--- a/development/cost-breakdowns/cheap_model_cost_slides.pptx
+++ b/development/cost-breakdowns/cheap_model_cost_slides.pptx
@@ -5,11 +5,12 @@
     <p:sldMasterId id="2147483648" r:id="rId1"/>
   </p:sldMasterIdLst>
   <p:sldIdLst>
-    <p:sldId id="256" r:id="rId2"/>
-    <p:sldId id="257" r:id="rId3"/>
-    <p:sldId id="258" r:id="rId4"/>
+    <p:sldId id="256" r:id="rId7"/>
+    <p:sldId id="257" r:id="rId8"/>
+    <p:sldId id="258" r:id="rId9"/>
+    <p:sldId id="259" r:id="rId10"/>
   </p:sldIdLst>
-  <p:sldSz cx="12192000" cy="6858000"/>
+  <p:sldSz cx="12191695" cy="6858000" type="screen4x3"/>
   <p:notesSz cx="6858000" cy="9144000"/>
   <p:defaultTextStyle>
     <a:defPPr>
@@ -106,22 +107,6 @@
       </a:defRPr>
     </a:lvl9pPr>
   </p:defaultTextStyle>
-  <p:extLst>
-    <p:ext uri="{EFAFB233-063F-42B5-8137-9DF3F51BA10A}">
-      <p15:sldGuideLst xmlns:p15="http://schemas.microsoft.com/office/powerpoint/2012/main">
-        <p15:guide id="1" orient="horz" pos="2160">
-          <p15:clr>
-            <a:srgbClr val="A4A3A4"/>
-          </p15:clr>
-        </p15:guide>
-        <p15:guide id="2" pos="2880">
-          <p15:clr>
-            <a:srgbClr val="A4A3A4"/>
-          </p15:clr>
-        </p15:guide>
-      </p15:sldGuideLst>
-    </p:ext>
-  </p:extLst>
 </p:presentation>
 </file>
 
@@ -163,9 +148,10 @@
           <a:lstStyle/>
           <a:p>
             <a:r>
-              <a:rPr lang="en-US"/>
+              <a:rPr lang="en-US" smtClean="0"/>
               <a:t>Click to edit Master title style</a:t>
             </a:r>
+            <a:endParaRPr lang="en-US"/>
           </a:p>
         </p:txBody>
       </p:sp>
@@ -281,9 +267,10 @@
           </a:lstStyle>
           <a:p>
             <a:r>
-              <a:rPr lang="en-US"/>
+              <a:rPr lang="en-US" smtClean="0"/>
               <a:t>Click to edit Master subtitle style</a:t>
             </a:r>
+            <a:endParaRPr lang="en-US"/>
           </a:p>
         </p:txBody>
       </p:sp>
@@ -304,7 +291,7 @@
           <a:p>
             <a:fld id="{5BCAD085-E8A6-8845-BD4E-CB4CCA059FC4}" type="datetimeFigureOut">
               <a:rPr lang="en-US" smtClean="0"/>
-              <a:t>6/15/26</a:t>
+              <a:t>1/27/13</a:t>
             </a:fld>
             <a:endParaRPr lang="en-US"/>
           </a:p>
@@ -398,9 +385,10 @@
           <a:lstStyle/>
           <a:p>
             <a:r>
-              <a:rPr lang="en-US"/>
+              <a:rPr lang="en-US" smtClean="0"/>
               <a:t>Click to edit Master title style</a:t>
             </a:r>
+            <a:endParaRPr lang="en-US"/>
           </a:p>
         </p:txBody>
       </p:sp>
@@ -421,37 +409,38 @@
           <a:p>
             <a:pPr lvl="0"/>
             <a:r>
-              <a:rPr lang="en-US"/>
+              <a:rPr lang="en-US" smtClean="0"/>
               <a:t>Click to edit Master text styles</a:t>
             </a:r>
           </a:p>
           <a:p>
             <a:pPr lvl="1"/>
             <a:r>
-              <a:rPr lang="en-US"/>
+              <a:rPr lang="en-US" smtClean="0"/>
               <a:t>Second level</a:t>
             </a:r>
           </a:p>
           <a:p>
             <a:pPr lvl="2"/>
             <a:r>
-              <a:rPr lang="en-US"/>
+              <a:rPr lang="en-US" smtClean="0"/>
               <a:t>Third level</a:t>
             </a:r>
           </a:p>
           <a:p>
             <a:pPr lvl="3"/>
             <a:r>
-              <a:rPr lang="en-US"/>
+              <a:rPr lang="en-US" smtClean="0"/>
               <a:t>Fourth level</a:t>
             </a:r>
           </a:p>
           <a:p>
             <a:pPr lvl="4"/>
             <a:r>
-              <a:rPr lang="en-US"/>
+              <a:rPr lang="en-US" smtClean="0"/>
               <a:t>Fifth level</a:t>
             </a:r>
+            <a:endParaRPr lang="en-US"/>
           </a:p>
         </p:txBody>
       </p:sp>
@@ -472,7 +461,7 @@
           <a:p>
             <a:fld id="{5BCAD085-E8A6-8845-BD4E-CB4CCA059FC4}" type="datetimeFigureOut">
               <a:rPr lang="en-US" smtClean="0"/>
-              <a:t>6/15/26</a:t>
+              <a:t>1/27/13</a:t>
             </a:fld>
             <a:endParaRPr lang="en-US"/>
           </a:p>
@@ -571,9 +560,10 @@
           <a:lstStyle/>
           <a:p>
             <a:r>
-              <a:rPr lang="en-US"/>
+              <a:rPr lang="en-US" smtClean="0"/>
               <a:t>Click to edit Master title style</a:t>
             </a:r>
+            <a:endParaRPr lang="en-US"/>
           </a:p>
         </p:txBody>
       </p:sp>
@@ -599,37 +589,38 @@
           <a:p>
             <a:pPr lvl="0"/>
             <a:r>
-              <a:rPr lang="en-US"/>
+              <a:rPr lang="en-US" smtClean="0"/>
               <a:t>Click to edit Master text styles</a:t>
             </a:r>
           </a:p>
           <a:p>
             <a:pPr lvl="1"/>
             <a:r>
-              <a:rPr lang="en-US"/>
+              <a:rPr lang="en-US" smtClean="0"/>
               <a:t>Second level</a:t>
             </a:r>
           </a:p>
           <a:p>
             <a:pPr lvl="2"/>
             <a:r>
-              <a:rPr lang="en-US"/>
+              <a:rPr lang="en-US" smtClean="0"/>
               <a:t>Third level</a:t>
             </a:r>
           </a:p>
           <a:p>
             <a:pPr lvl="3"/>
             <a:r>
-              <a:rPr lang="en-US"/>
+              <a:rPr lang="en-US" smtClean="0"/>
               <a:t>Fourth level</a:t>
             </a:r>
           </a:p>
           <a:p>
             <a:pPr lvl="4"/>
             <a:r>
-              <a:rPr lang="en-US"/>
+              <a:rPr lang="en-US" smtClean="0"/>
               <a:t>Fifth level</a:t>
             </a:r>
+            <a:endParaRPr lang="en-US"/>
           </a:p>
         </p:txBody>
       </p:sp>
@@ -650,7 +641,7 @@
           <a:p>
             <a:fld id="{5BCAD085-E8A6-8845-BD4E-CB4CCA059FC4}" type="datetimeFigureOut">
               <a:rPr lang="en-US" smtClean="0"/>
-              <a:t>6/15/26</a:t>
+              <a:t>1/27/13</a:t>
             </a:fld>
             <a:endParaRPr lang="en-US"/>
           </a:p>
@@ -744,9 +735,10 @@
           <a:lstStyle/>
           <a:p>
             <a:r>
-              <a:rPr lang="en-US"/>
+              <a:rPr lang="en-US" smtClean="0"/>
               <a:t>Click to edit Master title style</a:t>
             </a:r>
+            <a:endParaRPr lang="en-US"/>
           </a:p>
         </p:txBody>
       </p:sp>
@@ -767,37 +759,38 @@
           <a:p>
             <a:pPr lvl="0"/>
             <a:r>
-              <a:rPr lang="en-US"/>
+              <a:rPr lang="en-US" smtClean="0"/>
               <a:t>Click to edit Master text styles</a:t>
             </a:r>
           </a:p>
           <a:p>
             <a:pPr lvl="1"/>
             <a:r>
-              <a:rPr lang="en-US"/>
+              <a:rPr lang="en-US" smtClean="0"/>
               <a:t>Second level</a:t>
             </a:r>
           </a:p>
           <a:p>
             <a:pPr lvl="2"/>
             <a:r>
-              <a:rPr lang="en-US"/>
+              <a:rPr lang="en-US" smtClean="0"/>
               <a:t>Third level</a:t>
             </a:r>
           </a:p>
           <a:p>
             <a:pPr lvl="3"/>
             <a:r>
-              <a:rPr lang="en-US"/>
+              <a:rPr lang="en-US" smtClean="0"/>
               <a:t>Fourth level</a:t>
             </a:r>
           </a:p>
           <a:p>
             <a:pPr lvl="4"/>
             <a:r>
-              <a:rPr lang="en-US"/>
+              <a:rPr lang="en-US" smtClean="0"/>
               <a:t>Fifth level</a:t>
             </a:r>
+            <a:endParaRPr lang="en-US"/>
           </a:p>
         </p:txBody>
       </p:sp>
@@ -818,7 +811,7 @@
           <a:p>
             <a:fld id="{5BCAD085-E8A6-8845-BD4E-CB4CCA059FC4}" type="datetimeFigureOut">
               <a:rPr lang="en-US" smtClean="0"/>
-              <a:t>6/15/26</a:t>
+              <a:t>1/27/13</a:t>
             </a:fld>
             <a:endParaRPr lang="en-US"/>
           </a:p>
@@ -921,9 +914,10 @@
           </a:lstStyle>
           <a:p>
             <a:r>
-              <a:rPr lang="en-US"/>
+              <a:rPr lang="en-US" smtClean="0"/>
               <a:t>Click to edit Master title style</a:t>
             </a:r>
+            <a:endParaRPr lang="en-US"/>
           </a:p>
         </p:txBody>
       </p:sp>
@@ -1040,7 +1034,7 @@
           <a:p>
             <a:pPr lvl="0"/>
             <a:r>
-              <a:rPr lang="en-US"/>
+              <a:rPr lang="en-US" smtClean="0"/>
               <a:t>Click to edit Master text styles</a:t>
             </a:r>
           </a:p>
@@ -1063,7 +1057,7 @@
           <a:p>
             <a:fld id="{5BCAD085-E8A6-8845-BD4E-CB4CCA059FC4}" type="datetimeFigureOut">
               <a:rPr lang="en-US" smtClean="0"/>
-              <a:t>6/15/26</a:t>
+              <a:t>1/27/13</a:t>
             </a:fld>
             <a:endParaRPr lang="en-US"/>
           </a:p>
@@ -1157,9 +1151,10 @@
           <a:lstStyle/>
           <a:p>
             <a:r>
-              <a:rPr lang="en-US"/>
+              <a:rPr lang="en-US" smtClean="0"/>
               <a:t>Click to edit Master title style</a:t>
             </a:r>
+            <a:endParaRPr lang="en-US"/>
           </a:p>
         </p:txBody>
       </p:sp>
@@ -1213,37 +1208,38 @@
           <a:p>
             <a:pPr lvl="0"/>
             <a:r>
-              <a:rPr lang="en-US"/>
+              <a:rPr lang="en-US" smtClean="0"/>
               <a:t>Click to edit Master text styles</a:t>
             </a:r>
           </a:p>
           <a:p>
             <a:pPr lvl="1"/>
             <a:r>
-              <a:rPr lang="en-US"/>
+              <a:rPr lang="en-US" smtClean="0"/>
               <a:t>Second level</a:t>
             </a:r>
           </a:p>
           <a:p>
             <a:pPr lvl="2"/>
             <a:r>
-              <a:rPr lang="en-US"/>
+              <a:rPr lang="en-US" smtClean="0"/>
               <a:t>Third level</a:t>
             </a:r>
           </a:p>
           <a:p>
             <a:pPr lvl="3"/>
             <a:r>
-              <a:rPr lang="en-US"/>
+              <a:rPr lang="en-US" smtClean="0"/>
               <a:t>Fourth level</a:t>
             </a:r>
           </a:p>
           <a:p>
             <a:pPr lvl="4"/>
             <a:r>
-              <a:rPr lang="en-US"/>
+              <a:rPr lang="en-US" smtClean="0"/>
               <a:t>Fifth level</a:t>
             </a:r>
+            <a:endParaRPr lang="en-US"/>
           </a:p>
         </p:txBody>
       </p:sp>
@@ -1297,37 +1293,38 @@
           <a:p>
             <a:pPr lvl="0"/>
             <a:r>
-              <a:rPr lang="en-US"/>
+              <a:rPr lang="en-US" smtClean="0"/>
               <a:t>Click to edit Master text styles</a:t>
             </a:r>
           </a:p>
           <a:p>
             <a:pPr lvl="1"/>
             <a:r>
-              <a:rPr lang="en-US"/>
+              <a:rPr lang="en-US" smtClean="0"/>
               <a:t>Second level</a:t>
             </a:r>
           </a:p>
           <a:p>
             <a:pPr lvl="2"/>
             <a:r>
-              <a:rPr lang="en-US"/>
+              <a:rPr lang="en-US" smtClean="0"/>
               <a:t>Third level</a:t>
             </a:r>
           </a:p>
           <a:p>
             <a:pPr lvl="3"/>
             <a:r>
-              <a:rPr lang="en-US"/>
+              <a:rPr lang="en-US" smtClean="0"/>
               <a:t>Fourth level</a:t>
             </a:r>
           </a:p>
           <a:p>
             <a:pPr lvl="4"/>
             <a:r>
-              <a:rPr lang="en-US"/>
+              <a:rPr lang="en-US" smtClean="0"/>
               <a:t>Fifth level</a:t>
             </a:r>
+            <a:endParaRPr lang="en-US"/>
           </a:p>
         </p:txBody>
       </p:sp>
@@ -1348,7 +1345,7 @@
           <a:p>
             <a:fld id="{5BCAD085-E8A6-8845-BD4E-CB4CCA059FC4}" type="datetimeFigureOut">
               <a:rPr lang="en-US" smtClean="0"/>
-              <a:t>6/15/26</a:t>
+              <a:t>1/27/13</a:t>
             </a:fld>
             <a:endParaRPr lang="en-US"/>
           </a:p>
@@ -1446,9 +1443,10 @@
           </a:lstStyle>
           <a:p>
             <a:r>
-              <a:rPr lang="en-US"/>
+              <a:rPr lang="en-US" smtClean="0"/>
               <a:t>Click to edit Master title style</a:t>
             </a:r>
+            <a:endParaRPr lang="en-US"/>
           </a:p>
         </p:txBody>
       </p:sp>
@@ -1511,7 +1509,7 @@
           <a:p>
             <a:pPr lvl="0"/>
             <a:r>
-              <a:rPr lang="en-US"/>
+              <a:rPr lang="en-US" smtClean="0"/>
               <a:t>Click to edit Master text styles</a:t>
             </a:r>
           </a:p>
@@ -1567,37 +1565,38 @@
           <a:p>
             <a:pPr lvl="0"/>
             <a:r>
-              <a:rPr lang="en-US"/>
+              <a:rPr lang="en-US" smtClean="0"/>
               <a:t>Click to edit Master text styles</a:t>
             </a:r>
           </a:p>
           <a:p>
             <a:pPr lvl="1"/>
             <a:r>
-              <a:rPr lang="en-US"/>
+              <a:rPr lang="en-US" smtClean="0"/>
               <a:t>Second level</a:t>
             </a:r>
           </a:p>
           <a:p>
             <a:pPr lvl="2"/>
             <a:r>
-              <a:rPr lang="en-US"/>
+              <a:rPr lang="en-US" smtClean="0"/>
               <a:t>Third level</a:t>
             </a:r>
           </a:p>
           <a:p>
             <a:pPr lvl="3"/>
             <a:r>
-              <a:rPr lang="en-US"/>
+              <a:rPr lang="en-US" smtClean="0"/>
               <a:t>Fourth level</a:t>
             </a:r>
           </a:p>
           <a:p>
             <a:pPr lvl="4"/>
             <a:r>
-              <a:rPr lang="en-US"/>
+              <a:rPr lang="en-US" smtClean="0"/>
               <a:t>Fifth level</a:t>
             </a:r>
+            <a:endParaRPr lang="en-US"/>
           </a:p>
         </p:txBody>
       </p:sp>
@@ -1660,7 +1659,7 @@
           <a:p>
             <a:pPr lvl="0"/>
             <a:r>
-              <a:rPr lang="en-US"/>
+              <a:rPr lang="en-US" smtClean="0"/>
               <a:t>Click to edit Master text styles</a:t>
             </a:r>
           </a:p>
@@ -1716,37 +1715,38 @@
           <a:p>
             <a:pPr lvl="0"/>
             <a:r>
-              <a:rPr lang="en-US"/>
+              <a:rPr lang="en-US" smtClean="0"/>
               <a:t>Click to edit Master text styles</a:t>
             </a:r>
           </a:p>
           <a:p>
             <a:pPr lvl="1"/>
             <a:r>
-              <a:rPr lang="en-US"/>
+              <a:rPr lang="en-US" smtClean="0"/>
               <a:t>Second level</a:t>
             </a:r>
           </a:p>
           <a:p>
             <a:pPr lvl="2"/>
             <a:r>
-              <a:rPr lang="en-US"/>
+              <a:rPr lang="en-US" smtClean="0"/>
               <a:t>Third level</a:t>
             </a:r>
           </a:p>
           <a:p>
             <a:pPr lvl="3"/>
             <a:r>
-              <a:rPr lang="en-US"/>
+              <a:rPr lang="en-US" smtClean="0"/>
               <a:t>Fourth level</a:t>
             </a:r>
           </a:p>
           <a:p>
             <a:pPr lvl="4"/>
             <a:r>
-              <a:rPr lang="en-US"/>
+              <a:rPr lang="en-US" smtClean="0"/>
               <a:t>Fifth level</a:t>
             </a:r>
+            <a:endParaRPr lang="en-US"/>
           </a:p>
         </p:txBody>
       </p:sp>
@@ -1767,7 +1767,7 @@
           <a:p>
             <a:fld id="{5BCAD085-E8A6-8845-BD4E-CB4CCA059FC4}" type="datetimeFigureOut">
               <a:rPr lang="en-US" smtClean="0"/>
-              <a:t>6/15/26</a:t>
+              <a:t>1/27/13</a:t>
             </a:fld>
             <a:endParaRPr lang="en-US"/>
           </a:p>
@@ -1861,9 +1861,10 @@
           <a:lstStyle/>
           <a:p>
             <a:r>
-              <a:rPr lang="en-US"/>
+              <a:rPr lang="en-US" smtClean="0"/>
               <a:t>Click to edit Master title style</a:t>
             </a:r>
+            <a:endParaRPr lang="en-US"/>
           </a:p>
         </p:txBody>
       </p:sp>
@@ -1884,7 +1885,7 @@
           <a:p>
             <a:fld id="{5BCAD085-E8A6-8845-BD4E-CB4CCA059FC4}" type="datetimeFigureOut">
               <a:rPr lang="en-US" smtClean="0"/>
-              <a:t>6/15/26</a:t>
+              <a:t>1/27/13</a:t>
             </a:fld>
             <a:endParaRPr lang="en-US"/>
           </a:p>
@@ -1979,7 +1980,7 @@
           <a:p>
             <a:fld id="{5BCAD085-E8A6-8845-BD4E-CB4CCA059FC4}" type="datetimeFigureOut">
               <a:rPr lang="en-US" smtClean="0"/>
-              <a:t>6/15/26</a:t>
+              <a:t>1/27/13</a:t>
             </a:fld>
             <a:endParaRPr lang="en-US"/>
           </a:p>
@@ -2082,9 +2083,10 @@
           </a:lstStyle>
           <a:p>
             <a:r>
-              <a:rPr lang="en-US"/>
+              <a:rPr lang="en-US" smtClean="0"/>
               <a:t>Click to edit Master title style</a:t>
             </a:r>
+            <a:endParaRPr lang="en-US"/>
           </a:p>
         </p:txBody>
       </p:sp>
@@ -2138,37 +2140,38 @@
           <a:p>
             <a:pPr lvl="0"/>
             <a:r>
-              <a:rPr lang="en-US"/>
+              <a:rPr lang="en-US" smtClean="0"/>
               <a:t>Click to edit Master text styles</a:t>
             </a:r>
           </a:p>
           <a:p>
             <a:pPr lvl="1"/>
             <a:r>
-              <a:rPr lang="en-US"/>
+              <a:rPr lang="en-US" smtClean="0"/>
               <a:t>Second level</a:t>
             </a:r>
           </a:p>
           <a:p>
             <a:pPr lvl="2"/>
             <a:r>
-              <a:rPr lang="en-US"/>
+              <a:rPr lang="en-US" smtClean="0"/>
               <a:t>Third level</a:t>
             </a:r>
           </a:p>
           <a:p>
             <a:pPr lvl="3"/>
             <a:r>
-              <a:rPr lang="en-US"/>
+              <a:rPr lang="en-US" smtClean="0"/>
               <a:t>Fourth level</a:t>
             </a:r>
           </a:p>
           <a:p>
             <a:pPr lvl="4"/>
             <a:r>
-              <a:rPr lang="en-US"/>
+              <a:rPr lang="en-US" smtClean="0"/>
               <a:t>Fifth level</a:t>
             </a:r>
+            <a:endParaRPr lang="en-US"/>
           </a:p>
         </p:txBody>
       </p:sp>
@@ -2231,7 +2234,7 @@
           <a:p>
             <a:pPr lvl="0"/>
             <a:r>
-              <a:rPr lang="en-US"/>
+              <a:rPr lang="en-US" smtClean="0"/>
               <a:t>Click to edit Master text styles</a:t>
             </a:r>
           </a:p>
@@ -2254,7 +2257,7 @@
           <a:p>
             <a:fld id="{5BCAD085-E8A6-8845-BD4E-CB4CCA059FC4}" type="datetimeFigureOut">
               <a:rPr lang="en-US" smtClean="0"/>
-              <a:t>6/15/26</a:t>
+              <a:t>1/27/13</a:t>
             </a:fld>
             <a:endParaRPr lang="en-US"/>
           </a:p>
@@ -2357,9 +2360,10 @@
           </a:lstStyle>
           <a:p>
             <a:r>
-              <a:rPr lang="en-US"/>
+              <a:rPr lang="en-US" smtClean="0"/>
               <a:t>Click to edit Master title style</a:t>
             </a:r>
+            <a:endParaRPr lang="en-US"/>
           </a:p>
         </p:txBody>
       </p:sp>
@@ -2483,7 +2487,7 @@
           <a:p>
             <a:pPr lvl="0"/>
             <a:r>
-              <a:rPr lang="en-US"/>
+              <a:rPr lang="en-US" smtClean="0"/>
               <a:t>Click to edit Master text styles</a:t>
             </a:r>
           </a:p>
@@ -2506,7 +2510,7 @@
           <a:p>
             <a:fld id="{5BCAD085-E8A6-8845-BD4E-CB4CCA059FC4}" type="datetimeFigureOut">
               <a:rPr lang="en-US" smtClean="0"/>
-              <a:t>6/15/26</a:t>
+              <a:t>1/27/13</a:t>
             </a:fld>
             <a:endParaRPr lang="en-US"/>
           </a:p>
@@ -2615,9 +2619,10 @@
           <a:lstStyle/>
           <a:p>
             <a:r>
-              <a:rPr lang="en-US"/>
+              <a:rPr lang="en-US" smtClean="0"/>
               <a:t>Click to edit Master title style</a:t>
             </a:r>
+            <a:endParaRPr lang="en-US"/>
           </a:p>
         </p:txBody>
       </p:sp>
@@ -2648,37 +2653,38 @@
           <a:p>
             <a:pPr lvl="0"/>
             <a:r>
-              <a:rPr lang="en-US"/>
+              <a:rPr lang="en-US" smtClean="0"/>
               <a:t>Click to edit Master text styles</a:t>
             </a:r>
           </a:p>
           <a:p>
             <a:pPr lvl="1"/>
             <a:r>
-              <a:rPr lang="en-US"/>
+              <a:rPr lang="en-US" smtClean="0"/>
               <a:t>Second level</a:t>
             </a:r>
           </a:p>
           <a:p>
             <a:pPr lvl="2"/>
             <a:r>
-              <a:rPr lang="en-US"/>
+              <a:rPr lang="en-US" smtClean="0"/>
               <a:t>Third level</a:t>
             </a:r>
           </a:p>
           <a:p>
             <a:pPr lvl="3"/>
             <a:r>
-              <a:rPr lang="en-US"/>
+              <a:rPr lang="en-US" smtClean="0"/>
               <a:t>Fourth level</a:t>
             </a:r>
           </a:p>
           <a:p>
             <a:pPr lvl="4"/>
             <a:r>
-              <a:rPr lang="en-US"/>
+              <a:rPr lang="en-US" smtClean="0"/>
               <a:t>Fifth level</a:t>
             </a:r>
+            <a:endParaRPr lang="en-US"/>
           </a:p>
         </p:txBody>
       </p:sp>
@@ -2717,7 +2723,7 @@
           <a:p>
             <a:fld id="{5BCAD085-E8A6-8845-BD4E-CB4CCA059FC4}" type="datetimeFigureOut">
               <a:rPr lang="en-US" smtClean="0"/>
-              <a:t>6/15/26</a:t>
+              <a:t>1/27/13</a:t>
             </a:fld>
             <a:endParaRPr lang="en-US"/>
           </a:p>
@@ -3076,7 +3082,7 @@
 </file>
 
 <file path=ppt/slides/slide1.xml><?xml version="1.0" encoding="utf-8"?>
-<p:sld xmlns:a="http://schemas.openxmlformats.org/drawingml/2006/main" xmlns:r="http://schemas.openxmlformats.org/officeDocument/2006/relationships" xmlns:p="http://schemas.openxmlformats.org/presentationml/2006/main">
+<p:sld xmlns:a="http://schemas.openxmlformats.org/drawingml/2006/main" xmlns:p="http://schemas.openxmlformats.org/presentationml/2006/main" xmlns:r="http://schemas.openxmlformats.org/officeDocument/2006/relationships">
   <p:cSld>
     <p:spTree>
       <p:nvGrpSpPr>
@@ -3084,14 +3090,7 @@
         <p:cNvGrpSpPr/>
         <p:nvPr/>
       </p:nvGrpSpPr>
-      <p:grpSpPr>
-        <a:xfrm>
-          <a:off x="0" y="0"/>
-          <a:ext cx="0" cy="0"/>
-          <a:chOff x="0" y="0"/>
-          <a:chExt cx="0" cy="0"/>
-        </a:xfrm>
-      </p:grpSpPr>
+      <p:grpSpPr/>
       <p:sp>
         <p:nvSpPr>
           <p:cNvPr id="2" name="TextBox 1"/>
@@ -3177,46 +3176,16 @@
                 <a:tableStyleId>{5C22544A-7EE6-4342-B048-85BDC9FD1C3A}</a:tableStyleId>
               </a:tblPr>
               <a:tblGrid>
-                <a:gridCol w="2148840">
-                  <a:extLst>
-                    <a:ext uri="{9D8B030D-6E8A-4147-A177-3AD203B41FA5}">
-                      <a16:colId xmlns:a16="http://schemas.microsoft.com/office/drawing/2014/main" val="20000"/>
-                    </a:ext>
-                  </a:extLst>
-                </a:gridCol>
-                <a:gridCol w="1188720">
-                  <a:extLst>
-                    <a:ext uri="{9D8B030D-6E8A-4147-A177-3AD203B41FA5}">
-                      <a16:colId xmlns:a16="http://schemas.microsoft.com/office/drawing/2014/main" val="20001"/>
-                    </a:ext>
-                  </a:extLst>
-                </a:gridCol>
-                <a:gridCol w="1325880">
-                  <a:extLst>
-                    <a:ext uri="{9D8B030D-6E8A-4147-A177-3AD203B41FA5}">
-                      <a16:colId xmlns:a16="http://schemas.microsoft.com/office/drawing/2014/main" val="20002"/>
-                    </a:ext>
-                  </a:extLst>
-                </a:gridCol>
-                <a:gridCol w="1325880">
-                  <a:extLst>
-                    <a:ext uri="{9D8B030D-6E8A-4147-A177-3AD203B41FA5}">
-                      <a16:colId xmlns:a16="http://schemas.microsoft.com/office/drawing/2014/main" val="20003"/>
-                    </a:ext>
-                  </a:extLst>
-                </a:gridCol>
-                <a:gridCol w="1234440">
-                  <a:extLst>
-                    <a:ext uri="{9D8B030D-6E8A-4147-A177-3AD203B41FA5}">
-                      <a16:colId xmlns:a16="http://schemas.microsoft.com/office/drawing/2014/main" val="20004"/>
-                    </a:ext>
-                  </a:extLst>
-                </a:gridCol>
+                <a:gridCol w="2148840"/>
+                <a:gridCol w="1188720"/>
+                <a:gridCol w="1325880"/>
+                <a:gridCol w="1325880"/>
+                <a:gridCol w="1234440"/>
               </a:tblGrid>
               <a:tr h="475488">
                 <a:tc>
                   <a:txBody>
-                    <a:bodyPr/>
+                    <a:bodyPr wrap="square"/>
                     <a:lstStyle/>
                     <a:p>
                       <a:pPr algn="l"/>
@@ -3238,7 +3207,7 @@
                 </a:tc>
                 <a:tc>
                   <a:txBody>
-                    <a:bodyPr/>
+                    <a:bodyPr wrap="square"/>
                     <a:lstStyle/>
                     <a:p>
                       <a:pPr algn="ctr"/>
@@ -3261,7 +3230,7 @@
                 </a:tc>
                 <a:tc>
                   <a:txBody>
-                    <a:bodyPr/>
+                    <a:bodyPr wrap="square"/>
                     <a:lstStyle/>
                     <a:p>
                       <a:pPr algn="ctr"/>
@@ -3284,7 +3253,7 @@
                 </a:tc>
                 <a:tc>
                   <a:txBody>
-                    <a:bodyPr/>
+                    <a:bodyPr wrap="square"/>
                     <a:lstStyle/>
                     <a:p>
                       <a:pPr algn="ctr"/>
@@ -3307,7 +3276,7 @@
                 </a:tc>
                 <a:tc>
                   <a:txBody>
-                    <a:bodyPr/>
+                    <a:bodyPr wrap="square"/>
                     <a:lstStyle/>
                     <a:p>
                       <a:pPr algn="ctr"/>
@@ -3328,16 +3297,11 @@
                     </a:solidFill>
                   </a:tcPr>
                 </a:tc>
-                <a:extLst>
-                  <a:ext uri="{0D108BD9-81ED-4DB2-BD59-A6C34878D82A}">
-                    <a16:rowId xmlns:a16="http://schemas.microsoft.com/office/drawing/2014/main" val="10000"/>
-                  </a:ext>
-                </a:extLst>
               </a:tr>
               <a:tr h="475488">
                 <a:tc>
                   <a:txBody>
-                    <a:bodyPr/>
+                    <a:bodyPr wrap="square"/>
                     <a:lstStyle/>
                     <a:p>
                       <a:pPr algn="l"/>
@@ -3359,7 +3323,7 @@
                 </a:tc>
                 <a:tc>
                   <a:txBody>
-                    <a:bodyPr/>
+                    <a:bodyPr wrap="square"/>
                     <a:lstStyle/>
                     <a:p>
                       <a:pPr algn="ctr"/>
@@ -3381,7 +3345,7 @@
                 </a:tc>
                 <a:tc>
                   <a:txBody>
-                    <a:bodyPr/>
+                    <a:bodyPr wrap="square"/>
                     <a:lstStyle/>
                     <a:p>
                       <a:pPr algn="r"/>
@@ -3403,7 +3367,7 @@
                 </a:tc>
                 <a:tc>
                   <a:txBody>
-                    <a:bodyPr/>
+                    <a:bodyPr wrap="square"/>
                     <a:lstStyle/>
                     <a:p>
                       <a:pPr algn="r"/>
@@ -3425,7 +3389,7 @@
                 </a:tc>
                 <a:tc>
                   <a:txBody>
-                    <a:bodyPr/>
+                    <a:bodyPr wrap="square"/>
                     <a:lstStyle/>
                     <a:p>
                       <a:pPr algn="r"/>
@@ -3445,16 +3409,11 @@
                     </a:solidFill>
                   </a:tcPr>
                 </a:tc>
-                <a:extLst>
-                  <a:ext uri="{0D108BD9-81ED-4DB2-BD59-A6C34878D82A}">
-                    <a16:rowId xmlns:a16="http://schemas.microsoft.com/office/drawing/2014/main" val="10001"/>
-                  </a:ext>
-                </a:extLst>
               </a:tr>
               <a:tr h="475488">
                 <a:tc>
                   <a:txBody>
-                    <a:bodyPr/>
+                    <a:bodyPr wrap="square"/>
                     <a:lstStyle/>
                     <a:p>
                       <a:pPr algn="l"/>
@@ -3476,7 +3435,7 @@
                 </a:tc>
                 <a:tc>
                   <a:txBody>
-                    <a:bodyPr/>
+                    <a:bodyPr wrap="square"/>
                     <a:lstStyle/>
                     <a:p>
                       <a:pPr algn="ctr"/>
@@ -3498,7 +3457,7 @@
                 </a:tc>
                 <a:tc>
                   <a:txBody>
-                    <a:bodyPr/>
+                    <a:bodyPr wrap="square"/>
                     <a:lstStyle/>
                     <a:p>
                       <a:pPr algn="r"/>
@@ -3520,7 +3479,7 @@
                 </a:tc>
                 <a:tc>
                   <a:txBody>
-                    <a:bodyPr/>
+                    <a:bodyPr wrap="square"/>
                     <a:lstStyle/>
                     <a:p>
                       <a:pPr algn="r"/>
@@ -3542,7 +3501,7 @@
                 </a:tc>
                 <a:tc>
                   <a:txBody>
-                    <a:bodyPr/>
+                    <a:bodyPr wrap="square"/>
                     <a:lstStyle/>
                     <a:p>
                       <a:pPr algn="r"/>
@@ -3562,16 +3521,11 @@
                     </a:solidFill>
                   </a:tcPr>
                 </a:tc>
-                <a:extLst>
-                  <a:ext uri="{0D108BD9-81ED-4DB2-BD59-A6C34878D82A}">
-                    <a16:rowId xmlns:a16="http://schemas.microsoft.com/office/drawing/2014/main" val="10002"/>
-                  </a:ext>
-                </a:extLst>
               </a:tr>
               <a:tr h="475488">
                 <a:tc>
                   <a:txBody>
-                    <a:bodyPr/>
+                    <a:bodyPr wrap="square"/>
                     <a:lstStyle/>
                     <a:p>
                       <a:pPr algn="l"/>
@@ -3593,7 +3547,7 @@
                 </a:tc>
                 <a:tc>
                   <a:txBody>
-                    <a:bodyPr/>
+                    <a:bodyPr wrap="square"/>
                     <a:lstStyle/>
                     <a:p>
                       <a:pPr algn="ctr"/>
@@ -3615,7 +3569,7 @@
                 </a:tc>
                 <a:tc>
                   <a:txBody>
-                    <a:bodyPr/>
+                    <a:bodyPr wrap="square"/>
                     <a:lstStyle/>
                     <a:p>
                       <a:pPr algn="r"/>
@@ -3637,7 +3591,7 @@
                 </a:tc>
                 <a:tc>
                   <a:txBody>
-                    <a:bodyPr/>
+                    <a:bodyPr wrap="square"/>
                     <a:lstStyle/>
                     <a:p>
                       <a:pPr algn="r"/>
@@ -3659,7 +3613,7 @@
                 </a:tc>
                 <a:tc>
                   <a:txBody>
-                    <a:bodyPr/>
+                    <a:bodyPr wrap="square"/>
                     <a:lstStyle/>
                     <a:p>
                       <a:pPr algn="r"/>
@@ -3679,16 +3633,11 @@
                     </a:solidFill>
                   </a:tcPr>
                 </a:tc>
-                <a:extLst>
-                  <a:ext uri="{0D108BD9-81ED-4DB2-BD59-A6C34878D82A}">
-                    <a16:rowId xmlns:a16="http://schemas.microsoft.com/office/drawing/2014/main" val="10003"/>
-                  </a:ext>
-                </a:extLst>
               </a:tr>
               <a:tr h="475488">
                 <a:tc>
                   <a:txBody>
-                    <a:bodyPr/>
+                    <a:bodyPr wrap="square"/>
                     <a:lstStyle/>
                     <a:p>
                       <a:pPr algn="l"/>
@@ -3710,7 +3659,7 @@
                 </a:tc>
                 <a:tc>
                   <a:txBody>
-                    <a:bodyPr/>
+                    <a:bodyPr wrap="square"/>
                     <a:lstStyle/>
                     <a:p>
                       <a:pPr algn="ctr"/>
@@ -3732,7 +3681,7 @@
                 </a:tc>
                 <a:tc>
                   <a:txBody>
-                    <a:bodyPr/>
+                    <a:bodyPr wrap="square"/>
                     <a:lstStyle/>
                     <a:p>
                       <a:pPr algn="r"/>
@@ -3754,7 +3703,7 @@
                 </a:tc>
                 <a:tc>
                   <a:txBody>
-                    <a:bodyPr/>
+                    <a:bodyPr wrap="square"/>
                     <a:lstStyle/>
                     <a:p>
                       <a:pPr algn="r"/>
@@ -3776,7 +3725,7 @@
                 </a:tc>
                 <a:tc>
                   <a:txBody>
-                    <a:bodyPr/>
+                    <a:bodyPr wrap="square"/>
                     <a:lstStyle/>
                     <a:p>
                       <a:pPr algn="r"/>
@@ -3796,11 +3745,6 @@
                     </a:solidFill>
                   </a:tcPr>
                 </a:tc>
-                <a:extLst>
-                  <a:ext uri="{0D108BD9-81ED-4DB2-BD59-A6C34878D82A}">
-                    <a16:rowId xmlns:a16="http://schemas.microsoft.com/office/drawing/2014/main" val="10004"/>
-                  </a:ext>
-                </a:extLst>
               </a:tr>
             </a:tbl>
           </a:graphicData>
@@ -3814,7 +3758,7 @@
         </p:nvSpPr>
         <p:spPr>
           <a:xfrm>
-            <a:off x="274320" y="3564032"/>
+            <a:off x="274320" y="3703320"/>
             <a:ext cx="7498079" cy="365760"/>
           </a:xfrm>
           <a:prstGeom prst="rect">
@@ -3829,7 +3773,7 @@
           <a:lstStyle/>
           <a:p>
             <a:r>
-              <a:rPr sz="1200" b="1" dirty="0">
+              <a:rPr sz="1200" b="1">
                 <a:solidFill>
                   <a:srgbClr val="335588"/>
                 </a:solidFill>
@@ -3848,7 +3792,7 @@
           <p:nvPr/>
         </p:nvGraphicFramePr>
         <p:xfrm>
-          <a:off x="274320" y="3977639"/>
+          <a:off x="274320" y="4160520"/>
           <a:ext cx="6035040" cy="1280160"/>
         </p:xfrm>
         <a:graphic>
@@ -3858,25 +3802,13 @@
                 <a:tableStyleId>{5C22544A-7EE6-4342-B048-85BDC9FD1C3A}</a:tableStyleId>
               </a:tblPr>
               <a:tblGrid>
-                <a:gridCol w="4617720">
-                  <a:extLst>
-                    <a:ext uri="{9D8B030D-6E8A-4147-A177-3AD203B41FA5}">
-                      <a16:colId xmlns:a16="http://schemas.microsoft.com/office/drawing/2014/main" val="20000"/>
-                    </a:ext>
-                  </a:extLst>
-                </a:gridCol>
-                <a:gridCol w="1417320">
-                  <a:extLst>
-                    <a:ext uri="{9D8B030D-6E8A-4147-A177-3AD203B41FA5}">
-                      <a16:colId xmlns:a16="http://schemas.microsoft.com/office/drawing/2014/main" val="20001"/>
-                    </a:ext>
-                  </a:extLst>
-                </a:gridCol>
+                <a:gridCol w="4617720"/>
+                <a:gridCol w="1417320"/>
               </a:tblGrid>
               <a:tr h="426720">
                 <a:tc>
                   <a:txBody>
-                    <a:bodyPr/>
+                    <a:bodyPr wrap="square"/>
                     <a:lstStyle/>
                     <a:p>
                       <a:pPr algn="l"/>
@@ -3898,7 +3830,7 @@
                 </a:tc>
                 <a:tc>
                   <a:txBody>
-                    <a:bodyPr/>
+                    <a:bodyPr wrap="square"/>
                     <a:lstStyle/>
                     <a:p>
                       <a:pPr algn="r"/>
@@ -3918,16 +3850,11 @@
                     </a:solidFill>
                   </a:tcPr>
                 </a:tc>
-                <a:extLst>
-                  <a:ext uri="{0D108BD9-81ED-4DB2-BD59-A6C34878D82A}">
-                    <a16:rowId xmlns:a16="http://schemas.microsoft.com/office/drawing/2014/main" val="10000"/>
-                  </a:ext>
-                </a:extLst>
               </a:tr>
               <a:tr h="426720">
                 <a:tc>
                   <a:txBody>
-                    <a:bodyPr/>
+                    <a:bodyPr wrap="square"/>
                     <a:lstStyle/>
                     <a:p>
                       <a:pPr algn="l"/>
@@ -3949,7 +3876,7 @@
                 </a:tc>
                 <a:tc>
                   <a:txBody>
-                    <a:bodyPr/>
+                    <a:bodyPr wrap="square"/>
                     <a:lstStyle/>
                     <a:p>
                       <a:pPr algn="r"/>
@@ -3969,16 +3896,11 @@
                     </a:solidFill>
                   </a:tcPr>
                 </a:tc>
-                <a:extLst>
-                  <a:ext uri="{0D108BD9-81ED-4DB2-BD59-A6C34878D82A}">
-                    <a16:rowId xmlns:a16="http://schemas.microsoft.com/office/drawing/2014/main" val="10001"/>
-                  </a:ext>
-                </a:extLst>
               </a:tr>
               <a:tr h="426720">
                 <a:tc>
                   <a:txBody>
-                    <a:bodyPr/>
+                    <a:bodyPr wrap="square"/>
                     <a:lstStyle/>
                     <a:p>
                       <a:pPr algn="l"/>
@@ -4000,7 +3922,7 @@
                 </a:tc>
                 <a:tc>
                   <a:txBody>
-                    <a:bodyPr/>
+                    <a:bodyPr wrap="square"/>
                     <a:lstStyle/>
                     <a:p>
                       <a:pPr algn="r"/>
@@ -4020,11 +3942,6 @@
                     </a:solidFill>
                   </a:tcPr>
                 </a:tc>
-                <a:extLst>
-                  <a:ext uri="{0D108BD9-81ED-4DB2-BD59-A6C34878D82A}">
-                    <a16:rowId xmlns:a16="http://schemas.microsoft.com/office/drawing/2014/main" val="10002"/>
-                  </a:ext>
-                </a:extLst>
               </a:tr>
             </a:tbl>
           </a:graphicData>
@@ -4038,8 +3955,8 @@
         </p:nvSpPr>
         <p:spPr>
           <a:xfrm>
-            <a:off x="7498080" y="1117285"/>
-            <a:ext cx="4505723" cy="2428870"/>
+            <a:off x="7726679" y="1188720"/>
+            <a:ext cx="4206240" cy="4937760"/>
           </a:xfrm>
           <a:prstGeom prst="rect">
             <a:avLst/>
@@ -4053,7 +3970,7 @@
           <a:lstStyle/>
           <a:p>
             <a:r>
-              <a:rPr sz="1300" b="1" dirty="0">
+              <a:rPr sz="1300" b="1">
                 <a:solidFill>
                   <a:srgbClr val="335588"/>
                 </a:solidFill>
@@ -4068,7 +3985,7 @@
               </a:spcBef>
             </a:pPr>
             <a:r>
-              <a:rPr sz="1050" b="1" dirty="0">
+              <a:rPr sz="1050" b="1">
                 <a:solidFill>
                   <a:srgbClr val="1F3050"/>
                 </a:solidFill>
@@ -4076,7 +3993,7 @@
               <a:t>▪ Both are closed frontier models.  </a:t>
             </a:r>
             <a:r>
-              <a:rPr sz="1050" dirty="0">
+              <a:rPr sz="1050">
                 <a:solidFill>
                   <a:srgbClr val="555555"/>
                 </a:solidFill>
@@ -4091,7 +4008,7 @@
               </a:spcBef>
             </a:pPr>
             <a:r>
-              <a:rPr sz="1050" b="1" dirty="0">
+              <a:rPr sz="1050" b="1">
                 <a:solidFill>
                   <a:srgbClr val="1F3050"/>
                 </a:solidFill>
@@ -4099,7 +4016,7 @@
               <a:t>▪ Sonnet is the pricier anchor.  </a:t>
             </a:r>
             <a:r>
-              <a:rPr sz="1050" dirty="0">
+              <a:rPr sz="1050">
                 <a:solidFill>
                   <a:srgbClr val="555555"/>
                 </a:solidFill>
@@ -4114,7 +4031,7 @@
               </a:spcBef>
             </a:pPr>
             <a:r>
-              <a:rPr sz="1050" b="1" dirty="0">
+              <a:rPr sz="1050" b="1">
                 <a:solidFill>
                   <a:srgbClr val="1F3050"/>
                 </a:solidFill>
@@ -4122,7 +4039,7 @@
               <a:t>▪ Qwen-Flash is cheapest but redundant.  </a:t>
             </a:r>
             <a:r>
-              <a:rPr sz="1050" dirty="0">
+              <a:rPr sz="1050">
                 <a:solidFill>
                   <a:srgbClr val="555555"/>
                 </a:solidFill>
@@ -4137,7 +4054,7 @@
               </a:spcBef>
             </a:pPr>
             <a:r>
-              <a:rPr sz="1050" b="1" dirty="0">
+              <a:rPr sz="1050" b="1">
                 <a:solidFill>
                   <a:srgbClr val="1F3050"/>
                 </a:solidFill>
@@ -4145,7 +4062,7 @@
               <a:t>▪ Levers save ~30%, not more.  </a:t>
             </a:r>
             <a:r>
-              <a:rPr sz="1050" dirty="0">
+              <a:rPr sz="1050">
                 <a:solidFill>
                   <a:srgbClr val="555555"/>
                 </a:solidFill>
@@ -4197,7 +4114,7 @@
 </file>
 
 <file path=ppt/slides/slide2.xml><?xml version="1.0" encoding="utf-8"?>
-<p:sld xmlns:a="http://schemas.openxmlformats.org/drawingml/2006/main" xmlns:r="http://schemas.openxmlformats.org/officeDocument/2006/relationships" xmlns:p="http://schemas.openxmlformats.org/presentationml/2006/main">
+<p:sld xmlns:a="http://schemas.openxmlformats.org/drawingml/2006/main" xmlns:p="http://schemas.openxmlformats.org/presentationml/2006/main" xmlns:r="http://schemas.openxmlformats.org/officeDocument/2006/relationships">
   <p:cSld>
     <p:spTree>
       <p:nvGrpSpPr>
@@ -4205,14 +4122,7 @@
         <p:cNvGrpSpPr/>
         <p:nvPr/>
       </p:nvGrpSpPr>
-      <p:grpSpPr>
-        <a:xfrm>
-          <a:off x="0" y="0"/>
-          <a:ext cx="0" cy="0"/>
-          <a:chOff x="0" y="0"/>
-          <a:chExt cx="0" cy="0"/>
-        </a:xfrm>
-      </p:grpSpPr>
+      <p:grpSpPr/>
       <p:sp>
         <p:nvSpPr>
           <p:cNvPr id="2" name="TextBox 1"/>
@@ -4298,67 +4208,19 @@
                 <a:tableStyleId>{5C22544A-7EE6-4342-B048-85BDC9FD1C3A}</a:tableStyleId>
               </a:tblPr>
               <a:tblGrid>
-                <a:gridCol w="2148840">
-                  <a:extLst>
-                    <a:ext uri="{9D8B030D-6E8A-4147-A177-3AD203B41FA5}">
-                      <a16:colId xmlns:a16="http://schemas.microsoft.com/office/drawing/2014/main" val="20000"/>
-                    </a:ext>
-                  </a:extLst>
-                </a:gridCol>
-                <a:gridCol w="960120">
-                  <a:extLst>
-                    <a:ext uri="{9D8B030D-6E8A-4147-A177-3AD203B41FA5}">
-                      <a16:colId xmlns:a16="http://schemas.microsoft.com/office/drawing/2014/main" val="20001"/>
-                    </a:ext>
-                  </a:extLst>
-                </a:gridCol>
-                <a:gridCol w="960120">
-                  <a:extLst>
-                    <a:ext uri="{9D8B030D-6E8A-4147-A177-3AD203B41FA5}">
-                      <a16:colId xmlns:a16="http://schemas.microsoft.com/office/drawing/2014/main" val="20002"/>
-                    </a:ext>
-                  </a:extLst>
-                </a:gridCol>
-                <a:gridCol w="960120">
-                  <a:extLst>
-                    <a:ext uri="{9D8B030D-6E8A-4147-A177-3AD203B41FA5}">
-                      <a16:colId xmlns:a16="http://schemas.microsoft.com/office/drawing/2014/main" val="20003"/>
-                    </a:ext>
-                  </a:extLst>
-                </a:gridCol>
-                <a:gridCol w="960120">
-                  <a:extLst>
-                    <a:ext uri="{9D8B030D-6E8A-4147-A177-3AD203B41FA5}">
-                      <a16:colId xmlns:a16="http://schemas.microsoft.com/office/drawing/2014/main" val="20004"/>
-                    </a:ext>
-                  </a:extLst>
-                </a:gridCol>
-                <a:gridCol w="960120">
-                  <a:extLst>
-                    <a:ext uri="{9D8B030D-6E8A-4147-A177-3AD203B41FA5}">
-                      <a16:colId xmlns:a16="http://schemas.microsoft.com/office/drawing/2014/main" val="20005"/>
-                    </a:ext>
-                  </a:extLst>
-                </a:gridCol>
-                <a:gridCol w="960120">
-                  <a:extLst>
-                    <a:ext uri="{9D8B030D-6E8A-4147-A177-3AD203B41FA5}">
-                      <a16:colId xmlns:a16="http://schemas.microsoft.com/office/drawing/2014/main" val="20006"/>
-                    </a:ext>
-                  </a:extLst>
-                </a:gridCol>
-                <a:gridCol w="914400">
-                  <a:extLst>
-                    <a:ext uri="{9D8B030D-6E8A-4147-A177-3AD203B41FA5}">
-                      <a16:colId xmlns:a16="http://schemas.microsoft.com/office/drawing/2014/main" val="20007"/>
-                    </a:ext>
-                  </a:extLst>
-                </a:gridCol>
+                <a:gridCol w="2148840"/>
+                <a:gridCol w="960120"/>
+                <a:gridCol w="960120"/>
+                <a:gridCol w="960120"/>
+                <a:gridCol w="960120"/>
+                <a:gridCol w="960120"/>
+                <a:gridCol w="960120"/>
+                <a:gridCol w="914400"/>
               </a:tblGrid>
               <a:tr h="418011">
                 <a:tc>
                   <a:txBody>
-                    <a:bodyPr/>
+                    <a:bodyPr wrap="square"/>
                     <a:lstStyle/>
                     <a:p>
                       <a:pPr algn="l"/>
@@ -4380,7 +4242,7 @@
                 </a:tc>
                 <a:tc>
                   <a:txBody>
-                    <a:bodyPr/>
+                    <a:bodyPr wrap="square"/>
                     <a:lstStyle/>
                     <a:p>
                       <a:pPr algn="ctr"/>
@@ -4403,7 +4265,7 @@
                 </a:tc>
                 <a:tc>
                   <a:txBody>
-                    <a:bodyPr/>
+                    <a:bodyPr wrap="square"/>
                     <a:lstStyle/>
                     <a:p>
                       <a:pPr algn="ctr"/>
@@ -4426,7 +4288,7 @@
                 </a:tc>
                 <a:tc>
                   <a:txBody>
-                    <a:bodyPr/>
+                    <a:bodyPr wrap="square"/>
                     <a:lstStyle/>
                     <a:p>
                       <a:pPr algn="ctr"/>
@@ -4449,7 +4311,7 @@
                 </a:tc>
                 <a:tc>
                   <a:txBody>
-                    <a:bodyPr/>
+                    <a:bodyPr wrap="square"/>
                     <a:lstStyle/>
                     <a:p>
                       <a:pPr algn="ctr"/>
@@ -4472,7 +4334,7 @@
                 </a:tc>
                 <a:tc>
                   <a:txBody>
-                    <a:bodyPr/>
+                    <a:bodyPr wrap="square"/>
                     <a:lstStyle/>
                     <a:p>
                       <a:pPr algn="ctr"/>
@@ -4495,7 +4357,7 @@
                 </a:tc>
                 <a:tc>
                   <a:txBody>
-                    <a:bodyPr/>
+                    <a:bodyPr wrap="square"/>
                     <a:lstStyle/>
                     <a:p>
                       <a:pPr algn="ctr"/>
@@ -4518,7 +4380,7 @@
                 </a:tc>
                 <a:tc>
                   <a:txBody>
-                    <a:bodyPr/>
+                    <a:bodyPr wrap="square"/>
                     <a:lstStyle/>
                     <a:p>
                       <a:pPr algn="ctr"/>
@@ -4539,16 +4401,11 @@
                     </a:solidFill>
                   </a:tcPr>
                 </a:tc>
-                <a:extLst>
-                  <a:ext uri="{0D108BD9-81ED-4DB2-BD59-A6C34878D82A}">
-                    <a16:rowId xmlns:a16="http://schemas.microsoft.com/office/drawing/2014/main" val="10000"/>
-                  </a:ext>
-                </a:extLst>
               </a:tr>
               <a:tr h="418011">
                 <a:tc>
                   <a:txBody>
-                    <a:bodyPr/>
+                    <a:bodyPr wrap="square"/>
                     <a:lstStyle/>
                     <a:p>
                       <a:pPr algn="l"/>
@@ -4570,7 +4427,7 @@
                 </a:tc>
                 <a:tc>
                   <a:txBody>
-                    <a:bodyPr/>
+                    <a:bodyPr wrap="square"/>
                     <a:lstStyle/>
                     <a:p>
                       <a:pPr algn="r"/>
@@ -4592,7 +4449,7 @@
                 </a:tc>
                 <a:tc>
                   <a:txBody>
-                    <a:bodyPr/>
+                    <a:bodyPr wrap="square"/>
                     <a:lstStyle/>
                     <a:p>
                       <a:pPr algn="r"/>
@@ -4614,7 +4471,7 @@
                 </a:tc>
                 <a:tc>
                   <a:txBody>
-                    <a:bodyPr/>
+                    <a:bodyPr wrap="square"/>
                     <a:lstStyle/>
                     <a:p>
                       <a:pPr algn="r"/>
@@ -4636,7 +4493,7 @@
                 </a:tc>
                 <a:tc>
                   <a:txBody>
-                    <a:bodyPr/>
+                    <a:bodyPr wrap="square"/>
                     <a:lstStyle/>
                     <a:p>
                       <a:pPr algn="r"/>
@@ -4658,7 +4515,7 @@
                 </a:tc>
                 <a:tc>
                   <a:txBody>
-                    <a:bodyPr/>
+                    <a:bodyPr wrap="square"/>
                     <a:lstStyle/>
                     <a:p>
                       <a:pPr algn="r"/>
@@ -4680,7 +4537,7 @@
                 </a:tc>
                 <a:tc>
                   <a:txBody>
-                    <a:bodyPr/>
+                    <a:bodyPr wrap="square"/>
                     <a:lstStyle/>
                     <a:p>
                       <a:pPr algn="r"/>
@@ -4702,7 +4559,7 @@
                 </a:tc>
                 <a:tc>
                   <a:txBody>
-                    <a:bodyPr/>
+                    <a:bodyPr wrap="square"/>
                     <a:lstStyle/>
                     <a:p>
                       <a:pPr algn="r"/>
@@ -4722,16 +4579,11 @@
                     </a:solidFill>
                   </a:tcPr>
                 </a:tc>
-                <a:extLst>
-                  <a:ext uri="{0D108BD9-81ED-4DB2-BD59-A6C34878D82A}">
-                    <a16:rowId xmlns:a16="http://schemas.microsoft.com/office/drawing/2014/main" val="10001"/>
-                  </a:ext>
-                </a:extLst>
               </a:tr>
               <a:tr h="418011">
                 <a:tc>
                   <a:txBody>
-                    <a:bodyPr/>
+                    <a:bodyPr wrap="square"/>
                     <a:lstStyle/>
                     <a:p>
                       <a:pPr algn="l"/>
@@ -4753,7 +4605,7 @@
                 </a:tc>
                 <a:tc>
                   <a:txBody>
-                    <a:bodyPr/>
+                    <a:bodyPr wrap="square"/>
                     <a:lstStyle/>
                     <a:p>
                       <a:pPr algn="r"/>
@@ -4775,7 +4627,7 @@
                 </a:tc>
                 <a:tc>
                   <a:txBody>
-                    <a:bodyPr/>
+                    <a:bodyPr wrap="square"/>
                     <a:lstStyle/>
                     <a:p>
                       <a:pPr algn="r"/>
@@ -4797,7 +4649,7 @@
                 </a:tc>
                 <a:tc>
                   <a:txBody>
-                    <a:bodyPr/>
+                    <a:bodyPr wrap="square"/>
                     <a:lstStyle/>
                     <a:p>
                       <a:pPr algn="r"/>
@@ -4819,7 +4671,7 @@
                 </a:tc>
                 <a:tc>
                   <a:txBody>
-                    <a:bodyPr/>
+                    <a:bodyPr wrap="square"/>
                     <a:lstStyle/>
                     <a:p>
                       <a:pPr algn="r"/>
@@ -4841,7 +4693,7 @@
                 </a:tc>
                 <a:tc>
                   <a:txBody>
-                    <a:bodyPr/>
+                    <a:bodyPr wrap="square"/>
                     <a:lstStyle/>
                     <a:p>
                       <a:pPr algn="r"/>
@@ -4863,7 +4715,7 @@
                 </a:tc>
                 <a:tc>
                   <a:txBody>
-                    <a:bodyPr/>
+                    <a:bodyPr wrap="square"/>
                     <a:lstStyle/>
                     <a:p>
                       <a:pPr algn="r"/>
@@ -4885,7 +4737,7 @@
                 </a:tc>
                 <a:tc>
                   <a:txBody>
-                    <a:bodyPr/>
+                    <a:bodyPr wrap="square"/>
                     <a:lstStyle/>
                     <a:p>
                       <a:pPr algn="r"/>
@@ -4905,16 +4757,11 @@
                     </a:solidFill>
                   </a:tcPr>
                 </a:tc>
-                <a:extLst>
-                  <a:ext uri="{0D108BD9-81ED-4DB2-BD59-A6C34878D82A}">
-                    <a16:rowId xmlns:a16="http://schemas.microsoft.com/office/drawing/2014/main" val="10002"/>
-                  </a:ext>
-                </a:extLst>
               </a:tr>
               <a:tr h="418011">
                 <a:tc>
                   <a:txBody>
-                    <a:bodyPr/>
+                    <a:bodyPr wrap="square"/>
                     <a:lstStyle/>
                     <a:p>
                       <a:pPr algn="l"/>
@@ -4936,7 +4783,7 @@
                 </a:tc>
                 <a:tc>
                   <a:txBody>
-                    <a:bodyPr/>
+                    <a:bodyPr wrap="square"/>
                     <a:lstStyle/>
                     <a:p>
                       <a:pPr algn="r"/>
@@ -4958,7 +4805,7 @@
                 </a:tc>
                 <a:tc>
                   <a:txBody>
-                    <a:bodyPr/>
+                    <a:bodyPr wrap="square"/>
                     <a:lstStyle/>
                     <a:p>
                       <a:pPr algn="r"/>
@@ -4980,7 +4827,7 @@
                 </a:tc>
                 <a:tc>
                   <a:txBody>
-                    <a:bodyPr/>
+                    <a:bodyPr wrap="square"/>
                     <a:lstStyle/>
                     <a:p>
                       <a:pPr algn="r"/>
@@ -5002,7 +4849,7 @@
                 </a:tc>
                 <a:tc>
                   <a:txBody>
-                    <a:bodyPr/>
+                    <a:bodyPr wrap="square"/>
                     <a:lstStyle/>
                     <a:p>
                       <a:pPr algn="r"/>
@@ -5024,7 +4871,7 @@
                 </a:tc>
                 <a:tc>
                   <a:txBody>
-                    <a:bodyPr/>
+                    <a:bodyPr wrap="square"/>
                     <a:lstStyle/>
                     <a:p>
                       <a:pPr algn="r"/>
@@ -5046,7 +4893,7 @@
                 </a:tc>
                 <a:tc>
                   <a:txBody>
-                    <a:bodyPr/>
+                    <a:bodyPr wrap="square"/>
                     <a:lstStyle/>
                     <a:p>
                       <a:pPr algn="r"/>
@@ -5068,7 +4915,7 @@
                 </a:tc>
                 <a:tc>
                   <a:txBody>
-                    <a:bodyPr/>
+                    <a:bodyPr wrap="square"/>
                     <a:lstStyle/>
                     <a:p>
                       <a:pPr algn="r"/>
@@ -5088,16 +4935,11 @@
                     </a:solidFill>
                   </a:tcPr>
                 </a:tc>
-                <a:extLst>
-                  <a:ext uri="{0D108BD9-81ED-4DB2-BD59-A6C34878D82A}">
-                    <a16:rowId xmlns:a16="http://schemas.microsoft.com/office/drawing/2014/main" val="10003"/>
-                  </a:ext>
-                </a:extLst>
               </a:tr>
               <a:tr h="418011">
                 <a:tc>
                   <a:txBody>
-                    <a:bodyPr/>
+                    <a:bodyPr wrap="square"/>
                     <a:lstStyle/>
                     <a:p>
                       <a:pPr algn="l"/>
@@ -5119,7 +4961,7 @@
                 </a:tc>
                 <a:tc>
                   <a:txBody>
-                    <a:bodyPr/>
+                    <a:bodyPr wrap="square"/>
                     <a:lstStyle/>
                     <a:p>
                       <a:pPr algn="r"/>
@@ -5141,7 +4983,7 @@
                 </a:tc>
                 <a:tc>
                   <a:txBody>
-                    <a:bodyPr/>
+                    <a:bodyPr wrap="square"/>
                     <a:lstStyle/>
                     <a:p>
                       <a:pPr algn="r"/>
@@ -5163,7 +5005,7 @@
                 </a:tc>
                 <a:tc>
                   <a:txBody>
-                    <a:bodyPr/>
+                    <a:bodyPr wrap="square"/>
                     <a:lstStyle/>
                     <a:p>
                       <a:pPr algn="r"/>
@@ -5185,7 +5027,7 @@
                 </a:tc>
                 <a:tc>
                   <a:txBody>
-                    <a:bodyPr/>
+                    <a:bodyPr wrap="square"/>
                     <a:lstStyle/>
                     <a:p>
                       <a:pPr algn="r"/>
@@ -5207,7 +5049,7 @@
                 </a:tc>
                 <a:tc>
                   <a:txBody>
-                    <a:bodyPr/>
+                    <a:bodyPr wrap="square"/>
                     <a:lstStyle/>
                     <a:p>
                       <a:pPr algn="r"/>
@@ -5229,7 +5071,7 @@
                 </a:tc>
                 <a:tc>
                   <a:txBody>
-                    <a:bodyPr/>
+                    <a:bodyPr wrap="square"/>
                     <a:lstStyle/>
                     <a:p>
                       <a:pPr algn="r"/>
@@ -5251,7 +5093,7 @@
                 </a:tc>
                 <a:tc>
                   <a:txBody>
-                    <a:bodyPr/>
+                    <a:bodyPr wrap="square"/>
                     <a:lstStyle/>
                     <a:p>
                       <a:pPr algn="r"/>
@@ -5271,16 +5113,11 @@
                     </a:solidFill>
                   </a:tcPr>
                 </a:tc>
-                <a:extLst>
-                  <a:ext uri="{0D108BD9-81ED-4DB2-BD59-A6C34878D82A}">
-                    <a16:rowId xmlns:a16="http://schemas.microsoft.com/office/drawing/2014/main" val="10004"/>
-                  </a:ext>
-                </a:extLst>
               </a:tr>
               <a:tr h="418011">
                 <a:tc>
                   <a:txBody>
-                    <a:bodyPr/>
+                    <a:bodyPr wrap="square"/>
                     <a:lstStyle/>
                     <a:p>
                       <a:pPr algn="l"/>
@@ -5302,7 +5139,7 @@
                 </a:tc>
                 <a:tc>
                   <a:txBody>
-                    <a:bodyPr/>
+                    <a:bodyPr wrap="square"/>
                     <a:lstStyle/>
                     <a:p>
                       <a:pPr algn="r"/>
@@ -5324,7 +5161,7 @@
                 </a:tc>
                 <a:tc>
                   <a:txBody>
-                    <a:bodyPr/>
+                    <a:bodyPr wrap="square"/>
                     <a:lstStyle/>
                     <a:p>
                       <a:pPr algn="r"/>
@@ -5346,7 +5183,7 @@
                 </a:tc>
                 <a:tc>
                   <a:txBody>
-                    <a:bodyPr/>
+                    <a:bodyPr wrap="square"/>
                     <a:lstStyle/>
                     <a:p>
                       <a:pPr algn="r"/>
@@ -5368,7 +5205,7 @@
                 </a:tc>
                 <a:tc>
                   <a:txBody>
-                    <a:bodyPr/>
+                    <a:bodyPr wrap="square"/>
                     <a:lstStyle/>
                     <a:p>
                       <a:pPr algn="r"/>
@@ -5390,7 +5227,7 @@
                 </a:tc>
                 <a:tc>
                   <a:txBody>
-                    <a:bodyPr/>
+                    <a:bodyPr wrap="square"/>
                     <a:lstStyle/>
                     <a:p>
                       <a:pPr algn="r"/>
@@ -5412,7 +5249,7 @@
                 </a:tc>
                 <a:tc>
                   <a:txBody>
-                    <a:bodyPr/>
+                    <a:bodyPr wrap="square"/>
                     <a:lstStyle/>
                     <a:p>
                       <a:pPr algn="r"/>
@@ -5434,7 +5271,7 @@
                 </a:tc>
                 <a:tc>
                   <a:txBody>
-                    <a:bodyPr/>
+                    <a:bodyPr wrap="square"/>
                     <a:lstStyle/>
                     <a:p>
                       <a:pPr algn="r"/>
@@ -5454,16 +5291,11 @@
                     </a:solidFill>
                   </a:tcPr>
                 </a:tc>
-                <a:extLst>
-                  <a:ext uri="{0D108BD9-81ED-4DB2-BD59-A6C34878D82A}">
-                    <a16:rowId xmlns:a16="http://schemas.microsoft.com/office/drawing/2014/main" val="10005"/>
-                  </a:ext>
-                </a:extLst>
               </a:tr>
               <a:tr h="418014">
                 <a:tc>
                   <a:txBody>
-                    <a:bodyPr/>
+                    <a:bodyPr wrap="square"/>
                     <a:lstStyle/>
                     <a:p>
                       <a:pPr algn="l"/>
@@ -5485,7 +5317,7 @@
                 </a:tc>
                 <a:tc>
                   <a:txBody>
-                    <a:bodyPr/>
+                    <a:bodyPr wrap="square"/>
                     <a:lstStyle/>
                     <a:p>
                       <a:pPr algn="r"/>
@@ -5507,11 +5339,18 @@
                 </a:tc>
                 <a:tc>
                   <a:txBody>
-                    <a:bodyPr/>
+                    <a:bodyPr wrap="square"/>
                     <a:lstStyle/>
                     <a:p>
                       <a:pPr algn="l"/>
-                      <a:endParaRPr/>
+                      <a:r>
+                        <a:rPr sz="1000" b="0">
+                          <a:solidFill>
+                            <a:srgbClr val="1F3050"/>
+                          </a:solidFill>
+                        </a:rPr>
+                        <a:t/>
+                      </a:r>
                     </a:p>
                   </a:txBody>
                   <a:tcPr marL="54864" marR="54864" marT="18288" marB="18288">
@@ -5522,11 +5361,18 @@
                 </a:tc>
                 <a:tc>
                   <a:txBody>
-                    <a:bodyPr/>
+                    <a:bodyPr wrap="square"/>
                     <a:lstStyle/>
                     <a:p>
                       <a:pPr algn="l"/>
-                      <a:endParaRPr/>
+                      <a:r>
+                        <a:rPr sz="1000" b="0">
+                          <a:solidFill>
+                            <a:srgbClr val="1F3050"/>
+                          </a:solidFill>
+                        </a:rPr>
+                        <a:t/>
+                      </a:r>
                     </a:p>
                   </a:txBody>
                   <a:tcPr marL="54864" marR="54864" marT="18288" marB="18288">
@@ -5537,7 +5383,7 @@
                 </a:tc>
                 <a:tc>
                   <a:txBody>
-                    <a:bodyPr/>
+                    <a:bodyPr wrap="square"/>
                     <a:lstStyle/>
                     <a:p>
                       <a:pPr algn="r"/>
@@ -5559,7 +5405,7 @@
                 </a:tc>
                 <a:tc>
                   <a:txBody>
-                    <a:bodyPr/>
+                    <a:bodyPr wrap="square"/>
                     <a:lstStyle/>
                     <a:p>
                       <a:pPr algn="r"/>
@@ -5581,7 +5427,7 @@
                 </a:tc>
                 <a:tc>
                   <a:txBody>
-                    <a:bodyPr/>
+                    <a:bodyPr wrap="square"/>
                     <a:lstStyle/>
                     <a:p>
                       <a:pPr algn="r"/>
@@ -5603,7 +5449,7 @@
                 </a:tc>
                 <a:tc>
                   <a:txBody>
-                    <a:bodyPr/>
+                    <a:bodyPr wrap="square"/>
                     <a:lstStyle/>
                     <a:p>
                       <a:pPr algn="r"/>
@@ -5623,11 +5469,6 @@
                     </a:solidFill>
                   </a:tcPr>
                 </a:tc>
-                <a:extLst>
-                  <a:ext uri="{0D108BD9-81ED-4DB2-BD59-A6C34878D82A}">
-                    <a16:rowId xmlns:a16="http://schemas.microsoft.com/office/drawing/2014/main" val="10006"/>
-                  </a:ext>
-                </a:extLst>
               </a:tr>
             </a:tbl>
           </a:graphicData>
@@ -5777,7 +5618,7 @@
 </file>
 
 <file path=ppt/slides/slide3.xml><?xml version="1.0" encoding="utf-8"?>
-<p:sld xmlns:a="http://schemas.openxmlformats.org/drawingml/2006/main" xmlns:r="http://schemas.openxmlformats.org/officeDocument/2006/relationships" xmlns:p="http://schemas.openxmlformats.org/presentationml/2006/main">
+<p:sld xmlns:a="http://schemas.openxmlformats.org/drawingml/2006/main" xmlns:p="http://schemas.openxmlformats.org/presentationml/2006/main" xmlns:r="http://schemas.openxmlformats.org/officeDocument/2006/relationships">
   <p:cSld>
     <p:spTree>
       <p:nvGrpSpPr>
@@ -5785,14 +5626,7 @@
         <p:cNvGrpSpPr/>
         <p:nvPr/>
       </p:nvGrpSpPr>
-      <p:grpSpPr>
-        <a:xfrm>
-          <a:off x="0" y="0"/>
-          <a:ext cx="0" cy="0"/>
-          <a:chOff x="0" y="0"/>
-          <a:chExt cx="0" cy="0"/>
-        </a:xfrm>
-      </p:grpSpPr>
+      <p:grpSpPr/>
       <p:sp>
         <p:nvSpPr>
           <p:cNvPr id="2" name="TextBox 1"/>
@@ -5878,39 +5712,15 @@
                 <a:tableStyleId>{5C22544A-7EE6-4342-B048-85BDC9FD1C3A}</a:tableStyleId>
               </a:tblPr>
               <a:tblGrid>
-                <a:gridCol w="3154680">
-                  <a:extLst>
-                    <a:ext uri="{9D8B030D-6E8A-4147-A177-3AD203B41FA5}">
-                      <a16:colId xmlns:a16="http://schemas.microsoft.com/office/drawing/2014/main" val="20000"/>
-                    </a:ext>
-                  </a:extLst>
-                </a:gridCol>
-                <a:gridCol w="1143000">
-                  <a:extLst>
-                    <a:ext uri="{9D8B030D-6E8A-4147-A177-3AD203B41FA5}">
-                      <a16:colId xmlns:a16="http://schemas.microsoft.com/office/drawing/2014/main" val="20001"/>
-                    </a:ext>
-                  </a:extLst>
-                </a:gridCol>
-                <a:gridCol w="1600200">
-                  <a:extLst>
-                    <a:ext uri="{9D8B030D-6E8A-4147-A177-3AD203B41FA5}">
-                      <a16:colId xmlns:a16="http://schemas.microsoft.com/office/drawing/2014/main" val="20002"/>
-                    </a:ext>
-                  </a:extLst>
-                </a:gridCol>
-                <a:gridCol w="4160520">
-                  <a:extLst>
-                    <a:ext uri="{9D8B030D-6E8A-4147-A177-3AD203B41FA5}">
-                      <a16:colId xmlns:a16="http://schemas.microsoft.com/office/drawing/2014/main" val="20003"/>
-                    </a:ext>
-                  </a:extLst>
-                </a:gridCol>
+                <a:gridCol w="3154680"/>
+                <a:gridCol w="1143000"/>
+                <a:gridCol w="1600200"/>
+                <a:gridCol w="4160520"/>
               </a:tblGrid>
               <a:tr h="375920">
                 <a:tc>
                   <a:txBody>
-                    <a:bodyPr/>
+                    <a:bodyPr wrap="square"/>
                     <a:lstStyle/>
                     <a:p>
                       <a:pPr algn="l"/>
@@ -5932,7 +5742,7 @@
                 </a:tc>
                 <a:tc>
                   <a:txBody>
-                    <a:bodyPr/>
+                    <a:bodyPr wrap="square"/>
                     <a:lstStyle/>
                     <a:p>
                       <a:pPr algn="ctr"/>
@@ -5954,7 +5764,7 @@
                 </a:tc>
                 <a:tc>
                   <a:txBody>
-                    <a:bodyPr/>
+                    <a:bodyPr wrap="square"/>
                     <a:lstStyle/>
                     <a:p>
                       <a:pPr algn="ctr"/>
@@ -5976,7 +5786,7 @@
                 </a:tc>
                 <a:tc>
                   <a:txBody>
-                    <a:bodyPr/>
+                    <a:bodyPr wrap="square"/>
                     <a:lstStyle/>
                     <a:p>
                       <a:pPr algn="l"/>
@@ -5996,16 +5806,11 @@
                     </a:solidFill>
                   </a:tcPr>
                 </a:tc>
-                <a:extLst>
-                  <a:ext uri="{0D108BD9-81ED-4DB2-BD59-A6C34878D82A}">
-                    <a16:rowId xmlns:a16="http://schemas.microsoft.com/office/drawing/2014/main" val="10000"/>
-                  </a:ext>
-                </a:extLst>
               </a:tr>
               <a:tr h="375920">
                 <a:tc>
                   <a:txBody>
-                    <a:bodyPr/>
+                    <a:bodyPr wrap="square"/>
                     <a:lstStyle/>
                     <a:p>
                       <a:pPr algn="l"/>
@@ -6027,7 +5832,7 @@
                 </a:tc>
                 <a:tc>
                   <a:txBody>
-                    <a:bodyPr/>
+                    <a:bodyPr wrap="square"/>
                     <a:lstStyle/>
                     <a:p>
                       <a:pPr algn="ctr"/>
@@ -6049,7 +5854,7 @@
                 </a:tc>
                 <a:tc>
                   <a:txBody>
-                    <a:bodyPr/>
+                    <a:bodyPr wrap="square"/>
                     <a:lstStyle/>
                     <a:p>
                       <a:pPr algn="r"/>
@@ -6071,7 +5876,7 @@
                 </a:tc>
                 <a:tc>
                   <a:txBody>
-                    <a:bodyPr/>
+                    <a:bodyPr wrap="square"/>
                     <a:lstStyle/>
                     <a:p>
                       <a:pPr algn="l"/>
@@ -6091,16 +5896,11 @@
                     </a:solidFill>
                   </a:tcPr>
                 </a:tc>
-                <a:extLst>
-                  <a:ext uri="{0D108BD9-81ED-4DB2-BD59-A6C34878D82A}">
-                    <a16:rowId xmlns:a16="http://schemas.microsoft.com/office/drawing/2014/main" val="10001"/>
-                  </a:ext>
-                </a:extLst>
               </a:tr>
               <a:tr h="375920">
                 <a:tc>
                   <a:txBody>
-                    <a:bodyPr/>
+                    <a:bodyPr wrap="square"/>
                     <a:lstStyle/>
                     <a:p>
                       <a:pPr algn="l"/>
@@ -6122,7 +5922,7 @@
                 </a:tc>
                 <a:tc>
                   <a:txBody>
-                    <a:bodyPr/>
+                    <a:bodyPr wrap="square"/>
                     <a:lstStyle/>
                     <a:p>
                       <a:pPr algn="ctr"/>
@@ -6144,7 +5944,7 @@
                 </a:tc>
                 <a:tc>
                   <a:txBody>
-                    <a:bodyPr/>
+                    <a:bodyPr wrap="square"/>
                     <a:lstStyle/>
                     <a:p>
                       <a:pPr algn="r"/>
@@ -6166,7 +5966,7 @@
                 </a:tc>
                 <a:tc>
                   <a:txBody>
-                    <a:bodyPr/>
+                    <a:bodyPr wrap="square"/>
                     <a:lstStyle/>
                     <a:p>
                       <a:pPr algn="l"/>
@@ -6186,16 +5986,11 @@
                     </a:solidFill>
                   </a:tcPr>
                 </a:tc>
-                <a:extLst>
-                  <a:ext uri="{0D108BD9-81ED-4DB2-BD59-A6C34878D82A}">
-                    <a16:rowId xmlns:a16="http://schemas.microsoft.com/office/drawing/2014/main" val="10002"/>
-                  </a:ext>
-                </a:extLst>
               </a:tr>
               <a:tr h="375920">
                 <a:tc>
                   <a:txBody>
-                    <a:bodyPr/>
+                    <a:bodyPr wrap="square"/>
                     <a:lstStyle/>
                     <a:p>
                       <a:pPr algn="l"/>
@@ -6217,7 +6012,7 @@
                 </a:tc>
                 <a:tc>
                   <a:txBody>
-                    <a:bodyPr/>
+                    <a:bodyPr wrap="square"/>
                     <a:lstStyle/>
                     <a:p>
                       <a:pPr algn="ctr"/>
@@ -6239,7 +6034,7 @@
                 </a:tc>
                 <a:tc>
                   <a:txBody>
-                    <a:bodyPr/>
+                    <a:bodyPr wrap="square"/>
                     <a:lstStyle/>
                     <a:p>
                       <a:pPr algn="r"/>
@@ -6261,7 +6056,7 @@
                 </a:tc>
                 <a:tc>
                   <a:txBody>
-                    <a:bodyPr/>
+                    <a:bodyPr wrap="square"/>
                     <a:lstStyle/>
                     <a:p>
                       <a:pPr algn="l"/>
@@ -6281,16 +6076,11 @@
                     </a:solidFill>
                   </a:tcPr>
                 </a:tc>
-                <a:extLst>
-                  <a:ext uri="{0D108BD9-81ED-4DB2-BD59-A6C34878D82A}">
-                    <a16:rowId xmlns:a16="http://schemas.microsoft.com/office/drawing/2014/main" val="10003"/>
-                  </a:ext>
-                </a:extLst>
               </a:tr>
               <a:tr h="375920">
                 <a:tc>
                   <a:txBody>
-                    <a:bodyPr/>
+                    <a:bodyPr wrap="square"/>
                     <a:lstStyle/>
                     <a:p>
                       <a:pPr algn="l"/>
@@ -6312,7 +6102,7 @@
                 </a:tc>
                 <a:tc>
                   <a:txBody>
-                    <a:bodyPr/>
+                    <a:bodyPr wrap="square"/>
                     <a:lstStyle/>
                     <a:p>
                       <a:pPr algn="ctr"/>
@@ -6334,7 +6124,7 @@
                 </a:tc>
                 <a:tc>
                   <a:txBody>
-                    <a:bodyPr/>
+                    <a:bodyPr wrap="square"/>
                     <a:lstStyle/>
                     <a:p>
                       <a:pPr algn="r"/>
@@ -6356,7 +6146,7 @@
                 </a:tc>
                 <a:tc>
                   <a:txBody>
-                    <a:bodyPr/>
+                    <a:bodyPr wrap="square"/>
                     <a:lstStyle/>
                     <a:p>
                       <a:pPr algn="l"/>
@@ -6376,16 +6166,11 @@
                     </a:solidFill>
                   </a:tcPr>
                 </a:tc>
-                <a:extLst>
-                  <a:ext uri="{0D108BD9-81ED-4DB2-BD59-A6C34878D82A}">
-                    <a16:rowId xmlns:a16="http://schemas.microsoft.com/office/drawing/2014/main" val="10004"/>
-                  </a:ext>
-                </a:extLst>
               </a:tr>
               <a:tr h="375920">
                 <a:tc>
                   <a:txBody>
-                    <a:bodyPr/>
+                    <a:bodyPr wrap="square"/>
                     <a:lstStyle/>
                     <a:p>
                       <a:pPr algn="l"/>
@@ -6407,7 +6192,7 @@
                 </a:tc>
                 <a:tc>
                   <a:txBody>
-                    <a:bodyPr/>
+                    <a:bodyPr wrap="square"/>
                     <a:lstStyle/>
                     <a:p>
                       <a:pPr algn="ctr"/>
@@ -6429,7 +6214,7 @@
                 </a:tc>
                 <a:tc>
                   <a:txBody>
-                    <a:bodyPr/>
+                    <a:bodyPr wrap="square"/>
                     <a:lstStyle/>
                     <a:p>
                       <a:pPr algn="r"/>
@@ -6451,7 +6236,7 @@
                 </a:tc>
                 <a:tc>
                   <a:txBody>
-                    <a:bodyPr/>
+                    <a:bodyPr wrap="square"/>
                     <a:lstStyle/>
                     <a:p>
                       <a:pPr algn="l"/>
@@ -6471,16 +6256,11 @@
                     </a:solidFill>
                   </a:tcPr>
                 </a:tc>
-                <a:extLst>
-                  <a:ext uri="{0D108BD9-81ED-4DB2-BD59-A6C34878D82A}">
-                    <a16:rowId xmlns:a16="http://schemas.microsoft.com/office/drawing/2014/main" val="10005"/>
-                  </a:ext>
-                </a:extLst>
               </a:tr>
               <a:tr h="375920">
                 <a:tc>
                   <a:txBody>
-                    <a:bodyPr/>
+                    <a:bodyPr wrap="square"/>
                     <a:lstStyle/>
                     <a:p>
                       <a:pPr algn="l"/>
@@ -6502,7 +6282,7 @@
                 </a:tc>
                 <a:tc>
                   <a:txBody>
-                    <a:bodyPr/>
+                    <a:bodyPr wrap="square"/>
                     <a:lstStyle/>
                     <a:p>
                       <a:pPr algn="ctr"/>
@@ -6524,7 +6304,7 @@
                 </a:tc>
                 <a:tc>
                   <a:txBody>
-                    <a:bodyPr/>
+                    <a:bodyPr wrap="square"/>
                     <a:lstStyle/>
                     <a:p>
                       <a:pPr algn="r"/>
@@ -6546,7 +6326,7 @@
                 </a:tc>
                 <a:tc>
                   <a:txBody>
-                    <a:bodyPr/>
+                    <a:bodyPr wrap="square"/>
                     <a:lstStyle/>
                     <a:p>
                       <a:pPr algn="l"/>
@@ -6566,16 +6346,11 @@
                     </a:solidFill>
                   </a:tcPr>
                 </a:tc>
-                <a:extLst>
-                  <a:ext uri="{0D108BD9-81ED-4DB2-BD59-A6C34878D82A}">
-                    <a16:rowId xmlns:a16="http://schemas.microsoft.com/office/drawing/2014/main" val="10006"/>
-                  </a:ext>
-                </a:extLst>
               </a:tr>
               <a:tr h="375920">
                 <a:tc>
                   <a:txBody>
-                    <a:bodyPr/>
+                    <a:bodyPr wrap="square"/>
                     <a:lstStyle/>
                     <a:p>
                       <a:pPr algn="l"/>
@@ -6597,12 +6372,12 @@
                 </a:tc>
                 <a:tc>
                   <a:txBody>
-                    <a:bodyPr/>
+                    <a:bodyPr wrap="square"/>
                     <a:lstStyle/>
                     <a:p>
                       <a:pPr algn="ctr"/>
                       <a:r>
-                        <a:rPr sz="1100" b="1" dirty="0">
+                        <a:rPr sz="1100" b="1">
                           <a:solidFill>
                             <a:srgbClr val="335588"/>
                           </a:solidFill>
@@ -6619,12 +6394,12 @@
                 </a:tc>
                 <a:tc>
                   <a:txBody>
-                    <a:bodyPr/>
+                    <a:bodyPr wrap="square"/>
                     <a:lstStyle/>
                     <a:p>
                       <a:pPr algn="r"/>
                       <a:r>
-                        <a:rPr sz="1050" b="0" dirty="0">
+                        <a:rPr sz="1050" b="0">
                           <a:solidFill>
                             <a:srgbClr val="1F3050"/>
                           </a:solidFill>
@@ -6641,12 +6416,12 @@
                 </a:tc>
                 <a:tc>
                   <a:txBody>
-                    <a:bodyPr/>
+                    <a:bodyPr wrap="square"/>
                     <a:lstStyle/>
                     <a:p>
                       <a:pPr algn="l"/>
                       <a:r>
-                        <a:rPr sz="950" b="0" dirty="0">
+                        <a:rPr sz="950" b="0">
                           <a:solidFill>
                             <a:srgbClr val="555555"/>
                           </a:solidFill>
@@ -6661,16 +6436,11 @@
                     </a:solidFill>
                   </a:tcPr>
                 </a:tc>
-                <a:extLst>
-                  <a:ext uri="{0D108BD9-81ED-4DB2-BD59-A6C34878D82A}">
-                    <a16:rowId xmlns:a16="http://schemas.microsoft.com/office/drawing/2014/main" val="10007"/>
-                  </a:ext>
-                </a:extLst>
               </a:tr>
               <a:tr h="375920">
                 <a:tc>
                   <a:txBody>
-                    <a:bodyPr/>
+                    <a:bodyPr wrap="square"/>
                     <a:lstStyle/>
                     <a:p>
                       <a:pPr algn="l"/>
@@ -6692,7 +6462,7 @@
                 </a:tc>
                 <a:tc>
                   <a:txBody>
-                    <a:bodyPr/>
+                    <a:bodyPr wrap="square"/>
                     <a:lstStyle/>
                     <a:p>
                       <a:pPr algn="ctr"/>
@@ -6714,7 +6484,7 @@
                 </a:tc>
                 <a:tc>
                   <a:txBody>
-                    <a:bodyPr/>
+                    <a:bodyPr wrap="square"/>
                     <a:lstStyle/>
                     <a:p>
                       <a:pPr algn="r"/>
@@ -6736,12 +6506,12 @@
                 </a:tc>
                 <a:tc>
                   <a:txBody>
-                    <a:bodyPr/>
+                    <a:bodyPr wrap="square"/>
                     <a:lstStyle/>
                     <a:p>
                       <a:pPr algn="l"/>
                       <a:r>
-                        <a:rPr sz="950" b="0" dirty="0">
+                        <a:rPr sz="950" b="0">
                           <a:solidFill>
                             <a:srgbClr val="555555"/>
                           </a:solidFill>
@@ -6756,11 +6526,6 @@
                     </a:solidFill>
                   </a:tcPr>
                 </a:tc>
-                <a:extLst>
-                  <a:ext uri="{0D108BD9-81ED-4DB2-BD59-A6C34878D82A}">
-                    <a16:rowId xmlns:a16="http://schemas.microsoft.com/office/drawing/2014/main" val="10008"/>
-                  </a:ext>
-                </a:extLst>
               </a:tr>
             </a:tbl>
           </a:graphicData>
@@ -6840,7 +6605,7 @@
                   <a:srgbClr val="555555"/>
                 </a:solidFill>
               </a:rPr>
-              <a:t>These stack: keeping both think but cutting structure → ~10% of full (Haiku+Gemini sweep5 $538 → ~$54), with statistical power largely intact.</a:t>
+              <a:t>These stack: keeping both think but cutting structure → ~10% of full (Haiku+Gemini sweep5 $537 → ~$54), with statistical power largely intact.</a:t>
             </a:r>
           </a:p>
         </p:txBody>
@@ -6874,6 +6639,550 @@
                 </a:solidFill>
               </a:rPr>
               <a:t>Scenarios computed on the sweep5 token table. PlanBench scales the same way (its analogue of validate_plan-style cost is the with-tools think-on cell). Cuts are labeled variants — flag any domain/fixture sampling in the writeup.</a:t>
+            </a:r>
+          </a:p>
+        </p:txBody>
+      </p:sp>
+    </p:spTree>
+  </p:cSld>
+  <p:clrMapOvr>
+    <a:masterClrMapping/>
+  </p:clrMapOvr>
+</p:sld>
+</file>
+
+<file path=ppt/slides/slide4.xml><?xml version="1.0" encoding="utf-8"?>
+<p:sld xmlns:a="http://schemas.openxmlformats.org/drawingml/2006/main" xmlns:p="http://schemas.openxmlformats.org/presentationml/2006/main" xmlns:r="http://schemas.openxmlformats.org/officeDocument/2006/relationships">
+  <p:cSld>
+    <p:spTree>
+      <p:nvGrpSpPr>
+        <p:cNvPr id="1" name=""/>
+        <p:cNvGrpSpPr/>
+        <p:nvPr/>
+      </p:nvGrpSpPr>
+      <p:grpSpPr/>
+      <p:sp>
+        <p:nvSpPr>
+          <p:cNvPr id="2" name="TextBox 1"/>
+          <p:cNvSpPr txBox="1"/>
+          <p:nvPr/>
+        </p:nvSpPr>
+        <p:spPr>
+          <a:xfrm>
+            <a:off x="274320" y="164592"/>
+            <a:ext cx="11612880" cy="457200"/>
+          </a:xfrm>
+          <a:prstGeom prst="rect">
+            <a:avLst/>
+          </a:prstGeom>
+          <a:noFill/>
+        </p:spPr>
+        <p:txBody>
+          <a:bodyPr wrap="none">
+            <a:spAutoFit/>
+          </a:bodyPr>
+          <a:lstStyle/>
+          <a:p>
+            <a:r>
+              <a:rPr sz="2200" b="1">
+                <a:solidFill>
+                  <a:srgbClr val="1F3050"/>
+                </a:solidFill>
+              </a:rPr>
+              <a:t>What We Cut vs What Stays Solid</a:t>
+            </a:r>
+          </a:p>
+        </p:txBody>
+      </p:sp>
+      <p:sp>
+        <p:nvSpPr>
+          <p:cNvPr id="3" name="TextBox 2"/>
+          <p:cNvSpPr txBox="1"/>
+          <p:nvPr/>
+        </p:nvSpPr>
+        <p:spPr>
+          <a:xfrm>
+            <a:off x="274320" y="658368"/>
+            <a:ext cx="11612880" cy="365760"/>
+          </a:xfrm>
+          <a:prstGeom prst="rect">
+            <a:avLst/>
+          </a:prstGeom>
+          <a:noFill/>
+        </p:spPr>
+        <p:txBody>
+          <a:bodyPr wrap="none">
+            <a:spAutoFit/>
+          </a:bodyPr>
+          <a:lstStyle/>
+          <a:p>
+            <a:r>
+              <a:rPr sz="1150" i="1">
+                <a:solidFill>
+                  <a:srgbClr val="555555"/>
+                </a:solidFill>
+              </a:rPr>
+              <a:t>Rule of thumb: cut the repeats, keep the spread.  The cuts only remove spares — the comparison stays intact.</a:t>
+            </a:r>
+          </a:p>
+        </p:txBody>
+      </p:sp>
+      <p:sp>
+        <p:nvSpPr>
+          <p:cNvPr id="4" name="Rounded Rectangle 3"/>
+          <p:cNvSpPr/>
+          <p:nvPr/>
+        </p:nvSpPr>
+        <p:spPr>
+          <a:xfrm>
+            <a:off x="274320" y="1325880"/>
+            <a:ext cx="5715000" cy="3703320"/>
+          </a:xfrm>
+          <a:prstGeom prst="roundRect">
+            <a:avLst/>
+          </a:prstGeom>
+          <a:solidFill>
+            <a:srgbClr val="ECF6EC"/>
+          </a:solidFill>
+          <a:ln w="19050">
+            <a:solidFill>
+              <a:srgbClr val="3E823C"/>
+            </a:solidFill>
+          </a:ln>
+          <a:effectLst/>
+        </p:spPr>
+        <p:style>
+          <a:lnRef idx="1">
+            <a:schemeClr val="accent1"/>
+          </a:lnRef>
+          <a:fillRef idx="3">
+            <a:schemeClr val="accent1"/>
+          </a:fillRef>
+          <a:effectRef idx="2">
+            <a:schemeClr val="accent1"/>
+          </a:effectRef>
+          <a:fontRef idx="minor">
+            <a:schemeClr val="lt1"/>
+          </a:fontRef>
+        </p:style>
+        <p:txBody>
+          <a:bodyPr rtlCol="0" anchor="ctr"/>
+          <a:lstStyle/>
+          <a:p>
+            <a:pPr algn="ctr"/>
+          </a:p>
+        </p:txBody>
+      </p:sp>
+      <p:sp>
+        <p:nvSpPr>
+          <p:cNvPr id="5" name="TextBox 4"/>
+          <p:cNvSpPr txBox="1"/>
+          <p:nvPr/>
+        </p:nvSpPr>
+        <p:spPr>
+          <a:xfrm>
+            <a:off x="530352" y="1527048"/>
+            <a:ext cx="5202936" cy="3300984"/>
+          </a:xfrm>
+          <a:prstGeom prst="rect">
+            <a:avLst/>
+          </a:prstGeom>
+          <a:noFill/>
+        </p:spPr>
+        <p:txBody>
+          <a:bodyPr wrap="square">
+            <a:spAutoFit/>
+          </a:bodyPr>
+          <a:lstStyle/>
+          <a:p>
+            <a:r>
+              <a:rPr sz="1500" b="1">
+                <a:solidFill>
+                  <a:srgbClr val="3E823C"/>
+                </a:solidFill>
+              </a:rPr>
+              <a:t>✓  KEEP — this IS the experiment</a:t>
+            </a:r>
+          </a:p>
+          <a:p>
+            <a:pPr>
+              <a:spcBef>
+                <a:spcPts val="900"/>
+              </a:spcBef>
+            </a:pPr>
+            <a:r>
+              <a:rPr sz="1150" b="1">
+                <a:solidFill>
+                  <a:srgbClr val="1F3050"/>
+                </a:solidFill>
+              </a:rPr>
+              <a:t>• Tools vs no-tools.  </a:t>
+            </a:r>
+            <a:r>
+              <a:rPr sz="1150">
+                <a:solidFill>
+                  <a:srgbClr val="555555"/>
+                </a:solidFill>
+              </a:rPr>
+              <a:t>the whole question — drop it and there's no experiment.</a:t>
+            </a:r>
+          </a:p>
+          <a:p>
+            <a:pPr>
+              <a:spcBef>
+                <a:spcPts val="900"/>
+              </a:spcBef>
+            </a:pPr>
+            <a:r>
+              <a:rPr sz="1150" b="1">
+                <a:solidFill>
+                  <a:srgbClr val="1F3050"/>
+                </a:solidFill>
+              </a:rPr>
+              <a:t>• Both world-families.  </a:t>
+            </a:r>
+            <a:r>
+              <a:rPr sz="1150">
+                <a:solidFill>
+                  <a:srgbClr val="555555"/>
+                </a:solidFill>
+              </a:rPr>
+              <a:t>keep some classical AND some numeric, or you can't claim it generalizes.</a:t>
+            </a:r>
+          </a:p>
+          <a:p>
+            <a:pPr>
+              <a:spcBef>
+                <a:spcPts val="900"/>
+              </a:spcBef>
+            </a:pPr>
+            <a:r>
+              <a:rPr sz="1150" b="1">
+                <a:solidFill>
+                  <a:srgbClr val="1F3050"/>
+                </a:solidFill>
+              </a:rPr>
+              <a:t>• Both think on / off (ideally).  </a:t>
+            </a:r>
+            <a:r>
+              <a:rPr sz="1150">
+                <a:solidFill>
+                  <a:srgbClr val="555555"/>
+                </a:solidFill>
+              </a:rPr>
+              <a:t>a real research question, and only a 2× cost.</a:t>
+            </a:r>
+          </a:p>
+          <a:p>
+            <a:pPr>
+              <a:spcBef>
+                <a:spcPts val="900"/>
+              </a:spcBef>
+            </a:pPr>
+            <a:r>
+              <a:rPr sz="1150" b="1">
+                <a:solidFill>
+                  <a:srgbClr val="1F3050"/>
+                </a:solidFill>
+              </a:rPr>
+              <a:t>• Hundreds of answers per cell.  </a:t>
+            </a:r>
+            <a:r>
+              <a:rPr sz="1150">
+                <a:solidFill>
+                  <a:srgbClr val="555555"/>
+                </a:solidFill>
+              </a:rPr>
+              <a:t>enough for honest confidence bars (Wilson CIs).</a:t>
+            </a:r>
+          </a:p>
+        </p:txBody>
+      </p:sp>
+      <p:sp>
+        <p:nvSpPr>
+          <p:cNvPr id="6" name="Rounded Rectangle 5"/>
+          <p:cNvSpPr/>
+          <p:nvPr/>
+        </p:nvSpPr>
+        <p:spPr>
+          <a:xfrm>
+            <a:off x="6217920" y="1325880"/>
+            <a:ext cx="5696712" cy="3703320"/>
+          </a:xfrm>
+          <a:prstGeom prst="roundRect">
+            <a:avLst/>
+          </a:prstGeom>
+          <a:solidFill>
+            <a:srgbClr val="FBF1DE"/>
+          </a:solidFill>
+          <a:ln w="19050">
+            <a:solidFill>
+              <a:srgbClr val="AE701C"/>
+            </a:solidFill>
+          </a:ln>
+          <a:effectLst/>
+        </p:spPr>
+        <p:style>
+          <a:lnRef idx="1">
+            <a:schemeClr val="accent1"/>
+          </a:lnRef>
+          <a:fillRef idx="3">
+            <a:schemeClr val="accent1"/>
+          </a:fillRef>
+          <a:effectRef idx="2">
+            <a:schemeClr val="accent1"/>
+          </a:effectRef>
+          <a:fontRef idx="minor">
+            <a:schemeClr val="lt1"/>
+          </a:fontRef>
+        </p:style>
+        <p:txBody>
+          <a:bodyPr rtlCol="0" anchor="ctr"/>
+          <a:lstStyle/>
+          <a:p>
+            <a:pPr algn="ctr"/>
+          </a:p>
+        </p:txBody>
+      </p:sp>
+      <p:sp>
+        <p:nvSpPr>
+          <p:cNvPr id="7" name="TextBox 6"/>
+          <p:cNvSpPr txBox="1"/>
+          <p:nvPr/>
+        </p:nvSpPr>
+        <p:spPr>
+          <a:xfrm>
+            <a:off x="6473952" y="1527048"/>
+            <a:ext cx="5184648" cy="3300984"/>
+          </a:xfrm>
+          <a:prstGeom prst="rect">
+            <a:avLst/>
+          </a:prstGeom>
+          <a:noFill/>
+        </p:spPr>
+        <p:txBody>
+          <a:bodyPr wrap="square">
+            <a:spAutoFit/>
+          </a:bodyPr>
+          <a:lstStyle/>
+          <a:p>
+            <a:r>
+              <a:rPr sz="1500" b="1">
+                <a:solidFill>
+                  <a:srgbClr val="AE701C"/>
+                </a:solidFill>
+              </a:rPr>
+              <a:t>✂  SAFE TO CUT — just repeats</a:t>
+            </a:r>
+          </a:p>
+          <a:p>
+            <a:pPr>
+              <a:spcBef>
+                <a:spcPts val="900"/>
+              </a:spcBef>
+            </a:pPr>
+            <a:r>
+              <a:rPr sz="1150" b="1">
+                <a:solidFill>
+                  <a:srgbClr val="1F3050"/>
+                </a:solidFill>
+              </a:rPr>
+              <a:t>• Wordings 6 → 2.  </a:t>
+            </a:r>
+            <a:r>
+              <a:rPr sz="1150">
+                <a:solidFill>
+                  <a:srgbClr val="555555"/>
+                </a:solidFill>
+              </a:rPr>
+              <a:t>keep 2 phrasings; still shows wording doesn't change the result.   ‒52%</a:t>
+            </a:r>
+          </a:p>
+          <a:p>
+            <a:pPr>
+              <a:spcBef>
+                <a:spcPts val="900"/>
+              </a:spcBef>
+            </a:pPr>
+            <a:r>
+              <a:rPr sz="1150" b="1">
+                <a:solidFill>
+                  <a:srgbClr val="1F3050"/>
+                </a:solidFill>
+              </a:rPr>
+              <a:t>• Plan-checks 10 → 4.  </a:t>
+            </a:r>
+            <a:r>
+              <a:rPr sz="1150">
+                <a:solidFill>
+                  <a:srgbClr val="555555"/>
+                </a:solidFill>
+              </a:rPr>
+              <a:t>2 broken + 2 good; still tests both skills.   −40%</a:t>
+            </a:r>
+          </a:p>
+          <a:p>
+            <a:pPr>
+              <a:spcBef>
+                <a:spcPts val="900"/>
+              </a:spcBef>
+            </a:pPr>
+            <a:r>
+              <a:rPr sz="1150" b="1">
+                <a:solidFill>
+                  <a:srgbClr val="1F3050"/>
+                </a:solidFill>
+              </a:rPr>
+              <a:t>• Worlds 20 → 10.  </a:t>
+            </a:r>
+            <a:r>
+              <a:rPr sz="1150">
+                <a:solidFill>
+                  <a:srgbClr val="555555"/>
+                </a:solidFill>
+              </a:rPr>
+              <a:t>keep 5 classical + 5 numeric (balanced).   −50%</a:t>
+            </a:r>
+          </a:p>
+          <a:p>
+            <a:pPr>
+              <a:spcBef>
+                <a:spcPts val="900"/>
+              </a:spcBef>
+            </a:pPr>
+            <a:r>
+              <a:rPr sz="1150" b="1">
+                <a:solidFill>
+                  <a:srgbClr val="1F3050"/>
+                </a:solidFill>
+              </a:rPr>
+              <a:t>• Drop think-on.  </a:t>
+            </a:r>
+            <a:r>
+              <a:rPr sz="1150">
+                <a:solidFill>
+                  <a:srgbClr val="555555"/>
+                </a:solidFill>
+              </a:rPr>
+              <a:t>the single biggest lever.   −64%</a:t>
+            </a:r>
+          </a:p>
+        </p:txBody>
+      </p:sp>
+      <p:sp>
+        <p:nvSpPr>
+          <p:cNvPr id="8" name="Rounded Rectangle 7"/>
+          <p:cNvSpPr/>
+          <p:nvPr/>
+        </p:nvSpPr>
+        <p:spPr>
+          <a:xfrm>
+            <a:off x="274320" y="5285232"/>
+            <a:ext cx="11640312" cy="841248"/>
+          </a:xfrm>
+          <a:prstGeom prst="roundRect">
+            <a:avLst/>
+          </a:prstGeom>
+          <a:solidFill>
+            <a:srgbClr val="335588"/>
+          </a:solidFill>
+          <a:ln>
+            <a:noFill/>
+          </a:ln>
+          <a:effectLst/>
+        </p:spPr>
+        <p:style>
+          <a:lnRef idx="1">
+            <a:schemeClr val="accent1"/>
+          </a:lnRef>
+          <a:fillRef idx="3">
+            <a:schemeClr val="accent1"/>
+          </a:fillRef>
+          <a:effectRef idx="2">
+            <a:schemeClr val="accent1"/>
+          </a:effectRef>
+          <a:fontRef idx="minor">
+            <a:schemeClr val="lt1"/>
+          </a:fontRef>
+        </p:style>
+        <p:txBody>
+          <a:bodyPr rtlCol="0" anchor="ctr"/>
+          <a:lstStyle/>
+          <a:p>
+            <a:pPr algn="ctr"/>
+          </a:p>
+        </p:txBody>
+      </p:sp>
+      <p:sp>
+        <p:nvSpPr>
+          <p:cNvPr id="9" name="TextBox 8"/>
+          <p:cNvSpPr txBox="1"/>
+          <p:nvPr/>
+        </p:nvSpPr>
+        <p:spPr>
+          <a:xfrm>
+            <a:off x="502920" y="5394960"/>
+            <a:ext cx="11247120" cy="640080"/>
+          </a:xfrm>
+          <a:prstGeom prst="rect">
+            <a:avLst/>
+          </a:prstGeom>
+          <a:noFill/>
+        </p:spPr>
+        <p:txBody>
+          <a:bodyPr wrap="square">
+            <a:spAutoFit/>
+          </a:bodyPr>
+          <a:lstStyle/>
+          <a:p>
+            <a:r>
+              <a:rPr sz="1250" b="1">
+                <a:solidFill>
+                  <a:srgbClr val="FFFFFF"/>
+                </a:solidFill>
+              </a:rPr>
+              <a:t>Lean-but-solid recipe:  </a:t>
+            </a:r>
+            <a:r>
+              <a:rPr sz="1250">
+                <a:solidFill>
+                  <a:srgbClr val="DDE6F2"/>
+                </a:solidFill>
+              </a:rPr>
+              <a:t>both models · tools + no-tools · both think · 10 balanced worlds · 2 wordings · 4 plan-checks   →   ~10% of full  (~$54 sweep5, Haiku+Gemini), still with real confidence bars.</a:t>
+            </a:r>
+          </a:p>
+        </p:txBody>
+      </p:sp>
+      <p:sp>
+        <p:nvSpPr>
+          <p:cNvPr id="10" name="TextBox 9"/>
+          <p:cNvSpPr txBox="1"/>
+          <p:nvPr/>
+        </p:nvSpPr>
+        <p:spPr>
+          <a:xfrm>
+            <a:off x="274320" y="6327648"/>
+            <a:ext cx="11612880" cy="457200"/>
+          </a:xfrm>
+          <a:prstGeom prst="rect">
+            <a:avLst/>
+          </a:prstGeom>
+          <a:noFill/>
+        </p:spPr>
+        <p:txBody>
+          <a:bodyPr wrap="square">
+            <a:spAutoFit/>
+          </a:bodyPr>
+          <a:lstStyle/>
+          <a:p>
+            <a:r>
+              <a:rPr sz="850" i="1">
+                <a:solidFill>
+                  <a:srgbClr val="555555"/>
+                </a:solidFill>
+              </a:rPr>
+              <a:t>Cuts are labeled variants — flag any domain/fixture sampling in the writeup. % reductions are model-independent; $ shown for the recommended cheap pair.</a:t>
             </a:r>
           </a:p>
         </p:txBody>

--- a/development/cost-breakdowns/cheap_model_cost_slides.pptx
+++ b/development/cost-breakdowns/cheap_model_cost_slides.pptx
@@ -9,6 +9,7 @@
     <p:sldId id="257" r:id="rId8"/>
     <p:sldId id="258" r:id="rId9"/>
     <p:sldId id="259" r:id="rId10"/>
+    <p:sldId id="260" r:id="rId11"/>
   </p:sldIdLst>
   <p:sldSz cx="12191695" cy="6858000" type="screen4x3"/>
   <p:notesSz cx="6858000" cy="9144000"/>
@@ -7183,6 +7184,1438 @@
                 </a:solidFill>
               </a:rPr>
               <a:t>Cuts are labeled variants — flag any domain/fixture sampling in the writeup. % reductions are model-independent; $ shown for the recommended cheap pair.</a:t>
+            </a:r>
+          </a:p>
+        </p:txBody>
+      </p:sp>
+    </p:spTree>
+  </p:cSld>
+  <p:clrMapOvr>
+    <a:masterClrMapping/>
+  </p:clrMapOvr>
+</p:sld>
+</file>
+
+<file path=ppt/slides/slide5.xml><?xml version="1.0" encoding="utf-8"?>
+<p:sld xmlns:a="http://schemas.openxmlformats.org/drawingml/2006/main" xmlns:p="http://schemas.openxmlformats.org/presentationml/2006/main" xmlns:r="http://schemas.openxmlformats.org/officeDocument/2006/relationships">
+  <p:cSld>
+    <p:spTree>
+      <p:nvGrpSpPr>
+        <p:cNvPr id="1" name=""/>
+        <p:cNvGrpSpPr/>
+        <p:nvPr/>
+      </p:nvGrpSpPr>
+      <p:grpSpPr/>
+      <p:sp>
+        <p:nvSpPr>
+          <p:cNvPr id="2" name="TextBox 1"/>
+          <p:cNvSpPr txBox="1"/>
+          <p:nvPr/>
+        </p:nvSpPr>
+        <p:spPr>
+          <a:xfrm>
+            <a:off x="274320" y="164592"/>
+            <a:ext cx="11612880" cy="457200"/>
+          </a:xfrm>
+          <a:prstGeom prst="rect">
+            <a:avLst/>
+          </a:prstGeom>
+          <a:noFill/>
+        </p:spPr>
+        <p:txBody>
+          <a:bodyPr wrap="none">
+            <a:spAutoFit/>
+          </a:bodyPr>
+          <a:lstStyle/>
+          <a:p>
+            <a:r>
+              <a:rPr sz="2200" b="1">
+                <a:solidFill>
+                  <a:srgbClr val="1F3050"/>
+                </a:solidFill>
+              </a:rPr>
+              <a:t>Alternative — Rent One Steady GPU, Self-Host the Open Roster</a:t>
+            </a:r>
+          </a:p>
+        </p:txBody>
+      </p:sp>
+      <p:sp>
+        <p:nvSpPr>
+          <p:cNvPr id="3" name="TextBox 2"/>
+          <p:cNvSpPr txBox="1"/>
+          <p:nvPr/>
+        </p:nvSpPr>
+        <p:spPr>
+          <a:xfrm>
+            <a:off x="274320" y="658368"/>
+            <a:ext cx="11612880" cy="365760"/>
+          </a:xfrm>
+          <a:prstGeom prst="rect">
+            <a:avLst/>
+          </a:prstGeom>
+          <a:noFill/>
+        </p:spPr>
+        <p:txBody>
+          <a:bodyPr wrap="none">
+            <a:spAutoFit/>
+          </a:bodyPr>
+          <a:lstStyle/>
+          <a:p>
+            <a:r>
+              <a:rPr sz="1150" i="1">
+                <a:solidFill>
+                  <a:srgbClr val="555555"/>
+                </a:solidFill>
+              </a:rPr>
+              <a:t>Run the OPEN models (Qwen3.5-0.8/4/9B · Qwen3.6-35B · maybe gemma4-31B) on a persistent neocloud box, not the queued 3090/RTX-6000 cluster. Different models &amp; purpose from the API closed-model baseline above — this is the actual experiment roster.</a:t>
+            </a:r>
+          </a:p>
+        </p:txBody>
+      </p:sp>
+      <p:graphicFrame>
+        <p:nvGraphicFramePr>
+          <p:cNvPr id="4" name="Table 3"/>
+          <p:cNvGraphicFramePr>
+            <a:graphicFrameLocks noGrp="1"/>
+          </p:cNvGraphicFramePr>
+          <p:nvPr/>
+        </p:nvGraphicFramePr>
+        <p:xfrm>
+          <a:off x="274320" y="1170432"/>
+          <a:ext cx="11612880" cy="1783080"/>
+        </p:xfrm>
+        <a:graphic>
+          <a:graphicData uri="http://schemas.openxmlformats.org/drawingml/2006/table">
+            <a:tbl>
+              <a:tblPr firstRow="1" bandRow="1">
+                <a:tableStyleId>{5C22544A-7EE6-4342-B048-85BDC9FD1C3A}</a:tableStyleId>
+              </a:tblPr>
+              <a:tblGrid>
+                <a:gridCol w="3246120"/>
+                <a:gridCol w="1417320"/>
+                <a:gridCol w="1143000"/>
+                <a:gridCol w="1417320"/>
+                <a:gridCol w="4389120"/>
+              </a:tblGrid>
+              <a:tr h="356616">
+                <a:tc>
+                  <a:txBody>
+                    <a:bodyPr wrap="square"/>
+                    <a:lstStyle/>
+                    <a:p>
+                      <a:pPr algn="l"/>
+                      <a:r>
+                        <a:rPr sz="1000" b="1">
+                          <a:solidFill>
+                            <a:srgbClr val="FFFFFF"/>
+                          </a:solidFill>
+                        </a:rPr>
+                        <a:t>Route</a:t>
+                      </a:r>
+                    </a:p>
+                  </a:txBody>
+                  <a:tcPr marL="54864" marR="54864" marT="18288" marB="18288">
+                    <a:solidFill>
+                      <a:srgbClr val="335588"/>
+                    </a:solidFill>
+                  </a:tcPr>
+                </a:tc>
+                <a:tc>
+                  <a:txBody>
+                    <a:bodyPr wrap="square"/>
+                    <a:lstStyle/>
+                    <a:p>
+                      <a:pPr algn="ctr"/>
+                      <a:r>
+                        <a:rPr sz="1000" b="1">
+                          <a:solidFill>
+                            <a:srgbClr val="FFFFFF"/>
+                          </a:solidFill>
+                        </a:rPr>
+                        <a:t>GPU/API $</a:t>
+                      </a:r>
+                    </a:p>
+                  </a:txBody>
+                  <a:tcPr marL="54864" marR="54864" marT="18288" marB="18288">
+                    <a:solidFill>
+                      <a:srgbClr val="335588"/>
+                    </a:solidFill>
+                  </a:tcPr>
+                </a:tc>
+                <a:tc>
+                  <a:txBody>
+                    <a:bodyPr wrap="square"/>
+                    <a:lstStyle/>
+                    <a:p>
+                      <a:pPr algn="ctr"/>
+                      <a:r>
+                        <a:rPr sz="1000" b="1">
+                          <a:solidFill>
+                            <a:srgbClr val="FFFFFF"/>
+                          </a:solidFill>
+                        </a:rPr>
+                        <a:t>Steady?</a:t>
+                      </a:r>
+                    </a:p>
+                  </a:txBody>
+                  <a:tcPr marL="54864" marR="54864" marT="18288" marB="18288">
+                    <a:solidFill>
+                      <a:srgbClr val="335588"/>
+                    </a:solidFill>
+                  </a:tcPr>
+                </a:tc>
+                <a:tc>
+                  <a:txBody>
+                    <a:bodyPr wrap="square"/>
+                    <a:lstStyle/>
+                    <a:p>
+                      <a:pPr algn="ctr"/>
+                      <a:r>
+                        <a:rPr sz="1000" b="1">
+                          <a:solidFill>
+                            <a:srgbClr val="FFFFFF"/>
+                          </a:solidFill>
+                        </a:rPr>
+                        <a:t>35B in BF16</a:t>
+                      </a:r>
+                    </a:p>
+                  </a:txBody>
+                  <a:tcPr marL="54864" marR="54864" marT="18288" marB="18288">
+                    <a:solidFill>
+                      <a:srgbClr val="335588"/>
+                    </a:solidFill>
+                  </a:tcPr>
+                </a:tc>
+                <a:tc>
+                  <a:txBody>
+                    <a:bodyPr wrap="square"/>
+                    <a:lstStyle/>
+                    <a:p>
+                      <a:pPr algn="l"/>
+                      <a:r>
+                        <a:rPr sz="1000" b="1">
+                          <a:solidFill>
+                            <a:srgbClr val="FFFFFF"/>
+                          </a:solidFill>
+                        </a:rPr>
+                        <a:t>Backend / moving parts</a:t>
+                      </a:r>
+                    </a:p>
+                  </a:txBody>
+                  <a:tcPr marL="54864" marR="54864" marT="18288" marB="18288">
+                    <a:solidFill>
+                      <a:srgbClr val="335588"/>
+                    </a:solidFill>
+                  </a:tcPr>
+                </a:tc>
+              </a:tr>
+              <a:tr h="356616">
+                <a:tc>
+                  <a:txBody>
+                    <a:bodyPr wrap="square"/>
+                    <a:lstStyle/>
+                    <a:p>
+                      <a:pPr algn="l"/>
+                      <a:r>
+                        <a:rPr sz="1000" b="0">
+                          <a:solidFill>
+                            <a:srgbClr val="1F3050"/>
+                          </a:solidFill>
+                        </a:rPr>
+                        <a:t>Free SLURM cluster (3090/RTX-6000)</a:t>
+                      </a:r>
+                    </a:p>
+                  </a:txBody>
+                  <a:tcPr marL="54864" marR="54864" marT="18288" marB="18288">
+                    <a:solidFill>
+                      <a:srgbClr val="FFFFFF"/>
+                    </a:solidFill>
+                  </a:tcPr>
+                </a:tc>
+                <a:tc>
+                  <a:txBody>
+                    <a:bodyPr wrap="square"/>
+                    <a:lstStyle/>
+                    <a:p>
+                      <a:pPr algn="ctr"/>
+                      <a:r>
+                        <a:rPr sz="1000" b="0">
+                          <a:solidFill>
+                            <a:srgbClr val="1F3050"/>
+                          </a:solidFill>
+                        </a:rPr>
+                        <a:t>$0</a:t>
+                      </a:r>
+                    </a:p>
+                  </a:txBody>
+                  <a:tcPr marL="54864" marR="54864" marT="18288" marB="18288">
+                    <a:solidFill>
+                      <a:srgbClr val="FFFFFF"/>
+                    </a:solidFill>
+                  </a:tcPr>
+                </a:tc>
+                <a:tc>
+                  <a:txBody>
+                    <a:bodyPr wrap="square"/>
+                    <a:lstStyle/>
+                    <a:p>
+                      <a:pPr algn="ctr"/>
+                      <a:r>
+                        <a:rPr sz="1000" b="0">
+                          <a:solidFill>
+                            <a:srgbClr val="555555"/>
+                          </a:solidFill>
+                        </a:rPr>
+                        <a:t>queued</a:t>
+                      </a:r>
+                    </a:p>
+                  </a:txBody>
+                  <a:tcPr marL="54864" marR="54864" marT="18288" marB="18288">
+                    <a:solidFill>
+                      <a:srgbClr val="FFFFFF"/>
+                    </a:solidFill>
+                  </a:tcPr>
+                </a:tc>
+                <a:tc>
+                  <a:txBody>
+                    <a:bodyPr wrap="square"/>
+                    <a:lstStyle/>
+                    <a:p>
+                      <a:pPr algn="ctr"/>
+                      <a:r>
+                        <a:rPr sz="1000" b="0">
+                          <a:solidFill>
+                            <a:srgbClr val="A03030"/>
+                          </a:solidFill>
+                        </a:rPr>
+                        <a:t>✗ can't seat</a:t>
+                      </a:r>
+                    </a:p>
+                  </a:txBody>
+                  <a:tcPr marL="54864" marR="54864" marT="18288" marB="18288">
+                    <a:solidFill>
+                      <a:srgbClr val="FFFFFF"/>
+                    </a:solidFill>
+                  </a:tcPr>
+                </a:tc>
+                <a:tc>
+                  <a:txBody>
+                    <a:bodyPr wrap="square"/>
+                    <a:lstStyle/>
+                    <a:p>
+                      <a:pPr algn="l"/>
+                      <a:r>
+                        <a:rPr sz="950" b="0">
+                          <a:solidFill>
+                            <a:srgbClr val="555555"/>
+                          </a:solidFill>
+                        </a:rPr>
+                        <a:t>shared, mixed configs</a:t>
+                      </a:r>
+                    </a:p>
+                  </a:txBody>
+                  <a:tcPr marL="54864" marR="54864" marT="18288" marB="18288">
+                    <a:solidFill>
+                      <a:srgbClr val="FFFFFF"/>
+                    </a:solidFill>
+                  </a:tcPr>
+                </a:tc>
+              </a:tr>
+              <a:tr h="356616">
+                <a:tc>
+                  <a:txBody>
+                    <a:bodyPr wrap="square"/>
+                    <a:lstStyle/>
+                    <a:p>
+                      <a:pPr algn="l"/>
+                      <a:r>
+                        <a:rPr sz="1000" b="1">
+                          <a:solidFill>
+                            <a:srgbClr val="1F3050"/>
+                          </a:solidFill>
+                        </a:rPr>
+                        <a:t>Rented H200-141GB</a:t>
+                      </a:r>
+                    </a:p>
+                  </a:txBody>
+                  <a:tcPr marL="54864" marR="54864" marT="18288" marB="18288">
+                    <a:solidFill>
+                      <a:srgbClr val="E2F0D9"/>
+                    </a:solidFill>
+                  </a:tcPr>
+                </a:tc>
+                <a:tc>
+                  <a:txBody>
+                    <a:bodyPr wrap="square"/>
+                    <a:lstStyle/>
+                    <a:p>
+                      <a:pPr algn="ctr"/>
+                      <a:r>
+                        <a:rPr sz="1000" b="1">
+                          <a:solidFill>
+                            <a:srgbClr val="335588"/>
+                          </a:solidFill>
+                        </a:rPr>
+                        <a:t>$120-150</a:t>
+                      </a:r>
+                    </a:p>
+                  </a:txBody>
+                  <a:tcPr marL="54864" marR="54864" marT="18288" marB="18288">
+                    <a:solidFill>
+                      <a:srgbClr val="E2F0D9"/>
+                    </a:solidFill>
+                  </a:tcPr>
+                </a:tc>
+                <a:tc>
+                  <a:txBody>
+                    <a:bodyPr wrap="square"/>
+                    <a:lstStyle/>
+                    <a:p>
+                      <a:pPr algn="ctr"/>
+                      <a:r>
+                        <a:rPr sz="1000" b="0">
+                          <a:solidFill>
+                            <a:srgbClr val="555555"/>
+                          </a:solidFill>
+                        </a:rPr>
+                        <a:t>yes</a:t>
+                      </a:r>
+                    </a:p>
+                  </a:txBody>
+                  <a:tcPr marL="54864" marR="54864" marT="18288" marB="18288">
+                    <a:solidFill>
+                      <a:srgbClr val="E2F0D9"/>
+                    </a:solidFill>
+                  </a:tcPr>
+                </a:tc>
+                <a:tc>
+                  <a:txBody>
+                    <a:bodyPr wrap="square"/>
+                    <a:lstStyle/>
+                    <a:p>
+                      <a:pPr algn="ctr"/>
+                      <a:r>
+                        <a:rPr sz="1000" b="0">
+                          <a:solidFill>
+                            <a:srgbClr val="335588"/>
+                          </a:solidFill>
+                        </a:rPr>
+                        <a:t>✓ clean BF16</a:t>
+                      </a:r>
+                    </a:p>
+                  </a:txBody>
+                  <a:tcPr marL="54864" marR="54864" marT="18288" marB="18288">
+                    <a:solidFill>
+                      <a:srgbClr val="E2F0D9"/>
+                    </a:solidFill>
+                  </a:tcPr>
+                </a:tc>
+                <a:tc>
+                  <a:txBody>
+                    <a:bodyPr wrap="square"/>
+                    <a:lstStyle/>
+                    <a:p>
+                      <a:pPr algn="l"/>
+                      <a:r>
+                        <a:rPr sz="950" b="0">
+                          <a:solidFill>
+                            <a:srgbClr val="555555"/>
+                          </a:solidFill>
+                        </a:rPr>
+                        <a:t>one vanilla vLLM · no TP/FP8</a:t>
+                      </a:r>
+                    </a:p>
+                  </a:txBody>
+                  <a:tcPr marL="54864" marR="54864" marT="18288" marB="18288">
+                    <a:solidFill>
+                      <a:srgbClr val="E2F0D9"/>
+                    </a:solidFill>
+                  </a:tcPr>
+                </a:tc>
+              </a:tr>
+              <a:tr h="356616">
+                <a:tc>
+                  <a:txBody>
+                    <a:bodyPr wrap="square"/>
+                    <a:lstStyle/>
+                    <a:p>
+                      <a:pPr algn="l"/>
+                      <a:r>
+                        <a:rPr sz="1000" b="0">
+                          <a:solidFill>
+                            <a:srgbClr val="1F3050"/>
+                          </a:solidFill>
+                        </a:rPr>
+                        <a:t>Rented H100-80GB (budget)</a:t>
+                      </a:r>
+                    </a:p>
+                  </a:txBody>
+                  <a:tcPr marL="54864" marR="54864" marT="18288" marB="18288">
+                    <a:solidFill>
+                      <a:srgbClr val="FFFFFF"/>
+                    </a:solidFill>
+                  </a:tcPr>
+                </a:tc>
+                <a:tc>
+                  <a:txBody>
+                    <a:bodyPr wrap="square"/>
+                    <a:lstStyle/>
+                    <a:p>
+                      <a:pPr algn="ctr"/>
+                      <a:r>
+                        <a:rPr sz="1000" b="0">
+                          <a:solidFill>
+                            <a:srgbClr val="1F3050"/>
+                          </a:solidFill>
+                        </a:rPr>
+                        <a:t>$96-120</a:t>
+                      </a:r>
+                    </a:p>
+                  </a:txBody>
+                  <a:tcPr marL="54864" marR="54864" marT="18288" marB="18288">
+                    <a:solidFill>
+                      <a:srgbClr val="FFFFFF"/>
+                    </a:solidFill>
+                  </a:tcPr>
+                </a:tc>
+                <a:tc>
+                  <a:txBody>
+                    <a:bodyPr wrap="square"/>
+                    <a:lstStyle/>
+                    <a:p>
+                      <a:pPr algn="ctr"/>
+                      <a:r>
+                        <a:rPr sz="1000" b="0">
+                          <a:solidFill>
+                            <a:srgbClr val="555555"/>
+                          </a:solidFill>
+                        </a:rPr>
+                        <a:t>yes</a:t>
+                      </a:r>
+                    </a:p>
+                  </a:txBody>
+                  <a:tcPr marL="54864" marR="54864" marT="18288" marB="18288">
+                    <a:solidFill>
+                      <a:srgbClr val="FFFFFF"/>
+                    </a:solidFill>
+                  </a:tcPr>
+                </a:tc>
+                <a:tc>
+                  <a:txBody>
+                    <a:bodyPr wrap="square"/>
+                    <a:lstStyle/>
+                    <a:p>
+                      <a:pPr algn="ctr"/>
+                      <a:r>
+                        <a:rPr sz="1000" b="0">
+                          <a:solidFill>
+                            <a:srgbClr val="555555"/>
+                          </a:solidFill>
+                        </a:rPr>
+                        <a:t>FP8 / TP=2</a:t>
+                      </a:r>
+                    </a:p>
+                  </a:txBody>
+                  <a:tcPr marL="54864" marR="54864" marT="18288" marB="18288">
+                    <a:solidFill>
+                      <a:srgbClr val="FFFFFF"/>
+                    </a:solidFill>
+                  </a:tcPr>
+                </a:tc>
+                <a:tc>
+                  <a:txBody>
+                    <a:bodyPr wrap="square"/>
+                    <a:lstStyle/>
+                    <a:p>
+                      <a:pPr algn="l"/>
+                      <a:r>
+                        <a:rPr sz="950" b="0">
+                          <a:solidFill>
+                            <a:srgbClr val="555555"/>
+                          </a:solidFill>
+                        </a:rPr>
+                        <a:t>one vLLM · more moving parts</a:t>
+                      </a:r>
+                    </a:p>
+                  </a:txBody>
+                  <a:tcPr marL="54864" marR="54864" marT="18288" marB="18288">
+                    <a:solidFill>
+                      <a:srgbClr val="FFFFFF"/>
+                    </a:solidFill>
+                  </a:tcPr>
+                </a:tc>
+              </a:tr>
+              <a:tr h="356616">
+                <a:tc>
+                  <a:txBody>
+                    <a:bodyPr wrap="square"/>
+                    <a:lstStyle/>
+                    <a:p>
+                      <a:pPr algn="l"/>
+                      <a:r>
+                        <a:rPr sz="1000" b="0">
+                          <a:solidFill>
+                            <a:srgbClr val="1F3050"/>
+                          </a:solidFill>
+                        </a:rPr>
+                        <a:t>API closed models (slides 1-4)</a:t>
+                      </a:r>
+                    </a:p>
+                  </a:txBody>
+                  <a:tcPr marL="54864" marR="54864" marT="18288" marB="18288">
+                    <a:solidFill>
+                      <a:srgbClr val="F2F5FA"/>
+                    </a:solidFill>
+                  </a:tcPr>
+                </a:tc>
+                <a:tc>
+                  <a:txBody>
+                    <a:bodyPr wrap="square"/>
+                    <a:lstStyle/>
+                    <a:p>
+                      <a:pPr algn="ctr"/>
+                      <a:r>
+                        <a:rPr sz="1000" b="0">
+                          <a:solidFill>
+                            <a:srgbClr val="1F3050"/>
+                          </a:solidFill>
+                        </a:rPr>
+                        <a:t>$1,047</a:t>
+                      </a:r>
+                    </a:p>
+                  </a:txBody>
+                  <a:tcPr marL="54864" marR="54864" marT="18288" marB="18288">
+                    <a:solidFill>
+                      <a:srgbClr val="F2F5FA"/>
+                    </a:solidFill>
+                  </a:tcPr>
+                </a:tc>
+                <a:tc>
+                  <a:txBody>
+                    <a:bodyPr wrap="square"/>
+                    <a:lstStyle/>
+                    <a:p>
+                      <a:pPr algn="ctr"/>
+                      <a:r>
+                        <a:rPr sz="1000" b="0">
+                          <a:solidFill>
+                            <a:srgbClr val="555555"/>
+                          </a:solidFill>
+                        </a:rPr>
+                        <a:t>yes</a:t>
+                      </a:r>
+                    </a:p>
+                  </a:txBody>
+                  <a:tcPr marL="54864" marR="54864" marT="18288" marB="18288">
+                    <a:solidFill>
+                      <a:srgbClr val="F2F5FA"/>
+                    </a:solidFill>
+                  </a:tcPr>
+                </a:tc>
+                <a:tc>
+                  <a:txBody>
+                    <a:bodyPr wrap="square"/>
+                    <a:lstStyle/>
+                    <a:p>
+                      <a:pPr algn="ctr"/>
+                      <a:r>
+                        <a:rPr sz="1000" b="0">
+                          <a:solidFill>
+                            <a:srgbClr val="555555"/>
+                          </a:solidFill>
+                        </a:rPr>
+                        <a:t>n/a (closed)</a:t>
+                      </a:r>
+                    </a:p>
+                  </a:txBody>
+                  <a:tcPr marL="54864" marR="54864" marT="18288" marB="18288">
+                    <a:solidFill>
+                      <a:srgbClr val="F2F5FA"/>
+                    </a:solidFill>
+                  </a:tcPr>
+                </a:tc>
+                <a:tc>
+                  <a:txBody>
+                    <a:bodyPr wrap="square"/>
+                    <a:lstStyle/>
+                    <a:p>
+                      <a:pPr algn="l"/>
+                      <a:r>
+                        <a:rPr sz="950" b="0">
+                          <a:solidFill>
+                            <a:srgbClr val="555555"/>
+                          </a:solidFill>
+                        </a:rPr>
+                        <a:t>OpenAI API · by-the-token</a:t>
+                      </a:r>
+                    </a:p>
+                  </a:txBody>
+                  <a:tcPr marL="54864" marR="54864" marT="18288" marB="18288">
+                    <a:solidFill>
+                      <a:srgbClr val="F2F5FA"/>
+                    </a:solidFill>
+                  </a:tcPr>
+                </a:tc>
+              </a:tr>
+            </a:tbl>
+          </a:graphicData>
+        </a:graphic>
+      </p:graphicFrame>
+      <p:sp>
+        <p:nvSpPr>
+          <p:cNvPr id="5" name="TextBox 4"/>
+          <p:cNvSpPr txBox="1"/>
+          <p:nvPr/>
+        </p:nvSpPr>
+        <p:spPr>
+          <a:xfrm>
+            <a:off x="274320" y="3127248"/>
+            <a:ext cx="5212080" cy="292608"/>
+          </a:xfrm>
+          <a:prstGeom prst="rect">
+            <a:avLst/>
+          </a:prstGeom>
+          <a:noFill/>
+        </p:spPr>
+        <p:txBody>
+          <a:bodyPr wrap="none">
+            <a:spAutoFit/>
+          </a:bodyPr>
+          <a:lstStyle/>
+          <a:p>
+            <a:r>
+              <a:rPr sz="1200" b="1">
+                <a:solidFill>
+                  <a:srgbClr val="335588"/>
+                </a:solidFill>
+              </a:rPr>
+              <a:t>Per-model BF16 fit (served one at a time)</a:t>
+            </a:r>
+          </a:p>
+        </p:txBody>
+      </p:sp>
+      <p:graphicFrame>
+        <p:nvGraphicFramePr>
+          <p:cNvPr id="6" name="Table 5"/>
+          <p:cNvGraphicFramePr>
+            <a:graphicFrameLocks noGrp="1"/>
+          </p:cNvGraphicFramePr>
+          <p:nvPr/>
+        </p:nvGraphicFramePr>
+        <p:xfrm>
+          <a:off x="274320" y="3456432"/>
+          <a:ext cx="5212080" cy="1874519"/>
+        </p:xfrm>
+        <a:graphic>
+          <a:graphicData uri="http://schemas.openxmlformats.org/drawingml/2006/table">
+            <a:tbl>
+              <a:tblPr firstRow="1" bandRow="1">
+                <a:tableStyleId>{5C22544A-7EE6-4342-B048-85BDC9FD1C3A}</a:tableStyleId>
+              </a:tblPr>
+              <a:tblGrid>
+                <a:gridCol w="1783080"/>
+                <a:gridCol w="960120"/>
+                <a:gridCol w="1188720"/>
+                <a:gridCol w="1280160"/>
+              </a:tblGrid>
+              <a:tr h="312419">
+                <a:tc>
+                  <a:txBody>
+                    <a:bodyPr wrap="square"/>
+                    <a:lstStyle/>
+                    <a:p>
+                      <a:pPr algn="l"/>
+                      <a:r>
+                        <a:rPr sz="950" b="1">
+                          <a:solidFill>
+                            <a:srgbClr val="FFFFFF"/>
+                          </a:solidFill>
+                        </a:rPr>
+                        <a:t>Open model</a:t>
+                      </a:r>
+                    </a:p>
+                  </a:txBody>
+                  <a:tcPr marL="54864" marR="54864" marT="18288" marB="18288">
+                    <a:solidFill>
+                      <a:srgbClr val="335588"/>
+                    </a:solidFill>
+                  </a:tcPr>
+                </a:tc>
+                <a:tc>
+                  <a:txBody>
+                    <a:bodyPr wrap="square"/>
+                    <a:lstStyle/>
+                    <a:p>
+                      <a:pPr algn="ctr"/>
+                      <a:r>
+                        <a:rPr sz="950" b="1">
+                          <a:solidFill>
+                            <a:srgbClr val="FFFFFF"/>
+                          </a:solidFill>
+                        </a:rPr>
+                        <a:t>BF16 GB</a:t>
+                      </a:r>
+                    </a:p>
+                  </a:txBody>
+                  <a:tcPr marL="54864" marR="54864" marT="18288" marB="18288">
+                    <a:solidFill>
+                      <a:srgbClr val="335588"/>
+                    </a:solidFill>
+                  </a:tcPr>
+                </a:tc>
+                <a:tc>
+                  <a:txBody>
+                    <a:bodyPr wrap="square"/>
+                    <a:lstStyle/>
+                    <a:p>
+                      <a:pPr algn="ctr"/>
+                      <a:r>
+                        <a:rPr sz="950" b="1">
+                          <a:solidFill>
+                            <a:srgbClr val="FFFFFF"/>
+                          </a:solidFill>
+                        </a:rPr>
+                        <a:t>H200-141</a:t>
+                      </a:r>
+                    </a:p>
+                  </a:txBody>
+                  <a:tcPr marL="54864" marR="54864" marT="18288" marB="18288">
+                    <a:solidFill>
+                      <a:srgbClr val="335588"/>
+                    </a:solidFill>
+                  </a:tcPr>
+                </a:tc>
+                <a:tc>
+                  <a:txBody>
+                    <a:bodyPr wrap="square"/>
+                    <a:lstStyle/>
+                    <a:p>
+                      <a:pPr algn="ctr"/>
+                      <a:r>
+                        <a:rPr sz="950" b="1">
+                          <a:solidFill>
+                            <a:srgbClr val="FFFFFF"/>
+                          </a:solidFill>
+                        </a:rPr>
+                        <a:t>H100-80</a:t>
+                      </a:r>
+                    </a:p>
+                  </a:txBody>
+                  <a:tcPr marL="54864" marR="54864" marT="18288" marB="18288">
+                    <a:solidFill>
+                      <a:srgbClr val="335588"/>
+                    </a:solidFill>
+                  </a:tcPr>
+                </a:tc>
+              </a:tr>
+              <a:tr h="312419">
+                <a:tc>
+                  <a:txBody>
+                    <a:bodyPr wrap="square"/>
+                    <a:lstStyle/>
+                    <a:p>
+                      <a:pPr algn="l"/>
+                      <a:r>
+                        <a:rPr sz="950" b="0">
+                          <a:solidFill>
+                            <a:srgbClr val="1F3050"/>
+                          </a:solidFill>
+                        </a:rPr>
+                        <a:t>Qwen3.5-0.8B</a:t>
+                      </a:r>
+                    </a:p>
+                  </a:txBody>
+                  <a:tcPr marL="54864" marR="54864" marT="18288" marB="18288">
+                    <a:solidFill>
+                      <a:srgbClr val="FFFFFF"/>
+                    </a:solidFill>
+                  </a:tcPr>
+                </a:tc>
+                <a:tc>
+                  <a:txBody>
+                    <a:bodyPr wrap="square"/>
+                    <a:lstStyle/>
+                    <a:p>
+                      <a:pPr algn="r"/>
+                      <a:r>
+                        <a:rPr sz="950" b="0">
+                          <a:solidFill>
+                            <a:srgbClr val="555555"/>
+                          </a:solidFill>
+                        </a:rPr>
+                        <a:t>1.6</a:t>
+                      </a:r>
+                    </a:p>
+                  </a:txBody>
+                  <a:tcPr marL="54864" marR="54864" marT="18288" marB="18288">
+                    <a:solidFill>
+                      <a:srgbClr val="FFFFFF"/>
+                    </a:solidFill>
+                  </a:tcPr>
+                </a:tc>
+                <a:tc>
+                  <a:txBody>
+                    <a:bodyPr wrap="square"/>
+                    <a:lstStyle/>
+                    <a:p>
+                      <a:pPr algn="ctr"/>
+                      <a:r>
+                        <a:rPr sz="950" b="0">
+                          <a:solidFill>
+                            <a:srgbClr val="3E823C"/>
+                          </a:solidFill>
+                        </a:rPr>
+                        <a:t>✓</a:t>
+                      </a:r>
+                    </a:p>
+                  </a:txBody>
+                  <a:tcPr marL="54864" marR="54864" marT="18288" marB="18288">
+                    <a:solidFill>
+                      <a:srgbClr val="FFFFFF"/>
+                    </a:solidFill>
+                  </a:tcPr>
+                </a:tc>
+                <a:tc>
+                  <a:txBody>
+                    <a:bodyPr wrap="square"/>
+                    <a:lstStyle/>
+                    <a:p>
+                      <a:pPr algn="ctr"/>
+                      <a:r>
+                        <a:rPr sz="900" b="0">
+                          <a:solidFill>
+                            <a:srgbClr val="3E823C"/>
+                          </a:solidFill>
+                        </a:rPr>
+                        <a:t>✓</a:t>
+                      </a:r>
+                    </a:p>
+                  </a:txBody>
+                  <a:tcPr marL="54864" marR="54864" marT="18288" marB="18288">
+                    <a:solidFill>
+                      <a:srgbClr val="FFFFFF"/>
+                    </a:solidFill>
+                  </a:tcPr>
+                </a:tc>
+              </a:tr>
+              <a:tr h="312419">
+                <a:tc>
+                  <a:txBody>
+                    <a:bodyPr wrap="square"/>
+                    <a:lstStyle/>
+                    <a:p>
+                      <a:pPr algn="l"/>
+                      <a:r>
+                        <a:rPr sz="950" b="0">
+                          <a:solidFill>
+                            <a:srgbClr val="1F3050"/>
+                          </a:solidFill>
+                        </a:rPr>
+                        <a:t>Qwen3.5-4B</a:t>
+                      </a:r>
+                    </a:p>
+                  </a:txBody>
+                  <a:tcPr marL="54864" marR="54864" marT="18288" marB="18288">
+                    <a:solidFill>
+                      <a:srgbClr val="F2F5FA"/>
+                    </a:solidFill>
+                  </a:tcPr>
+                </a:tc>
+                <a:tc>
+                  <a:txBody>
+                    <a:bodyPr wrap="square"/>
+                    <a:lstStyle/>
+                    <a:p>
+                      <a:pPr algn="r"/>
+                      <a:r>
+                        <a:rPr sz="950" b="0">
+                          <a:solidFill>
+                            <a:srgbClr val="555555"/>
+                          </a:solidFill>
+                        </a:rPr>
+                        <a:t>8.0</a:t>
+                      </a:r>
+                    </a:p>
+                  </a:txBody>
+                  <a:tcPr marL="54864" marR="54864" marT="18288" marB="18288">
+                    <a:solidFill>
+                      <a:srgbClr val="F2F5FA"/>
+                    </a:solidFill>
+                  </a:tcPr>
+                </a:tc>
+                <a:tc>
+                  <a:txBody>
+                    <a:bodyPr wrap="square"/>
+                    <a:lstStyle/>
+                    <a:p>
+                      <a:pPr algn="ctr"/>
+                      <a:r>
+                        <a:rPr sz="950" b="0">
+                          <a:solidFill>
+                            <a:srgbClr val="3E823C"/>
+                          </a:solidFill>
+                        </a:rPr>
+                        <a:t>✓</a:t>
+                      </a:r>
+                    </a:p>
+                  </a:txBody>
+                  <a:tcPr marL="54864" marR="54864" marT="18288" marB="18288">
+                    <a:solidFill>
+                      <a:srgbClr val="F2F5FA"/>
+                    </a:solidFill>
+                  </a:tcPr>
+                </a:tc>
+                <a:tc>
+                  <a:txBody>
+                    <a:bodyPr wrap="square"/>
+                    <a:lstStyle/>
+                    <a:p>
+                      <a:pPr algn="ctr"/>
+                      <a:r>
+                        <a:rPr sz="900" b="0">
+                          <a:solidFill>
+                            <a:srgbClr val="3E823C"/>
+                          </a:solidFill>
+                        </a:rPr>
+                        <a:t>✓</a:t>
+                      </a:r>
+                    </a:p>
+                  </a:txBody>
+                  <a:tcPr marL="54864" marR="54864" marT="18288" marB="18288">
+                    <a:solidFill>
+                      <a:srgbClr val="F2F5FA"/>
+                    </a:solidFill>
+                  </a:tcPr>
+                </a:tc>
+              </a:tr>
+              <a:tr h="312419">
+                <a:tc>
+                  <a:txBody>
+                    <a:bodyPr wrap="square"/>
+                    <a:lstStyle/>
+                    <a:p>
+                      <a:pPr algn="l"/>
+                      <a:r>
+                        <a:rPr sz="950" b="0">
+                          <a:solidFill>
+                            <a:srgbClr val="1F3050"/>
+                          </a:solidFill>
+                        </a:rPr>
+                        <a:t>Qwen3.5-9B</a:t>
+                      </a:r>
+                    </a:p>
+                  </a:txBody>
+                  <a:tcPr marL="54864" marR="54864" marT="18288" marB="18288">
+                    <a:solidFill>
+                      <a:srgbClr val="FFFFFF"/>
+                    </a:solidFill>
+                  </a:tcPr>
+                </a:tc>
+                <a:tc>
+                  <a:txBody>
+                    <a:bodyPr wrap="square"/>
+                    <a:lstStyle/>
+                    <a:p>
+                      <a:pPr algn="r"/>
+                      <a:r>
+                        <a:rPr sz="950" b="0">
+                          <a:solidFill>
+                            <a:srgbClr val="555555"/>
+                          </a:solidFill>
+                        </a:rPr>
+                        <a:t>18</a:t>
+                      </a:r>
+                    </a:p>
+                  </a:txBody>
+                  <a:tcPr marL="54864" marR="54864" marT="18288" marB="18288">
+                    <a:solidFill>
+                      <a:srgbClr val="FFFFFF"/>
+                    </a:solidFill>
+                  </a:tcPr>
+                </a:tc>
+                <a:tc>
+                  <a:txBody>
+                    <a:bodyPr wrap="square"/>
+                    <a:lstStyle/>
+                    <a:p>
+                      <a:pPr algn="ctr"/>
+                      <a:r>
+                        <a:rPr sz="950" b="0">
+                          <a:solidFill>
+                            <a:srgbClr val="3E823C"/>
+                          </a:solidFill>
+                        </a:rPr>
+                        <a:t>✓</a:t>
+                      </a:r>
+                    </a:p>
+                  </a:txBody>
+                  <a:tcPr marL="54864" marR="54864" marT="18288" marB="18288">
+                    <a:solidFill>
+                      <a:srgbClr val="FFFFFF"/>
+                    </a:solidFill>
+                  </a:tcPr>
+                </a:tc>
+                <a:tc>
+                  <a:txBody>
+                    <a:bodyPr wrap="square"/>
+                    <a:lstStyle/>
+                    <a:p>
+                      <a:pPr algn="ctr"/>
+                      <a:r>
+                        <a:rPr sz="900" b="0">
+                          <a:solidFill>
+                            <a:srgbClr val="3E823C"/>
+                          </a:solidFill>
+                        </a:rPr>
+                        <a:t>✓</a:t>
+                      </a:r>
+                    </a:p>
+                  </a:txBody>
+                  <a:tcPr marL="54864" marR="54864" marT="18288" marB="18288">
+                    <a:solidFill>
+                      <a:srgbClr val="FFFFFF"/>
+                    </a:solidFill>
+                  </a:tcPr>
+                </a:tc>
+              </a:tr>
+              <a:tr h="312419">
+                <a:tc>
+                  <a:txBody>
+                    <a:bodyPr wrap="square"/>
+                    <a:lstStyle/>
+                    <a:p>
+                      <a:pPr algn="l"/>
+                      <a:r>
+                        <a:rPr sz="950" b="0">
+                          <a:solidFill>
+                            <a:srgbClr val="1F3050"/>
+                          </a:solidFill>
+                        </a:rPr>
+                        <a:t>Qwen3.6-35B</a:t>
+                      </a:r>
+                    </a:p>
+                  </a:txBody>
+                  <a:tcPr marL="54864" marR="54864" marT="18288" marB="18288">
+                    <a:solidFill>
+                      <a:srgbClr val="F2F5FA"/>
+                    </a:solidFill>
+                  </a:tcPr>
+                </a:tc>
+                <a:tc>
+                  <a:txBody>
+                    <a:bodyPr wrap="square"/>
+                    <a:lstStyle/>
+                    <a:p>
+                      <a:pPr algn="r"/>
+                      <a:r>
+                        <a:rPr sz="950" b="0">
+                          <a:solidFill>
+                            <a:srgbClr val="555555"/>
+                          </a:solidFill>
+                        </a:rPr>
+                        <a:t>70</a:t>
+                      </a:r>
+                    </a:p>
+                  </a:txBody>
+                  <a:tcPr marL="54864" marR="54864" marT="18288" marB="18288">
+                    <a:solidFill>
+                      <a:srgbClr val="F2F5FA"/>
+                    </a:solidFill>
+                  </a:tcPr>
+                </a:tc>
+                <a:tc>
+                  <a:txBody>
+                    <a:bodyPr wrap="square"/>
+                    <a:lstStyle/>
+                    <a:p>
+                      <a:pPr algn="ctr"/>
+                      <a:r>
+                        <a:rPr sz="950" b="0">
+                          <a:solidFill>
+                            <a:srgbClr val="3E823C"/>
+                          </a:solidFill>
+                        </a:rPr>
+                        <a:t>✓</a:t>
+                      </a:r>
+                    </a:p>
+                  </a:txBody>
+                  <a:tcPr marL="54864" marR="54864" marT="18288" marB="18288">
+                    <a:solidFill>
+                      <a:srgbClr val="F2F5FA"/>
+                    </a:solidFill>
+                  </a:tcPr>
+                </a:tc>
+                <a:tc>
+                  <a:txBody>
+                    <a:bodyPr wrap="square"/>
+                    <a:lstStyle/>
+                    <a:p>
+                      <a:pPr algn="ctr"/>
+                      <a:r>
+                        <a:rPr sz="900" b="0">
+                          <a:solidFill>
+                            <a:srgbClr val="A03030"/>
+                          </a:solidFill>
+                        </a:rPr>
+                        <a:t>FP8/TP2</a:t>
+                      </a:r>
+                    </a:p>
+                  </a:txBody>
+                  <a:tcPr marL="54864" marR="54864" marT="18288" marB="18288">
+                    <a:solidFill>
+                      <a:srgbClr val="F2F5FA"/>
+                    </a:solidFill>
+                  </a:tcPr>
+                </a:tc>
+              </a:tr>
+              <a:tr h="312424">
+                <a:tc>
+                  <a:txBody>
+                    <a:bodyPr wrap="square"/>
+                    <a:lstStyle/>
+                    <a:p>
+                      <a:pPr algn="l"/>
+                      <a:r>
+                        <a:rPr sz="950" b="0">
+                          <a:solidFill>
+                            <a:srgbClr val="1F3050"/>
+                          </a:solidFill>
+                        </a:rPr>
+                        <a:t>gemma4-31B †</a:t>
+                      </a:r>
+                    </a:p>
+                  </a:txBody>
+                  <a:tcPr marL="54864" marR="54864" marT="18288" marB="18288">
+                    <a:solidFill>
+                      <a:srgbClr val="FFFFFF"/>
+                    </a:solidFill>
+                  </a:tcPr>
+                </a:tc>
+                <a:tc>
+                  <a:txBody>
+                    <a:bodyPr wrap="square"/>
+                    <a:lstStyle/>
+                    <a:p>
+                      <a:pPr algn="r"/>
+                      <a:r>
+                        <a:rPr sz="950" b="0">
+                          <a:solidFill>
+                            <a:srgbClr val="555555"/>
+                          </a:solidFill>
+                        </a:rPr>
+                        <a:t>62</a:t>
+                      </a:r>
+                    </a:p>
+                  </a:txBody>
+                  <a:tcPr marL="54864" marR="54864" marT="18288" marB="18288">
+                    <a:solidFill>
+                      <a:srgbClr val="FFFFFF"/>
+                    </a:solidFill>
+                  </a:tcPr>
+                </a:tc>
+                <a:tc>
+                  <a:txBody>
+                    <a:bodyPr wrap="square"/>
+                    <a:lstStyle/>
+                    <a:p>
+                      <a:pPr algn="ctr"/>
+                      <a:r>
+                        <a:rPr sz="950" b="0">
+                          <a:solidFill>
+                            <a:srgbClr val="3E823C"/>
+                          </a:solidFill>
+                        </a:rPr>
+                        <a:t>✓</a:t>
+                      </a:r>
+                    </a:p>
+                  </a:txBody>
+                  <a:tcPr marL="54864" marR="54864" marT="18288" marB="18288">
+                    <a:solidFill>
+                      <a:srgbClr val="FFFFFF"/>
+                    </a:solidFill>
+                  </a:tcPr>
+                </a:tc>
+                <a:tc>
+                  <a:txBody>
+                    <a:bodyPr wrap="square"/>
+                    <a:lstStyle/>
+                    <a:p>
+                      <a:pPr algn="ctr"/>
+                      <a:r>
+                        <a:rPr sz="900" b="0">
+                          <a:solidFill>
+                            <a:srgbClr val="A03030"/>
+                          </a:solidFill>
+                        </a:rPr>
+                        <a:t>FP8/TP2</a:t>
+                      </a:r>
+                    </a:p>
+                  </a:txBody>
+                  <a:tcPr marL="54864" marR="54864" marT="18288" marB="18288">
+                    <a:solidFill>
+                      <a:srgbClr val="FFFFFF"/>
+                    </a:solidFill>
+                  </a:tcPr>
+                </a:tc>
+              </a:tr>
+            </a:tbl>
+          </a:graphicData>
+        </a:graphic>
+      </p:graphicFrame>
+      <p:sp>
+        <p:nvSpPr>
+          <p:cNvPr id="7" name="TextBox 6"/>
+          <p:cNvSpPr txBox="1"/>
+          <p:nvPr/>
+        </p:nvSpPr>
+        <p:spPr>
+          <a:xfrm>
+            <a:off x="5669280" y="3127248"/>
+            <a:ext cx="6245352" cy="3108960"/>
+          </a:xfrm>
+          <a:prstGeom prst="rect">
+            <a:avLst/>
+          </a:prstGeom>
+          <a:noFill/>
+        </p:spPr>
+        <p:txBody>
+          <a:bodyPr wrap="square">
+            <a:spAutoFit/>
+          </a:bodyPr>
+          <a:lstStyle/>
+          <a:p>
+            <a:r>
+              <a:rPr sz="1300" b="1">
+                <a:solidFill>
+                  <a:srgbClr val="335588"/>
+                </a:solidFill>
+              </a:rPr>
+              <a:t>Decision &amp; constraints</a:t>
+            </a:r>
+          </a:p>
+          <a:p>
+            <a:pPr>
+              <a:spcBef>
+                <a:spcPts val="700"/>
+              </a:spcBef>
+            </a:pPr>
+            <a:r>
+              <a:rPr sz="1050" b="1">
+                <a:solidFill>
+                  <a:srgbClr val="1F3050"/>
+                </a:solidFill>
+              </a:rPr>
+              <a:t>▪ H200-141GB — fewest moving parts.  </a:t>
+            </a:r>
+            <a:r>
+              <a:rPr sz="1050">
+                <a:solidFill>
+                  <a:srgbClr val="555555"/>
+                </a:solidFill>
+              </a:rPr>
+              <a:t>every model in clean BF16 on a single GPU: no tensor-parallel, no FP8. H100-80 only if budget bites (forces FP8/TP=2 on the 31-35B).</a:t>
+            </a:r>
+          </a:p>
+          <a:p>
+            <a:pPr>
+              <a:spcBef>
+                <a:spcPts val="700"/>
+              </a:spcBef>
+            </a:pPr>
+            <a:r>
+              <a:rPr sz="1050" b="1">
+                <a:solidFill>
+                  <a:srgbClr val="1F3050"/>
+                </a:solidFill>
+              </a:rPr>
+              <a:t>▪ Time-share one box.  </a:t>
+            </a:r>
+            <a:r>
+              <a:rPr sz="1050">
+                <a:solidFill>
+                  <a:srgbClr val="555555"/>
+                </a:solidFill>
+              </a:rPr>
+              <a:t>load a model → run its sweep5v2 + PlanBench cells → swap. Vanilla vLLM OpenAI server; ~40-50 GPU-hrs @ ~$3/hr ≈ $120-150 for all five (PlanBench extra, TBD).</a:t>
+            </a:r>
+          </a:p>
+          <a:p>
+            <a:pPr>
+              <a:spcBef>
+                <a:spcPts val="700"/>
+              </a:spcBef>
+            </a:pPr>
+            <a:r>
+              <a:rPr sz="1050" b="1">
+                <a:solidFill>
+                  <a:srgbClr val="1F3050"/>
+                </a:solidFill>
+              </a:rPr>
+              <a:t>▪ Harness change is tiny.  </a:t>
+            </a:r>
+            <a:r>
+              <a:rPr sz="1050">
+                <a:solidFill>
+                  <a:srgbClr val="555555"/>
+                </a:solidFill>
+              </a:rPr>
+              <a:t>VLLMClient is OpenAI-compatible — only base_url + key move to the rented box. Per-model flags: --max-model-len, --gpu-memory-utilization, --served-model-name.</a:t>
+            </a:r>
+          </a:p>
+          <a:p>
+            <a:pPr>
+              <a:spcBef>
+                <a:spcPts val="700"/>
+              </a:spcBef>
+            </a:pPr>
+            <a:r>
+              <a:rPr sz="1050" b="1">
+                <a:solidFill>
+                  <a:srgbClr val="1F3050"/>
+                </a:solidFill>
+              </a:rPr>
+              <a:t>▪ Corpus isolation is load-bearing.  </a:t>
+            </a:r>
+            <a:r>
+              <a:rPr sz="1050">
+                <a:solidFill>
+                  <a:srgbClr val="555555"/>
+                </a:solidFill>
+              </a:rPr>
+              <a:t>each model's trials.jsonl from ONE backend; keep temp/top_p/max_tokens/seed identical to cluster cells. Never split a model across cluster + rental.</a:t>
+            </a:r>
+          </a:p>
+        </p:txBody>
+      </p:sp>
+      <p:sp>
+        <p:nvSpPr>
+          <p:cNvPr id="8" name="TextBox 7"/>
+          <p:cNvSpPr txBox="1"/>
+          <p:nvPr/>
+        </p:nvSpPr>
+        <p:spPr>
+          <a:xfrm>
+            <a:off x="274320" y="6327648"/>
+            <a:ext cx="11612880" cy="457200"/>
+          </a:xfrm>
+          <a:prstGeom prst="rect">
+            <a:avLst/>
+          </a:prstGeom>
+          <a:noFill/>
+        </p:spPr>
+        <p:txBody>
+          <a:bodyPr wrap="square">
+            <a:spAutoFit/>
+          </a:bodyPr>
+          <a:lstStyle/>
+          <a:p>
+            <a:r>
+              <a:rPr sz="850" i="1">
+                <a:solidFill>
+                  <a:srgbClr val="555555"/>
+                </a:solidFill>
+              </a:rPr>
+              <a:t>Cost &amp; GPU-hours are ESTIMATES from the deployment handoff (~40-50 GPU-hrs @ ~$3/hr H200); confirm with a short pilot before the full sweep. † gemma4-31B optional. Open items for the planner: PlanBench trial/problem count · H200 vs H100+FP8 · whether the 0.8-9B cells stay on the free cluster (cheaper) or move to the box (one backend).</a:t>
             </a:r>
           </a:p>
         </p:txBody>

--- a/development/cost-breakdowns/cheap_model_cost_slides.pptx
+++ b/development/cost-breakdowns/cheap_model_cost_slides.pptx
@@ -3119,7 +3119,7 @@
                   <a:srgbClr val="1F3050"/>
                 </a:solidFill>
               </a:rPr>
-              <a:t>Cheap-Model API Baseline — Two-Benchmark Cost</a:t>
+              <a:t>Single-Tool Cost — Now Measured, Not Estimated</a:t>
             </a:r>
           </a:p>
         </p:txBody>
@@ -3133,7 +3133,7 @@
         <p:spPr>
           <a:xfrm>
             <a:off x="274320" y="658368"/>
-            <a:ext cx="11612880" cy="365760"/>
+            <a:ext cx="11612880" cy="384048"/>
           </a:xfrm>
           <a:prstGeom prst="rect">
             <a:avLst/>
@@ -3141,7 +3141,7 @@
           <a:noFill/>
         </p:spPr>
         <p:txBody>
-          <a:bodyPr wrap="none">
+          <a:bodyPr wrap="square">
             <a:spAutoFit/>
           </a:bodyPr>
           <a:lstStyle/>
@@ -3152,7 +3152,7 @@
                   <a:srgbClr val="555555"/>
                 </a:solidFill>
               </a:rPr>
-              <a:t>Full corpus · both think on/off · all variants  ·  no-tools = Batch −50% · with-tools = prompt-cache (input ×0.5, can't batch the tool loop)</a:t>
+              <a:t>Two live Anthropic API runs (Jun 2026) replace the Qwen3.5-9B proxy  ·  think-off, plain variants  ·  the proxy was wrong both ways</a:t>
             </a:r>
           </a:p>
         </p:txBody>
@@ -3167,7 +3167,7 @@
         </p:nvGraphicFramePr>
         <p:xfrm>
           <a:off x="274320" y="1188720"/>
-          <a:ext cx="7223760" cy="2377440"/>
+          <a:ext cx="8549640" cy="1737360"/>
         </p:xfrm>
         <a:graphic>
           <a:graphicData uri="http://schemas.openxmlformats.org/drawingml/2006/table">
@@ -3176,13 +3176,13 @@
                 <a:tableStyleId>{5C22544A-7EE6-4342-B048-85BDC9FD1C3A}</a:tableStyleId>
               </a:tblPr>
               <a:tblGrid>
-                <a:gridCol w="2148840"/>
-                <a:gridCol w="1188720"/>
                 <a:gridCol w="1325880"/>
-                <a:gridCol w="1325880"/>
+                <a:gridCol w="1508760"/>
+                <a:gridCol w="3063240"/>
                 <a:gridCol w="1234440"/>
+                <a:gridCol w="1417320"/>
               </a:tblGrid>
-              <a:tr h="475488">
+              <a:tr h="434340">
                 <a:tc>
                   <a:txBody>
                     <a:bodyPr wrap="square"/>
@@ -3195,6 +3195,28 @@
                             <a:srgbClr val="FFFFFF"/>
                           </a:solidFill>
                         </a:rPr>
+                        <a:t>Arm</a:t>
+                      </a:r>
+                    </a:p>
+                  </a:txBody>
+                  <a:tcPr marL="54864" marR="54864" marT="18288" marB="18288">
+                    <a:solidFill>
+                      <a:srgbClr val="335588"/>
+                    </a:solidFill>
+                  </a:tcPr>
+                </a:tc>
+                <a:tc>
+                  <a:txBody>
+                    <a:bodyPr wrap="square"/>
+                    <a:lstStyle/>
+                    <a:p>
+                      <a:pPr algn="l"/>
+                      <a:r>
+                        <a:rPr sz="1050" b="1">
+                          <a:solidFill>
+                            <a:srgbClr val="FFFFFF"/>
+                          </a:solidFill>
+                        </a:rPr>
                         <a:t>Model</a:t>
                       </a:r>
                     </a:p>
@@ -3210,6 +3232,28 @@
                     <a:bodyPr wrap="square"/>
                     <a:lstStyle/>
                     <a:p>
+                      <a:pPr algn="l"/>
+                      <a:r>
+                        <a:rPr sz="1050" b="1">
+                          <a:solidFill>
+                            <a:srgbClr val="FFFFFF"/>
+                          </a:solidFill>
+                        </a:rPr>
+                        <a:t>What ran</a:t>
+                      </a:r>
+                    </a:p>
+                  </a:txBody>
+                  <a:tcPr marL="54864" marR="54864" marT="18288" marB="18288">
+                    <a:solidFill>
+                      <a:srgbClr val="335588"/>
+                    </a:solidFill>
+                  </a:tcPr>
+                </a:tc>
+                <a:tc>
+                  <a:txBody>
+                    <a:bodyPr wrap="square"/>
+                    <a:lstStyle/>
+                    <a:p>
                       <a:pPr algn="ctr"/>
                       <a:r>
                         <a:rPr sz="1050" b="1">
@@ -3217,8 +3261,7 @@
                             <a:srgbClr val="FFFFFF"/>
                           </a:solidFill>
                         </a:rPr>
-                        <a:t>$/Mtok
-(in / out)</a:t>
+                        <a:t>Price basis</a:t>
                       </a:r>
                     </a:p>
                   </a:txBody>
@@ -3240,8 +3283,7 @@
                             <a:srgbClr val="FFFFFF"/>
                           </a:solidFill>
                         </a:rPr>
-                        <a:t>sweep5
-single-tool</a:t>
+                        <a:t>Measured $</a:t>
                       </a:r>
                     </a:p>
                   </a:txBody>
@@ -3251,6 +3293,74 @@
                     </a:solidFill>
                   </a:tcPr>
                 </a:tc>
+              </a:tr>
+              <a:tr h="434340">
+                <a:tc>
+                  <a:txBody>
+                    <a:bodyPr wrap="square"/>
+                    <a:lstStyle/>
+                    <a:p>
+                      <a:pPr algn="l"/>
+                      <a:r>
+                        <a:rPr sz="1050" b="1">
+                          <a:solidFill>
+                            <a:srgbClr val="1F3050"/>
+                          </a:solidFill>
+                        </a:rPr>
+                        <a:t>no-tools</a:t>
+                      </a:r>
+                    </a:p>
+                  </a:txBody>
+                  <a:tcPr marL="54864" marR="54864" marT="18288" marB="18288">
+                    <a:solidFill>
+                      <a:srgbClr val="E2F0D9"/>
+                    </a:solidFill>
+                  </a:tcPr>
+                </a:tc>
+                <a:tc>
+                  <a:txBody>
+                    <a:bodyPr wrap="square"/>
+                    <a:lstStyle/>
+                    <a:p>
+                      <a:pPr algn="l"/>
+                      <a:r>
+                        <a:rPr sz="1050" b="0">
+                          <a:solidFill>
+                            <a:srgbClr val="1F3050"/>
+                          </a:solidFill>
+                        </a:rPr>
+                        <a:t>Sonnet 4.6</a:t>
+                      </a:r>
+                    </a:p>
+                  </a:txBody>
+                  <a:tcPr marL="54864" marR="54864" marT="18288" marB="18288">
+                    <a:solidFill>
+                      <a:srgbClr val="E2F0D9"/>
+                    </a:solidFill>
+                  </a:tcPr>
+                </a:tc>
+                <a:tc>
+                  <a:txBody>
+                    <a:bodyPr wrap="square"/>
+                    <a:lstStyle/>
+                    <a:p>
+                      <a:pPr algn="l"/>
+                      <a:r>
+                        <a:rPr sz="1000" b="0">
+                          <a:solidFill>
+                            <a:srgbClr val="555555"/>
+                          </a:solidFill>
+                        </a:rPr>
+                        <a:t>full run, both corpora (9,120 trials)</a:t>
+                      </a:r>
+                    </a:p>
+                  </a:txBody>
+                  <a:tcPr marL="54864" marR="54864" marT="18288" marB="18288">
+                    <a:solidFill>
+                      <a:srgbClr val="E2F0D9"/>
+                    </a:solidFill>
+                  </a:tcPr>
+                </a:tc>
                 <a:tc>
                   <a:txBody>
                     <a:bodyPr wrap="square"/>
@@ -3258,19 +3368,108 @@
                     <a:p>
                       <a:pPr algn="ctr"/>
                       <a:r>
+                        <a:rPr sz="1000" b="0">
+                          <a:solidFill>
+                            <a:srgbClr val="555555"/>
+                          </a:solidFill>
+                        </a:rPr>
+                        <a:t>Batch −50%</a:t>
+                      </a:r>
+                    </a:p>
+                  </a:txBody>
+                  <a:tcPr marL="54864" marR="54864" marT="18288" marB="18288">
+                    <a:solidFill>
+                      <a:srgbClr val="E2F0D9"/>
+                    </a:solidFill>
+                  </a:tcPr>
+                </a:tc>
+                <a:tc>
+                  <a:txBody>
+                    <a:bodyPr wrap="square"/>
+                    <a:lstStyle/>
+                    <a:p>
+                      <a:pPr algn="r"/>
+                      <a:r>
+                        <a:rPr sz="1150" b="1">
+                          <a:solidFill>
+                            <a:srgbClr val="1F3050"/>
+                          </a:solidFill>
+                        </a:rPr>
+                        <a:t>$81.51</a:t>
+                      </a:r>
+                    </a:p>
+                  </a:txBody>
+                  <a:tcPr marL="54864" marR="54864" marT="18288" marB="18288">
+                    <a:solidFill>
+                      <a:srgbClr val="E2F0D9"/>
+                    </a:solidFill>
+                  </a:tcPr>
+                </a:tc>
+              </a:tr>
+              <a:tr h="434340">
+                <a:tc>
+                  <a:txBody>
+                    <a:bodyPr wrap="square"/>
+                    <a:lstStyle/>
+                    <a:p>
+                      <a:pPr algn="l"/>
+                      <a:r>
                         <a:rPr sz="1050" b="1">
                           <a:solidFill>
-                            <a:srgbClr val="FFFFFF"/>
-                          </a:solidFill>
-                        </a:rPr>
-                        <a:t>PlanBench
-full</a:t>
-                      </a:r>
-                    </a:p>
-                  </a:txBody>
-                  <a:tcPr marL="54864" marR="54864" marT="18288" marB="18288">
-                    <a:solidFill>
-                      <a:srgbClr val="335588"/>
+                            <a:srgbClr val="1F3050"/>
+                          </a:solidFill>
+                        </a:rPr>
+                        <a:t>with-tools</a:t>
+                      </a:r>
+                    </a:p>
+                  </a:txBody>
+                  <a:tcPr marL="54864" marR="54864" marT="18288" marB="18288">
+                    <a:solidFill>
+                      <a:srgbClr val="F2F5FA"/>
+                    </a:solidFill>
+                  </a:tcPr>
+                </a:tc>
+                <a:tc>
+                  <a:txBody>
+                    <a:bodyPr wrap="square"/>
+                    <a:lstStyle/>
+                    <a:p>
+                      <a:pPr algn="l"/>
+                      <a:r>
+                        <a:rPr sz="1050" b="0">
+                          <a:solidFill>
+                            <a:srgbClr val="1F3050"/>
+                          </a:solidFill>
+                        </a:rPr>
+                        <a:t>Sonnet 4.6</a:t>
+                      </a:r>
+                    </a:p>
+                  </a:txBody>
+                  <a:tcPr marL="54864" marR="54864" marT="18288" marB="18288">
+                    <a:solidFill>
+                      <a:srgbClr val="F2F5FA"/>
+                    </a:solidFill>
+                  </a:tcPr>
+                </a:tc>
+                <a:tc>
+                  <a:txBody>
+                    <a:bodyPr wrap="square"/>
+                    <a:lstStyle/>
+                    <a:p>
+                      <a:pPr algn="l"/>
+                      <a:r>
+                        <a:rPr sz="1000" b="0">
+                          <a:solidFill>
+                            <a:srgbClr val="555555"/>
+                          </a:solidFill>
+                        </a:rPr>
+                        <a:t>probe → plain projection (4,560)</a:t>
+                      </a:r>
+                    </a:p>
+                  </a:txBody>
+                  <a:tcPr marL="54864" marR="54864" marT="18288" marB="18288">
+                    <a:solidFill>
+                      <a:srgbClr val="F2F5FA"/>
                     </a:solidFill>
                   </a:tcPr>
                 </a:tc>
@@ -3281,32 +3480,75 @@
                     <a:p>
                       <a:pPr algn="ctr"/>
                       <a:r>
+                        <a:rPr sz="1000" b="0">
+                          <a:solidFill>
+                            <a:srgbClr val="555555"/>
+                          </a:solidFill>
+                        </a:rPr>
+                        <a:t>List</a:t>
+                      </a:r>
+                    </a:p>
+                  </a:txBody>
+                  <a:tcPr marL="54864" marR="54864" marT="18288" marB="18288">
+                    <a:solidFill>
+                      <a:srgbClr val="F2F5FA"/>
+                    </a:solidFill>
+                  </a:tcPr>
+                </a:tc>
+                <a:tc>
+                  <a:txBody>
+                    <a:bodyPr wrap="square"/>
+                    <a:lstStyle/>
+                    <a:p>
+                      <a:pPr algn="r"/>
+                      <a:r>
+                        <a:rPr sz="1150" b="1">
+                          <a:solidFill>
+                            <a:srgbClr val="1F3050"/>
+                          </a:solidFill>
+                        </a:rPr>
+                        <a:t>$449 / corpus</a:t>
+                      </a:r>
+                    </a:p>
+                  </a:txBody>
+                  <a:tcPr marL="54864" marR="54864" marT="18288" marB="18288">
+                    <a:solidFill>
+                      <a:srgbClr val="F2F5FA"/>
+                    </a:solidFill>
+                  </a:tcPr>
+                </a:tc>
+              </a:tr>
+              <a:tr h="434340">
+                <a:tc>
+                  <a:txBody>
+                    <a:bodyPr wrap="square"/>
+                    <a:lstStyle/>
+                    <a:p>
+                      <a:pPr algn="l"/>
+                      <a:r>
                         <a:rPr sz="1050" b="1">
                           <a:solidFill>
-                            <a:srgbClr val="FFFFFF"/>
-                          </a:solidFill>
-                        </a:rPr>
-                        <a:t>Total
-/ model</a:t>
-                      </a:r>
-                    </a:p>
-                  </a:txBody>
-                  <a:tcPr marL="54864" marR="54864" marT="18288" marB="18288">
-                    <a:solidFill>
-                      <a:srgbClr val="335588"/>
-                    </a:solidFill>
-                  </a:tcPr>
-                </a:tc>
-              </a:tr>
-              <a:tr h="475488">
-                <a:tc>
-                  <a:txBody>
-                    <a:bodyPr wrap="square"/>
-                    <a:lstStyle/>
-                    <a:p>
-                      <a:pPr algn="l"/>
-                      <a:r>
-                        <a:rPr sz="1100" b="1">
+                            <a:srgbClr val="1F3050"/>
+                          </a:solidFill>
+                        </a:rPr>
+                        <a:t>with-tools</a:t>
+                      </a:r>
+                    </a:p>
+                  </a:txBody>
+                  <a:tcPr marL="54864" marR="54864" marT="18288" marB="18288">
+                    <a:solidFill>
+                      <a:srgbClr val="FFFFFF"/>
+                    </a:solidFill>
+                  </a:tcPr>
+                </a:tc>
+                <a:tc>
+                  <a:txBody>
+                    <a:bodyPr wrap="square"/>
+                    <a:lstStyle/>
+                    <a:p>
+                      <a:pPr algn="l"/>
+                      <a:r>
+                        <a:rPr sz="1050" b="0">
                           <a:solidFill>
                             <a:srgbClr val="1F3050"/>
                           </a:solidFill>
@@ -3326,14 +3568,36 @@
                     <a:bodyPr wrap="square"/>
                     <a:lstStyle/>
                     <a:p>
+                      <a:pPr algn="l"/>
+                      <a:r>
+                        <a:rPr sz="1000" b="0">
+                          <a:solidFill>
+                            <a:srgbClr val="555555"/>
+                          </a:solidFill>
+                        </a:rPr>
+                        <a:t>probe → plain projection (4,560)</a:t>
+                      </a:r>
+                    </a:p>
+                  </a:txBody>
+                  <a:tcPr marL="54864" marR="54864" marT="18288" marB="18288">
+                    <a:solidFill>
+                      <a:srgbClr val="FFFFFF"/>
+                    </a:solidFill>
+                  </a:tcPr>
+                </a:tc>
+                <a:tc>
+                  <a:txBody>
+                    <a:bodyPr wrap="square"/>
+                    <a:lstStyle/>
+                    <a:p>
                       <a:pPr algn="ctr"/>
                       <a:r>
-                        <a:rPr sz="950" b="0">
+                        <a:rPr sz="1000" b="0">
                           <a:solidFill>
                             <a:srgbClr val="555555"/>
                           </a:solidFill>
                         </a:rPr>
-                        <a:t>$1 / $5</a:t>
+                        <a:t>List</a:t>
                       </a:r>
                     </a:p>
                   </a:txBody>
@@ -3350,398 +3614,18 @@
                     <a:p>
                       <a:pPr algn="r"/>
                       <a:r>
-                        <a:rPr sz="1050" b="0">
-                          <a:solidFill>
-                            <a:srgbClr val="555555"/>
-                          </a:solidFill>
-                        </a:rPr>
-                        <a:t>$418</a:t>
+                        <a:rPr sz="1150" b="1">
+                          <a:solidFill>
+                            <a:srgbClr val="1F3050"/>
+                          </a:solidFill>
+                        </a:rPr>
+                        <a:t>$146 / corpus</a:t>
                       </a:r>
                     </a:p>
                   </a:txBody>
                   <a:tcPr marL="54864" marR="54864" marT="18288" marB="18288">
                     <a:solidFill>
                       <a:srgbClr val="FFFFFF"/>
-                    </a:solidFill>
-                  </a:tcPr>
-                </a:tc>
-                <a:tc>
-                  <a:txBody>
-                    <a:bodyPr wrap="square"/>
-                    <a:lstStyle/>
-                    <a:p>
-                      <a:pPr algn="r"/>
-                      <a:r>
-                        <a:rPr sz="1050" b="0">
-                          <a:solidFill>
-                            <a:srgbClr val="555555"/>
-                          </a:solidFill>
-                        </a:rPr>
-                        <a:t>$395</a:t>
-                      </a:r>
-                    </a:p>
-                  </a:txBody>
-                  <a:tcPr marL="54864" marR="54864" marT="18288" marB="18288">
-                    <a:solidFill>
-                      <a:srgbClr val="FFFFFF"/>
-                    </a:solidFill>
-                  </a:tcPr>
-                </a:tc>
-                <a:tc>
-                  <a:txBody>
-                    <a:bodyPr wrap="square"/>
-                    <a:lstStyle/>
-                    <a:p>
-                      <a:pPr algn="r"/>
-                      <a:r>
-                        <a:rPr sz="1100" b="1">
-                          <a:solidFill>
-                            <a:srgbClr val="1F3050"/>
-                          </a:solidFill>
-                        </a:rPr>
-                        <a:t>$813</a:t>
-                      </a:r>
-                    </a:p>
-                  </a:txBody>
-                  <a:tcPr marL="54864" marR="54864" marT="18288" marB="18288">
-                    <a:solidFill>
-                      <a:srgbClr val="FFFFFF"/>
-                    </a:solidFill>
-                  </a:tcPr>
-                </a:tc>
-              </a:tr>
-              <a:tr h="475488">
-                <a:tc>
-                  <a:txBody>
-                    <a:bodyPr wrap="square"/>
-                    <a:lstStyle/>
-                    <a:p>
-                      <a:pPr algn="l"/>
-                      <a:r>
-                        <a:rPr sz="1100" b="1">
-                          <a:solidFill>
-                            <a:srgbClr val="1F3050"/>
-                          </a:solidFill>
-                        </a:rPr>
-                        <a:t>Gemini Flash-Lite</a:t>
-                      </a:r>
-                    </a:p>
-                  </a:txBody>
-                  <a:tcPr marL="54864" marR="54864" marT="18288" marB="18288">
-                    <a:solidFill>
-                      <a:srgbClr val="F2F5FA"/>
-                    </a:solidFill>
-                  </a:tcPr>
-                </a:tc>
-                <a:tc>
-                  <a:txBody>
-                    <a:bodyPr wrap="square"/>
-                    <a:lstStyle/>
-                    <a:p>
-                      <a:pPr algn="ctr"/>
-                      <a:r>
-                        <a:rPr sz="950" b="0">
-                          <a:solidFill>
-                            <a:srgbClr val="555555"/>
-                          </a:solidFill>
-                        </a:rPr>
-                        <a:t>$0.25 / $1.50</a:t>
-                      </a:r>
-                    </a:p>
-                  </a:txBody>
-                  <a:tcPr marL="54864" marR="54864" marT="18288" marB="18288">
-                    <a:solidFill>
-                      <a:srgbClr val="F2F5FA"/>
-                    </a:solidFill>
-                  </a:tcPr>
-                </a:tc>
-                <a:tc>
-                  <a:txBody>
-                    <a:bodyPr wrap="square"/>
-                    <a:lstStyle/>
-                    <a:p>
-                      <a:pPr algn="r"/>
-                      <a:r>
-                        <a:rPr sz="1050" b="0">
-                          <a:solidFill>
-                            <a:srgbClr val="555555"/>
-                          </a:solidFill>
-                        </a:rPr>
-                        <a:t>$120</a:t>
-                      </a:r>
-                    </a:p>
-                  </a:txBody>
-                  <a:tcPr marL="54864" marR="54864" marT="18288" marB="18288">
-                    <a:solidFill>
-                      <a:srgbClr val="F2F5FA"/>
-                    </a:solidFill>
-                  </a:tcPr>
-                </a:tc>
-                <a:tc>
-                  <a:txBody>
-                    <a:bodyPr wrap="square"/>
-                    <a:lstStyle/>
-                    <a:p>
-                      <a:pPr algn="r"/>
-                      <a:r>
-                        <a:rPr sz="1050" b="0">
-                          <a:solidFill>
-                            <a:srgbClr val="555555"/>
-                          </a:solidFill>
-                        </a:rPr>
-                        <a:t>$114</a:t>
-                      </a:r>
-                    </a:p>
-                  </a:txBody>
-                  <a:tcPr marL="54864" marR="54864" marT="18288" marB="18288">
-                    <a:solidFill>
-                      <a:srgbClr val="F2F5FA"/>
-                    </a:solidFill>
-                  </a:tcPr>
-                </a:tc>
-                <a:tc>
-                  <a:txBody>
-                    <a:bodyPr wrap="square"/>
-                    <a:lstStyle/>
-                    <a:p>
-                      <a:pPr algn="r"/>
-                      <a:r>
-                        <a:rPr sz="1100" b="1">
-                          <a:solidFill>
-                            <a:srgbClr val="1F3050"/>
-                          </a:solidFill>
-                        </a:rPr>
-                        <a:t>$233</a:t>
-                      </a:r>
-                    </a:p>
-                  </a:txBody>
-                  <a:tcPr marL="54864" marR="54864" marT="18288" marB="18288">
-                    <a:solidFill>
-                      <a:srgbClr val="F2F5FA"/>
-                    </a:solidFill>
-                  </a:tcPr>
-                </a:tc>
-              </a:tr>
-              <a:tr h="475488">
-                <a:tc>
-                  <a:txBody>
-                    <a:bodyPr wrap="square"/>
-                    <a:lstStyle/>
-                    <a:p>
-                      <a:pPr algn="l"/>
-                      <a:r>
-                        <a:rPr sz="1100" b="1">
-                          <a:solidFill>
-                            <a:srgbClr val="1F3050"/>
-                          </a:solidFill>
-                        </a:rPr>
-                        <a:t>Sonnet 4.6</a:t>
-                      </a:r>
-                    </a:p>
-                  </a:txBody>
-                  <a:tcPr marL="54864" marR="54864" marT="18288" marB="18288">
-                    <a:solidFill>
-                      <a:srgbClr val="FFFFFF"/>
-                    </a:solidFill>
-                  </a:tcPr>
-                </a:tc>
-                <a:tc>
-                  <a:txBody>
-                    <a:bodyPr wrap="square"/>
-                    <a:lstStyle/>
-                    <a:p>
-                      <a:pPr algn="ctr"/>
-                      <a:r>
-                        <a:rPr sz="950" b="0">
-                          <a:solidFill>
-                            <a:srgbClr val="555555"/>
-                          </a:solidFill>
-                        </a:rPr>
-                        <a:t>$3 / $15</a:t>
-                      </a:r>
-                    </a:p>
-                  </a:txBody>
-                  <a:tcPr marL="54864" marR="54864" marT="18288" marB="18288">
-                    <a:solidFill>
-                      <a:srgbClr val="FFFFFF"/>
-                    </a:solidFill>
-                  </a:tcPr>
-                </a:tc>
-                <a:tc>
-                  <a:txBody>
-                    <a:bodyPr wrap="square"/>
-                    <a:lstStyle/>
-                    <a:p>
-                      <a:pPr algn="r"/>
-                      <a:r>
-                        <a:rPr sz="1050" b="0">
-                          <a:solidFill>
-                            <a:srgbClr val="555555"/>
-                          </a:solidFill>
-                        </a:rPr>
-                        <a:t>$1,254</a:t>
-                      </a:r>
-                    </a:p>
-                  </a:txBody>
-                  <a:tcPr marL="54864" marR="54864" marT="18288" marB="18288">
-                    <a:solidFill>
-                      <a:srgbClr val="FFFFFF"/>
-                    </a:solidFill>
-                  </a:tcPr>
-                </a:tc>
-                <a:tc>
-                  <a:txBody>
-                    <a:bodyPr wrap="square"/>
-                    <a:lstStyle/>
-                    <a:p>
-                      <a:pPr algn="r"/>
-                      <a:r>
-                        <a:rPr sz="1050" b="0">
-                          <a:solidFill>
-                            <a:srgbClr val="555555"/>
-                          </a:solidFill>
-                        </a:rPr>
-                        <a:t>$1,186</a:t>
-                      </a:r>
-                    </a:p>
-                  </a:txBody>
-                  <a:tcPr marL="54864" marR="54864" marT="18288" marB="18288">
-                    <a:solidFill>
-                      <a:srgbClr val="FFFFFF"/>
-                    </a:solidFill>
-                  </a:tcPr>
-                </a:tc>
-                <a:tc>
-                  <a:txBody>
-                    <a:bodyPr wrap="square"/>
-                    <a:lstStyle/>
-                    <a:p>
-                      <a:pPr algn="r"/>
-                      <a:r>
-                        <a:rPr sz="1100" b="1">
-                          <a:solidFill>
-                            <a:srgbClr val="1F3050"/>
-                          </a:solidFill>
-                        </a:rPr>
-                        <a:t>$2,440</a:t>
-                      </a:r>
-                    </a:p>
-                  </a:txBody>
-                  <a:tcPr marL="54864" marR="54864" marT="18288" marB="18288">
-                    <a:solidFill>
-                      <a:srgbClr val="FFFFFF"/>
-                    </a:solidFill>
-                  </a:tcPr>
-                </a:tc>
-              </a:tr>
-              <a:tr h="475488">
-                <a:tc>
-                  <a:txBody>
-                    <a:bodyPr wrap="square"/>
-                    <a:lstStyle/>
-                    <a:p>
-                      <a:pPr algn="l"/>
-                      <a:r>
-                        <a:rPr sz="1100" b="1">
-                          <a:solidFill>
-                            <a:srgbClr val="1F3050"/>
-                          </a:solidFill>
-                        </a:rPr>
-                        <a:t>Qwen-Flash</a:t>
-                      </a:r>
-                    </a:p>
-                  </a:txBody>
-                  <a:tcPr marL="54864" marR="54864" marT="18288" marB="18288">
-                    <a:solidFill>
-                      <a:srgbClr val="F2F5FA"/>
-                    </a:solidFill>
-                  </a:tcPr>
-                </a:tc>
-                <a:tc>
-                  <a:txBody>
-                    <a:bodyPr wrap="square"/>
-                    <a:lstStyle/>
-                    <a:p>
-                      <a:pPr algn="ctr"/>
-                      <a:r>
-                        <a:rPr sz="950" b="0">
-                          <a:solidFill>
-                            <a:srgbClr val="555555"/>
-                          </a:solidFill>
-                        </a:rPr>
-                        <a:t>$0.05 / $0.40</a:t>
-                      </a:r>
-                    </a:p>
-                  </a:txBody>
-                  <a:tcPr marL="54864" marR="54864" marT="18288" marB="18288">
-                    <a:solidFill>
-                      <a:srgbClr val="F2F5FA"/>
-                    </a:solidFill>
-                  </a:tcPr>
-                </a:tc>
-                <a:tc>
-                  <a:txBody>
-                    <a:bodyPr wrap="square"/>
-                    <a:lstStyle/>
-                    <a:p>
-                      <a:pPr algn="r"/>
-                      <a:r>
-                        <a:rPr sz="1050" b="0">
-                          <a:solidFill>
-                            <a:srgbClr val="555555"/>
-                          </a:solidFill>
-                        </a:rPr>
-                        <a:t>$30</a:t>
-                      </a:r>
-                    </a:p>
-                  </a:txBody>
-                  <a:tcPr marL="54864" marR="54864" marT="18288" marB="18288">
-                    <a:solidFill>
-                      <a:srgbClr val="F2F5FA"/>
-                    </a:solidFill>
-                  </a:tcPr>
-                </a:tc>
-                <a:tc>
-                  <a:txBody>
-                    <a:bodyPr wrap="square"/>
-                    <a:lstStyle/>
-                    <a:p>
-                      <a:pPr algn="r"/>
-                      <a:r>
-                        <a:rPr sz="1050" b="0">
-                          <a:solidFill>
-                            <a:srgbClr val="555555"/>
-                          </a:solidFill>
-                        </a:rPr>
-                        <a:t>$29</a:t>
-                      </a:r>
-                    </a:p>
-                  </a:txBody>
-                  <a:tcPr marL="54864" marR="54864" marT="18288" marB="18288">
-                    <a:solidFill>
-                      <a:srgbClr val="F2F5FA"/>
-                    </a:solidFill>
-                  </a:tcPr>
-                </a:tc>
-                <a:tc>
-                  <a:txBody>
-                    <a:bodyPr wrap="square"/>
-                    <a:lstStyle/>
-                    <a:p>
-                      <a:pPr algn="r"/>
-                      <a:r>
-                        <a:rPr sz="1100" b="1">
-                          <a:solidFill>
-                            <a:srgbClr val="1F3050"/>
-                          </a:solidFill>
-                        </a:rPr>
-                        <a:t>$59</a:t>
-                      </a:r>
-                    </a:p>
-                  </a:txBody>
-                  <a:tcPr marL="54864" marR="54864" marT="18288" marB="18288">
-                    <a:solidFill>
-                      <a:srgbClr val="F2F5FA"/>
                     </a:solidFill>
                   </a:tcPr>
                 </a:tc>
@@ -3752,211 +3636,60 @@
       </p:graphicFrame>
       <p:sp>
         <p:nvSpPr>
-          <p:cNvPr id="5" name="TextBox 4"/>
+          <p:cNvPr id="5" name="Rounded Rectangle 4"/>
+          <p:cNvSpPr/>
+          <p:nvPr/>
+        </p:nvSpPr>
+        <p:spPr>
+          <a:xfrm>
+            <a:off x="274320" y="3246120"/>
+            <a:ext cx="5623560" cy="2514600"/>
+          </a:xfrm>
+          <a:prstGeom prst="roundRect">
+            <a:avLst/>
+          </a:prstGeom>
+          <a:solidFill>
+            <a:srgbClr val="FBEEEE"/>
+          </a:solidFill>
+          <a:ln w="19050">
+            <a:solidFill>
+              <a:srgbClr val="A03030"/>
+            </a:solidFill>
+          </a:ln>
+          <a:effectLst/>
+        </p:spPr>
+        <p:style>
+          <a:lnRef idx="1">
+            <a:schemeClr val="accent1"/>
+          </a:lnRef>
+          <a:fillRef idx="3">
+            <a:schemeClr val="accent1"/>
+          </a:fillRef>
+          <a:effectRef idx="2">
+            <a:schemeClr val="accent1"/>
+          </a:effectRef>
+          <a:fontRef idx="minor">
+            <a:schemeClr val="lt1"/>
+          </a:fontRef>
+        </p:style>
+        <p:txBody>
+          <a:bodyPr rtlCol="0" anchor="ctr"/>
+          <a:lstStyle/>
+          <a:p>
+            <a:pPr algn="ctr"/>
+          </a:p>
+        </p:txBody>
+      </p:sp>
+      <p:sp>
+        <p:nvSpPr>
+          <p:cNvPr id="6" name="TextBox 5"/>
           <p:cNvSpPr txBox="1"/>
           <p:nvPr/>
         </p:nvSpPr>
         <p:spPr>
           <a:xfrm>
-            <a:off x="274320" y="3703320"/>
-            <a:ext cx="7498079" cy="365760"/>
-          </a:xfrm>
-          <a:prstGeom prst="rect">
-            <a:avLst/>
-          </a:prstGeom>
-          <a:noFill/>
-        </p:spPr>
-        <p:txBody>
-          <a:bodyPr wrap="none">
-            <a:spAutoFit/>
-          </a:bodyPr>
-          <a:lstStyle/>
-          <a:p>
-            <a:r>
-              <a:rPr sz="1200" b="1">
-                <a:solidFill>
-                  <a:srgbClr val="335588"/>
-                </a:solidFill>
-              </a:rPr>
-              <a:t>Two-model pair totals (both benchmarks, discounted)</a:t>
-            </a:r>
-          </a:p>
-        </p:txBody>
-      </p:sp>
-      <p:graphicFrame>
-        <p:nvGraphicFramePr>
-          <p:cNvPr id="6" name="Table 5"/>
-          <p:cNvGraphicFramePr>
-            <a:graphicFrameLocks noGrp="1"/>
-          </p:cNvGraphicFramePr>
-          <p:nvPr/>
-        </p:nvGraphicFramePr>
-        <p:xfrm>
-          <a:off x="274320" y="4160520"/>
-          <a:ext cx="6035040" cy="1280160"/>
-        </p:xfrm>
-        <a:graphic>
-          <a:graphicData uri="http://schemas.openxmlformats.org/drawingml/2006/table">
-            <a:tbl>
-              <a:tblPr firstRow="1" bandRow="1">
-                <a:tableStyleId>{5C22544A-7EE6-4342-B048-85BDC9FD1C3A}</a:tableStyleId>
-              </a:tblPr>
-              <a:tblGrid>
-                <a:gridCol w="4617720"/>
-                <a:gridCol w="1417320"/>
-              </a:tblGrid>
-              <a:tr h="426720">
-                <a:tc>
-                  <a:txBody>
-                    <a:bodyPr wrap="square"/>
-                    <a:lstStyle/>
-                    <a:p>
-                      <a:pPr algn="l"/>
-                      <a:r>
-                        <a:rPr sz="1100" b="1">
-                          <a:solidFill>
-                            <a:srgbClr val="1F3050"/>
-                          </a:solidFill>
-                        </a:rPr>
-                        <a:t>Option 1 · Haiku + Gemini Flash-Lite</a:t>
-                      </a:r>
-                    </a:p>
-                  </a:txBody>
-                  <a:tcPr marL="54864" marR="54864" marT="18288" marB="18288">
-                    <a:solidFill>
-                      <a:srgbClr val="E2F0D9"/>
-                    </a:solidFill>
-                  </a:tcPr>
-                </a:tc>
-                <a:tc>
-                  <a:txBody>
-                    <a:bodyPr wrap="square"/>
-                    <a:lstStyle/>
-                    <a:p>
-                      <a:pPr algn="r"/>
-                      <a:r>
-                        <a:rPr sz="1200" b="1">
-                          <a:solidFill>
-                            <a:srgbClr val="335588"/>
-                          </a:solidFill>
-                        </a:rPr>
-                        <a:t>$1,047</a:t>
-                      </a:r>
-                    </a:p>
-                  </a:txBody>
-                  <a:tcPr marL="54864" marR="54864" marT="18288" marB="18288">
-                    <a:solidFill>
-                      <a:srgbClr val="E2F0D9"/>
-                    </a:solidFill>
-                  </a:tcPr>
-                </a:tc>
-              </a:tr>
-              <a:tr h="426720">
-                <a:tc>
-                  <a:txBody>
-                    <a:bodyPr wrap="square"/>
-                    <a:lstStyle/>
-                    <a:p>
-                      <a:pPr algn="l"/>
-                      <a:r>
-                        <a:rPr sz="1100" b="0">
-                          <a:solidFill>
-                            <a:srgbClr val="1F3050"/>
-                          </a:solidFill>
-                        </a:rPr>
-                        <a:t>Option 2 · Haiku + Sonnet 4.6</a:t>
-                      </a:r>
-                    </a:p>
-                  </a:txBody>
-                  <a:tcPr marL="54864" marR="54864" marT="18288" marB="18288">
-                    <a:solidFill>
-                      <a:srgbClr val="F2F5FA"/>
-                    </a:solidFill>
-                  </a:tcPr>
-                </a:tc>
-                <a:tc>
-                  <a:txBody>
-                    <a:bodyPr wrap="square"/>
-                    <a:lstStyle/>
-                    <a:p>
-                      <a:pPr algn="r"/>
-                      <a:r>
-                        <a:rPr sz="1200" b="1">
-                          <a:solidFill>
-                            <a:srgbClr val="1F3050"/>
-                          </a:solidFill>
-                        </a:rPr>
-                        <a:t>$3,253</a:t>
-                      </a:r>
-                    </a:p>
-                  </a:txBody>
-                  <a:tcPr marL="54864" marR="54864" marT="18288" marB="18288">
-                    <a:solidFill>
-                      <a:srgbClr val="F2F5FA"/>
-                    </a:solidFill>
-                  </a:tcPr>
-                </a:tc>
-              </a:tr>
-              <a:tr h="426720">
-                <a:tc>
-                  <a:txBody>
-                    <a:bodyPr wrap="square"/>
-                    <a:lstStyle/>
-                    <a:p>
-                      <a:pPr algn="l"/>
-                      <a:r>
-                        <a:rPr sz="1100" b="0">
-                          <a:solidFill>
-                            <a:srgbClr val="1F3050"/>
-                          </a:solidFill>
-                        </a:rPr>
-                        <a:t>+ optional · Haiku + Qwen-Flash</a:t>
-                      </a:r>
-                    </a:p>
-                  </a:txBody>
-                  <a:tcPr marL="54864" marR="54864" marT="18288" marB="18288">
-                    <a:solidFill>
-                      <a:srgbClr val="FFFFFF"/>
-                    </a:solidFill>
-                  </a:tcPr>
-                </a:tc>
-                <a:tc>
-                  <a:txBody>
-                    <a:bodyPr wrap="square"/>
-                    <a:lstStyle/>
-                    <a:p>
-                      <a:pPr algn="r"/>
-                      <a:r>
-                        <a:rPr sz="1200" b="1">
-                          <a:solidFill>
-                            <a:srgbClr val="1F3050"/>
-                          </a:solidFill>
-                        </a:rPr>
-                        <a:t>$872</a:t>
-                      </a:r>
-                    </a:p>
-                  </a:txBody>
-                  <a:tcPr marL="54864" marR="54864" marT="18288" marB="18288">
-                    <a:solidFill>
-                      <a:srgbClr val="FFFFFF"/>
-                    </a:solidFill>
-                  </a:tcPr>
-                </a:tc>
-              </a:tr>
-            </a:tbl>
-          </a:graphicData>
-        </a:graphic>
-      </p:graphicFrame>
-      <p:sp>
-        <p:nvSpPr>
-          <p:cNvPr id="7" name="TextBox 6"/>
-          <p:cNvSpPr txBox="1"/>
-          <p:nvPr/>
-        </p:nvSpPr>
-        <p:spPr>
-          <a:xfrm>
-            <a:off x="7726679" y="1188720"/>
-            <a:ext cx="4206240" cy="4937760"/>
+            <a:off x="530352" y="3447288"/>
+            <a:ext cx="5111496" cy="2112264"/>
           </a:xfrm>
           <a:prstGeom prst="rect">
             <a:avLst/>
@@ -3970,111 +3703,220 @@
           <a:lstStyle/>
           <a:p>
             <a:r>
-              <a:rPr sz="1300" b="1">
+              <a:rPr sz="1400" b="1">
                 <a:solidFill>
-                  <a:srgbClr val="335588"/>
+                  <a:srgbClr val="A03030"/>
                 </a:solidFill>
               </a:rPr>
-              <a:t>Why option 1</a:t>
+              <a:t>▲  No-tools: proxy 1.9× too HIGH</a:t>
             </a:r>
           </a:p>
           <a:p>
             <a:pPr>
               <a:spcBef>
-                <a:spcPts val="700"/>
+                <a:spcPts val="800"/>
               </a:spcBef>
             </a:pPr>
             <a:r>
-              <a:rPr sz="1050" b="1">
+              <a:rPr sz="1100" b="1">
                 <a:solidFill>
                   <a:srgbClr val="1F3050"/>
                 </a:solidFill>
               </a:rPr>
-              <a:t>▪ Both are closed frontier models.  </a:t>
-            </a:r>
-            <a:r>
-              <a:rPr sz="1050">
+              <a:t>• Real Sonnet = $39/corpus, proxy said $73.  </a:t>
+            </a:r>
+          </a:p>
+          <a:p>
+            <a:pPr>
+              <a:spcBef>
+                <a:spcPts val="800"/>
+              </a:spcBef>
+            </a:pPr>
+            <a:r>
+              <a:rPr sz="1100" b="1">
+                <a:solidFill>
+                  <a:srgbClr val="1F3050"/>
+                </a:solidFill>
+              </a:rPr>
+              <a:t>• Output collapses.  </a:t>
+            </a:r>
+            <a:r>
+              <a:rPr sz="1100">
                 <a:solidFill>
                   <a:srgbClr val="555555"/>
                 </a:solidFill>
               </a:rPr>
-              <a:t>You can't self-host Haiku or Gemini — that's exactly what API budget should buy. ~$1,047 for BOTH full benchmarks, 2 models.</a:t>
+              <a:t>Qwen3.5-9B writes a long answer even think-off; Sonnet is terse — solve 3,746 → 261 out tok/trial, validate_plan 1,771 → 834.</a:t>
             </a:r>
           </a:p>
           <a:p>
             <a:pPr>
               <a:spcBef>
-                <a:spcPts val="700"/>
+                <a:spcPts val="800"/>
               </a:spcBef>
             </a:pPr>
             <a:r>
-              <a:rPr sz="1050" b="1">
+              <a:rPr sz="1100" b="1">
                 <a:solidFill>
                   <a:srgbClr val="1F3050"/>
                 </a:solidFill>
               </a:rPr>
-              <a:t>▪ Sonnet is the pricier anchor.  </a:t>
-            </a:r>
-            <a:r>
-              <a:rPr sz="1050">
+              <a:t>• Input ~+15% only.  </a:t>
+            </a:r>
+            <a:r>
+              <a:rPr sz="1100">
                 <a:solidFill>
                   <a:srgbClr val="555555"/>
                 </a:solidFill>
               </a:rPr>
-              <a:t>Option 2 = $3,253 (3×). Sonnet isn't 'small' — it buys a stronger upper-bound point, not a cheap one.</a:t>
-            </a:r>
-          </a:p>
-          <a:p>
-            <a:pPr>
-              <a:spcBef>
-                <a:spcPts val="700"/>
-              </a:spcBef>
-            </a:pPr>
-            <a:r>
-              <a:rPr sz="1050" b="1">
-                <a:solidFill>
-                  <a:srgbClr val="1F3050"/>
-                </a:solidFill>
-              </a:rPr>
-              <a:t>▪ Qwen-Flash is cheapest but redundant.  </a:t>
-            </a:r>
-            <a:r>
-              <a:rPr sz="1050">
-                <a:solidFill>
-                  <a:srgbClr val="555555"/>
-                </a:solidFill>
-              </a:rPr>
-              <a:t>+$59/model and matches the tested family, but you already run Qwen locally for free on SLURM, and API-Qwen ≠ your checkpoint (different corpus). Use only as a managed point.</a:t>
-            </a:r>
-          </a:p>
-          <a:p>
-            <a:pPr>
-              <a:spcBef>
-                <a:spcPts val="700"/>
-              </a:spcBef>
-            </a:pPr>
-            <a:r>
-              <a:rPr sz="1050" b="1">
-                <a:solidFill>
-                  <a:srgbClr val="1F3050"/>
-                </a:solidFill>
-              </a:rPr>
-              <a:t>▪ Levers save ~30%, not more.  </a:t>
-            </a:r>
-            <a:r>
-              <a:rPr sz="1050">
-                <a:solidFill>
-                  <a:srgbClr val="555555"/>
-                </a:solidFill>
-              </a:rPr>
-              <a:t>Output (priced 5× input) is untouched by caching, and the with-tools arm can't batch. List → discounted: Sonnet $3,735 → $2,440.</a:t>
-            </a:r>
+              <a:t>Sonnet tokenizer is slightly heavier; output drove the error.</a:t>
+            </a:r>
+          </a:p>
+        </p:txBody>
+      </p:sp>
+      <p:sp>
+        <p:nvSpPr>
+          <p:cNvPr id="7" name="Rounded Rectangle 6"/>
+          <p:cNvSpPr/>
+          <p:nvPr/>
+        </p:nvSpPr>
+        <p:spPr>
+          <a:xfrm>
+            <a:off x="6126480" y="3246120"/>
+            <a:ext cx="5788152" cy="2514600"/>
+          </a:xfrm>
+          <a:prstGeom prst="roundRect">
+            <a:avLst/>
+          </a:prstGeom>
+          <a:solidFill>
+            <a:srgbClr val="ECF1F8"/>
+          </a:solidFill>
+          <a:ln w="19050">
+            <a:solidFill>
+              <a:srgbClr val="335588"/>
+            </a:solidFill>
+          </a:ln>
+          <a:effectLst/>
+        </p:spPr>
+        <p:style>
+          <a:lnRef idx="1">
+            <a:schemeClr val="accent1"/>
+          </a:lnRef>
+          <a:fillRef idx="3">
+            <a:schemeClr val="accent1"/>
+          </a:fillRef>
+          <a:effectRef idx="2">
+            <a:schemeClr val="accent1"/>
+          </a:effectRef>
+          <a:fontRef idx="minor">
+            <a:schemeClr val="lt1"/>
+          </a:fontRef>
+        </p:style>
+        <p:txBody>
+          <a:bodyPr rtlCol="0" anchor="ctr"/>
+          <a:lstStyle/>
+          <a:p>
+            <a:pPr algn="ctr"/>
           </a:p>
         </p:txBody>
       </p:sp>
       <p:sp>
         <p:nvSpPr>
           <p:cNvPr id="8" name="TextBox 7"/>
+          <p:cNvSpPr txBox="1"/>
+          <p:nvPr/>
+        </p:nvSpPr>
+        <p:spPr>
+          <a:xfrm>
+            <a:off x="6382512" y="3447288"/>
+            <a:ext cx="5276088" cy="2112264"/>
+          </a:xfrm>
+          <a:prstGeom prst="rect">
+            <a:avLst/>
+          </a:prstGeom>
+          <a:noFill/>
+        </p:spPr>
+        <p:txBody>
+          <a:bodyPr wrap="square">
+            <a:spAutoFit/>
+          </a:bodyPr>
+          <a:lstStyle/>
+          <a:p>
+            <a:r>
+              <a:rPr sz="1400" b="1">
+                <a:solidFill>
+                  <a:srgbClr val="335588"/>
+                </a:solidFill>
+              </a:rPr>
+              <a:t>▼  With-tools: proxy 1.6× too LOW</a:t>
+            </a:r>
+          </a:p>
+          <a:p>
+            <a:pPr>
+              <a:spcBef>
+                <a:spcPts val="800"/>
+              </a:spcBef>
+            </a:pPr>
+            <a:r>
+              <a:rPr sz="1100" b="1">
+                <a:solidFill>
+                  <a:srgbClr val="1F3050"/>
+                </a:solidFill>
+              </a:rPr>
+              <a:t>• Real Haiku-plain = $146/corpus, proxy said $92 (list).  </a:t>
+            </a:r>
+          </a:p>
+          <a:p>
+            <a:pPr>
+              <a:spcBef>
+                <a:spcPts val="800"/>
+              </a:spcBef>
+            </a:pPr>
+            <a:r>
+              <a:rPr sz="1100" b="1">
+                <a:solidFill>
+                  <a:srgbClr val="1F3050"/>
+                </a:solidFill>
+              </a:rPr>
+              <a:t>• The agentic loop re-bills everything.  </a:t>
+            </a:r>
+            <a:r>
+              <a:rPr sz="1100">
+                <a:solidFill>
+                  <a:srgbClr val="555555"/>
+                </a:solidFill>
+              </a:rPr>
+              <a:t>domain + ~3.6k-tok tool schema + history, every turn; simulate dumps a giant trajectory (solve $9→$26, simulate $8→$30).</a:t>
+            </a:r>
+          </a:p>
+          <a:p>
+            <a:pPr>
+              <a:spcBef>
+                <a:spcPts val="800"/>
+              </a:spcBef>
+            </a:pPr>
+            <a:r>
+              <a:rPr sz="1100" b="1">
+                <a:solidFill>
+                  <a:srgbClr val="1F3050"/>
+                </a:solidFill>
+              </a:rPr>
+              <a:t>• Can't batch.  </a:t>
+            </a:r>
+            <a:r>
+              <a:rPr sz="1100">
+                <a:solidFill>
+                  <a:srgbClr val="555555"/>
+                </a:solidFill>
+              </a:rPr>
+              <a:t>the tool loop is live → LIST price, no −50%. Errors don't cancel per-arm — budget each arm from its own anchor.</a:t>
+            </a:r>
+          </a:p>
+        </p:txBody>
+      </p:sp>
+      <p:sp>
+        <p:nvSpPr>
+          <p:cNvPr id="9" name="TextBox 8"/>
           <p:cNvSpPr txBox="1"/>
           <p:nvPr/>
         </p:nvSpPr>
@@ -4100,7 +3942,7 @@
                   <a:srgbClr val="555555"/>
                 </a:solidFill>
               </a:rPr>
-              <a:t>Tokens: measured Qwen3.5-9B (real for Qwen, PROXY for closed models — extended-thinking output may be 2-5× on think-on cells). PlanBench tokens = aggregate proxy. Pricing: Claude authoritative; Gemini/Qwen web, Jun 2026. Pilot ~$20-35 to calibrate before committing.</a:t>
+              <a:t>Sources: .local/sonnet/grade_{canonical,anon}.log (no-tools, measured) · development/with_tools_probe_findings.md (with-tools probe). Both think-OFF — there is no frontier think-ON anchor yet; treat any think-on figure as unmeasured.</a:t>
             </a:r>
           </a:p>
         </p:txBody>
@@ -4151,7 +3993,7 @@
                   <a:srgbClr val="1F3050"/>
                 </a:solidFill>
               </a:rPr>
-              <a:t>Single-Tool (sweep5) — Cost by Task</a:t>
+              <a:t>Single-Tool by Task — Measured Tokens &amp; $</a:t>
             </a:r>
           </a:p>
         </p:txBody>
@@ -4165,7 +4007,7 @@
         <p:spPr>
           <a:xfrm>
             <a:off x="274320" y="658368"/>
-            <a:ext cx="11612880" cy="365760"/>
+            <a:ext cx="11612880" cy="384048"/>
           </a:xfrm>
           <a:prstGeom prst="rect">
             <a:avLst/>
@@ -4173,7 +4015,7 @@
           <a:noFill/>
         </p:spPr>
         <p:txBody>
-          <a:bodyPr wrap="none">
+          <a:bodyPr wrap="square">
             <a:spAutoFit/>
           </a:bodyPr>
           <a:lstStyle/>
@@ -4184,7 +4026,7 @@
                   <a:srgbClr val="555555"/>
                 </a:solidFill>
               </a:rPr>
-              <a:t>Per-model task TOTAL across full matrix (no-tools 3 variants + with-tools 6 variants, × 2 think) · tokens are cumulative across the agent loop</a:t>
+              <a:t>think-off · plain · ONE corpus.  NT = Sonnet (Batch −50%); WT = live probe (List).  The WT input column is the whole story: the tool loop, not the answer, is the bill.</a:t>
             </a:r>
           </a:p>
         </p:txBody>
@@ -4198,8 +4040,8 @@
           <p:nvPr/>
         </p:nvGraphicFramePr>
         <p:xfrm>
-          <a:off x="274320" y="1188720"/>
-          <a:ext cx="8823960" cy="2926080"/>
+          <a:off x="274320" y="1207008"/>
+          <a:ext cx="9189720" cy="2743200"/>
         </p:xfrm>
         <a:graphic>
           <a:graphicData uri="http://schemas.openxmlformats.org/drawingml/2006/table">
@@ -4208,29 +4050,835 @@
                 <a:tableStyleId>{5C22544A-7EE6-4342-B048-85BDC9FD1C3A}</a:tableStyleId>
               </a:tblPr>
               <a:tblGrid>
-                <a:gridCol w="2148840"/>
-                <a:gridCol w="960120"/>
-                <a:gridCol w="960120"/>
-                <a:gridCol w="960120"/>
-                <a:gridCol w="960120"/>
-                <a:gridCol w="960120"/>
-                <a:gridCol w="960120"/>
-                <a:gridCol w="914400"/>
+                <a:gridCol w="2011680"/>
+                <a:gridCol w="1051560"/>
+                <a:gridCol w="1325880"/>
+                <a:gridCol w="1188720"/>
+                <a:gridCol w="1188720"/>
+                <a:gridCol w="2423160"/>
               </a:tblGrid>
-              <a:tr h="418011">
-                <a:tc>
-                  <a:txBody>
-                    <a:bodyPr wrap="square"/>
-                    <a:lstStyle/>
-                    <a:p>
-                      <a:pPr algn="l"/>
+              <a:tr h="391885">
+                <a:tc>
+                  <a:txBody>
+                    <a:bodyPr wrap="square"/>
+                    <a:lstStyle/>
+                    <a:p>
+                      <a:pPr algn="l"/>
+                      <a:r>
+                        <a:rPr sz="950" b="1">
+                          <a:solidFill>
+                            <a:srgbClr val="FFFFFF"/>
+                          </a:solidFill>
+                        </a:rPr>
+                        <a:t>Task</a:t>
+                      </a:r>
+                    </a:p>
+                  </a:txBody>
+                  <a:tcPr marL="54864" marR="54864" marT="18288" marB="18288">
+                    <a:solidFill>
+                      <a:srgbClr val="335588"/>
+                    </a:solidFill>
+                  </a:tcPr>
+                </a:tc>
+                <a:tc>
+                  <a:txBody>
+                    <a:bodyPr wrap="square"/>
+                    <a:lstStyle/>
+                    <a:p>
+                      <a:pPr algn="ctr"/>
+                      <a:r>
+                        <a:rPr sz="950" b="1">
+                          <a:solidFill>
+                            <a:srgbClr val="FFFFFF"/>
+                          </a:solidFill>
+                        </a:rPr>
+                        <a:t>n/corpus</a:t>
+                      </a:r>
+                    </a:p>
+                  </a:txBody>
+                  <a:tcPr marL="54864" marR="54864" marT="18288" marB="18288">
+                    <a:solidFill>
+                      <a:srgbClr val="335588"/>
+                    </a:solidFill>
+                  </a:tcPr>
+                </a:tc>
+                <a:tc>
+                  <a:txBody>
+                    <a:bodyPr wrap="square"/>
+                    <a:lstStyle/>
+                    <a:p>
+                      <a:pPr algn="ctr"/>
+                      <a:r>
+                        <a:rPr sz="950" b="1">
+                          <a:solidFill>
+                            <a:srgbClr val="FFFFFF"/>
+                          </a:solidFill>
+                        </a:rPr>
+                        <a:t>NT $
+(Son, batch)</a:t>
+                      </a:r>
+                    </a:p>
+                  </a:txBody>
+                  <a:tcPr marL="54864" marR="54864" marT="18288" marB="18288">
+                    <a:solidFill>
+                      <a:srgbClr val="335588"/>
+                    </a:solidFill>
+                  </a:tcPr>
+                </a:tc>
+                <a:tc>
+                  <a:txBody>
+                    <a:bodyPr wrap="square"/>
+                    <a:lstStyle/>
+                    <a:p>
+                      <a:pPr algn="ctr"/>
+                      <a:r>
+                        <a:rPr sz="950" b="1">
+                          <a:solidFill>
+                            <a:srgbClr val="FFFFFF"/>
+                          </a:solidFill>
+                        </a:rPr>
+                        <a:t>WT $
+Sonnet</a:t>
+                      </a:r>
+                    </a:p>
+                  </a:txBody>
+                  <a:tcPr marL="54864" marR="54864" marT="18288" marB="18288">
+                    <a:solidFill>
+                      <a:srgbClr val="335588"/>
+                    </a:solidFill>
+                  </a:tcPr>
+                </a:tc>
+                <a:tc>
+                  <a:txBody>
+                    <a:bodyPr wrap="square"/>
+                    <a:lstStyle/>
+                    <a:p>
+                      <a:pPr algn="ctr"/>
+                      <a:r>
+                        <a:rPr sz="950" b="1">
+                          <a:solidFill>
+                            <a:srgbClr val="FFFFFF"/>
+                          </a:solidFill>
+                        </a:rPr>
+                        <a:t>WT $
+Haiku</a:t>
+                      </a:r>
+                    </a:p>
+                  </a:txBody>
+                  <a:tcPr marL="54864" marR="54864" marT="18288" marB="18288">
+                    <a:solidFill>
+                      <a:srgbClr val="335588"/>
+                    </a:solidFill>
+                  </a:tcPr>
+                </a:tc>
+                <a:tc>
+                  <a:txBody>
+                    <a:bodyPr wrap="square"/>
+                    <a:lstStyle/>
+                    <a:p>
+                      <a:pPr algn="ctr"/>
+                      <a:r>
+                        <a:rPr sz="950" b="1">
+                          <a:solidFill>
+                            <a:srgbClr val="FFFFFF"/>
+                          </a:solidFill>
+                        </a:rPr>
+                        <a:t>WT input tok/trial
+Sonnet / Haiku</a:t>
+                      </a:r>
+                    </a:p>
+                  </a:txBody>
+                  <a:tcPr marL="54864" marR="54864" marT="18288" marB="18288">
+                    <a:solidFill>
+                      <a:srgbClr val="335588"/>
+                    </a:solidFill>
+                  </a:tcPr>
+                </a:tc>
+              </a:tr>
+              <a:tr h="391885">
+                <a:tc>
+                  <a:txBody>
+                    <a:bodyPr wrap="square"/>
+                    <a:lstStyle/>
+                    <a:p>
+                      <a:pPr algn="l"/>
+                      <a:r>
+                        <a:rPr sz="1050" b="0">
+                          <a:solidFill>
+                            <a:srgbClr val="1F3050"/>
+                          </a:solidFill>
+                        </a:rPr>
+                        <a:t>solve</a:t>
+                      </a:r>
+                    </a:p>
+                  </a:txBody>
+                  <a:tcPr marL="54864" marR="54864" marT="18288" marB="18288">
+                    <a:solidFill>
+                      <a:srgbClr val="FFFFFF"/>
+                    </a:solidFill>
+                  </a:tcPr>
+                </a:tc>
+                <a:tc>
+                  <a:txBody>
+                    <a:bodyPr wrap="square"/>
+                    <a:lstStyle/>
+                    <a:p>
+                      <a:pPr algn="r"/>
+                      <a:r>
+                        <a:rPr sz="1000" b="0">
+                          <a:solidFill>
+                            <a:srgbClr val="555555"/>
+                          </a:solidFill>
+                        </a:rPr>
+                        <a:t>300</a:t>
+                      </a:r>
+                    </a:p>
+                  </a:txBody>
+                  <a:tcPr marL="54864" marR="54864" marT="18288" marB="18288">
+                    <a:solidFill>
+                      <a:srgbClr val="FFFFFF"/>
+                    </a:solidFill>
+                  </a:tcPr>
+                </a:tc>
+                <a:tc>
+                  <a:txBody>
+                    <a:bodyPr wrap="square"/>
+                    <a:lstStyle/>
+                    <a:p>
+                      <a:pPr algn="r"/>
+                      <a:r>
+                        <a:rPr sz="1000" b="0">
+                          <a:solidFill>
+                            <a:srgbClr val="1F3050"/>
+                          </a:solidFill>
+                        </a:rPr>
+                        <a:t>$1.24</a:t>
+                      </a:r>
+                    </a:p>
+                  </a:txBody>
+                  <a:tcPr marL="54864" marR="54864" marT="18288" marB="18288">
+                    <a:solidFill>
+                      <a:srgbClr val="FFFFFF"/>
+                    </a:solidFill>
+                  </a:tcPr>
+                </a:tc>
+                <a:tc>
+                  <a:txBody>
+                    <a:bodyPr wrap="square"/>
+                    <a:lstStyle/>
+                    <a:p>
+                      <a:pPr algn="r"/>
+                      <a:r>
+                        <a:rPr sz="1000" b="0">
+                          <a:solidFill>
+                            <a:srgbClr val="1F3050"/>
+                          </a:solidFill>
+                        </a:rPr>
+                        <a:t>$30</a:t>
+                      </a:r>
+                    </a:p>
+                  </a:txBody>
+                  <a:tcPr marL="54864" marR="54864" marT="18288" marB="18288">
+                    <a:solidFill>
+                      <a:srgbClr val="FFFFFF"/>
+                    </a:solidFill>
+                  </a:tcPr>
+                </a:tc>
+                <a:tc>
+                  <a:txBody>
+                    <a:bodyPr wrap="square"/>
+                    <a:lstStyle/>
+                    <a:p>
+                      <a:pPr algn="r"/>
+                      <a:r>
+                        <a:rPr sz="1000" b="0">
+                          <a:solidFill>
+                            <a:srgbClr val="1F3050"/>
+                          </a:solidFill>
+                        </a:rPr>
+                        <a:t>$26</a:t>
+                      </a:r>
+                    </a:p>
+                  </a:txBody>
+                  <a:tcPr marL="54864" marR="54864" marT="18288" marB="18288">
+                    <a:solidFill>
+                      <a:srgbClr val="FFFFFF"/>
+                    </a:solidFill>
+                  </a:tcPr>
+                </a:tc>
+                <a:tc>
+                  <a:txBody>
+                    <a:bodyPr wrap="square"/>
+                    <a:lstStyle/>
+                    <a:p>
+                      <a:pPr algn="r"/>
+                      <a:r>
+                        <a:rPr sz="1000" b="0">
+                          <a:solidFill>
+                            <a:srgbClr val="A03030"/>
+                          </a:solidFill>
+                        </a:rPr>
+                        <a:t>19k / 50k</a:t>
+                      </a:r>
+                    </a:p>
+                  </a:txBody>
+                  <a:tcPr marL="54864" marR="54864" marT="18288" marB="18288">
+                    <a:solidFill>
+                      <a:srgbClr val="FFFFFF"/>
+                    </a:solidFill>
+                  </a:tcPr>
+                </a:tc>
+              </a:tr>
+              <a:tr h="391885">
+                <a:tc>
+                  <a:txBody>
+                    <a:bodyPr wrap="square"/>
+                    <a:lstStyle/>
+                    <a:p>
+                      <a:pPr algn="l"/>
+                      <a:r>
+                        <a:rPr sz="1050" b="0">
+                          <a:solidFill>
+                            <a:srgbClr val="1F3050"/>
+                          </a:solidFill>
+                        </a:rPr>
+                        <a:t>validate_domain</a:t>
+                      </a:r>
+                    </a:p>
+                  </a:txBody>
+                  <a:tcPr marL="54864" marR="54864" marT="18288" marB="18288">
+                    <a:solidFill>
+                      <a:srgbClr val="F2F5FA"/>
+                    </a:solidFill>
+                  </a:tcPr>
+                </a:tc>
+                <a:tc>
+                  <a:txBody>
+                    <a:bodyPr wrap="square"/>
+                    <a:lstStyle/>
+                    <a:p>
+                      <a:pPr algn="r"/>
+                      <a:r>
+                        <a:rPr sz="1000" b="0">
+                          <a:solidFill>
+                            <a:srgbClr val="555555"/>
+                          </a:solidFill>
+                        </a:rPr>
+                        <a:t>360</a:t>
+                      </a:r>
+                    </a:p>
+                  </a:txBody>
+                  <a:tcPr marL="54864" marR="54864" marT="18288" marB="18288">
+                    <a:solidFill>
+                      <a:srgbClr val="F2F5FA"/>
+                    </a:solidFill>
+                  </a:tcPr>
+                </a:tc>
+                <a:tc>
+                  <a:txBody>
+                    <a:bodyPr wrap="square"/>
+                    <a:lstStyle/>
+                    <a:p>
+                      <a:pPr algn="r"/>
+                      <a:r>
+                        <a:rPr sz="1000" b="0">
+                          <a:solidFill>
+                            <a:srgbClr val="1F3050"/>
+                          </a:solidFill>
+                        </a:rPr>
+                        <a:t>$1.38</a:t>
+                      </a:r>
+                    </a:p>
+                  </a:txBody>
+                  <a:tcPr marL="54864" marR="54864" marT="18288" marB="18288">
+                    <a:solidFill>
+                      <a:srgbClr val="F2F5FA"/>
+                    </a:solidFill>
+                  </a:tcPr>
+                </a:tc>
+                <a:tc>
+                  <a:txBody>
+                    <a:bodyPr wrap="square"/>
+                    <a:lstStyle/>
+                    <a:p>
+                      <a:pPr algn="r"/>
+                      <a:r>
+                        <a:rPr sz="1000" b="0">
+                          <a:solidFill>
+                            <a:srgbClr val="1F3050"/>
+                          </a:solidFill>
+                        </a:rPr>
+                        <a:t>$19</a:t>
+                      </a:r>
+                    </a:p>
+                  </a:txBody>
+                  <a:tcPr marL="54864" marR="54864" marT="18288" marB="18288">
+                    <a:solidFill>
+                      <a:srgbClr val="F2F5FA"/>
+                    </a:solidFill>
+                  </a:tcPr>
+                </a:tc>
+                <a:tc>
+                  <a:txBody>
+                    <a:bodyPr wrap="square"/>
+                    <a:lstStyle/>
+                    <a:p>
+                      <a:pPr algn="r"/>
+                      <a:r>
+                        <a:rPr sz="1000" b="0">
+                          <a:solidFill>
+                            <a:srgbClr val="1F3050"/>
+                          </a:solidFill>
+                        </a:rPr>
+                        <a:t>$6</a:t>
+                      </a:r>
+                    </a:p>
+                  </a:txBody>
+                  <a:tcPr marL="54864" marR="54864" marT="18288" marB="18288">
+                    <a:solidFill>
+                      <a:srgbClr val="F2F5FA"/>
+                    </a:solidFill>
+                  </a:tcPr>
+                </a:tc>
+                <a:tc>
+                  <a:txBody>
+                    <a:bodyPr wrap="square"/>
+                    <a:lstStyle/>
+                    <a:p>
+                      <a:pPr algn="r"/>
+                      <a:r>
+                        <a:rPr sz="1000" b="0">
+                          <a:solidFill>
+                            <a:srgbClr val="555555"/>
+                          </a:solidFill>
+                        </a:rPr>
+                        <a:t>11k / 11k</a:t>
+                      </a:r>
+                    </a:p>
+                  </a:txBody>
+                  <a:tcPr marL="54864" marR="54864" marT="18288" marB="18288">
+                    <a:solidFill>
+                      <a:srgbClr val="F2F5FA"/>
+                    </a:solidFill>
+                  </a:tcPr>
+                </a:tc>
+              </a:tr>
+              <a:tr h="391885">
+                <a:tc>
+                  <a:txBody>
+                    <a:bodyPr wrap="square"/>
+                    <a:lstStyle/>
+                    <a:p>
+                      <a:pPr algn="l"/>
+                      <a:r>
+                        <a:rPr sz="1050" b="0">
+                          <a:solidFill>
+                            <a:srgbClr val="1F3050"/>
+                          </a:solidFill>
+                        </a:rPr>
+                        <a:t>validate_problem</a:t>
+                      </a:r>
+                    </a:p>
+                  </a:txBody>
+                  <a:tcPr marL="54864" marR="54864" marT="18288" marB="18288">
+                    <a:solidFill>
+                      <a:srgbClr val="FFFFFF"/>
+                    </a:solidFill>
+                  </a:tcPr>
+                </a:tc>
+                <a:tc>
+                  <a:txBody>
+                    <a:bodyPr wrap="square"/>
+                    <a:lstStyle/>
+                    <a:p>
+                      <a:pPr algn="r"/>
+                      <a:r>
+                        <a:rPr sz="1000" b="0">
+                          <a:solidFill>
+                            <a:srgbClr val="555555"/>
+                          </a:solidFill>
+                        </a:rPr>
+                        <a:t>600</a:t>
+                      </a:r>
+                    </a:p>
+                  </a:txBody>
+                  <a:tcPr marL="54864" marR="54864" marT="18288" marB="18288">
+                    <a:solidFill>
+                      <a:srgbClr val="FFFFFF"/>
+                    </a:solidFill>
+                  </a:tcPr>
+                </a:tc>
+                <a:tc>
+                  <a:txBody>
+                    <a:bodyPr wrap="square"/>
+                    <a:lstStyle/>
+                    <a:p>
+                      <a:pPr algn="r"/>
+                      <a:r>
+                        <a:rPr sz="1000" b="0">
+                          <a:solidFill>
+                            <a:srgbClr val="1F3050"/>
+                          </a:solidFill>
+                        </a:rPr>
+                        <a:t>$2.19</a:t>
+                      </a:r>
+                    </a:p>
+                  </a:txBody>
+                  <a:tcPr marL="54864" marR="54864" marT="18288" marB="18288">
+                    <a:solidFill>
+                      <a:srgbClr val="FFFFFF"/>
+                    </a:solidFill>
+                  </a:tcPr>
+                </a:tc>
+                <a:tc>
+                  <a:txBody>
+                    <a:bodyPr wrap="square"/>
+                    <a:lstStyle/>
+                    <a:p>
+                      <a:pPr algn="r"/>
+                      <a:r>
+                        <a:rPr sz="1000" b="0">
+                          <a:solidFill>
+                            <a:srgbClr val="1F3050"/>
+                          </a:solidFill>
+                        </a:rPr>
+                        <a:t>$34</a:t>
+                      </a:r>
+                    </a:p>
+                  </a:txBody>
+                  <a:tcPr marL="54864" marR="54864" marT="18288" marB="18288">
+                    <a:solidFill>
+                      <a:srgbClr val="FFFFFF"/>
+                    </a:solidFill>
+                  </a:tcPr>
+                </a:tc>
+                <a:tc>
+                  <a:txBody>
+                    <a:bodyPr wrap="square"/>
+                    <a:lstStyle/>
+                    <a:p>
+                      <a:pPr algn="r"/>
+                      <a:r>
+                        <a:rPr sz="1000" b="0">
+                          <a:solidFill>
+                            <a:srgbClr val="1F3050"/>
+                          </a:solidFill>
+                        </a:rPr>
+                        <a:t>$11</a:t>
+                      </a:r>
+                    </a:p>
+                  </a:txBody>
+                  <a:tcPr marL="54864" marR="54864" marT="18288" marB="18288">
+                    <a:solidFill>
+                      <a:srgbClr val="FFFFFF"/>
+                    </a:solidFill>
+                  </a:tcPr>
+                </a:tc>
+                <a:tc>
+                  <a:txBody>
+                    <a:bodyPr wrap="square"/>
+                    <a:lstStyle/>
+                    <a:p>
+                      <a:pPr algn="r"/>
+                      <a:r>
+                        <a:rPr sz="1000" b="0">
+                          <a:solidFill>
+                            <a:srgbClr val="555555"/>
+                          </a:solidFill>
+                        </a:rPr>
+                        <a:t>12k / 12k</a:t>
+                      </a:r>
+                    </a:p>
+                  </a:txBody>
+                  <a:tcPr marL="54864" marR="54864" marT="18288" marB="18288">
+                    <a:solidFill>
+                      <a:srgbClr val="FFFFFF"/>
+                    </a:solidFill>
+                  </a:tcPr>
+                </a:tc>
+              </a:tr>
+              <a:tr h="391885">
+                <a:tc>
+                  <a:txBody>
+                    <a:bodyPr wrap="square"/>
+                    <a:lstStyle/>
+                    <a:p>
+                      <a:pPr algn="l"/>
+                      <a:r>
+                        <a:rPr sz="1050" b="1">
+                          <a:solidFill>
+                            <a:srgbClr val="A03030"/>
+                          </a:solidFill>
+                        </a:rPr>
+                        <a:t>validate_plan</a:t>
+                      </a:r>
+                    </a:p>
+                  </a:txBody>
+                  <a:tcPr marL="54864" marR="54864" marT="18288" marB="18288">
+                    <a:solidFill>
+                      <a:srgbClr val="E2F0D9"/>
+                    </a:solidFill>
+                  </a:tcPr>
+                </a:tc>
+                <a:tc>
+                  <a:txBody>
+                    <a:bodyPr wrap="square"/>
+                    <a:lstStyle/>
+                    <a:p>
+                      <a:pPr algn="r"/>
+                      <a:r>
+                        <a:rPr sz="1000" b="0">
+                          <a:solidFill>
+                            <a:srgbClr val="555555"/>
+                          </a:solidFill>
+                        </a:rPr>
+                        <a:t>3,000</a:t>
+                      </a:r>
+                    </a:p>
+                  </a:txBody>
+                  <a:tcPr marL="54864" marR="54864" marT="18288" marB="18288">
+                    <a:solidFill>
+                      <a:srgbClr val="E2F0D9"/>
+                    </a:solidFill>
+                  </a:tcPr>
+                </a:tc>
+                <a:tc>
+                  <a:txBody>
+                    <a:bodyPr wrap="square"/>
+                    <a:lstStyle/>
+                    <a:p>
+                      <a:pPr algn="r"/>
                       <a:r>
                         <a:rPr sz="1000" b="1">
                           <a:solidFill>
+                            <a:srgbClr val="1F3050"/>
+                          </a:solidFill>
+                        </a:rPr>
+                        <a:t>$25.63</a:t>
+                      </a:r>
+                    </a:p>
+                  </a:txBody>
+                  <a:tcPr marL="54864" marR="54864" marT="18288" marB="18288">
+                    <a:solidFill>
+                      <a:srgbClr val="E2F0D9"/>
+                    </a:solidFill>
+                  </a:tcPr>
+                </a:tc>
+                <a:tc>
+                  <a:txBody>
+                    <a:bodyPr wrap="square"/>
+                    <a:lstStyle/>
+                    <a:p>
+                      <a:pPr algn="r"/>
+                      <a:r>
+                        <a:rPr sz="1000" b="1">
+                          <a:solidFill>
+                            <a:srgbClr val="1F3050"/>
+                          </a:solidFill>
+                        </a:rPr>
+                        <a:t>$212</a:t>
+                      </a:r>
+                    </a:p>
+                  </a:txBody>
+                  <a:tcPr marL="54864" marR="54864" marT="18288" marB="18288">
+                    <a:solidFill>
+                      <a:srgbClr val="E2F0D9"/>
+                    </a:solidFill>
+                  </a:tcPr>
+                </a:tc>
+                <a:tc>
+                  <a:txBody>
+                    <a:bodyPr wrap="square"/>
+                    <a:lstStyle/>
+                    <a:p>
+                      <a:pPr algn="r"/>
+                      <a:r>
+                        <a:rPr sz="1000" b="1">
+                          <a:solidFill>
+                            <a:srgbClr val="1F3050"/>
+                          </a:solidFill>
+                        </a:rPr>
+                        <a:t>$73</a:t>
+                      </a:r>
+                    </a:p>
+                  </a:txBody>
+                  <a:tcPr marL="54864" marR="54864" marT="18288" marB="18288">
+                    <a:solidFill>
+                      <a:srgbClr val="E2F0D9"/>
+                    </a:solidFill>
+                  </a:tcPr>
+                </a:tc>
+                <a:tc>
+                  <a:txBody>
+                    <a:bodyPr wrap="square"/>
+                    <a:lstStyle/>
+                    <a:p>
+                      <a:pPr algn="r"/>
+                      <a:r>
+                        <a:rPr sz="1000" b="0">
+                          <a:solidFill>
+                            <a:srgbClr val="555555"/>
+                          </a:solidFill>
+                        </a:rPr>
+                        <a:t>14k / 15k</a:t>
+                      </a:r>
+                    </a:p>
+                  </a:txBody>
+                  <a:tcPr marL="54864" marR="54864" marT="18288" marB="18288">
+                    <a:solidFill>
+                      <a:srgbClr val="E2F0D9"/>
+                    </a:solidFill>
+                  </a:tcPr>
+                </a:tc>
+              </a:tr>
+              <a:tr h="391885">
+                <a:tc>
+                  <a:txBody>
+                    <a:bodyPr wrap="square"/>
+                    <a:lstStyle/>
+                    <a:p>
+                      <a:pPr algn="l"/>
+                      <a:r>
+                        <a:rPr sz="1050" b="0">
+                          <a:solidFill>
+                            <a:srgbClr val="1F3050"/>
+                          </a:solidFill>
+                        </a:rPr>
+                        <a:t>simulate</a:t>
+                      </a:r>
+                    </a:p>
+                  </a:txBody>
+                  <a:tcPr marL="54864" marR="54864" marT="18288" marB="18288">
+                    <a:solidFill>
+                      <a:srgbClr val="FFFFFF"/>
+                    </a:solidFill>
+                  </a:tcPr>
+                </a:tc>
+                <a:tc>
+                  <a:txBody>
+                    <a:bodyPr wrap="square"/>
+                    <a:lstStyle/>
+                    <a:p>
+                      <a:pPr algn="r"/>
+                      <a:r>
+                        <a:rPr sz="1000" b="0">
+                          <a:solidFill>
+                            <a:srgbClr val="555555"/>
+                          </a:solidFill>
+                        </a:rPr>
+                        <a:t>300</a:t>
+                      </a:r>
+                    </a:p>
+                  </a:txBody>
+                  <a:tcPr marL="54864" marR="54864" marT="18288" marB="18288">
+                    <a:solidFill>
+                      <a:srgbClr val="FFFFFF"/>
+                    </a:solidFill>
+                  </a:tcPr>
+                </a:tc>
+                <a:tc>
+                  <a:txBody>
+                    <a:bodyPr wrap="square"/>
+                    <a:lstStyle/>
+                    <a:p>
+                      <a:pPr algn="r"/>
+                      <a:r>
+                        <a:rPr sz="1000" b="0">
+                          <a:solidFill>
+                            <a:srgbClr val="1F3050"/>
+                          </a:solidFill>
+                        </a:rPr>
+                        <a:t>$8.67</a:t>
+                      </a:r>
+                    </a:p>
+                  </a:txBody>
+                  <a:tcPr marL="54864" marR="54864" marT="18288" marB="18288">
+                    <a:solidFill>
+                      <a:srgbClr val="FFFFFF"/>
+                    </a:solidFill>
+                  </a:tcPr>
+                </a:tc>
+                <a:tc>
+                  <a:txBody>
+                    <a:bodyPr wrap="square"/>
+                    <a:lstStyle/>
+                    <a:p>
+                      <a:pPr algn="r"/>
+                      <a:r>
+                        <a:rPr sz="1000" b="0">
+                          <a:solidFill>
+                            <a:srgbClr val="1F3050"/>
+                          </a:solidFill>
+                        </a:rPr>
+                        <a:t>$154</a:t>
+                      </a:r>
+                    </a:p>
+                  </a:txBody>
+                  <a:tcPr marL="54864" marR="54864" marT="18288" marB="18288">
+                    <a:solidFill>
+                      <a:srgbClr val="FFFFFF"/>
+                    </a:solidFill>
+                  </a:tcPr>
+                </a:tc>
+                <a:tc>
+                  <a:txBody>
+                    <a:bodyPr wrap="square"/>
+                    <a:lstStyle/>
+                    <a:p>
+                      <a:pPr algn="r"/>
+                      <a:r>
+                        <a:rPr sz="1000" b="0">
+                          <a:solidFill>
+                            <a:srgbClr val="1F3050"/>
+                          </a:solidFill>
+                        </a:rPr>
+                        <a:t>$30</a:t>
+                      </a:r>
+                    </a:p>
+                  </a:txBody>
+                  <a:tcPr marL="54864" marR="54864" marT="18288" marB="18288">
+                    <a:solidFill>
+                      <a:srgbClr val="FFFFFF"/>
+                    </a:solidFill>
+                  </a:tcPr>
+                </a:tc>
+                <a:tc>
+                  <a:txBody>
+                    <a:bodyPr wrap="square"/>
+                    <a:lstStyle/>
+                    <a:p>
+                      <a:pPr algn="r"/>
+                      <a:r>
+                        <a:rPr sz="1000" b="0">
+                          <a:solidFill>
+                            <a:srgbClr val="A03030"/>
+                          </a:solidFill>
+                        </a:rPr>
+                        <a:t>141k / 78k</a:t>
+                      </a:r>
+                    </a:p>
+                  </a:txBody>
+                  <a:tcPr marL="54864" marR="54864" marT="18288" marB="18288">
+                    <a:solidFill>
+                      <a:srgbClr val="FFFFFF"/>
+                    </a:solidFill>
+                  </a:tcPr>
+                </a:tc>
+              </a:tr>
+              <a:tr h="391890">
+                <a:tc>
+                  <a:txBody>
+                    <a:bodyPr wrap="square"/>
+                    <a:lstStyle/>
+                    <a:p>
+                      <a:pPr algn="l"/>
+                      <a:r>
+                        <a:rPr sz="1050" b="1">
+                          <a:solidFill>
                             <a:srgbClr val="FFFFFF"/>
                           </a:solidFill>
                         </a:rPr>
-                        <a:t>Task</a:t>
+                        <a:t>ALL TASKS</a:t>
                       </a:r>
                     </a:p>
                   </a:txBody>
@@ -4245,15 +4893,14 @@
                     <a:bodyPr wrap="square"/>
                     <a:lstStyle/>
                     <a:p>
-                      <a:pPr algn="ctr"/>
+                      <a:pPr algn="r"/>
                       <a:r>
                         <a:rPr sz="1000" b="1">
                           <a:solidFill>
                             <a:srgbClr val="FFFFFF"/>
                           </a:solidFill>
                         </a:rPr>
-                        <a:t>trials
-/model</a:t>
+                        <a:t>4,560</a:t>
                       </a:r>
                     </a:p>
                   </a:txBody>
@@ -4268,15 +4915,14 @@
                     <a:bodyPr wrap="square"/>
                     <a:lstStyle/>
                     <a:p>
-                      <a:pPr algn="ctr"/>
-                      <a:r>
-                        <a:rPr sz="1000" b="1">
+                      <a:pPr algn="r"/>
+                      <a:r>
+                        <a:rPr sz="1050" b="1">
                           <a:solidFill>
                             <a:srgbClr val="FFFFFF"/>
                           </a:solidFill>
                         </a:rPr>
-                        <a:t>in tok
-/trial</a:t>
+                        <a:t>$39</a:t>
                       </a:r>
                     </a:p>
                   </a:txBody>
@@ -4291,15 +4937,14 @@
                     <a:bodyPr wrap="square"/>
                     <a:lstStyle/>
                     <a:p>
-                      <a:pPr algn="ctr"/>
-                      <a:r>
-                        <a:rPr sz="1000" b="1">
+                      <a:pPr algn="r"/>
+                      <a:r>
+                        <a:rPr sz="1050" b="1">
                           <a:solidFill>
                             <a:srgbClr val="FFFFFF"/>
                           </a:solidFill>
                         </a:rPr>
-                        <a:t>out tok
-/trial</a:t>
+                        <a:t>$449</a:t>
                       </a:r>
                     </a:p>
                   </a:txBody>
@@ -4314,15 +4959,14 @@
                     <a:bodyPr wrap="square"/>
                     <a:lstStyle/>
                     <a:p>
-                      <a:pPr algn="ctr"/>
-                      <a:r>
-                        <a:rPr sz="1000" b="1">
+                      <a:pPr algn="r"/>
+                      <a:r>
+                        <a:rPr sz="1050" b="1">
                           <a:solidFill>
                             <a:srgbClr val="FFFFFF"/>
                           </a:solidFill>
                         </a:rPr>
-                        <a:t>Haiku
-$</a:t>
+                        <a:t>$146</a:t>
                       </a:r>
                     </a:p>
                   </a:txBody>
@@ -4337,1129 +4981,14 @@
                     <a:bodyPr wrap="square"/>
                     <a:lstStyle/>
                     <a:p>
-                      <a:pPr algn="ctr"/>
-                      <a:r>
-                        <a:rPr sz="1000" b="1">
-                          <a:solidFill>
-                            <a:srgbClr val="FFFFFF"/>
-                          </a:solidFill>
-                        </a:rPr>
-                        <a:t>Gemini
-$</a:t>
-                      </a:r>
-                    </a:p>
-                  </a:txBody>
-                  <a:tcPr marL="54864" marR="54864" marT="18288" marB="18288">
-                    <a:solidFill>
-                      <a:srgbClr val="335588"/>
-                    </a:solidFill>
-                  </a:tcPr>
-                </a:tc>
-                <a:tc>
-                  <a:txBody>
-                    <a:bodyPr wrap="square"/>
-                    <a:lstStyle/>
-                    <a:p>
-                      <a:pPr algn="ctr"/>
-                      <a:r>
-                        <a:rPr sz="1000" b="1">
-                          <a:solidFill>
-                            <a:srgbClr val="FFFFFF"/>
-                          </a:solidFill>
-                        </a:rPr>
-                        <a:t>Sonnet
-$</a:t>
-                      </a:r>
-                    </a:p>
-                  </a:txBody>
-                  <a:tcPr marL="54864" marR="54864" marT="18288" marB="18288">
-                    <a:solidFill>
-                      <a:srgbClr val="335588"/>
-                    </a:solidFill>
-                  </a:tcPr>
-                </a:tc>
-                <a:tc>
-                  <a:txBody>
-                    <a:bodyPr wrap="square"/>
-                    <a:lstStyle/>
-                    <a:p>
-                      <a:pPr algn="ctr"/>
-                      <a:r>
-                        <a:rPr sz="1000" b="1">
-                          <a:solidFill>
-                            <a:srgbClr val="FFFFFF"/>
-                          </a:solidFill>
-                        </a:rPr>
-                        <a:t>Qwen
-$</a:t>
-                      </a:r>
-                    </a:p>
-                  </a:txBody>
-                  <a:tcPr marL="54864" marR="54864" marT="18288" marB="18288">
-                    <a:solidFill>
-                      <a:srgbClr val="335588"/>
-                    </a:solidFill>
-                  </a:tcPr>
-                </a:tc>
-              </a:tr>
-              <a:tr h="418011">
-                <a:tc>
-                  <a:txBody>
-                    <a:bodyPr wrap="square"/>
-                    <a:lstStyle/>
-                    <a:p>
-                      <a:pPr algn="l"/>
-                      <a:r>
-                        <a:rPr sz="1050" b="0">
-                          <a:solidFill>
-                            <a:srgbClr val="1F3050"/>
-                          </a:solidFill>
-                        </a:rPr>
-                        <a:t>solve</a:t>
-                      </a:r>
-                    </a:p>
-                  </a:txBody>
-                  <a:tcPr marL="54864" marR="54864" marT="18288" marB="18288">
-                    <a:solidFill>
-                      <a:srgbClr val="FFFFFF"/>
-                    </a:solidFill>
-                  </a:tcPr>
-                </a:tc>
-                <a:tc>
-                  <a:txBody>
-                    <a:bodyPr wrap="square"/>
-                    <a:lstStyle/>
-                    <a:p>
-                      <a:pPr algn="r"/>
+                      <a:pPr algn="l"/>
                       <a:r>
                         <a:rPr sz="1000" b="0">
                           <a:solidFill>
-                            <a:srgbClr val="555555"/>
-                          </a:solidFill>
-                        </a:rPr>
-                        <a:t>1,800</a:t>
-                      </a:r>
-                    </a:p>
-                  </a:txBody>
-                  <a:tcPr marL="54864" marR="54864" marT="18288" marB="18288">
-                    <a:solidFill>
-                      <a:srgbClr val="FFFFFF"/>
-                    </a:solidFill>
-                  </a:tcPr>
-                </a:tc>
-                <a:tc>
-                  <a:txBody>
-                    <a:bodyPr wrap="square"/>
-                    <a:lstStyle/>
-                    <a:p>
-                      <a:pPr algn="r"/>
-                      <a:r>
-                        <a:rPr sz="1000" b="0">
-                          <a:solidFill>
-                            <a:srgbClr val="555555"/>
-                          </a:solidFill>
-                        </a:rPr>
-                        <a:t>10,983</a:t>
-                      </a:r>
-                    </a:p>
-                  </a:txBody>
-                  <a:tcPr marL="54864" marR="54864" marT="18288" marB="18288">
-                    <a:solidFill>
-                      <a:srgbClr val="FFFFFF"/>
-                    </a:solidFill>
-                  </a:tcPr>
-                </a:tc>
-                <a:tc>
-                  <a:txBody>
-                    <a:bodyPr wrap="square"/>
-                    <a:lstStyle/>
-                    <a:p>
-                      <a:pPr algn="r"/>
-                      <a:r>
-                        <a:rPr sz="1000" b="0">
-                          <a:solidFill>
-                            <a:srgbClr val="555555"/>
-                          </a:solidFill>
-                        </a:rPr>
-                        <a:t>4,269</a:t>
-                      </a:r>
-                    </a:p>
-                  </a:txBody>
-                  <a:tcPr marL="54864" marR="54864" marT="18288" marB="18288">
-                    <a:solidFill>
-                      <a:srgbClr val="FFFFFF"/>
-                    </a:solidFill>
-                  </a:tcPr>
-                </a:tc>
-                <a:tc>
-                  <a:txBody>
-                    <a:bodyPr wrap="square"/>
-                    <a:lstStyle/>
-                    <a:p>
-                      <a:pPr algn="r"/>
-                      <a:r>
-                        <a:rPr sz="1000" b="0">
-                          <a:solidFill>
-                            <a:srgbClr val="1F3050"/>
-                          </a:solidFill>
-                        </a:rPr>
-                        <a:t>$41</a:t>
-                      </a:r>
-                    </a:p>
-                  </a:txBody>
-                  <a:tcPr marL="54864" marR="54864" marT="18288" marB="18288">
-                    <a:solidFill>
-                      <a:srgbClr val="FFFFFF"/>
-                    </a:solidFill>
-                  </a:tcPr>
-                </a:tc>
-                <a:tc>
-                  <a:txBody>
-                    <a:bodyPr wrap="square"/>
-                    <a:lstStyle/>
-                    <a:p>
-                      <a:pPr algn="r"/>
-                      <a:r>
-                        <a:rPr sz="1000" b="0">
-                          <a:solidFill>
-                            <a:srgbClr val="1F3050"/>
-                          </a:solidFill>
-                        </a:rPr>
-                        <a:t>$12</a:t>
-                      </a:r>
-                    </a:p>
-                  </a:txBody>
-                  <a:tcPr marL="54864" marR="54864" marT="18288" marB="18288">
-                    <a:solidFill>
-                      <a:srgbClr val="FFFFFF"/>
-                    </a:solidFill>
-                  </a:tcPr>
-                </a:tc>
-                <a:tc>
-                  <a:txBody>
-                    <a:bodyPr wrap="square"/>
-                    <a:lstStyle/>
-                    <a:p>
-                      <a:pPr algn="r"/>
-                      <a:r>
-                        <a:rPr sz="1000" b="0">
-                          <a:solidFill>
-                            <a:srgbClr val="1F3050"/>
-                          </a:solidFill>
-                        </a:rPr>
-                        <a:t>$124</a:t>
-                      </a:r>
-                    </a:p>
-                  </a:txBody>
-                  <a:tcPr marL="54864" marR="54864" marT="18288" marB="18288">
-                    <a:solidFill>
-                      <a:srgbClr val="FFFFFF"/>
-                    </a:solidFill>
-                  </a:tcPr>
-                </a:tc>
-                <a:tc>
-                  <a:txBody>
-                    <a:bodyPr wrap="square"/>
-                    <a:lstStyle/>
-                    <a:p>
-                      <a:pPr algn="r"/>
-                      <a:r>
-                        <a:rPr sz="1000" b="0">
-                          <a:solidFill>
-                            <a:srgbClr val="1F3050"/>
-                          </a:solidFill>
-                        </a:rPr>
-                        <a:t>$3</a:t>
-                      </a:r>
-                    </a:p>
-                  </a:txBody>
-                  <a:tcPr marL="54864" marR="54864" marT="18288" marB="18288">
-                    <a:solidFill>
-                      <a:srgbClr val="FFFFFF"/>
-                    </a:solidFill>
-                  </a:tcPr>
-                </a:tc>
-              </a:tr>
-              <a:tr h="418011">
-                <a:tc>
-                  <a:txBody>
-                    <a:bodyPr wrap="square"/>
-                    <a:lstStyle/>
-                    <a:p>
-                      <a:pPr algn="l"/>
-                      <a:r>
-                        <a:rPr sz="1050" b="0">
-                          <a:solidFill>
-                            <a:srgbClr val="1F3050"/>
-                          </a:solidFill>
-                        </a:rPr>
-                        <a:t>validate_domain</a:t>
-                      </a:r>
-                    </a:p>
-                  </a:txBody>
-                  <a:tcPr marL="54864" marR="54864" marT="18288" marB="18288">
-                    <a:solidFill>
-                      <a:srgbClr val="F2F5FA"/>
-                    </a:solidFill>
-                  </a:tcPr>
-                </a:tc>
-                <a:tc>
-                  <a:txBody>
-                    <a:bodyPr wrap="square"/>
-                    <a:lstStyle/>
-                    <a:p>
-                      <a:pPr algn="r"/>
-                      <a:r>
-                        <a:rPr sz="1000" b="0">
-                          <a:solidFill>
-                            <a:srgbClr val="555555"/>
-                          </a:solidFill>
-                        </a:rPr>
-                        <a:t>2,160</a:t>
-                      </a:r>
-                    </a:p>
-                  </a:txBody>
-                  <a:tcPr marL="54864" marR="54864" marT="18288" marB="18288">
-                    <a:solidFill>
-                      <a:srgbClr val="F2F5FA"/>
-                    </a:solidFill>
-                  </a:tcPr>
-                </a:tc>
-                <a:tc>
-                  <a:txBody>
-                    <a:bodyPr wrap="square"/>
-                    <a:lstStyle/>
-                    <a:p>
-                      <a:pPr algn="r"/>
-                      <a:r>
-                        <a:rPr sz="1000" b="0">
-                          <a:solidFill>
-                            <a:srgbClr val="555555"/>
-                          </a:solidFill>
-                        </a:rPr>
-                        <a:t>6,612</a:t>
-                      </a:r>
-                    </a:p>
-                  </a:txBody>
-                  <a:tcPr marL="54864" marR="54864" marT="18288" marB="18288">
-                    <a:solidFill>
-                      <a:srgbClr val="F2F5FA"/>
-                    </a:solidFill>
-                  </a:tcPr>
-                </a:tc>
-                <a:tc>
-                  <a:txBody>
-                    <a:bodyPr wrap="square"/>
-                    <a:lstStyle/>
-                    <a:p>
-                      <a:pPr algn="r"/>
-                      <a:r>
-                        <a:rPr sz="1000" b="0">
-                          <a:solidFill>
-                            <a:srgbClr val="555555"/>
-                          </a:solidFill>
-                        </a:rPr>
-                        <a:t>2,004</a:t>
-                      </a:r>
-                    </a:p>
-                  </a:txBody>
-                  <a:tcPr marL="54864" marR="54864" marT="18288" marB="18288">
-                    <a:solidFill>
-                      <a:srgbClr val="F2F5FA"/>
-                    </a:solidFill>
-                  </a:tcPr>
-                </a:tc>
-                <a:tc>
-                  <a:txBody>
-                    <a:bodyPr wrap="square"/>
-                    <a:lstStyle/>
-                    <a:p>
-                      <a:pPr algn="r"/>
-                      <a:r>
-                        <a:rPr sz="1000" b="0">
-                          <a:solidFill>
-                            <a:srgbClr val="1F3050"/>
-                          </a:solidFill>
-                        </a:rPr>
-                        <a:t>$22</a:t>
-                      </a:r>
-                    </a:p>
-                  </a:txBody>
-                  <a:tcPr marL="54864" marR="54864" marT="18288" marB="18288">
-                    <a:solidFill>
-                      <a:srgbClr val="F2F5FA"/>
-                    </a:solidFill>
-                  </a:tcPr>
-                </a:tc>
-                <a:tc>
-                  <a:txBody>
-                    <a:bodyPr wrap="square"/>
-                    <a:lstStyle/>
-                    <a:p>
-                      <a:pPr algn="r"/>
-                      <a:r>
-                        <a:rPr sz="1000" b="0">
-                          <a:solidFill>
-                            <a:srgbClr val="1F3050"/>
-                          </a:solidFill>
-                        </a:rPr>
-                        <a:t>$6</a:t>
-                      </a:r>
-                    </a:p>
-                  </a:txBody>
-                  <a:tcPr marL="54864" marR="54864" marT="18288" marB="18288">
-                    <a:solidFill>
-                      <a:srgbClr val="F2F5FA"/>
-                    </a:solidFill>
-                  </a:tcPr>
-                </a:tc>
-                <a:tc>
-                  <a:txBody>
-                    <a:bodyPr wrap="square"/>
-                    <a:lstStyle/>
-                    <a:p>
-                      <a:pPr algn="r"/>
-                      <a:r>
-                        <a:rPr sz="1000" b="0">
-                          <a:solidFill>
-                            <a:srgbClr val="1F3050"/>
-                          </a:solidFill>
-                        </a:rPr>
-                        <a:t>$66</a:t>
-                      </a:r>
-                    </a:p>
-                  </a:txBody>
-                  <a:tcPr marL="54864" marR="54864" marT="18288" marB="18288">
-                    <a:solidFill>
-                      <a:srgbClr val="F2F5FA"/>
-                    </a:solidFill>
-                  </a:tcPr>
-                </a:tc>
-                <a:tc>
-                  <a:txBody>
-                    <a:bodyPr wrap="square"/>
-                    <a:lstStyle/>
-                    <a:p>
-                      <a:pPr algn="r"/>
-                      <a:r>
-                        <a:rPr sz="1000" b="0">
-                          <a:solidFill>
-                            <a:srgbClr val="1F3050"/>
-                          </a:solidFill>
-                        </a:rPr>
-                        <a:t>$2</a:t>
-                      </a:r>
-                    </a:p>
-                  </a:txBody>
-                  <a:tcPr marL="54864" marR="54864" marT="18288" marB="18288">
-                    <a:solidFill>
-                      <a:srgbClr val="F2F5FA"/>
-                    </a:solidFill>
-                  </a:tcPr>
-                </a:tc>
-              </a:tr>
-              <a:tr h="418011">
-                <a:tc>
-                  <a:txBody>
-                    <a:bodyPr wrap="square"/>
-                    <a:lstStyle/>
-                    <a:p>
-                      <a:pPr algn="l"/>
-                      <a:r>
-                        <a:rPr sz="1050" b="0">
-                          <a:solidFill>
-                            <a:srgbClr val="1F3050"/>
-                          </a:solidFill>
-                        </a:rPr>
-                        <a:t>validate_problem</a:t>
-                      </a:r>
-                    </a:p>
-                  </a:txBody>
-                  <a:tcPr marL="54864" marR="54864" marT="18288" marB="18288">
-                    <a:solidFill>
-                      <a:srgbClr val="FFFFFF"/>
-                    </a:solidFill>
-                  </a:tcPr>
-                </a:tc>
-                <a:tc>
-                  <a:txBody>
-                    <a:bodyPr wrap="square"/>
-                    <a:lstStyle/>
-                    <a:p>
-                      <a:pPr algn="r"/>
-                      <a:r>
-                        <a:rPr sz="1000" b="0">
-                          <a:solidFill>
-                            <a:srgbClr val="555555"/>
-                          </a:solidFill>
-                        </a:rPr>
-                        <a:t>3,600</a:t>
-                      </a:r>
-                    </a:p>
-                  </a:txBody>
-                  <a:tcPr marL="54864" marR="54864" marT="18288" marB="18288">
-                    <a:solidFill>
-                      <a:srgbClr val="FFFFFF"/>
-                    </a:solidFill>
-                  </a:tcPr>
-                </a:tc>
-                <a:tc>
-                  <a:txBody>
-                    <a:bodyPr wrap="square"/>
-                    <a:lstStyle/>
-                    <a:p>
-                      <a:pPr algn="r"/>
-                      <a:r>
-                        <a:rPr sz="1000" b="0">
-                          <a:solidFill>
-                            <a:srgbClr val="555555"/>
-                          </a:solidFill>
-                        </a:rPr>
-                        <a:t>8,047</a:t>
-                      </a:r>
-                    </a:p>
-                  </a:txBody>
-                  <a:tcPr marL="54864" marR="54864" marT="18288" marB="18288">
-                    <a:solidFill>
-                      <a:srgbClr val="FFFFFF"/>
-                    </a:solidFill>
-                  </a:tcPr>
-                </a:tc>
-                <a:tc>
-                  <a:txBody>
-                    <a:bodyPr wrap="square"/>
-                    <a:lstStyle/>
-                    <a:p>
-                      <a:pPr algn="r"/>
-                      <a:r>
-                        <a:rPr sz="1000" b="0">
-                          <a:solidFill>
-                            <a:srgbClr val="555555"/>
-                          </a:solidFill>
-                        </a:rPr>
-                        <a:t>2,376</a:t>
-                      </a:r>
-                    </a:p>
-                  </a:txBody>
-                  <a:tcPr marL="54864" marR="54864" marT="18288" marB="18288">
-                    <a:solidFill>
-                      <a:srgbClr val="FFFFFF"/>
-                    </a:solidFill>
-                  </a:tcPr>
-                </a:tc>
-                <a:tc>
-                  <a:txBody>
-                    <a:bodyPr wrap="square"/>
-                    <a:lstStyle/>
-                    <a:p>
-                      <a:pPr algn="r"/>
-                      <a:r>
-                        <a:rPr sz="1000" b="0">
-                          <a:solidFill>
-                            <a:srgbClr val="1F3050"/>
-                          </a:solidFill>
-                        </a:rPr>
-                        <a:t>$47</a:t>
-                      </a:r>
-                    </a:p>
-                  </a:txBody>
-                  <a:tcPr marL="54864" marR="54864" marT="18288" marB="18288">
-                    <a:solidFill>
-                      <a:srgbClr val="FFFFFF"/>
-                    </a:solidFill>
-                  </a:tcPr>
-                </a:tc>
-                <a:tc>
-                  <a:txBody>
-                    <a:bodyPr wrap="square"/>
-                    <a:lstStyle/>
-                    <a:p>
-                      <a:pPr algn="r"/>
-                      <a:r>
-                        <a:rPr sz="1000" b="0">
-                          <a:solidFill>
-                            <a:srgbClr val="1F3050"/>
-                          </a:solidFill>
-                        </a:rPr>
-                        <a:t>$13</a:t>
-                      </a:r>
-                    </a:p>
-                  </a:txBody>
-                  <a:tcPr marL="54864" marR="54864" marT="18288" marB="18288">
-                    <a:solidFill>
-                      <a:srgbClr val="FFFFFF"/>
-                    </a:solidFill>
-                  </a:tcPr>
-                </a:tc>
-                <a:tc>
-                  <a:txBody>
-                    <a:bodyPr wrap="square"/>
-                    <a:lstStyle/>
-                    <a:p>
-                      <a:pPr algn="r"/>
-                      <a:r>
-                        <a:rPr sz="1000" b="0">
-                          <a:solidFill>
-                            <a:srgbClr val="1F3050"/>
-                          </a:solidFill>
-                        </a:rPr>
-                        <a:t>$142</a:t>
-                      </a:r>
-                    </a:p>
-                  </a:txBody>
-                  <a:tcPr marL="54864" marR="54864" marT="18288" marB="18288">
-                    <a:solidFill>
-                      <a:srgbClr val="FFFFFF"/>
-                    </a:solidFill>
-                  </a:tcPr>
-                </a:tc>
-                <a:tc>
-                  <a:txBody>
-                    <a:bodyPr wrap="square"/>
-                    <a:lstStyle/>
-                    <a:p>
-                      <a:pPr algn="r"/>
-                      <a:r>
-                        <a:rPr sz="1000" b="0">
-                          <a:solidFill>
-                            <a:srgbClr val="1F3050"/>
-                          </a:solidFill>
-                        </a:rPr>
-                        <a:t>$3</a:t>
-                      </a:r>
-                    </a:p>
-                  </a:txBody>
-                  <a:tcPr marL="54864" marR="54864" marT="18288" marB="18288">
-                    <a:solidFill>
-                      <a:srgbClr val="FFFFFF"/>
-                    </a:solidFill>
-                  </a:tcPr>
-                </a:tc>
-              </a:tr>
-              <a:tr h="418011">
-                <a:tc>
-                  <a:txBody>
-                    <a:bodyPr wrap="square"/>
-                    <a:lstStyle/>
-                    <a:p>
-                      <a:pPr algn="l"/>
-                      <a:r>
-                        <a:rPr sz="1050" b="1">
-                          <a:solidFill>
-                            <a:srgbClr val="A03030"/>
-                          </a:solidFill>
-                        </a:rPr>
-                        <a:t>validate_plan</a:t>
-                      </a:r>
-                    </a:p>
-                  </a:txBody>
-                  <a:tcPr marL="54864" marR="54864" marT="18288" marB="18288">
-                    <a:solidFill>
-                      <a:srgbClr val="E2F0D9"/>
-                    </a:solidFill>
-                  </a:tcPr>
-                </a:tc>
-                <a:tc>
-                  <a:txBody>
-                    <a:bodyPr wrap="square"/>
-                    <a:lstStyle/>
-                    <a:p>
-                      <a:pPr algn="r"/>
-                      <a:r>
-                        <a:rPr sz="1000" b="0">
-                          <a:solidFill>
-                            <a:srgbClr val="555555"/>
-                          </a:solidFill>
-                        </a:rPr>
-                        <a:t>18,000</a:t>
-                      </a:r>
-                    </a:p>
-                  </a:txBody>
-                  <a:tcPr marL="54864" marR="54864" marT="18288" marB="18288">
-                    <a:solidFill>
-                      <a:srgbClr val="E2F0D9"/>
-                    </a:solidFill>
-                  </a:tcPr>
-                </a:tc>
-                <a:tc>
-                  <a:txBody>
-                    <a:bodyPr wrap="square"/>
-                    <a:lstStyle/>
-                    <a:p>
-                      <a:pPr algn="r"/>
-                      <a:r>
-                        <a:rPr sz="1000" b="0">
-                          <a:solidFill>
-                            <a:srgbClr val="555555"/>
-                          </a:solidFill>
-                        </a:rPr>
-                        <a:t>8,299</a:t>
-                      </a:r>
-                    </a:p>
-                  </a:txBody>
-                  <a:tcPr marL="54864" marR="54864" marT="18288" marB="18288">
-                    <a:solidFill>
-                      <a:srgbClr val="E2F0D9"/>
-                    </a:solidFill>
-                  </a:tcPr>
-                </a:tc>
-                <a:tc>
-                  <a:txBody>
-                    <a:bodyPr wrap="square"/>
-                    <a:lstStyle/>
-                    <a:p>
-                      <a:pPr algn="r"/>
-                      <a:r>
-                        <a:rPr sz="1000" b="0">
-                          <a:solidFill>
-                            <a:srgbClr val="555555"/>
-                          </a:solidFill>
-                        </a:rPr>
-                        <a:t>2,854</a:t>
-                      </a:r>
-                    </a:p>
-                  </a:txBody>
-                  <a:tcPr marL="54864" marR="54864" marT="18288" marB="18288">
-                    <a:solidFill>
-                      <a:srgbClr val="E2F0D9"/>
-                    </a:solidFill>
-                  </a:tcPr>
-                </a:tc>
-                <a:tc>
-                  <a:txBody>
-                    <a:bodyPr wrap="square"/>
-                    <a:lstStyle/>
-                    <a:p>
-                      <a:pPr algn="r"/>
-                      <a:r>
-                        <a:rPr sz="1000" b="1">
-                          <a:solidFill>
-                            <a:srgbClr val="1F3050"/>
-                          </a:solidFill>
-                        </a:rPr>
-                        <a:t>$276</a:t>
-                      </a:r>
-                    </a:p>
-                  </a:txBody>
-                  <a:tcPr marL="54864" marR="54864" marT="18288" marB="18288">
-                    <a:solidFill>
-                      <a:srgbClr val="E2F0D9"/>
-                    </a:solidFill>
-                  </a:tcPr>
-                </a:tc>
-                <a:tc>
-                  <a:txBody>
-                    <a:bodyPr wrap="square"/>
-                    <a:lstStyle/>
-                    <a:p>
-                      <a:pPr algn="r"/>
-                      <a:r>
-                        <a:rPr sz="1000" b="1">
-                          <a:solidFill>
-                            <a:srgbClr val="1F3050"/>
-                          </a:solidFill>
-                        </a:rPr>
-                        <a:t>$79</a:t>
-                      </a:r>
-                    </a:p>
-                  </a:txBody>
-                  <a:tcPr marL="54864" marR="54864" marT="18288" marB="18288">
-                    <a:solidFill>
-                      <a:srgbClr val="E2F0D9"/>
-                    </a:solidFill>
-                  </a:tcPr>
-                </a:tc>
-                <a:tc>
-                  <a:txBody>
-                    <a:bodyPr wrap="square"/>
-                    <a:lstStyle/>
-                    <a:p>
-                      <a:pPr algn="r"/>
-                      <a:r>
-                        <a:rPr sz="1000" b="1">
-                          <a:solidFill>
-                            <a:srgbClr val="1F3050"/>
-                          </a:solidFill>
-                        </a:rPr>
-                        <a:t>$828</a:t>
-                      </a:r>
-                    </a:p>
-                  </a:txBody>
-                  <a:tcPr marL="54864" marR="54864" marT="18288" marB="18288">
-                    <a:solidFill>
-                      <a:srgbClr val="E2F0D9"/>
-                    </a:solidFill>
-                  </a:tcPr>
-                </a:tc>
-                <a:tc>
-                  <a:txBody>
-                    <a:bodyPr wrap="square"/>
-                    <a:lstStyle/>
-                    <a:p>
-                      <a:pPr algn="r"/>
-                      <a:r>
-                        <a:rPr sz="1000" b="1">
-                          <a:solidFill>
-                            <a:srgbClr val="1F3050"/>
-                          </a:solidFill>
-                        </a:rPr>
-                        <a:t>$20</a:t>
-                      </a:r>
-                    </a:p>
-                  </a:txBody>
-                  <a:tcPr marL="54864" marR="54864" marT="18288" marB="18288">
-                    <a:solidFill>
-                      <a:srgbClr val="E2F0D9"/>
-                    </a:solidFill>
-                  </a:tcPr>
-                </a:tc>
-              </a:tr>
-              <a:tr h="418011">
-                <a:tc>
-                  <a:txBody>
-                    <a:bodyPr wrap="square"/>
-                    <a:lstStyle/>
-                    <a:p>
-                      <a:pPr algn="l"/>
-                      <a:r>
-                        <a:rPr sz="1050" b="0">
-                          <a:solidFill>
-                            <a:srgbClr val="1F3050"/>
-                          </a:solidFill>
-                        </a:rPr>
-                        <a:t>simulate</a:t>
-                      </a:r>
-                    </a:p>
-                  </a:txBody>
-                  <a:tcPr marL="54864" marR="54864" marT="18288" marB="18288">
-                    <a:solidFill>
-                      <a:srgbClr val="FFFFFF"/>
-                    </a:solidFill>
-                  </a:tcPr>
-                </a:tc>
-                <a:tc>
-                  <a:txBody>
-                    <a:bodyPr wrap="square"/>
-                    <a:lstStyle/>
-                    <a:p>
-                      <a:pPr algn="r"/>
-                      <a:r>
-                        <a:rPr sz="1000" b="0">
-                          <a:solidFill>
-                            <a:srgbClr val="555555"/>
-                          </a:solidFill>
-                        </a:rPr>
-                        <a:t>1,800</a:t>
-                      </a:r>
-                    </a:p>
-                  </a:txBody>
-                  <a:tcPr marL="54864" marR="54864" marT="18288" marB="18288">
-                    <a:solidFill>
-                      <a:srgbClr val="FFFFFF"/>
-                    </a:solidFill>
-                  </a:tcPr>
-                </a:tc>
-                <a:tc>
-                  <a:txBody>
-                    <a:bodyPr wrap="square"/>
-                    <a:lstStyle/>
-                    <a:p>
-                      <a:pPr algn="r"/>
-                      <a:r>
-                        <a:rPr sz="1000" b="0">
-                          <a:solidFill>
-                            <a:srgbClr val="555555"/>
-                          </a:solidFill>
-                        </a:rPr>
-                        <a:t>11,174</a:t>
-                      </a:r>
-                    </a:p>
-                  </a:txBody>
-                  <a:tcPr marL="54864" marR="54864" marT="18288" marB="18288">
-                    <a:solidFill>
-                      <a:srgbClr val="FFFFFF"/>
-                    </a:solidFill>
-                  </a:tcPr>
-                </a:tc>
-                <a:tc>
-                  <a:txBody>
-                    <a:bodyPr wrap="square"/>
-                    <a:lstStyle/>
-                    <a:p>
-                      <a:pPr algn="r"/>
-                      <a:r>
-                        <a:rPr sz="1000" b="0">
-                          <a:solidFill>
-                            <a:srgbClr val="555555"/>
-                          </a:solidFill>
-                        </a:rPr>
-                        <a:t>3,077</a:t>
-                      </a:r>
-                    </a:p>
-                  </a:txBody>
-                  <a:tcPr marL="54864" marR="54864" marT="18288" marB="18288">
-                    <a:solidFill>
-                      <a:srgbClr val="FFFFFF"/>
-                    </a:solidFill>
-                  </a:tcPr>
-                </a:tc>
-                <a:tc>
-                  <a:txBody>
-                    <a:bodyPr wrap="square"/>
-                    <a:lstStyle/>
-                    <a:p>
-                      <a:pPr algn="r"/>
-                      <a:r>
-                        <a:rPr sz="1000" b="0">
-                          <a:solidFill>
-                            <a:srgbClr val="1F3050"/>
-                          </a:solidFill>
-                        </a:rPr>
-                        <a:t>$31</a:t>
-                      </a:r>
-                    </a:p>
-                  </a:txBody>
-                  <a:tcPr marL="54864" marR="54864" marT="18288" marB="18288">
-                    <a:solidFill>
-                      <a:srgbClr val="FFFFFF"/>
-                    </a:solidFill>
-                  </a:tcPr>
-                </a:tc>
-                <a:tc>
-                  <a:txBody>
-                    <a:bodyPr wrap="square"/>
-                    <a:lstStyle/>
-                    <a:p>
-                      <a:pPr algn="r"/>
-                      <a:r>
-                        <a:rPr sz="1000" b="0">
-                          <a:solidFill>
-                            <a:srgbClr val="1F3050"/>
-                          </a:solidFill>
-                        </a:rPr>
-                        <a:t>$9</a:t>
-                      </a:r>
-                    </a:p>
-                  </a:txBody>
-                  <a:tcPr marL="54864" marR="54864" marT="18288" marB="18288">
-                    <a:solidFill>
-                      <a:srgbClr val="FFFFFF"/>
-                    </a:solidFill>
-                  </a:tcPr>
-                </a:tc>
-                <a:tc>
-                  <a:txBody>
-                    <a:bodyPr wrap="square"/>
-                    <a:lstStyle/>
-                    <a:p>
-                      <a:pPr algn="r"/>
-                      <a:r>
-                        <a:rPr sz="1000" b="0">
-                          <a:solidFill>
-                            <a:srgbClr val="1F3050"/>
-                          </a:solidFill>
-                        </a:rPr>
-                        <a:t>$94</a:t>
-                      </a:r>
-                    </a:p>
-                  </a:txBody>
-                  <a:tcPr marL="54864" marR="54864" marT="18288" marB="18288">
-                    <a:solidFill>
-                      <a:srgbClr val="FFFFFF"/>
-                    </a:solidFill>
-                  </a:tcPr>
-                </a:tc>
-                <a:tc>
-                  <a:txBody>
-                    <a:bodyPr wrap="square"/>
-                    <a:lstStyle/>
-                    <a:p>
-                      <a:pPr algn="r"/>
-                      <a:r>
-                        <a:rPr sz="1000" b="0">
-                          <a:solidFill>
-                            <a:srgbClr val="1F3050"/>
-                          </a:solidFill>
-                        </a:rPr>
-                        <a:t>$2</a:t>
-                      </a:r>
-                    </a:p>
-                  </a:txBody>
-                  <a:tcPr marL="54864" marR="54864" marT="18288" marB="18288">
-                    <a:solidFill>
-                      <a:srgbClr val="FFFFFF"/>
-                    </a:solidFill>
-                  </a:tcPr>
-                </a:tc>
-              </a:tr>
-              <a:tr h="418014">
-                <a:tc>
-                  <a:txBody>
-                    <a:bodyPr wrap="square"/>
-                    <a:lstStyle/>
-                    <a:p>
-                      <a:pPr algn="l"/>
-                      <a:r>
-                        <a:rPr sz="1050" b="1">
-                          <a:solidFill>
-                            <a:srgbClr val="FFFFFF"/>
-                          </a:solidFill>
-                        </a:rPr>
-                        <a:t>ALL TASKS</a:t>
-                      </a:r>
-                    </a:p>
-                  </a:txBody>
-                  <a:tcPr marL="54864" marR="54864" marT="18288" marB="18288">
-                    <a:solidFill>
-                      <a:srgbClr val="335588"/>
-                    </a:solidFill>
-                  </a:tcPr>
-                </a:tc>
-                <a:tc>
-                  <a:txBody>
-                    <a:bodyPr wrap="square"/>
-                    <a:lstStyle/>
-                    <a:p>
-                      <a:pPr algn="r"/>
-                      <a:r>
-                        <a:rPr sz="1000" b="1">
-                          <a:solidFill>
-                            <a:srgbClr val="FFFFFF"/>
-                          </a:solidFill>
-                        </a:rPr>
-                        <a:t>27,360</a:t>
-                      </a:r>
-                    </a:p>
-                  </a:txBody>
-                  <a:tcPr marL="54864" marR="54864" marT="18288" marB="18288">
-                    <a:solidFill>
-                      <a:srgbClr val="335588"/>
-                    </a:solidFill>
-                  </a:tcPr>
-                </a:tc>
-                <a:tc>
-                  <a:txBody>
-                    <a:bodyPr wrap="square"/>
-                    <a:lstStyle/>
-                    <a:p>
-                      <a:pPr algn="l"/>
-                      <a:r>
-                        <a:rPr sz="1000" b="0">
-                          <a:solidFill>
                             <a:srgbClr val="1F3050"/>
                           </a:solidFill>
                         </a:rPr>
                         <a:t/>
-                      </a:r>
-                    </a:p>
-                  </a:txBody>
-                  <a:tcPr marL="54864" marR="54864" marT="18288" marB="18288">
-                    <a:solidFill>
-                      <a:srgbClr val="335588"/>
-                    </a:solidFill>
-                  </a:tcPr>
-                </a:tc>
-                <a:tc>
-                  <a:txBody>
-                    <a:bodyPr wrap="square"/>
-                    <a:lstStyle/>
-                    <a:p>
-                      <a:pPr algn="l"/>
-                      <a:r>
-                        <a:rPr sz="1000" b="0">
-                          <a:solidFill>
-                            <a:srgbClr val="1F3050"/>
-                          </a:solidFill>
-                        </a:rPr>
-                        <a:t/>
-                      </a:r>
-                    </a:p>
-                  </a:txBody>
-                  <a:tcPr marL="54864" marR="54864" marT="18288" marB="18288">
-                    <a:solidFill>
-                      <a:srgbClr val="335588"/>
-                    </a:solidFill>
-                  </a:tcPr>
-                </a:tc>
-                <a:tc>
-                  <a:txBody>
-                    <a:bodyPr wrap="square"/>
-                    <a:lstStyle/>
-                    <a:p>
-                      <a:pPr algn="r"/>
-                      <a:r>
-                        <a:rPr sz="1050" b="1">
-                          <a:solidFill>
-                            <a:srgbClr val="FFFFFF"/>
-                          </a:solidFill>
-                        </a:rPr>
-                        <a:t>$418</a:t>
-                      </a:r>
-                    </a:p>
-                  </a:txBody>
-                  <a:tcPr marL="54864" marR="54864" marT="18288" marB="18288">
-                    <a:solidFill>
-                      <a:srgbClr val="335588"/>
-                    </a:solidFill>
-                  </a:tcPr>
-                </a:tc>
-                <a:tc>
-                  <a:txBody>
-                    <a:bodyPr wrap="square"/>
-                    <a:lstStyle/>
-                    <a:p>
-                      <a:pPr algn="r"/>
-                      <a:r>
-                        <a:rPr sz="1050" b="1">
-                          <a:solidFill>
-                            <a:srgbClr val="FFFFFF"/>
-                          </a:solidFill>
-                        </a:rPr>
-                        <a:t>$120</a:t>
-                      </a:r>
-                    </a:p>
-                  </a:txBody>
-                  <a:tcPr marL="54864" marR="54864" marT="18288" marB="18288">
-                    <a:solidFill>
-                      <a:srgbClr val="335588"/>
-                    </a:solidFill>
-                  </a:tcPr>
-                </a:tc>
-                <a:tc>
-                  <a:txBody>
-                    <a:bodyPr wrap="square"/>
-                    <a:lstStyle/>
-                    <a:p>
-                      <a:pPr algn="r"/>
-                      <a:r>
-                        <a:rPr sz="1050" b="1">
-                          <a:solidFill>
-                            <a:srgbClr val="FFFFFF"/>
-                          </a:solidFill>
-                        </a:rPr>
-                        <a:t>$1,254</a:t>
-                      </a:r>
-                    </a:p>
-                  </a:txBody>
-                  <a:tcPr marL="54864" marR="54864" marT="18288" marB="18288">
-                    <a:solidFill>
-                      <a:srgbClr val="335588"/>
-                    </a:solidFill>
-                  </a:tcPr>
-                </a:tc>
-                <a:tc>
-                  <a:txBody>
-                    <a:bodyPr wrap="square"/>
-                    <a:lstStyle/>
-                    <a:p>
-                      <a:pPr algn="r"/>
-                      <a:r>
-                        <a:rPr sz="1050" b="1">
-                          <a:solidFill>
-                            <a:srgbClr val="FFFFFF"/>
-                          </a:solidFill>
-                        </a:rPr>
-                        <a:t>$30</a:t>
                       </a:r>
                     </a:p>
                   </a:txBody>
@@ -5482,8 +5011,8 @@
         </p:nvSpPr>
         <p:spPr>
           <a:xfrm>
-            <a:off x="274320" y="4434840"/>
-            <a:ext cx="11612880" cy="1828800"/>
+            <a:off x="274320" y="4251960"/>
+            <a:ext cx="11612880" cy="2011680"/>
           </a:xfrm>
           <a:prstGeom prst="rect">
             <a:avLst/>
@@ -5517,7 +5046,7 @@
                   <a:srgbClr val="1F3050"/>
                 </a:solidFill>
               </a:rPr>
-              <a:t>▪ validate_plan = 66% of every bill.  </a:t>
+              <a:t>▪ validate_plan is still the bill — 66% of no-tools.  </a:t>
             </a:r>
             <a:r>
               <a:rPr sz="1050">
@@ -5525,7 +5054,7 @@
                   <a:srgbClr val="555555"/>
                 </a:solidFill>
               </a:rPr>
-              <a:t>It runs 10 plan fixtures (b1-b5 buggy + v1-v5 valid) × 100 problems × variants × think = 18,000 of 27,360 trials. The #1 cut target (slide 3).</a:t>
+              <a:t>$25.6 of $39. 10 plan fixtures (5 buggy + 5 valid) × 100 problems × 3 variants = 3,000 of 4,560 trials.</a:t>
             </a:r>
           </a:p>
           <a:p>
@@ -5540,7 +5069,7 @@
                   <a:srgbClr val="1F3050"/>
                 </a:solidFill>
               </a:rPr>
-              <a:t>▪ with-tools input dwarfs no-tools.  </a:t>
+              <a:t>▪ With-tools input is 8–80× the no-tools input.  </a:t>
             </a:r>
             <a:r>
               <a:rPr sz="1050">
@@ -5548,7 +5077,7 @@
                   <a:srgbClr val="555555"/>
                 </a:solidFill>
               </a:rPr>
-              <a:t>solve/simulate carry 11-17K input tok/trial — the tool loop re-bills domain+schemas+history each turn; caching that prefix is the main input lever.</a:t>
+              <a:t>the loop re-bills domain + 3.6k-tok schema + history every turn — and it is MODEL-SPECIFIC: Haiku loops to 50k on solve (Sonnet 19k); Sonnet pulls 141k on simulate (Haiku 78k, then overflows its 200K context).</a:t>
             </a:r>
           </a:p>
           <a:p>
@@ -5563,7 +5092,7 @@
                   <a:srgbClr val="1F3050"/>
                 </a:solidFill>
               </a:rPr>
-              <a:t>▪ $/trial = task $ ÷ trials.  </a:t>
+              <a:t>▪ That model-specificity is why WT projection is ± wide.  </a:t>
             </a:r>
             <a:r>
               <a:rPr sz="1050">
@@ -5571,7 +5100,7 @@
                   <a:srgbClr val="555555"/>
                 </a:solidFill>
               </a:rPr>
-              <a:t>e.g. validate_plan on Gemini = $79/18,000 ≈ $0.004/prompt; on Sonnet ≈ $0.046; on Qwen ≈ $0.001.</a:t>
+              <a:t>no-tools transfers cleanly across models (terse output, small tokens); with-tools does not — flag any un-measured WT number.</a:t>
             </a:r>
           </a:p>
         </p:txBody>
@@ -5604,7 +5133,7 @@
                   <a:srgbClr val="555555"/>
                 </a:solidFill>
               </a:rPr>
-              <a:t>Discounted (no-tools Batch −50%; with-tools input-cache ×0.5). Per-task token means averaged over the task's 4 cells weighted by trial count. Source: sweep5v2 Qwen3.5-9B corpus.</a:t>
+              <a:t>NT $ measured (canonical corpus; anon +~8%, both = $81.51). WT $ = plain-only (4,560) projection from the 75-trial probe — validate_plan n=49 solid, other cells n=6–8 (directional). Tokens cumulative across the agent loop; Haiku simulate averaged over attempts incl. 1 ctx-overflow.</a:t>
             </a:r>
           </a:p>
         </p:txBody>
@@ -5655,7 +5184,7 @@
                   <a:srgbClr val="1F3050"/>
                 </a:solidFill>
               </a:rPr>
-              <a:t>Cutting Cost by Cutting Volume</a:t>
+              <a:t>Cross-Provider Single-Tool Cost — One Corpus, think-off</a:t>
             </a:r>
           </a:p>
         </p:txBody>
@@ -5669,7 +5198,7 @@
         <p:spPr>
           <a:xfrm>
             <a:off x="274320" y="658368"/>
-            <a:ext cx="11612880" cy="365760"/>
+            <a:ext cx="11612880" cy="384048"/>
           </a:xfrm>
           <a:prstGeom prst="rect">
             <a:avLst/>
@@ -5677,7 +5206,7 @@
           <a:noFill/>
         </p:spPr>
         <p:txBody>
-          <a:bodyPr wrap="none">
+          <a:bodyPr wrap="square">
             <a:spAutoFit/>
           </a:bodyPr>
           <a:lstStyle/>
@@ -5688,7 +5217,7 @@
                   <a:srgbClr val="555555"/>
                 </a:solidFill>
               </a:rPr>
-              <a:t>% reductions are model-independent (token structure is fixed) — they transfer to any pair. $ shown for the recommended Haiku + Gemini Flash-Lite pair (sweep5)</a:t>
+              <a:t>● measured (own Claude-API tokens)   ○ projected (re-price the mean measured token profile).  Plain variants · no-tools = Batch −50% · with-tools = LIST (no batch, no caching).</a:t>
             </a:r>
           </a:p>
         </p:txBody>
@@ -5702,8 +5231,8 @@
           <p:nvPr/>
         </p:nvGraphicFramePr>
         <p:xfrm>
-          <a:off x="274320" y="1234440"/>
-          <a:ext cx="10058400" cy="3383280"/>
+          <a:off x="274320" y="1170432"/>
+          <a:ext cx="8823960" cy="3611880"/>
         </p:xfrm>
         <a:graphic>
           <a:graphicData uri="http://schemas.openxmlformats.org/drawingml/2006/table">
@@ -5712,25 +5241,27 @@
                 <a:tableStyleId>{5C22544A-7EE6-4342-B048-85BDC9FD1C3A}</a:tableStyleId>
               </a:tblPr>
               <a:tblGrid>
-                <a:gridCol w="3154680"/>
-                <a:gridCol w="1143000"/>
-                <a:gridCol w="1600200"/>
-                <a:gridCol w="4160520"/>
+                <a:gridCol w="960120"/>
+                <a:gridCol w="2468880"/>
+                <a:gridCol w="1280160"/>
+                <a:gridCol w="1417320"/>
+                <a:gridCol w="1325880"/>
+                <a:gridCol w="1371600"/>
               </a:tblGrid>
-              <a:tr h="375920">
-                <a:tc>
-                  <a:txBody>
-                    <a:bodyPr wrap="square"/>
-                    <a:lstStyle/>
-                    <a:p>
-                      <a:pPr algn="l"/>
-                      <a:r>
-                        <a:rPr sz="1050" b="1">
+              <a:tr h="300990">
+                <a:tc>
+                  <a:txBody>
+                    <a:bodyPr wrap="square"/>
+                    <a:lstStyle/>
+                    <a:p>
+                      <a:pPr algn="ctr"/>
+                      <a:r>
+                        <a:rPr sz="1000" b="1">
                           <a:solidFill>
                             <a:srgbClr val="FFFFFF"/>
                           </a:solidFill>
                         </a:rPr>
-                        <a:t>Scenario</a:t>
+                        <a:t>Tier</a:t>
                       </a:r>
                     </a:p>
                   </a:txBody>
@@ -5745,14 +5276,59 @@
                     <a:bodyPr wrap="square"/>
                     <a:lstStyle/>
                     <a:p>
+                      <a:pPr algn="l"/>
+                      <a:r>
+                        <a:rPr sz="1000" b="1">
+                          <a:solidFill>
+                            <a:srgbClr val="FFFFFF"/>
+                          </a:solidFill>
+                        </a:rPr>
+                        <a:t>Model</a:t>
+                      </a:r>
+                    </a:p>
+                  </a:txBody>
+                  <a:tcPr marL="54864" marR="54864" marT="18288" marB="18288">
+                    <a:solidFill>
+                      <a:srgbClr val="335588"/>
+                    </a:solidFill>
+                  </a:tcPr>
+                </a:tc>
+                <a:tc>
+                  <a:txBody>
+                    <a:bodyPr wrap="square"/>
+                    <a:lstStyle/>
+                    <a:p>
+                      <a:pPr algn="l"/>
+                      <a:r>
+                        <a:rPr sz="1000" b="1">
+                          <a:solidFill>
+                            <a:srgbClr val="FFFFFF"/>
+                          </a:solidFill>
+                        </a:rPr>
+                        <a:t>Provider</a:t>
+                      </a:r>
+                    </a:p>
+                  </a:txBody>
+                  <a:tcPr marL="54864" marR="54864" marT="18288" marB="18288">
+                    <a:solidFill>
+                      <a:srgbClr val="335588"/>
+                    </a:solidFill>
+                  </a:tcPr>
+                </a:tc>
+                <a:tc>
+                  <a:txBody>
+                    <a:bodyPr wrap="square"/>
+                    <a:lstStyle/>
+                    <a:p>
                       <a:pPr algn="ctr"/>
                       <a:r>
-                        <a:rPr sz="1050" b="1">
+                        <a:rPr sz="1000" b="1">
                           <a:solidFill>
                             <a:srgbClr val="FFFFFF"/>
                           </a:solidFill>
                         </a:rPr>
-                        <a:t>% of full</a:t>
+                        <a:t>$/Mtok
+in / out</a:t>
                       </a:r>
                     </a:p>
                   </a:txBody>
@@ -5769,12 +5345,13 @@
                     <a:p>
                       <a:pPr algn="ctr"/>
                       <a:r>
-                        <a:rPr sz="1050" b="1">
+                        <a:rPr sz="1000" b="1">
                           <a:solidFill>
                             <a:srgbClr val="FFFFFF"/>
                           </a:solidFill>
                         </a:rPr>
-                        <a:t>Haiku+Gemini $</a:t>
+                        <a:t>No-tools
+(batch)</a:t>
                       </a:r>
                     </a:p>
                   </a:txBody>
@@ -5789,14 +5366,15 @@
                     <a:bodyPr wrap="square"/>
                     <a:lstStyle/>
                     <a:p>
-                      <a:pPr algn="l"/>
-                      <a:r>
-                        <a:rPr sz="1050" b="1">
+                      <a:pPr algn="ctr"/>
+                      <a:r>
+                        <a:rPr sz="1000" b="1">
                           <a:solidFill>
                             <a:srgbClr val="FFFFFF"/>
                           </a:solidFill>
                         </a:rPr>
-                        <a:t>Lever</a:t>
+                        <a:t>With-tools
+(list)</a:t>
                       </a:r>
                     </a:p>
                   </a:txBody>
@@ -5807,26 +5385,70 @@
                   </a:tcPr>
                 </a:tc>
               </a:tr>
-              <a:tr h="375920">
-                <a:tc>
-                  <a:txBody>
-                    <a:bodyPr wrap="square"/>
-                    <a:lstStyle/>
-                    <a:p>
-                      <a:pPr algn="l"/>
-                      <a:r>
-                        <a:rPr sz="1050" b="1">
-                          <a:solidFill>
-                            <a:srgbClr val="1F3050"/>
-                          </a:solidFill>
-                        </a:rPr>
-                        <a:t>FULL (baseline)</a:t>
-                      </a:r>
-                    </a:p>
-                  </a:txBody>
-                  <a:tcPr marL="54864" marR="54864" marT="18288" marB="18288">
-                    <a:solidFill>
-                      <a:srgbClr val="FFFFFF"/>
+              <a:tr h="300990">
+                <a:tc>
+                  <a:txBody>
+                    <a:bodyPr wrap="square"/>
+                    <a:lstStyle/>
+                    <a:p>
+                      <a:pPr algn="l"/>
+                      <a:r>
+                        <a:rPr sz="850" b="1">
+                          <a:solidFill>
+                            <a:srgbClr val="335588"/>
+                          </a:solidFill>
+                        </a:rPr>
+                        <a:t>FRONTIER</a:t>
+                      </a:r>
+                    </a:p>
+                  </a:txBody>
+                  <a:tcPr marL="54864" marR="54864" marT="18288" marB="18288">
+                    <a:solidFill>
+                      <a:srgbClr val="E2F0D9"/>
+                    </a:solidFill>
+                  </a:tcPr>
+                </a:tc>
+                <a:tc>
+                  <a:txBody>
+                    <a:bodyPr wrap="square"/>
+                    <a:lstStyle/>
+                    <a:p>
+                      <a:pPr algn="l"/>
+                      <a:r>
+                        <a:rPr sz="1000" b="1">
+                          <a:solidFill>
+                            <a:srgbClr val="1F3050"/>
+                          </a:solidFill>
+                        </a:rPr>
+                        <a:t>● Sonnet 4.6</a:t>
+                      </a:r>
+                    </a:p>
+                  </a:txBody>
+                  <a:tcPr marL="54864" marR="54864" marT="18288" marB="18288">
+                    <a:solidFill>
+                      <a:srgbClr val="E2F0D9"/>
+                    </a:solidFill>
+                  </a:tcPr>
+                </a:tc>
+                <a:tc>
+                  <a:txBody>
+                    <a:bodyPr wrap="square"/>
+                    <a:lstStyle/>
+                    <a:p>
+                      <a:pPr algn="l"/>
+                      <a:r>
+                        <a:rPr sz="900" b="0">
+                          <a:solidFill>
+                            <a:srgbClr val="555555"/>
+                          </a:solidFill>
+                        </a:rPr>
+                        <a:t>Anthropic</a:t>
+                      </a:r>
+                    </a:p>
+                  </a:txBody>
+                  <a:tcPr marL="54864" marR="54864" marT="18288" marB="18288">
+                    <a:solidFill>
+                      <a:srgbClr val="E2F0D9"/>
                     </a:solidFill>
                   </a:tcPr>
                 </a:tc>
@@ -5837,18 +5459,18 @@
                     <a:p>
                       <a:pPr algn="ctr"/>
                       <a:r>
-                        <a:rPr sz="1100" b="1">
-                          <a:solidFill>
-                            <a:srgbClr val="1F3050"/>
-                          </a:solidFill>
-                        </a:rPr>
-                        <a:t>100%</a:t>
-                      </a:r>
-                    </a:p>
-                  </a:txBody>
-                  <a:tcPr marL="54864" marR="54864" marT="18288" marB="18288">
-                    <a:solidFill>
-                      <a:srgbClr val="FFFFFF"/>
+                        <a:rPr sz="1000" b="0">
+                          <a:solidFill>
+                            <a:srgbClr val="555555"/>
+                          </a:solidFill>
+                        </a:rPr>
+                        <a:t>$3 / $15</a:t>
+                      </a:r>
+                    </a:p>
+                  </a:txBody>
+                  <a:tcPr marL="54864" marR="54864" marT="18288" marB="18288">
+                    <a:solidFill>
+                      <a:srgbClr val="E2F0D9"/>
                     </a:solidFill>
                   </a:tcPr>
                 </a:tc>
@@ -5859,64 +5481,242 @@
                     <a:p>
                       <a:pPr algn="r"/>
                       <a:r>
-                        <a:rPr sz="1050" b="0">
-                          <a:solidFill>
-                            <a:srgbClr val="1F3050"/>
-                          </a:solidFill>
-                        </a:rPr>
-                        <a:t>$537</a:t>
-                      </a:r>
-                    </a:p>
-                  </a:txBody>
-                  <a:tcPr marL="54864" marR="54864" marT="18288" marB="18288">
-                    <a:solidFill>
-                      <a:srgbClr val="FFFFFF"/>
-                    </a:solidFill>
-                  </a:tcPr>
-                </a:tc>
-                <a:tc>
-                  <a:txBody>
-                    <a:bodyPr wrap="square"/>
-                    <a:lstStyle/>
-                    <a:p>
-                      <a:pPr algn="l"/>
-                      <a:r>
-                        <a:rPr sz="950" b="0">
+                        <a:rPr sz="1000" b="0">
+                          <a:solidFill>
+                            <a:srgbClr val="1F3050"/>
+                          </a:solidFill>
+                        </a:rPr>
+                        <a:t>$39</a:t>
+                      </a:r>
+                    </a:p>
+                  </a:txBody>
+                  <a:tcPr marL="54864" marR="54864" marT="18288" marB="18288">
+                    <a:solidFill>
+                      <a:srgbClr val="E2F0D9"/>
+                    </a:solidFill>
+                  </a:tcPr>
+                </a:tc>
+                <a:tc>
+                  <a:txBody>
+                    <a:bodyPr wrap="square"/>
+                    <a:lstStyle/>
+                    <a:p>
+                      <a:pPr algn="r"/>
+                      <a:r>
+                        <a:rPr sz="1000" b="1">
+                          <a:solidFill>
+                            <a:srgbClr val="1F3050"/>
+                          </a:solidFill>
+                        </a:rPr>
+                        <a:t>$449</a:t>
+                      </a:r>
+                    </a:p>
+                  </a:txBody>
+                  <a:tcPr marL="54864" marR="54864" marT="18288" marB="18288">
+                    <a:solidFill>
+                      <a:srgbClr val="E2F0D9"/>
+                    </a:solidFill>
+                  </a:tcPr>
+                </a:tc>
+              </a:tr>
+              <a:tr h="300990">
+                <a:tc>
+                  <a:txBody>
+                    <a:bodyPr wrap="square"/>
+                    <a:lstStyle/>
+                    <a:p>
+                      <a:pPr algn="l"/>
+                      <a:r>
+                        <a:rPr sz="850" b="1">
+                          <a:solidFill>
+                            <a:srgbClr val="335588"/>
+                          </a:solidFill>
+                        </a:rPr>
+                        <a:t/>
+                      </a:r>
+                    </a:p>
+                  </a:txBody>
+                  <a:tcPr marL="54864" marR="54864" marT="18288" marB="18288">
+                    <a:solidFill>
+                      <a:srgbClr val="ECF1F8"/>
+                    </a:solidFill>
+                  </a:tcPr>
+                </a:tc>
+                <a:tc>
+                  <a:txBody>
+                    <a:bodyPr wrap="square"/>
+                    <a:lstStyle/>
+                    <a:p>
+                      <a:pPr algn="l"/>
+                      <a:r>
+                        <a:rPr sz="1000" b="0">
+                          <a:solidFill>
+                            <a:srgbClr val="1F3050"/>
+                          </a:solidFill>
+                        </a:rPr>
+                        <a:t>○ GPT-5.5</a:t>
+                      </a:r>
+                    </a:p>
+                  </a:txBody>
+                  <a:tcPr marL="54864" marR="54864" marT="18288" marB="18288">
+                    <a:solidFill>
+                      <a:srgbClr val="ECF1F8"/>
+                    </a:solidFill>
+                  </a:tcPr>
+                </a:tc>
+                <a:tc>
+                  <a:txBody>
+                    <a:bodyPr wrap="square"/>
+                    <a:lstStyle/>
+                    <a:p>
+                      <a:pPr algn="l"/>
+                      <a:r>
+                        <a:rPr sz="900" b="0">
                           <a:solidFill>
                             <a:srgbClr val="555555"/>
                           </a:solidFill>
                         </a:rPr>
-                        <a:t>all 5 tasks · 20 domains · 6+3 variants · both think</a:t>
-                      </a:r>
-                    </a:p>
-                  </a:txBody>
-                  <a:tcPr marL="54864" marR="54864" marT="18288" marB="18288">
-                    <a:solidFill>
-                      <a:srgbClr val="FFFFFF"/>
+                        <a:t>OpenAI</a:t>
+                      </a:r>
+                    </a:p>
+                  </a:txBody>
+                  <a:tcPr marL="54864" marR="54864" marT="18288" marB="18288">
+                    <a:solidFill>
+                      <a:srgbClr val="ECF1F8"/>
+                    </a:solidFill>
+                  </a:tcPr>
+                </a:tc>
+                <a:tc>
+                  <a:txBody>
+                    <a:bodyPr wrap="square"/>
+                    <a:lstStyle/>
+                    <a:p>
+                      <a:pPr algn="ctr"/>
+                      <a:r>
+                        <a:rPr sz="1000" b="0">
+                          <a:solidFill>
+                            <a:srgbClr val="555555"/>
+                          </a:solidFill>
+                        </a:rPr>
+                        <a:t>$5 / $30</a:t>
+                      </a:r>
+                    </a:p>
+                  </a:txBody>
+                  <a:tcPr marL="54864" marR="54864" marT="18288" marB="18288">
+                    <a:solidFill>
+                      <a:srgbClr val="ECF1F8"/>
+                    </a:solidFill>
+                  </a:tcPr>
+                </a:tc>
+                <a:tc>
+                  <a:txBody>
+                    <a:bodyPr wrap="square"/>
+                    <a:lstStyle/>
+                    <a:p>
+                      <a:pPr algn="r"/>
+                      <a:r>
+                        <a:rPr sz="1000" b="0">
+                          <a:solidFill>
+                            <a:srgbClr val="1F3050"/>
+                          </a:solidFill>
+                        </a:rPr>
+                        <a:t>$86</a:t>
+                      </a:r>
+                    </a:p>
+                  </a:txBody>
+                  <a:tcPr marL="54864" marR="54864" marT="18288" marB="18288">
+                    <a:solidFill>
+                      <a:srgbClr val="ECF1F8"/>
+                    </a:solidFill>
+                  </a:tcPr>
+                </a:tc>
+                <a:tc>
+                  <a:txBody>
+                    <a:bodyPr wrap="square"/>
+                    <a:lstStyle/>
+                    <a:p>
+                      <a:pPr algn="r"/>
+                      <a:r>
+                        <a:rPr sz="1000" b="1">
+                          <a:solidFill>
+                            <a:srgbClr val="1F3050"/>
+                          </a:solidFill>
+                        </a:rPr>
+                        <a:t>$788</a:t>
+                      </a:r>
+                    </a:p>
+                  </a:txBody>
+                  <a:tcPr marL="54864" marR="54864" marT="18288" marB="18288">
+                    <a:solidFill>
+                      <a:srgbClr val="ECF1F8"/>
                     </a:solidFill>
                   </a:tcPr>
                 </a:tc>
               </a:tr>
-              <a:tr h="375920">
-                <a:tc>
-                  <a:txBody>
-                    <a:bodyPr wrap="square"/>
-                    <a:lstStyle/>
-                    <a:p>
-                      <a:pPr algn="l"/>
-                      <a:r>
-                        <a:rPr sz="1050" b="0">
-                          <a:solidFill>
-                            <a:srgbClr val="1F3050"/>
-                          </a:solidFill>
-                        </a:rPr>
-                        <a:t>validate_plan 10→4 fixtures</a:t>
-                      </a:r>
-                    </a:p>
-                  </a:txBody>
-                  <a:tcPr marL="54864" marR="54864" marT="18288" marB="18288">
-                    <a:solidFill>
-                      <a:srgbClr val="F2F5FA"/>
+              <a:tr h="300990">
+                <a:tc>
+                  <a:txBody>
+                    <a:bodyPr wrap="square"/>
+                    <a:lstStyle/>
+                    <a:p>
+                      <a:pPr algn="l"/>
+                      <a:r>
+                        <a:rPr sz="850" b="1">
+                          <a:solidFill>
+                            <a:srgbClr val="335588"/>
+                          </a:solidFill>
+                        </a:rPr>
+                        <a:t/>
+                      </a:r>
+                    </a:p>
+                  </a:txBody>
+                  <a:tcPr marL="54864" marR="54864" marT="18288" marB="18288">
+                    <a:solidFill>
+                      <a:srgbClr val="ECF1F8"/>
+                    </a:solidFill>
+                  </a:tcPr>
+                </a:tc>
+                <a:tc>
+                  <a:txBody>
+                    <a:bodyPr wrap="square"/>
+                    <a:lstStyle/>
+                    <a:p>
+                      <a:pPr algn="l"/>
+                      <a:r>
+                        <a:rPr sz="1000" b="0">
+                          <a:solidFill>
+                            <a:srgbClr val="1F3050"/>
+                          </a:solidFill>
+                        </a:rPr>
+                        <a:t>○ Gemini 3.1 Pro</a:t>
+                      </a:r>
+                    </a:p>
+                  </a:txBody>
+                  <a:tcPr marL="54864" marR="54864" marT="18288" marB="18288">
+                    <a:solidFill>
+                      <a:srgbClr val="ECF1F8"/>
+                    </a:solidFill>
+                  </a:tcPr>
+                </a:tc>
+                <a:tc>
+                  <a:txBody>
+                    <a:bodyPr wrap="square"/>
+                    <a:lstStyle/>
+                    <a:p>
+                      <a:pPr algn="l"/>
+                      <a:r>
+                        <a:rPr sz="900" b="0">
+                          <a:solidFill>
+                            <a:srgbClr val="555555"/>
+                          </a:solidFill>
+                        </a:rPr>
+                        <a:t>Google</a:t>
+                      </a:r>
+                    </a:p>
+                  </a:txBody>
+                  <a:tcPr marL="54864" marR="54864" marT="18288" marB="18288">
+                    <a:solidFill>
+                      <a:srgbClr val="ECF1F8"/>
                     </a:solidFill>
                   </a:tcPr>
                 </a:tc>
@@ -5927,18 +5727,18 @@
                     <a:p>
                       <a:pPr algn="ctr"/>
                       <a:r>
-                        <a:rPr sz="1100" b="1">
-                          <a:solidFill>
-                            <a:srgbClr val="1F3050"/>
-                          </a:solidFill>
-                        </a:rPr>
-                        <a:t>60%</a:t>
-                      </a:r>
-                    </a:p>
-                  </a:txBody>
-                  <a:tcPr marL="54864" marR="54864" marT="18288" marB="18288">
-                    <a:solidFill>
-                      <a:srgbClr val="F2F5FA"/>
+                        <a:rPr sz="1000" b="0">
+                          <a:solidFill>
+                            <a:srgbClr val="555555"/>
+                          </a:solidFill>
+                        </a:rPr>
+                        <a:t>$2 / $12</a:t>
+                      </a:r>
+                    </a:p>
+                  </a:txBody>
+                  <a:tcPr marL="54864" marR="54864" marT="18288" marB="18288">
+                    <a:solidFill>
+                      <a:srgbClr val="ECF1F8"/>
                     </a:solidFill>
                   </a:tcPr>
                 </a:tc>
@@ -5949,64 +5749,242 @@
                     <a:p>
                       <a:pPr algn="r"/>
                       <a:r>
-                        <a:rPr sz="1050" b="0">
-                          <a:solidFill>
-                            <a:srgbClr val="1F3050"/>
-                          </a:solidFill>
-                        </a:rPr>
-                        <a:t>$325</a:t>
-                      </a:r>
-                    </a:p>
-                  </a:txBody>
-                  <a:tcPr marL="54864" marR="54864" marT="18288" marB="18288">
-                    <a:solidFill>
-                      <a:srgbClr val="F2F5FA"/>
-                    </a:solidFill>
-                  </a:tcPr>
-                </a:tc>
-                <a:tc>
-                  <a:txBody>
-                    <a:bodyPr wrap="square"/>
-                    <a:lstStyle/>
-                    <a:p>
-                      <a:pPr algn="l"/>
-                      <a:r>
-                        <a:rPr sz="950" b="0">
+                        <a:rPr sz="1000" b="0">
+                          <a:solidFill>
+                            <a:srgbClr val="1F3050"/>
+                          </a:solidFill>
+                        </a:rPr>
+                        <a:t>$34</a:t>
+                      </a:r>
+                    </a:p>
+                  </a:txBody>
+                  <a:tcPr marL="54864" marR="54864" marT="18288" marB="18288">
+                    <a:solidFill>
+                      <a:srgbClr val="ECF1F8"/>
+                    </a:solidFill>
+                  </a:tcPr>
+                </a:tc>
+                <a:tc>
+                  <a:txBody>
+                    <a:bodyPr wrap="square"/>
+                    <a:lstStyle/>
+                    <a:p>
+                      <a:pPr algn="r"/>
+                      <a:r>
+                        <a:rPr sz="1000" b="1">
+                          <a:solidFill>
+                            <a:srgbClr val="1F3050"/>
+                          </a:solidFill>
+                        </a:rPr>
+                        <a:t>$315</a:t>
+                      </a:r>
+                    </a:p>
+                  </a:txBody>
+                  <a:tcPr marL="54864" marR="54864" marT="18288" marB="18288">
+                    <a:solidFill>
+                      <a:srgbClr val="ECF1F8"/>
+                    </a:solidFill>
+                  </a:tcPr>
+                </a:tc>
+              </a:tr>
+              <a:tr h="300990">
+                <a:tc>
+                  <a:txBody>
+                    <a:bodyPr wrap="square"/>
+                    <a:lstStyle/>
+                    <a:p>
+                      <a:pPr algn="l"/>
+                      <a:r>
+                        <a:rPr sz="850" b="1">
+                          <a:solidFill>
+                            <a:srgbClr val="335588"/>
+                          </a:solidFill>
+                        </a:rPr>
+                        <a:t/>
+                      </a:r>
+                    </a:p>
+                  </a:txBody>
+                  <a:tcPr marL="54864" marR="54864" marT="18288" marB="18288">
+                    <a:solidFill>
+                      <a:srgbClr val="ECF1F8"/>
+                    </a:solidFill>
+                  </a:tcPr>
+                </a:tc>
+                <a:tc>
+                  <a:txBody>
+                    <a:bodyPr wrap="square"/>
+                    <a:lstStyle/>
+                    <a:p>
+                      <a:pPr algn="l"/>
+                      <a:r>
+                        <a:rPr sz="1000" b="0">
+                          <a:solidFill>
+                            <a:srgbClr val="1F3050"/>
+                          </a:solidFill>
+                        </a:rPr>
+                        <a:t>○ Qwen3.7-Max</a:t>
+                      </a:r>
+                    </a:p>
+                  </a:txBody>
+                  <a:tcPr marL="54864" marR="54864" marT="18288" marB="18288">
+                    <a:solidFill>
+                      <a:srgbClr val="ECF1F8"/>
+                    </a:solidFill>
+                  </a:tcPr>
+                </a:tc>
+                <a:tc>
+                  <a:txBody>
+                    <a:bodyPr wrap="square"/>
+                    <a:lstStyle/>
+                    <a:p>
+                      <a:pPr algn="l"/>
+                      <a:r>
+                        <a:rPr sz="900" b="0">
                           <a:solidFill>
                             <a:srgbClr val="555555"/>
                           </a:solidFill>
                         </a:rPr>
-                        <a:t>drop redundant plan fixtures</a:t>
-                      </a:r>
-                    </a:p>
-                  </a:txBody>
-                  <a:tcPr marL="54864" marR="54864" marT="18288" marB="18288">
-                    <a:solidFill>
-                      <a:srgbClr val="F2F5FA"/>
+                        <a:t>Alibaba</a:t>
+                      </a:r>
+                    </a:p>
+                  </a:txBody>
+                  <a:tcPr marL="54864" marR="54864" marT="18288" marB="18288">
+                    <a:solidFill>
+                      <a:srgbClr val="ECF1F8"/>
+                    </a:solidFill>
+                  </a:tcPr>
+                </a:tc>
+                <a:tc>
+                  <a:txBody>
+                    <a:bodyPr wrap="square"/>
+                    <a:lstStyle/>
+                    <a:p>
+                      <a:pPr algn="ctr"/>
+                      <a:r>
+                        <a:rPr sz="1000" b="0">
+                          <a:solidFill>
+                            <a:srgbClr val="555555"/>
+                          </a:solidFill>
+                        </a:rPr>
+                        <a:t>$2.5 / $7.5</a:t>
+                      </a:r>
+                    </a:p>
+                  </a:txBody>
+                  <a:tcPr marL="54864" marR="54864" marT="18288" marB="18288">
+                    <a:solidFill>
+                      <a:srgbClr val="ECF1F8"/>
+                    </a:solidFill>
+                  </a:tcPr>
+                </a:tc>
+                <a:tc>
+                  <a:txBody>
+                    <a:bodyPr wrap="square"/>
+                    <a:lstStyle/>
+                    <a:p>
+                      <a:pPr algn="r"/>
+                      <a:r>
+                        <a:rPr sz="1000" b="0">
+                          <a:solidFill>
+                            <a:srgbClr val="1F3050"/>
+                          </a:solidFill>
+                        </a:rPr>
+                        <a:t>$26</a:t>
+                      </a:r>
+                    </a:p>
+                  </a:txBody>
+                  <a:tcPr marL="54864" marR="54864" marT="18288" marB="18288">
+                    <a:solidFill>
+                      <a:srgbClr val="ECF1F8"/>
+                    </a:solidFill>
+                  </a:tcPr>
+                </a:tc>
+                <a:tc>
+                  <a:txBody>
+                    <a:bodyPr wrap="square"/>
+                    <a:lstStyle/>
+                    <a:p>
+                      <a:pPr algn="r"/>
+                      <a:r>
+                        <a:rPr sz="1000" b="1">
+                          <a:solidFill>
+                            <a:srgbClr val="1F3050"/>
+                          </a:solidFill>
+                        </a:rPr>
+                        <a:t>$321</a:t>
+                      </a:r>
+                    </a:p>
+                  </a:txBody>
+                  <a:tcPr marL="54864" marR="54864" marT="18288" marB="18288">
+                    <a:solidFill>
+                      <a:srgbClr val="ECF1F8"/>
                     </a:solidFill>
                   </a:tcPr>
                 </a:tc>
               </a:tr>
-              <a:tr h="375920">
-                <a:tc>
-                  <a:txBody>
-                    <a:bodyPr wrap="square"/>
-                    <a:lstStyle/>
-                    <a:p>
-                      <a:pPr algn="l"/>
-                      <a:r>
-                        <a:rPr sz="1050" b="0">
-                          <a:solidFill>
-                            <a:srgbClr val="1F3050"/>
-                          </a:solidFill>
-                        </a:rPr>
-                        <a:t>with-tools variants 6→2</a:t>
-                      </a:r>
-                    </a:p>
-                  </a:txBody>
-                  <a:tcPr marL="54864" marR="54864" marT="18288" marB="18288">
-                    <a:solidFill>
-                      <a:srgbClr val="FFFFFF"/>
+              <a:tr h="300990">
+                <a:tc>
+                  <a:txBody>
+                    <a:bodyPr wrap="square"/>
+                    <a:lstStyle/>
+                    <a:p>
+                      <a:pPr algn="l"/>
+                      <a:r>
+                        <a:rPr sz="850" b="1">
+                          <a:solidFill>
+                            <a:srgbClr val="335588"/>
+                          </a:solidFill>
+                        </a:rPr>
+                        <a:t>MID</a:t>
+                      </a:r>
+                    </a:p>
+                  </a:txBody>
+                  <a:tcPr marL="54864" marR="54864" marT="18288" marB="18288">
+                    <a:solidFill>
+                      <a:srgbClr val="E2F0D9"/>
+                    </a:solidFill>
+                  </a:tcPr>
+                </a:tc>
+                <a:tc>
+                  <a:txBody>
+                    <a:bodyPr wrap="square"/>
+                    <a:lstStyle/>
+                    <a:p>
+                      <a:pPr algn="l"/>
+                      <a:r>
+                        <a:rPr sz="1000" b="1">
+                          <a:solidFill>
+                            <a:srgbClr val="1F3050"/>
+                          </a:solidFill>
+                        </a:rPr>
+                        <a:t>● Haiku 4.5</a:t>
+                      </a:r>
+                    </a:p>
+                  </a:txBody>
+                  <a:tcPr marL="54864" marR="54864" marT="18288" marB="18288">
+                    <a:solidFill>
+                      <a:srgbClr val="E2F0D9"/>
+                    </a:solidFill>
+                  </a:tcPr>
+                </a:tc>
+                <a:tc>
+                  <a:txBody>
+                    <a:bodyPr wrap="square"/>
+                    <a:lstStyle/>
+                    <a:p>
+                      <a:pPr algn="l"/>
+                      <a:r>
+                        <a:rPr sz="900" b="0">
+                          <a:solidFill>
+                            <a:srgbClr val="555555"/>
+                          </a:solidFill>
+                        </a:rPr>
+                        <a:t>Anthropic</a:t>
+                      </a:r>
+                    </a:p>
+                  </a:txBody>
+                  <a:tcPr marL="54864" marR="54864" marT="18288" marB="18288">
+                    <a:solidFill>
+                      <a:srgbClr val="E2F0D9"/>
                     </a:solidFill>
                   </a:tcPr>
                 </a:tc>
@@ -6017,18 +5995,18 @@
                     <a:p>
                       <a:pPr algn="ctr"/>
                       <a:r>
-                        <a:rPr sz="1100" b="1">
-                          <a:solidFill>
-                            <a:srgbClr val="1F3050"/>
-                          </a:solidFill>
-                        </a:rPr>
-                        <a:t>48%</a:t>
-                      </a:r>
-                    </a:p>
-                  </a:txBody>
-                  <a:tcPr marL="54864" marR="54864" marT="18288" marB="18288">
-                    <a:solidFill>
-                      <a:srgbClr val="FFFFFF"/>
+                        <a:rPr sz="1000" b="0">
+                          <a:solidFill>
+                            <a:srgbClr val="555555"/>
+                          </a:solidFill>
+                        </a:rPr>
+                        <a:t>$1 / $5</a:t>
+                      </a:r>
+                    </a:p>
+                  </a:txBody>
+                  <a:tcPr marL="54864" marR="54864" marT="18288" marB="18288">
+                    <a:solidFill>
+                      <a:srgbClr val="E2F0D9"/>
                     </a:solidFill>
                   </a:tcPr>
                 </a:tc>
@@ -6039,64 +6017,242 @@
                     <a:p>
                       <a:pPr algn="r"/>
                       <a:r>
-                        <a:rPr sz="1050" b="0">
-                          <a:solidFill>
-                            <a:srgbClr val="1F3050"/>
-                          </a:solidFill>
-                        </a:rPr>
-                        <a:t>$259</a:t>
-                      </a:r>
-                    </a:p>
-                  </a:txBody>
-                  <a:tcPr marL="54864" marR="54864" marT="18288" marB="18288">
-                    <a:solidFill>
-                      <a:srgbClr val="FFFFFF"/>
-                    </a:solidFill>
-                  </a:tcPr>
-                </a:tc>
-                <a:tc>
-                  <a:txBody>
-                    <a:bodyPr wrap="square"/>
-                    <a:lstStyle/>
-                    <a:p>
-                      <a:pPr algn="l"/>
-                      <a:r>
-                        <a:rPr sz="950" b="0">
+                        <a:rPr sz="1000" b="0">
+                          <a:solidFill>
+                            <a:srgbClr val="1F3050"/>
+                          </a:solidFill>
+                        </a:rPr>
+                        <a:t>$17</a:t>
+                      </a:r>
+                    </a:p>
+                  </a:txBody>
+                  <a:tcPr marL="54864" marR="54864" marT="18288" marB="18288">
+                    <a:solidFill>
+                      <a:srgbClr val="E2F0D9"/>
+                    </a:solidFill>
+                  </a:tcPr>
+                </a:tc>
+                <a:tc>
+                  <a:txBody>
+                    <a:bodyPr wrap="square"/>
+                    <a:lstStyle/>
+                    <a:p>
+                      <a:pPr algn="r"/>
+                      <a:r>
+                        <a:rPr sz="1000" b="1">
+                          <a:solidFill>
+                            <a:srgbClr val="1F3050"/>
+                          </a:solidFill>
+                        </a:rPr>
+                        <a:t>$146</a:t>
+                      </a:r>
+                    </a:p>
+                  </a:txBody>
+                  <a:tcPr marL="54864" marR="54864" marT="18288" marB="18288">
+                    <a:solidFill>
+                      <a:srgbClr val="E2F0D9"/>
+                    </a:solidFill>
+                  </a:tcPr>
+                </a:tc>
+              </a:tr>
+              <a:tr h="300990">
+                <a:tc>
+                  <a:txBody>
+                    <a:bodyPr wrap="square"/>
+                    <a:lstStyle/>
+                    <a:p>
+                      <a:pPr algn="l"/>
+                      <a:r>
+                        <a:rPr sz="850" b="1">
+                          <a:solidFill>
+                            <a:srgbClr val="335588"/>
+                          </a:solidFill>
+                        </a:rPr>
+                        <a:t/>
+                      </a:r>
+                    </a:p>
+                  </a:txBody>
+                  <a:tcPr marL="54864" marR="54864" marT="18288" marB="18288">
+                    <a:solidFill>
+                      <a:srgbClr val="F6F2EC"/>
+                    </a:solidFill>
+                  </a:tcPr>
+                </a:tc>
+                <a:tc>
+                  <a:txBody>
+                    <a:bodyPr wrap="square"/>
+                    <a:lstStyle/>
+                    <a:p>
+                      <a:pPr algn="l"/>
+                      <a:r>
+                        <a:rPr sz="1000" b="0">
+                          <a:solidFill>
+                            <a:srgbClr val="1F3050"/>
+                          </a:solidFill>
+                        </a:rPr>
+                        <a:t>○ GPT-5.4 Mini</a:t>
+                      </a:r>
+                    </a:p>
+                  </a:txBody>
+                  <a:tcPr marL="54864" marR="54864" marT="18288" marB="18288">
+                    <a:solidFill>
+                      <a:srgbClr val="F6F2EC"/>
+                    </a:solidFill>
+                  </a:tcPr>
+                </a:tc>
+                <a:tc>
+                  <a:txBody>
+                    <a:bodyPr wrap="square"/>
+                    <a:lstStyle/>
+                    <a:p>
+                      <a:pPr algn="l"/>
+                      <a:r>
+                        <a:rPr sz="900" b="0">
                           <a:solidFill>
                             <a:srgbClr val="555555"/>
                           </a:solidFill>
                         </a:rPr>
-                        <a:t>fewer prompt phrasings</a:t>
-                      </a:r>
-                    </a:p>
-                  </a:txBody>
-                  <a:tcPr marL="54864" marR="54864" marT="18288" marB="18288">
-                    <a:solidFill>
-                      <a:srgbClr val="FFFFFF"/>
+                        <a:t>OpenAI</a:t>
+                      </a:r>
+                    </a:p>
+                  </a:txBody>
+                  <a:tcPr marL="54864" marR="54864" marT="18288" marB="18288">
+                    <a:solidFill>
+                      <a:srgbClr val="F6F2EC"/>
+                    </a:solidFill>
+                  </a:tcPr>
+                </a:tc>
+                <a:tc>
+                  <a:txBody>
+                    <a:bodyPr wrap="square"/>
+                    <a:lstStyle/>
+                    <a:p>
+                      <a:pPr algn="ctr"/>
+                      <a:r>
+                        <a:rPr sz="1000" b="0">
+                          <a:solidFill>
+                            <a:srgbClr val="555555"/>
+                          </a:solidFill>
+                        </a:rPr>
+                        <a:t>$0.75 / $4.5</a:t>
+                      </a:r>
+                    </a:p>
+                  </a:txBody>
+                  <a:tcPr marL="54864" marR="54864" marT="18288" marB="18288">
+                    <a:solidFill>
+                      <a:srgbClr val="F6F2EC"/>
+                    </a:solidFill>
+                  </a:tcPr>
+                </a:tc>
+                <a:tc>
+                  <a:txBody>
+                    <a:bodyPr wrap="square"/>
+                    <a:lstStyle/>
+                    <a:p>
+                      <a:pPr algn="r"/>
+                      <a:r>
+                        <a:rPr sz="1000" b="0">
+                          <a:solidFill>
+                            <a:srgbClr val="1F3050"/>
+                          </a:solidFill>
+                        </a:rPr>
+                        <a:t>$13</a:t>
+                      </a:r>
+                    </a:p>
+                  </a:txBody>
+                  <a:tcPr marL="54864" marR="54864" marT="18288" marB="18288">
+                    <a:solidFill>
+                      <a:srgbClr val="F6F2EC"/>
+                    </a:solidFill>
+                  </a:tcPr>
+                </a:tc>
+                <a:tc>
+                  <a:txBody>
+                    <a:bodyPr wrap="square"/>
+                    <a:lstStyle/>
+                    <a:p>
+                      <a:pPr algn="r"/>
+                      <a:r>
+                        <a:rPr sz="1000" b="1">
+                          <a:solidFill>
+                            <a:srgbClr val="1F3050"/>
+                          </a:solidFill>
+                        </a:rPr>
+                        <a:t>$118</a:t>
+                      </a:r>
+                    </a:p>
+                  </a:txBody>
+                  <a:tcPr marL="54864" marR="54864" marT="18288" marB="18288">
+                    <a:solidFill>
+                      <a:srgbClr val="F6F2EC"/>
                     </a:solidFill>
                   </a:tcPr>
                 </a:tc>
               </a:tr>
-              <a:tr h="375920">
-                <a:tc>
-                  <a:txBody>
-                    <a:bodyPr wrap="square"/>
-                    <a:lstStyle/>
-                    <a:p>
-                      <a:pPr algn="l"/>
-                      <a:r>
-                        <a:rPr sz="1050" b="0">
-                          <a:solidFill>
-                            <a:srgbClr val="1F3050"/>
-                          </a:solidFill>
-                        </a:rPr>
-                        <a:t>domains 20→10 (half pool)</a:t>
-                      </a:r>
-                    </a:p>
-                  </a:txBody>
-                  <a:tcPr marL="54864" marR="54864" marT="18288" marB="18288">
-                    <a:solidFill>
-                      <a:srgbClr val="F2F5FA"/>
+              <a:tr h="300990">
+                <a:tc>
+                  <a:txBody>
+                    <a:bodyPr wrap="square"/>
+                    <a:lstStyle/>
+                    <a:p>
+                      <a:pPr algn="l"/>
+                      <a:r>
+                        <a:rPr sz="850" b="1">
+                          <a:solidFill>
+                            <a:srgbClr val="335588"/>
+                          </a:solidFill>
+                        </a:rPr>
+                        <a:t/>
+                      </a:r>
+                    </a:p>
+                  </a:txBody>
+                  <a:tcPr marL="54864" marR="54864" marT="18288" marB="18288">
+                    <a:solidFill>
+                      <a:srgbClr val="F6F2EC"/>
+                    </a:solidFill>
+                  </a:tcPr>
+                </a:tc>
+                <a:tc>
+                  <a:txBody>
+                    <a:bodyPr wrap="square"/>
+                    <a:lstStyle/>
+                    <a:p>
+                      <a:pPr algn="l"/>
+                      <a:r>
+                        <a:rPr sz="1000" b="0">
+                          <a:solidFill>
+                            <a:srgbClr val="1F3050"/>
+                          </a:solidFill>
+                        </a:rPr>
+                        <a:t>○ Gemini 2.5 Flash</a:t>
+                      </a:r>
+                    </a:p>
+                  </a:txBody>
+                  <a:tcPr marL="54864" marR="54864" marT="18288" marB="18288">
+                    <a:solidFill>
+                      <a:srgbClr val="F6F2EC"/>
+                    </a:solidFill>
+                  </a:tcPr>
+                </a:tc>
+                <a:tc>
+                  <a:txBody>
+                    <a:bodyPr wrap="square"/>
+                    <a:lstStyle/>
+                    <a:p>
+                      <a:pPr algn="l"/>
+                      <a:r>
+                        <a:rPr sz="900" b="0">
+                          <a:solidFill>
+                            <a:srgbClr val="555555"/>
+                          </a:solidFill>
+                        </a:rPr>
+                        <a:t>Google</a:t>
+                      </a:r>
+                    </a:p>
+                  </a:txBody>
+                  <a:tcPr marL="54864" marR="54864" marT="18288" marB="18288">
+                    <a:solidFill>
+                      <a:srgbClr val="F6F2EC"/>
                     </a:solidFill>
                   </a:tcPr>
                 </a:tc>
@@ -6107,18 +6263,18 @@
                     <a:p>
                       <a:pPr algn="ctr"/>
                       <a:r>
-                        <a:rPr sz="1100" b="1">
-                          <a:solidFill>
-                            <a:srgbClr val="1F3050"/>
-                          </a:solidFill>
-                        </a:rPr>
-                        <a:t>50%</a:t>
-                      </a:r>
-                    </a:p>
-                  </a:txBody>
-                  <a:tcPr marL="54864" marR="54864" marT="18288" marB="18288">
-                    <a:solidFill>
-                      <a:srgbClr val="F2F5FA"/>
+                        <a:rPr sz="1000" b="0">
+                          <a:solidFill>
+                            <a:srgbClr val="555555"/>
+                          </a:solidFill>
+                        </a:rPr>
+                        <a:t>$0.3 / $2.5</a:t>
+                      </a:r>
+                    </a:p>
+                  </a:txBody>
+                  <a:tcPr marL="54864" marR="54864" marT="18288" marB="18288">
+                    <a:solidFill>
+                      <a:srgbClr val="F6F2EC"/>
                     </a:solidFill>
                   </a:tcPr>
                 </a:tc>
@@ -6129,64 +6285,242 @@
                     <a:p>
                       <a:pPr algn="r"/>
                       <a:r>
-                        <a:rPr sz="1050" b="0">
-                          <a:solidFill>
-                            <a:srgbClr val="1F3050"/>
-                          </a:solidFill>
-                        </a:rPr>
-                        <a:t>$269</a:t>
-                      </a:r>
-                    </a:p>
-                  </a:txBody>
-                  <a:tcPr marL="54864" marR="54864" marT="18288" marB="18288">
-                    <a:solidFill>
-                      <a:srgbClr val="F2F5FA"/>
-                    </a:solidFill>
-                  </a:tcPr>
-                </a:tc>
-                <a:tc>
-                  <a:txBody>
-                    <a:bodyPr wrap="square"/>
-                    <a:lstStyle/>
-                    <a:p>
-                      <a:pPr algn="l"/>
-                      <a:r>
-                        <a:rPr sz="950" b="0">
+                        <a:rPr sz="1000" b="0">
+                          <a:solidFill>
+                            <a:srgbClr val="1F3050"/>
+                          </a:solidFill>
+                        </a:rPr>
+                        <a:t>$7</a:t>
+                      </a:r>
+                    </a:p>
+                  </a:txBody>
+                  <a:tcPr marL="54864" marR="54864" marT="18288" marB="18288">
+                    <a:solidFill>
+                      <a:srgbClr val="F6F2EC"/>
+                    </a:solidFill>
+                  </a:tcPr>
+                </a:tc>
+                <a:tc>
+                  <a:txBody>
+                    <a:bodyPr wrap="square"/>
+                    <a:lstStyle/>
+                    <a:p>
+                      <a:pPr algn="r"/>
+                      <a:r>
+                        <a:rPr sz="1000" b="1">
+                          <a:solidFill>
+                            <a:srgbClr val="1F3050"/>
+                          </a:solidFill>
+                        </a:rPr>
+                        <a:t>$54</a:t>
+                      </a:r>
+                    </a:p>
+                  </a:txBody>
+                  <a:tcPr marL="54864" marR="54864" marT="18288" marB="18288">
+                    <a:solidFill>
+                      <a:srgbClr val="F6F2EC"/>
+                    </a:solidFill>
+                  </a:tcPr>
+                </a:tc>
+              </a:tr>
+              <a:tr h="300990">
+                <a:tc>
+                  <a:txBody>
+                    <a:bodyPr wrap="square"/>
+                    <a:lstStyle/>
+                    <a:p>
+                      <a:pPr algn="l"/>
+                      <a:r>
+                        <a:rPr sz="850" b="1">
+                          <a:solidFill>
+                            <a:srgbClr val="335588"/>
+                          </a:solidFill>
+                        </a:rPr>
+                        <a:t/>
+                      </a:r>
+                    </a:p>
+                  </a:txBody>
+                  <a:tcPr marL="54864" marR="54864" marT="18288" marB="18288">
+                    <a:solidFill>
+                      <a:srgbClr val="F6F2EC"/>
+                    </a:solidFill>
+                  </a:tcPr>
+                </a:tc>
+                <a:tc>
+                  <a:txBody>
+                    <a:bodyPr wrap="square"/>
+                    <a:lstStyle/>
+                    <a:p>
+                      <a:pPr algn="l"/>
+                      <a:r>
+                        <a:rPr sz="1000" b="0">
+                          <a:solidFill>
+                            <a:srgbClr val="1F3050"/>
+                          </a:solidFill>
+                        </a:rPr>
+                        <a:t>○ Qwen-Plus</a:t>
+                      </a:r>
+                    </a:p>
+                  </a:txBody>
+                  <a:tcPr marL="54864" marR="54864" marT="18288" marB="18288">
+                    <a:solidFill>
+                      <a:srgbClr val="F6F2EC"/>
+                    </a:solidFill>
+                  </a:tcPr>
+                </a:tc>
+                <a:tc>
+                  <a:txBody>
+                    <a:bodyPr wrap="square"/>
+                    <a:lstStyle/>
+                    <a:p>
+                      <a:pPr algn="l"/>
+                      <a:r>
+                        <a:rPr sz="900" b="0">
                           <a:solidFill>
                             <a:srgbClr val="555555"/>
                           </a:solidFill>
                         </a:rPr>
-                        <a:t>halve the domain pool</a:t>
-                      </a:r>
-                    </a:p>
-                  </a:txBody>
-                  <a:tcPr marL="54864" marR="54864" marT="18288" marB="18288">
-                    <a:solidFill>
-                      <a:srgbClr val="F2F5FA"/>
+                        <a:t>Alibaba</a:t>
+                      </a:r>
+                    </a:p>
+                  </a:txBody>
+                  <a:tcPr marL="54864" marR="54864" marT="18288" marB="18288">
+                    <a:solidFill>
+                      <a:srgbClr val="F6F2EC"/>
+                    </a:solidFill>
+                  </a:tcPr>
+                </a:tc>
+                <a:tc>
+                  <a:txBody>
+                    <a:bodyPr wrap="square"/>
+                    <a:lstStyle/>
+                    <a:p>
+                      <a:pPr algn="ctr"/>
+                      <a:r>
+                        <a:rPr sz="1000" b="0">
+                          <a:solidFill>
+                            <a:srgbClr val="555555"/>
+                          </a:solidFill>
+                        </a:rPr>
+                        <a:t>$0.4 / $1.2</a:t>
+                      </a:r>
+                    </a:p>
+                  </a:txBody>
+                  <a:tcPr marL="54864" marR="54864" marT="18288" marB="18288">
+                    <a:solidFill>
+                      <a:srgbClr val="F6F2EC"/>
+                    </a:solidFill>
+                  </a:tcPr>
+                </a:tc>
+                <a:tc>
+                  <a:txBody>
+                    <a:bodyPr wrap="square"/>
+                    <a:lstStyle/>
+                    <a:p>
+                      <a:pPr algn="r"/>
+                      <a:r>
+                        <a:rPr sz="1000" b="0">
+                          <a:solidFill>
+                            <a:srgbClr val="1F3050"/>
+                          </a:solidFill>
+                        </a:rPr>
+                        <a:t>$4</a:t>
+                      </a:r>
+                    </a:p>
+                  </a:txBody>
+                  <a:tcPr marL="54864" marR="54864" marT="18288" marB="18288">
+                    <a:solidFill>
+                      <a:srgbClr val="F6F2EC"/>
+                    </a:solidFill>
+                  </a:tcPr>
+                </a:tc>
+                <a:tc>
+                  <a:txBody>
+                    <a:bodyPr wrap="square"/>
+                    <a:lstStyle/>
+                    <a:p>
+                      <a:pPr algn="r"/>
+                      <a:r>
+                        <a:rPr sz="1000" b="1">
+                          <a:solidFill>
+                            <a:srgbClr val="1F3050"/>
+                          </a:solidFill>
+                        </a:rPr>
+                        <a:t>$51</a:t>
+                      </a:r>
+                    </a:p>
+                  </a:txBody>
+                  <a:tcPr marL="54864" marR="54864" marT="18288" marB="18288">
+                    <a:solidFill>
+                      <a:srgbClr val="F6F2EC"/>
                     </a:solidFill>
                   </a:tcPr>
                 </a:tc>
               </a:tr>
-              <a:tr h="375920">
-                <a:tc>
-                  <a:txBody>
-                    <a:bodyPr wrap="square"/>
-                    <a:lstStyle/>
-                    <a:p>
-                      <a:pPr algn="l"/>
-                      <a:r>
-                        <a:rPr sz="1050" b="0">
-                          <a:solidFill>
-                            <a:srgbClr val="1F3050"/>
-                          </a:solidFill>
-                        </a:rPr>
-                        <a:t>no-tools variants 3→1</a:t>
-                      </a:r>
-                    </a:p>
-                  </a:txBody>
-                  <a:tcPr marL="54864" marR="54864" marT="18288" marB="18288">
-                    <a:solidFill>
-                      <a:srgbClr val="FFFFFF"/>
+              <a:tr h="300990">
+                <a:tc>
+                  <a:txBody>
+                    <a:bodyPr wrap="square"/>
+                    <a:lstStyle/>
+                    <a:p>
+                      <a:pPr algn="l"/>
+                      <a:r>
+                        <a:rPr sz="850" b="1">
+                          <a:solidFill>
+                            <a:srgbClr val="335588"/>
+                          </a:solidFill>
+                        </a:rPr>
+                        <a:t>BUDGET</a:t>
+                      </a:r>
+                    </a:p>
+                  </a:txBody>
+                  <a:tcPr marL="54864" marR="54864" marT="18288" marB="18288">
+                    <a:solidFill>
+                      <a:srgbClr val="F1F7F1"/>
+                    </a:solidFill>
+                  </a:tcPr>
+                </a:tc>
+                <a:tc>
+                  <a:txBody>
+                    <a:bodyPr wrap="square"/>
+                    <a:lstStyle/>
+                    <a:p>
+                      <a:pPr algn="l"/>
+                      <a:r>
+                        <a:rPr sz="1000" b="0">
+                          <a:solidFill>
+                            <a:srgbClr val="1F3050"/>
+                          </a:solidFill>
+                        </a:rPr>
+                        <a:t>○ GPT-5.4 Nano</a:t>
+                      </a:r>
+                    </a:p>
+                  </a:txBody>
+                  <a:tcPr marL="54864" marR="54864" marT="18288" marB="18288">
+                    <a:solidFill>
+                      <a:srgbClr val="F1F7F1"/>
+                    </a:solidFill>
+                  </a:tcPr>
+                </a:tc>
+                <a:tc>
+                  <a:txBody>
+                    <a:bodyPr wrap="square"/>
+                    <a:lstStyle/>
+                    <a:p>
+                      <a:pPr algn="l"/>
+                      <a:r>
+                        <a:rPr sz="900" b="0">
+                          <a:solidFill>
+                            <a:srgbClr val="555555"/>
+                          </a:solidFill>
+                        </a:rPr>
+                        <a:t>OpenAI</a:t>
+                      </a:r>
+                    </a:p>
+                  </a:txBody>
+                  <a:tcPr marL="54864" marR="54864" marT="18288" marB="18288">
+                    <a:solidFill>
+                      <a:srgbClr val="F1F7F1"/>
                     </a:solidFill>
                   </a:tcPr>
                 </a:tc>
@@ -6197,18 +6531,18 @@
                     <a:p>
                       <a:pPr algn="ctr"/>
                       <a:r>
-                        <a:rPr sz="1100" b="1">
-                          <a:solidFill>
-                            <a:srgbClr val="1F3050"/>
-                          </a:solidFill>
-                        </a:rPr>
-                        <a:t>85%</a:t>
-                      </a:r>
-                    </a:p>
-                  </a:txBody>
-                  <a:tcPr marL="54864" marR="54864" marT="18288" marB="18288">
-                    <a:solidFill>
-                      <a:srgbClr val="FFFFFF"/>
+                        <a:rPr sz="1000" b="0">
+                          <a:solidFill>
+                            <a:srgbClr val="555555"/>
+                          </a:solidFill>
+                        </a:rPr>
+                        <a:t>$0.2 / $1.25</a:t>
+                      </a:r>
+                    </a:p>
+                  </a:txBody>
+                  <a:tcPr marL="54864" marR="54864" marT="18288" marB="18288">
+                    <a:solidFill>
+                      <a:srgbClr val="F1F7F1"/>
                     </a:solidFill>
                   </a:tcPr>
                 </a:tc>
@@ -6219,64 +6553,242 @@
                     <a:p>
                       <a:pPr algn="r"/>
                       <a:r>
-                        <a:rPr sz="1050" b="0">
-                          <a:solidFill>
-                            <a:srgbClr val="1F3050"/>
-                          </a:solidFill>
-                        </a:rPr>
-                        <a:t>$457</a:t>
-                      </a:r>
-                    </a:p>
-                  </a:txBody>
-                  <a:tcPr marL="54864" marR="54864" marT="18288" marB="18288">
-                    <a:solidFill>
-                      <a:srgbClr val="FFFFFF"/>
-                    </a:solidFill>
-                  </a:tcPr>
-                </a:tc>
-                <a:tc>
-                  <a:txBody>
-                    <a:bodyPr wrap="square"/>
-                    <a:lstStyle/>
-                    <a:p>
-                      <a:pPr algn="l"/>
-                      <a:r>
-                        <a:rPr sz="950" b="0">
+                        <a:rPr sz="1000" b="0">
+                          <a:solidFill>
+                            <a:srgbClr val="1F3050"/>
+                          </a:solidFill>
+                        </a:rPr>
+                        <a:t>$4</a:t>
+                      </a:r>
+                    </a:p>
+                  </a:txBody>
+                  <a:tcPr marL="54864" marR="54864" marT="18288" marB="18288">
+                    <a:solidFill>
+                      <a:srgbClr val="F1F7F1"/>
+                    </a:solidFill>
+                  </a:tcPr>
+                </a:tc>
+                <a:tc>
+                  <a:txBody>
+                    <a:bodyPr wrap="square"/>
+                    <a:lstStyle/>
+                    <a:p>
+                      <a:pPr algn="r"/>
+                      <a:r>
+                        <a:rPr sz="1000" b="1">
+                          <a:solidFill>
+                            <a:srgbClr val="1F3050"/>
+                          </a:solidFill>
+                        </a:rPr>
+                        <a:t>$32</a:t>
+                      </a:r>
+                    </a:p>
+                  </a:txBody>
+                  <a:tcPr marL="54864" marR="54864" marT="18288" marB="18288">
+                    <a:solidFill>
+                      <a:srgbClr val="F1F7F1"/>
+                    </a:solidFill>
+                  </a:tcPr>
+                </a:tc>
+              </a:tr>
+              <a:tr h="300990">
+                <a:tc>
+                  <a:txBody>
+                    <a:bodyPr wrap="square"/>
+                    <a:lstStyle/>
+                    <a:p>
+                      <a:pPr algn="l"/>
+                      <a:r>
+                        <a:rPr sz="850" b="1">
+                          <a:solidFill>
+                            <a:srgbClr val="335588"/>
+                          </a:solidFill>
+                        </a:rPr>
+                        <a:t/>
+                      </a:r>
+                    </a:p>
+                  </a:txBody>
+                  <a:tcPr marL="54864" marR="54864" marT="18288" marB="18288">
+                    <a:solidFill>
+                      <a:srgbClr val="F1F7F1"/>
+                    </a:solidFill>
+                  </a:tcPr>
+                </a:tc>
+                <a:tc>
+                  <a:txBody>
+                    <a:bodyPr wrap="square"/>
+                    <a:lstStyle/>
+                    <a:p>
+                      <a:pPr algn="l"/>
+                      <a:r>
+                        <a:rPr sz="1000" b="0">
+                          <a:solidFill>
+                            <a:srgbClr val="1F3050"/>
+                          </a:solidFill>
+                        </a:rPr>
+                        <a:t>○ Gemini 2.5 Flash-Lite</a:t>
+                      </a:r>
+                    </a:p>
+                  </a:txBody>
+                  <a:tcPr marL="54864" marR="54864" marT="18288" marB="18288">
+                    <a:solidFill>
+                      <a:srgbClr val="F1F7F1"/>
+                    </a:solidFill>
+                  </a:tcPr>
+                </a:tc>
+                <a:tc>
+                  <a:txBody>
+                    <a:bodyPr wrap="square"/>
+                    <a:lstStyle/>
+                    <a:p>
+                      <a:pPr algn="l"/>
+                      <a:r>
+                        <a:rPr sz="900" b="0">
                           <a:solidFill>
                             <a:srgbClr val="555555"/>
                           </a:solidFill>
                         </a:rPr>
-                        <a:t>small — no-tools is cheap</a:t>
-                      </a:r>
-                    </a:p>
-                  </a:txBody>
-                  <a:tcPr marL="54864" marR="54864" marT="18288" marB="18288">
-                    <a:solidFill>
-                      <a:srgbClr val="FFFFFF"/>
+                        <a:t>Google</a:t>
+                      </a:r>
+                    </a:p>
+                  </a:txBody>
+                  <a:tcPr marL="54864" marR="54864" marT="18288" marB="18288">
+                    <a:solidFill>
+                      <a:srgbClr val="F1F7F1"/>
+                    </a:solidFill>
+                  </a:tcPr>
+                </a:tc>
+                <a:tc>
+                  <a:txBody>
+                    <a:bodyPr wrap="square"/>
+                    <a:lstStyle/>
+                    <a:p>
+                      <a:pPr algn="ctr"/>
+                      <a:r>
+                        <a:rPr sz="1000" b="0">
+                          <a:solidFill>
+                            <a:srgbClr val="555555"/>
+                          </a:solidFill>
+                        </a:rPr>
+                        <a:t>$0.1 / $0.4</a:t>
+                      </a:r>
+                    </a:p>
+                  </a:txBody>
+                  <a:tcPr marL="54864" marR="54864" marT="18288" marB="18288">
+                    <a:solidFill>
+                      <a:srgbClr val="F1F7F1"/>
+                    </a:solidFill>
+                  </a:tcPr>
+                </a:tc>
+                <a:tc>
+                  <a:txBody>
+                    <a:bodyPr wrap="square"/>
+                    <a:lstStyle/>
+                    <a:p>
+                      <a:pPr algn="r"/>
+                      <a:r>
+                        <a:rPr sz="1000" b="0">
+                          <a:solidFill>
+                            <a:srgbClr val="1F3050"/>
+                          </a:solidFill>
+                        </a:rPr>
+                        <a:t>$1</a:t>
+                      </a:r>
+                    </a:p>
+                  </a:txBody>
+                  <a:tcPr marL="54864" marR="54864" marT="18288" marB="18288">
+                    <a:solidFill>
+                      <a:srgbClr val="F1F7F1"/>
+                    </a:solidFill>
+                  </a:tcPr>
+                </a:tc>
+                <a:tc>
+                  <a:txBody>
+                    <a:bodyPr wrap="square"/>
+                    <a:lstStyle/>
+                    <a:p>
+                      <a:pPr algn="r"/>
+                      <a:r>
+                        <a:rPr sz="1000" b="1">
+                          <a:solidFill>
+                            <a:srgbClr val="1F3050"/>
+                          </a:solidFill>
+                        </a:rPr>
+                        <a:t>$14</a:t>
+                      </a:r>
+                    </a:p>
+                  </a:txBody>
+                  <a:tcPr marL="54864" marR="54864" marT="18288" marB="18288">
+                    <a:solidFill>
+                      <a:srgbClr val="F1F7F1"/>
                     </a:solidFill>
                   </a:tcPr>
                 </a:tc>
               </a:tr>
-              <a:tr h="375920">
-                <a:tc>
-                  <a:txBody>
-                    <a:bodyPr wrap="square"/>
-                    <a:lstStyle/>
-                    <a:p>
-                      <a:pPr algn="l"/>
-                      <a:r>
-                        <a:rPr sz="1050" b="0">
-                          <a:solidFill>
-                            <a:srgbClr val="1F3050"/>
-                          </a:solidFill>
-                        </a:rPr>
-                        <a:t>think-off only</a:t>
-                      </a:r>
-                    </a:p>
-                  </a:txBody>
-                  <a:tcPr marL="54864" marR="54864" marT="18288" marB="18288">
-                    <a:solidFill>
-                      <a:srgbClr val="F2F5FA"/>
+              <a:tr h="300990">
+                <a:tc>
+                  <a:txBody>
+                    <a:bodyPr wrap="square"/>
+                    <a:lstStyle/>
+                    <a:p>
+                      <a:pPr algn="l"/>
+                      <a:r>
+                        <a:rPr sz="850" b="1">
+                          <a:solidFill>
+                            <a:srgbClr val="335588"/>
+                          </a:solidFill>
+                        </a:rPr>
+                        <a:t/>
+                      </a:r>
+                    </a:p>
+                  </a:txBody>
+                  <a:tcPr marL="54864" marR="54864" marT="18288" marB="18288">
+                    <a:solidFill>
+                      <a:srgbClr val="F1F7F1"/>
+                    </a:solidFill>
+                  </a:tcPr>
+                </a:tc>
+                <a:tc>
+                  <a:txBody>
+                    <a:bodyPr wrap="square"/>
+                    <a:lstStyle/>
+                    <a:p>
+                      <a:pPr algn="l"/>
+                      <a:r>
+                        <a:rPr sz="1000" b="0">
+                          <a:solidFill>
+                            <a:srgbClr val="1F3050"/>
+                          </a:solidFill>
+                        </a:rPr>
+                        <a:t>○ Qwen-Flash</a:t>
+                      </a:r>
+                    </a:p>
+                  </a:txBody>
+                  <a:tcPr marL="54864" marR="54864" marT="18288" marB="18288">
+                    <a:solidFill>
+                      <a:srgbClr val="F1F7F1"/>
+                    </a:solidFill>
+                  </a:tcPr>
+                </a:tc>
+                <a:tc>
+                  <a:txBody>
+                    <a:bodyPr wrap="square"/>
+                    <a:lstStyle/>
+                    <a:p>
+                      <a:pPr algn="l"/>
+                      <a:r>
+                        <a:rPr sz="900" b="0">
+                          <a:solidFill>
+                            <a:srgbClr val="555555"/>
+                          </a:solidFill>
+                        </a:rPr>
+                        <a:t>Alibaba</a:t>
+                      </a:r>
+                    </a:p>
+                  </a:txBody>
+                  <a:tcPr marL="54864" marR="54864" marT="18288" marB="18288">
+                    <a:solidFill>
+                      <a:srgbClr val="F1F7F1"/>
                     </a:solidFill>
                   </a:tcPr>
                 </a:tc>
@@ -6287,18 +6799,18 @@
                     <a:p>
                       <a:pPr algn="ctr"/>
                       <a:r>
-                        <a:rPr sz="1100" b="1">
-                          <a:solidFill>
-                            <a:srgbClr val="1F3050"/>
-                          </a:solidFill>
-                        </a:rPr>
-                        <a:t>36%</a:t>
-                      </a:r>
-                    </a:p>
-                  </a:txBody>
-                  <a:tcPr marL="54864" marR="54864" marT="18288" marB="18288">
-                    <a:solidFill>
-                      <a:srgbClr val="F2F5FA"/>
+                        <a:rPr sz="1000" b="0">
+                          <a:solidFill>
+                            <a:srgbClr val="555555"/>
+                          </a:solidFill>
+                        </a:rPr>
+                        <a:t>$0.05 / $0.4</a:t>
+                      </a:r>
+                    </a:p>
+                  </a:txBody>
+                  <a:tcPr marL="54864" marR="54864" marT="18288" marB="18288">
+                    <a:solidFill>
+                      <a:srgbClr val="F1F7F1"/>
                     </a:solidFill>
                   </a:tcPr>
                 </a:tc>
@@ -6309,86 +6821,18 @@
                     <a:p>
                       <a:pPr algn="r"/>
                       <a:r>
-                        <a:rPr sz="1050" b="0">
-                          <a:solidFill>
-                            <a:srgbClr val="1F3050"/>
-                          </a:solidFill>
-                        </a:rPr>
-                        <a:t>$192</a:t>
-                      </a:r>
-                    </a:p>
-                  </a:txBody>
-                  <a:tcPr marL="54864" marR="54864" marT="18288" marB="18288">
-                    <a:solidFill>
-                      <a:srgbClr val="F2F5FA"/>
-                    </a:solidFill>
-                  </a:tcPr>
-                </a:tc>
-                <a:tc>
-                  <a:txBody>
-                    <a:bodyPr wrap="square"/>
-                    <a:lstStyle/>
-                    <a:p>
-                      <a:pPr algn="l"/>
-                      <a:r>
-                        <a:rPr sz="950" b="0">
-                          <a:solidFill>
-                            <a:srgbClr val="555555"/>
-                          </a:solidFill>
-                        </a:rPr>
-                        <a:t>biggest single lever</a:t>
-                      </a:r>
-                    </a:p>
-                  </a:txBody>
-                  <a:tcPr marL="54864" marR="54864" marT="18288" marB="18288">
-                    <a:solidFill>
-                      <a:srgbClr val="F2F5FA"/>
-                    </a:solidFill>
-                  </a:tcPr>
-                </a:tc>
-              </a:tr>
-              <a:tr h="375920">
-                <a:tc>
-                  <a:txBody>
-                    <a:bodyPr wrap="square"/>
-                    <a:lstStyle/>
-                    <a:p>
-                      <a:pPr algn="l"/>
-                      <a:r>
-                        <a:rPr sz="1050" b="1">
-                          <a:solidFill>
-                            <a:srgbClr val="1F3050"/>
-                          </a:solidFill>
-                        </a:rPr>
-                        <a:t>LEAN  (vp4 · ½dom · wt2 · nt1)</a:t>
-                      </a:r>
-                    </a:p>
-                  </a:txBody>
-                  <a:tcPr marL="54864" marR="54864" marT="18288" marB="18288">
-                    <a:solidFill>
-                      <a:srgbClr val="E2F0D9"/>
-                    </a:solidFill>
-                  </a:tcPr>
-                </a:tc>
-                <a:tc>
-                  <a:txBody>
-                    <a:bodyPr wrap="square"/>
-                    <a:lstStyle/>
-                    <a:p>
-                      <a:pPr algn="ctr"/>
-                      <a:r>
-                        <a:rPr sz="1100" b="1">
-                          <a:solidFill>
-                            <a:srgbClr val="335588"/>
-                          </a:solidFill>
-                        </a:rPr>
-                        <a:t>10%</a:t>
-                      </a:r>
-                    </a:p>
-                  </a:txBody>
-                  <a:tcPr marL="54864" marR="54864" marT="18288" marB="18288">
-                    <a:solidFill>
-                      <a:srgbClr val="E2F0D9"/>
+                        <a:rPr sz="1000" b="0">
+                          <a:solidFill>
+                            <a:srgbClr val="1F3050"/>
+                          </a:solidFill>
+                        </a:rPr>
+                        <a:t>$1</a:t>
+                      </a:r>
+                    </a:p>
+                  </a:txBody>
+                  <a:tcPr marL="54864" marR="54864" marT="18288" marB="18288">
+                    <a:solidFill>
+                      <a:srgbClr val="F1F7F1"/>
                     </a:solidFill>
                   </a:tcPr>
                 </a:tc>
@@ -6399,130 +6843,18 @@
                     <a:p>
                       <a:pPr algn="r"/>
                       <a:r>
-                        <a:rPr sz="1050" b="0">
-                          <a:solidFill>
-                            <a:srgbClr val="1F3050"/>
-                          </a:solidFill>
-                        </a:rPr>
-                        <a:t>$54</a:t>
-                      </a:r>
-                    </a:p>
-                  </a:txBody>
-                  <a:tcPr marL="54864" marR="54864" marT="18288" marB="18288">
-                    <a:solidFill>
-                      <a:srgbClr val="E2F0D9"/>
-                    </a:solidFill>
-                  </a:tcPr>
-                </a:tc>
-                <a:tc>
-                  <a:txBody>
-                    <a:bodyPr wrap="square"/>
-                    <a:lstStyle/>
-                    <a:p>
-                      <a:pPr algn="l"/>
-                      <a:r>
-                        <a:rPr sz="950" b="0">
-                          <a:solidFill>
-                            <a:srgbClr val="555555"/>
-                          </a:solidFill>
-                        </a:rPr>
-                        <a:t>stack structural cuts, keep both think</a:t>
-                      </a:r>
-                    </a:p>
-                  </a:txBody>
-                  <a:tcPr marL="54864" marR="54864" marT="18288" marB="18288">
-                    <a:solidFill>
-                      <a:srgbClr val="E2F0D9"/>
-                    </a:solidFill>
-                  </a:tcPr>
-                </a:tc>
-              </a:tr>
-              <a:tr h="375920">
-                <a:tc>
-                  <a:txBody>
-                    <a:bodyPr wrap="square"/>
-                    <a:lstStyle/>
-                    <a:p>
-                      <a:pPr algn="l"/>
-                      <a:r>
-                        <a:rPr sz="1050" b="0">
-                          <a:solidFill>
-                            <a:srgbClr val="1F3050"/>
-                          </a:solidFill>
-                        </a:rPr>
-                        <a:t>LEAN + think-off</a:t>
-                      </a:r>
-                    </a:p>
-                  </a:txBody>
-                  <a:tcPr marL="54864" marR="54864" marT="18288" marB="18288">
-                    <a:solidFill>
-                      <a:srgbClr val="F2F5FA"/>
-                    </a:solidFill>
-                  </a:tcPr>
-                </a:tc>
-                <a:tc>
-                  <a:txBody>
-                    <a:bodyPr wrap="square"/>
-                    <a:lstStyle/>
-                    <a:p>
-                      <a:pPr algn="ctr"/>
-                      <a:r>
-                        <a:rPr sz="1100" b="1">
-                          <a:solidFill>
-                            <a:srgbClr val="1F3050"/>
-                          </a:solidFill>
-                        </a:rPr>
-                        <a:t>4%</a:t>
-                      </a:r>
-                    </a:p>
-                  </a:txBody>
-                  <a:tcPr marL="54864" marR="54864" marT="18288" marB="18288">
-                    <a:solidFill>
-                      <a:srgbClr val="F2F5FA"/>
-                    </a:solidFill>
-                  </a:tcPr>
-                </a:tc>
-                <a:tc>
-                  <a:txBody>
-                    <a:bodyPr wrap="square"/>
-                    <a:lstStyle/>
-                    <a:p>
-                      <a:pPr algn="r"/>
-                      <a:r>
-                        <a:rPr sz="1050" b="0">
-                          <a:solidFill>
-                            <a:srgbClr val="1F3050"/>
-                          </a:solidFill>
-                        </a:rPr>
-                        <a:t>$20</a:t>
-                      </a:r>
-                    </a:p>
-                  </a:txBody>
-                  <a:tcPr marL="54864" marR="54864" marT="18288" marB="18288">
-                    <a:solidFill>
-                      <a:srgbClr val="F2F5FA"/>
-                    </a:solidFill>
-                  </a:tcPr>
-                </a:tc>
-                <a:tc>
-                  <a:txBody>
-                    <a:bodyPr wrap="square"/>
-                    <a:lstStyle/>
-                    <a:p>
-                      <a:pPr algn="l"/>
-                      <a:r>
-                        <a:rPr sz="950" b="0">
-                          <a:solidFill>
-                            <a:srgbClr val="555555"/>
-                          </a:solidFill>
-                        </a:rPr>
-                        <a:t>floor — power drops</a:t>
-                      </a:r>
-                    </a:p>
-                  </a:txBody>
-                  <a:tcPr marL="54864" marR="54864" marT="18288" marB="18288">
-                    <a:solidFill>
-                      <a:srgbClr val="F2F5FA"/>
+                        <a:rPr sz="1000" b="1">
+                          <a:solidFill>
+                            <a:srgbClr val="1F3050"/>
+                          </a:solidFill>
+                        </a:rPr>
+                        <a:t>$9</a:t>
+                      </a:r>
+                    </a:p>
+                  </a:txBody>
+                  <a:tcPr marL="54864" marR="54864" marT="18288" marB="18288">
+                    <a:solidFill>
+                      <a:srgbClr val="F1F7F1"/>
                     </a:solidFill>
                   </a:tcPr>
                 </a:tc>
@@ -6539,8 +6871,8 @@
         </p:nvSpPr>
         <p:spPr>
           <a:xfrm>
-            <a:off x="274320" y="4892040"/>
-            <a:ext cx="11612880" cy="1371600"/>
+            <a:off x="274320" y="4956048"/>
+            <a:ext cx="11612880" cy="1417320"/>
           </a:xfrm>
           <a:prstGeom prst="rect">
             <a:avLst/>
@@ -6559,7 +6891,7 @@
                   <a:srgbClr val="335588"/>
                 </a:solidFill>
               </a:rPr>
-              <a:t>Biggest levers, in order</a:t>
+              <a:t>Read this landscape</a:t>
             </a:r>
           </a:p>
           <a:p>
@@ -6574,7 +6906,7 @@
                   <a:srgbClr val="1F3050"/>
                 </a:solidFill>
               </a:rPr>
-              <a:t>▪ Drop think-on: −64%.  </a:t>
+              <a:t>▪ Two rows are measured (●), nine are projected (○).  </a:t>
             </a:r>
             <a:r>
               <a:rPr sz="1050">
@@ -6582,7 +6914,7 @@
                   <a:srgbClr val="555555"/>
                 </a:solidFill>
               </a:rPr>
-              <a:t>Halves the matrix and removes the extended-thinking output blow-up (the single biggest closed-model cost risk).</a:t>
+              <a:t>Sonnet/Haiku priced from their OWN tokens; the rest re-price the mean profile — so a same-tier ● vs ○ gap mixes BOTH price and token-profile. Read ○ as a price landscape, not a head-to-head.</a:t>
             </a:r>
           </a:p>
           <a:p>
@@ -6597,7 +6929,7 @@
                   <a:srgbClr val="1F3050"/>
                 </a:solidFill>
               </a:rPr>
-              <a:t>▪ Trim with-tools variants 6→2: −52% · halve domains: −50% · validate_plan 10→4: −40%.  </a:t>
+              <a:t>▪ No-tools is cheap everywhere ($1–$86); with-tools is where providers separate.  </a:t>
             </a:r>
             <a:r>
               <a:rPr sz="1050">
@@ -6605,7 +6937,7 @@
                   <a:srgbClr val="555555"/>
                 </a:solidFill>
               </a:rPr>
-              <a:t>These stack: keeping both think but cutting structure → ~10% of full (Haiku+Gemini sweep5 $537 → ~$54), with statistical power largely intact.</a:t>
+              <a:t>frontier WT $315 (Gemini 3.1 Pro) → $788 (GPT-5.5); budget WT $9 (Qwen-Flash) → $32 (GPT Nano). With-tools can't batch → the prompt-caching lever (≈⅔ of the $ is repeated prefix) is the only cut.</a:t>
             </a:r>
           </a:p>
         </p:txBody>
@@ -6638,7 +6970,7 @@
                   <a:srgbClr val="555555"/>
                 </a:solidFill>
               </a:rPr>
-              <a:t>Scenarios computed on the sweep5 token table. PlanBench scales the same way (its analogue of validate_plan-style cost is the with-tools think-on cell). Cuts are labeled variants — flag any domain/fixture sampling in the writeup.</a:t>
+              <a:t>Prices: list, Jun 2026 — Anthropic (claude-api skill), Google/OpenAI/Alibaba (vendor docs); re-verify in-console (Qwen-Max list $2.5/$7.5 is on a 50% promo to $1.25/$3.75). WT is ± wide for ○ rows: the two measured models differ up to 2.7× per task. Qwen runs FREE on SLURM.</a:t>
             </a:r>
           </a:p>
         </p:txBody>
@@ -6689,7 +7021,7 @@
                   <a:srgbClr val="1F3050"/>
                 </a:solidFill>
               </a:rPr>
-              <a:t>What We Cut vs What Stays Solid</a:t>
+              <a:t>PlanBench — the With-Tools Budget-Buster; Keep It on vLLM</a:t>
             </a:r>
           </a:p>
         </p:txBody>
@@ -6703,86 +7035,7 @@
         <p:spPr>
           <a:xfrm>
             <a:off x="274320" y="658368"/>
-            <a:ext cx="11612880" cy="365760"/>
-          </a:xfrm>
-          <a:prstGeom prst="rect">
-            <a:avLst/>
-          </a:prstGeom>
-          <a:noFill/>
-        </p:spPr>
-        <p:txBody>
-          <a:bodyPr wrap="none">
-            <a:spAutoFit/>
-          </a:bodyPr>
-          <a:lstStyle/>
-          <a:p>
-            <a:r>
-              <a:rPr sz="1150" i="1">
-                <a:solidFill>
-                  <a:srgbClr val="555555"/>
-                </a:solidFill>
-              </a:rPr>
-              <a:t>Rule of thumb: cut the repeats, keep the spread.  The cuts only remove spares — the comparison stays intact.</a:t>
-            </a:r>
-          </a:p>
-        </p:txBody>
-      </p:sp>
-      <p:sp>
-        <p:nvSpPr>
-          <p:cNvPr id="4" name="Rounded Rectangle 3"/>
-          <p:cNvSpPr/>
-          <p:nvPr/>
-        </p:nvSpPr>
-        <p:spPr>
-          <a:xfrm>
-            <a:off x="274320" y="1325880"/>
-            <a:ext cx="5715000" cy="3703320"/>
-          </a:xfrm>
-          <a:prstGeom prst="roundRect">
-            <a:avLst/>
-          </a:prstGeom>
-          <a:solidFill>
-            <a:srgbClr val="ECF6EC"/>
-          </a:solidFill>
-          <a:ln w="19050">
-            <a:solidFill>
-              <a:srgbClr val="3E823C"/>
-            </a:solidFill>
-          </a:ln>
-          <a:effectLst/>
-        </p:spPr>
-        <p:style>
-          <a:lnRef idx="1">
-            <a:schemeClr val="accent1"/>
-          </a:lnRef>
-          <a:fillRef idx="3">
-            <a:schemeClr val="accent1"/>
-          </a:fillRef>
-          <a:effectRef idx="2">
-            <a:schemeClr val="accent1"/>
-          </a:effectRef>
-          <a:fontRef idx="minor">
-            <a:schemeClr val="lt1"/>
-          </a:fontRef>
-        </p:style>
-        <p:txBody>
-          <a:bodyPr rtlCol="0" anchor="ctr"/>
-          <a:lstStyle/>
-          <a:p>
-            <a:pPr algn="ctr"/>
-          </a:p>
-        </p:txBody>
-      </p:sp>
-      <p:sp>
-        <p:nvSpPr>
-          <p:cNvPr id="5" name="TextBox 4"/>
-          <p:cNvSpPr txBox="1"/>
-          <p:nvPr/>
-        </p:nvSpPr>
-        <p:spPr>
-          <a:xfrm>
-            <a:off x="530352" y="1527048"/>
-            <a:ext cx="5202936" cy="3300984"/>
+            <a:ext cx="11612880" cy="384048"/>
           </a:xfrm>
           <a:prstGeom prst="rect">
             <a:avLst/>
@@ -6796,164 +7049,1401 @@
           <a:lstStyle/>
           <a:p>
             <a:r>
-              <a:rPr sz="1500" b="1">
-                <a:solidFill>
-                  <a:srgbClr val="3E823C"/>
-                </a:solidFill>
-              </a:rPr>
-              <a:t>✓  KEEP — this IS the experiment</a:t>
-            </a:r>
-          </a:p>
-          <a:p>
-            <a:pPr>
-              <a:spcBef>
-                <a:spcPts val="900"/>
-              </a:spcBef>
-            </a:pPr>
-            <a:r>
-              <a:rPr sz="1150" b="1">
-                <a:solidFill>
-                  <a:srgbClr val="1F3050"/>
-                </a:solidFill>
-              </a:rPr>
-              <a:t>• Tools vs no-tools.  </a:t>
-            </a:r>
-            <a:r>
-              <a:rPr sz="1150">
+              <a:rPr sz="1150" i="1">
                 <a:solidFill>
                   <a:srgbClr val="555555"/>
                 </a:solidFill>
               </a:rPr>
-              <a:t>the whole question — drop it and there's no experiment.</a:t>
-            </a:r>
-          </a:p>
-          <a:p>
-            <a:pPr>
-              <a:spcBef>
-                <a:spcPts val="900"/>
-              </a:spcBef>
-            </a:pPr>
-            <a:r>
-              <a:rPr sz="1150" b="1">
-                <a:solidFill>
-                  <a:srgbClr val="1F3050"/>
-                </a:solidFill>
-              </a:rPr>
-              <a:t>• Both world-families.  </a:t>
-            </a:r>
-            <a:r>
-              <a:rPr sz="1150">
-                <a:solidFill>
-                  <a:srgbClr val="555555"/>
-                </a:solidFill>
-              </a:rPr>
-              <a:t>keep some classical AND some numeric, or you can't claim it generalizes.</a:t>
-            </a:r>
-          </a:p>
-          <a:p>
-            <a:pPr>
-              <a:spcBef>
-                <a:spcPts val="900"/>
-              </a:spcBef>
-            </a:pPr>
-            <a:r>
-              <a:rPr sz="1150" b="1">
-                <a:solidFill>
-                  <a:srgbClr val="1F3050"/>
-                </a:solidFill>
-              </a:rPr>
-              <a:t>• Both think on / off (ideally).  </a:t>
-            </a:r>
-            <a:r>
-              <a:rPr sz="1150">
-                <a:solidFill>
-                  <a:srgbClr val="555555"/>
-                </a:solidFill>
-              </a:rPr>
-              <a:t>a real research question, and only a 2× cost.</a:t>
-            </a:r>
-          </a:p>
-          <a:p>
-            <a:pPr>
-              <a:spcBef>
-                <a:spcPts val="900"/>
-              </a:spcBef>
-            </a:pPr>
-            <a:r>
-              <a:rPr sz="1150" b="1">
-                <a:solidFill>
-                  <a:srgbClr val="1F3050"/>
-                </a:solidFill>
-              </a:rPr>
-              <a:t>• Hundreds of answers per cell.  </a:t>
-            </a:r>
-            <a:r>
-              <a:rPr sz="1150">
-                <a:solidFill>
-                  <a:srgbClr val="555555"/>
-                </a:solidFill>
-              </a:rPr>
-              <a:t>enough for honest confidence bars (Wilson CIs).</a:t>
+              <a:t>API-cost projection, think-off, one corpus-equiv (7,000 instances/cell), calibrated from the sweep5 anchors (NT ×0.54, WT ×1.59).  ● measured-token basis  ○ projected.</a:t>
             </a:r>
           </a:p>
         </p:txBody>
       </p:sp>
+      <p:graphicFrame>
+        <p:nvGraphicFramePr>
+          <p:cNvPr id="4" name="Table 3"/>
+          <p:cNvGraphicFramePr>
+            <a:graphicFrameLocks noGrp="1"/>
+          </p:cNvGraphicFramePr>
+          <p:nvPr/>
+        </p:nvGraphicFramePr>
+        <p:xfrm>
+          <a:off x="274320" y="1188720"/>
+          <a:ext cx="8275320" cy="3611880"/>
+        </p:xfrm>
+        <a:graphic>
+          <a:graphicData uri="http://schemas.openxmlformats.org/drawingml/2006/table">
+            <a:tbl>
+              <a:tblPr firstRow="1" bandRow="1">
+                <a:tableStyleId>{5C22544A-7EE6-4342-B048-85BDC9FD1C3A}</a:tableStyleId>
+              </a:tblPr>
+              <a:tblGrid>
+                <a:gridCol w="960120"/>
+                <a:gridCol w="2697480"/>
+                <a:gridCol w="1417320"/>
+                <a:gridCol w="1600200"/>
+                <a:gridCol w="1600200"/>
+              </a:tblGrid>
+              <a:tr h="300990">
+                <a:tc>
+                  <a:txBody>
+                    <a:bodyPr wrap="square"/>
+                    <a:lstStyle/>
+                    <a:p>
+                      <a:pPr algn="ctr"/>
+                      <a:r>
+                        <a:rPr sz="1000" b="1">
+                          <a:solidFill>
+                            <a:srgbClr val="FFFFFF"/>
+                          </a:solidFill>
+                        </a:rPr>
+                        <a:t>Tier</a:t>
+                      </a:r>
+                    </a:p>
+                  </a:txBody>
+                  <a:tcPr marL="54864" marR="54864" marT="18288" marB="18288">
+                    <a:solidFill>
+                      <a:srgbClr val="335588"/>
+                    </a:solidFill>
+                  </a:tcPr>
+                </a:tc>
+                <a:tc>
+                  <a:txBody>
+                    <a:bodyPr wrap="square"/>
+                    <a:lstStyle/>
+                    <a:p>
+                      <a:pPr algn="l"/>
+                      <a:r>
+                        <a:rPr sz="1000" b="1">
+                          <a:solidFill>
+                            <a:srgbClr val="FFFFFF"/>
+                          </a:solidFill>
+                        </a:rPr>
+                        <a:t>Model</a:t>
+                      </a:r>
+                    </a:p>
+                  </a:txBody>
+                  <a:tcPr marL="54864" marR="54864" marT="18288" marB="18288">
+                    <a:solidFill>
+                      <a:srgbClr val="335588"/>
+                    </a:solidFill>
+                  </a:tcPr>
+                </a:tc>
+                <a:tc>
+                  <a:txBody>
+                    <a:bodyPr wrap="square"/>
+                    <a:lstStyle/>
+                    <a:p>
+                      <a:pPr algn="l"/>
+                      <a:r>
+                        <a:rPr sz="1000" b="1">
+                          <a:solidFill>
+                            <a:srgbClr val="FFFFFF"/>
+                          </a:solidFill>
+                        </a:rPr>
+                        <a:t>Provider</a:t>
+                      </a:r>
+                    </a:p>
+                  </a:txBody>
+                  <a:tcPr marL="54864" marR="54864" marT="18288" marB="18288">
+                    <a:solidFill>
+                      <a:srgbClr val="335588"/>
+                    </a:solidFill>
+                  </a:tcPr>
+                </a:tc>
+                <a:tc>
+                  <a:txBody>
+                    <a:bodyPr wrap="square"/>
+                    <a:lstStyle/>
+                    <a:p>
+                      <a:pPr algn="ctr"/>
+                      <a:r>
+                        <a:rPr sz="1000" b="1">
+                          <a:solidFill>
+                            <a:srgbClr val="FFFFFF"/>
+                          </a:solidFill>
+                        </a:rPr>
+                        <a:t>No-tools
+(×0.54)</a:t>
+                      </a:r>
+                    </a:p>
+                  </a:txBody>
+                  <a:tcPr marL="54864" marR="54864" marT="18288" marB="18288">
+                    <a:solidFill>
+                      <a:srgbClr val="335588"/>
+                    </a:solidFill>
+                  </a:tcPr>
+                </a:tc>
+                <a:tc>
+                  <a:txBody>
+                    <a:bodyPr wrap="square"/>
+                    <a:lstStyle/>
+                    <a:p>
+                      <a:pPr algn="ctr"/>
+                      <a:r>
+                        <a:rPr sz="1000" b="1">
+                          <a:solidFill>
+                            <a:srgbClr val="FFFFFF"/>
+                          </a:solidFill>
+                        </a:rPr>
+                        <a:t>With-tools
+(×1.59)</a:t>
+                      </a:r>
+                    </a:p>
+                  </a:txBody>
+                  <a:tcPr marL="54864" marR="54864" marT="18288" marB="18288">
+                    <a:solidFill>
+                      <a:srgbClr val="335588"/>
+                    </a:solidFill>
+                  </a:tcPr>
+                </a:tc>
+              </a:tr>
+              <a:tr h="300990">
+                <a:tc>
+                  <a:txBody>
+                    <a:bodyPr wrap="square"/>
+                    <a:lstStyle/>
+                    <a:p>
+                      <a:pPr algn="l"/>
+                      <a:r>
+                        <a:rPr sz="850" b="1">
+                          <a:solidFill>
+                            <a:srgbClr val="335588"/>
+                          </a:solidFill>
+                        </a:rPr>
+                        <a:t>FRONTIER</a:t>
+                      </a:r>
+                    </a:p>
+                  </a:txBody>
+                  <a:tcPr marL="54864" marR="54864" marT="18288" marB="18288">
+                    <a:solidFill>
+                      <a:srgbClr val="E2F0D9"/>
+                    </a:solidFill>
+                  </a:tcPr>
+                </a:tc>
+                <a:tc>
+                  <a:txBody>
+                    <a:bodyPr wrap="square"/>
+                    <a:lstStyle/>
+                    <a:p>
+                      <a:pPr algn="l"/>
+                      <a:r>
+                        <a:rPr sz="1000" b="1">
+                          <a:solidFill>
+                            <a:srgbClr val="1F3050"/>
+                          </a:solidFill>
+                        </a:rPr>
+                        <a:t>● Sonnet 4.6</a:t>
+                      </a:r>
+                    </a:p>
+                  </a:txBody>
+                  <a:tcPr marL="54864" marR="54864" marT="18288" marB="18288">
+                    <a:solidFill>
+                      <a:srgbClr val="E2F0D9"/>
+                    </a:solidFill>
+                  </a:tcPr>
+                </a:tc>
+                <a:tc>
+                  <a:txBody>
+                    <a:bodyPr wrap="square"/>
+                    <a:lstStyle/>
+                    <a:p>
+                      <a:pPr algn="l"/>
+                      <a:r>
+                        <a:rPr sz="900" b="0">
+                          <a:solidFill>
+                            <a:srgbClr val="555555"/>
+                          </a:solidFill>
+                        </a:rPr>
+                        <a:t>Anthropic</a:t>
+                      </a:r>
+                    </a:p>
+                  </a:txBody>
+                  <a:tcPr marL="54864" marR="54864" marT="18288" marB="18288">
+                    <a:solidFill>
+                      <a:srgbClr val="E2F0D9"/>
+                    </a:solidFill>
+                  </a:tcPr>
+                </a:tc>
+                <a:tc>
+                  <a:txBody>
+                    <a:bodyPr wrap="square"/>
+                    <a:lstStyle/>
+                    <a:p>
+                      <a:pPr algn="r"/>
+                      <a:r>
+                        <a:rPr sz="1000" b="0">
+                          <a:solidFill>
+                            <a:srgbClr val="1F3050"/>
+                          </a:solidFill>
+                        </a:rPr>
+                        <a:t>$66</a:t>
+                      </a:r>
+                    </a:p>
+                  </a:txBody>
+                  <a:tcPr marL="54864" marR="54864" marT="18288" marB="18288">
+                    <a:solidFill>
+                      <a:srgbClr val="E2F0D9"/>
+                    </a:solidFill>
+                  </a:tcPr>
+                </a:tc>
+                <a:tc>
+                  <a:txBody>
+                    <a:bodyPr wrap="square"/>
+                    <a:lstStyle/>
+                    <a:p>
+                      <a:pPr algn="r"/>
+                      <a:r>
+                        <a:rPr sz="1000" b="1">
+                          <a:solidFill>
+                            <a:srgbClr val="A03030"/>
+                          </a:solidFill>
+                        </a:rPr>
+                        <a:t>$673</a:t>
+                      </a:r>
+                    </a:p>
+                  </a:txBody>
+                  <a:tcPr marL="54864" marR="54864" marT="18288" marB="18288">
+                    <a:solidFill>
+                      <a:srgbClr val="E2F0D9"/>
+                    </a:solidFill>
+                  </a:tcPr>
+                </a:tc>
+              </a:tr>
+              <a:tr h="300990">
+                <a:tc>
+                  <a:txBody>
+                    <a:bodyPr wrap="square"/>
+                    <a:lstStyle/>
+                    <a:p>
+                      <a:pPr algn="l"/>
+                      <a:r>
+                        <a:rPr sz="850" b="1">
+                          <a:solidFill>
+                            <a:srgbClr val="335588"/>
+                          </a:solidFill>
+                        </a:rPr>
+                        <a:t/>
+                      </a:r>
+                    </a:p>
+                  </a:txBody>
+                  <a:tcPr marL="54864" marR="54864" marT="18288" marB="18288">
+                    <a:solidFill>
+                      <a:srgbClr val="FBEEEE"/>
+                    </a:solidFill>
+                  </a:tcPr>
+                </a:tc>
+                <a:tc>
+                  <a:txBody>
+                    <a:bodyPr wrap="square"/>
+                    <a:lstStyle/>
+                    <a:p>
+                      <a:pPr algn="l"/>
+                      <a:r>
+                        <a:rPr sz="1000" b="0">
+                          <a:solidFill>
+                            <a:srgbClr val="1F3050"/>
+                          </a:solidFill>
+                        </a:rPr>
+                        <a:t>○ GPT-5.5</a:t>
+                      </a:r>
+                    </a:p>
+                  </a:txBody>
+                  <a:tcPr marL="54864" marR="54864" marT="18288" marB="18288">
+                    <a:solidFill>
+                      <a:srgbClr val="FBEEEE"/>
+                    </a:solidFill>
+                  </a:tcPr>
+                </a:tc>
+                <a:tc>
+                  <a:txBody>
+                    <a:bodyPr wrap="square"/>
+                    <a:lstStyle/>
+                    <a:p>
+                      <a:pPr algn="l"/>
+                      <a:r>
+                        <a:rPr sz="900" b="0">
+                          <a:solidFill>
+                            <a:srgbClr val="555555"/>
+                          </a:solidFill>
+                        </a:rPr>
+                        <a:t>OpenAI</a:t>
+                      </a:r>
+                    </a:p>
+                  </a:txBody>
+                  <a:tcPr marL="54864" marR="54864" marT="18288" marB="18288">
+                    <a:solidFill>
+                      <a:srgbClr val="FBEEEE"/>
+                    </a:solidFill>
+                  </a:tcPr>
+                </a:tc>
+                <a:tc>
+                  <a:txBody>
+                    <a:bodyPr wrap="square"/>
+                    <a:lstStyle/>
+                    <a:p>
+                      <a:pPr algn="r"/>
+                      <a:r>
+                        <a:rPr sz="1000" b="0">
+                          <a:solidFill>
+                            <a:srgbClr val="1F3050"/>
+                          </a:solidFill>
+                        </a:rPr>
+                        <a:t>$129</a:t>
+                      </a:r>
+                    </a:p>
+                  </a:txBody>
+                  <a:tcPr marL="54864" marR="54864" marT="18288" marB="18288">
+                    <a:solidFill>
+                      <a:srgbClr val="FBEEEE"/>
+                    </a:solidFill>
+                  </a:tcPr>
+                </a:tc>
+                <a:tc>
+                  <a:txBody>
+                    <a:bodyPr wrap="square"/>
+                    <a:lstStyle/>
+                    <a:p>
+                      <a:pPr algn="r"/>
+                      <a:r>
+                        <a:rPr sz="1000" b="1">
+                          <a:solidFill>
+                            <a:srgbClr val="A03030"/>
+                          </a:solidFill>
+                        </a:rPr>
+                        <a:t>$1,204</a:t>
+                      </a:r>
+                    </a:p>
+                  </a:txBody>
+                  <a:tcPr marL="54864" marR="54864" marT="18288" marB="18288">
+                    <a:solidFill>
+                      <a:srgbClr val="FBEEEE"/>
+                    </a:solidFill>
+                  </a:tcPr>
+                </a:tc>
+              </a:tr>
+              <a:tr h="300990">
+                <a:tc>
+                  <a:txBody>
+                    <a:bodyPr wrap="square"/>
+                    <a:lstStyle/>
+                    <a:p>
+                      <a:pPr algn="l"/>
+                      <a:r>
+                        <a:rPr sz="850" b="1">
+                          <a:solidFill>
+                            <a:srgbClr val="335588"/>
+                          </a:solidFill>
+                        </a:rPr>
+                        <a:t/>
+                      </a:r>
+                    </a:p>
+                  </a:txBody>
+                  <a:tcPr marL="54864" marR="54864" marT="18288" marB="18288">
+                    <a:solidFill>
+                      <a:srgbClr val="ECF1F8"/>
+                    </a:solidFill>
+                  </a:tcPr>
+                </a:tc>
+                <a:tc>
+                  <a:txBody>
+                    <a:bodyPr wrap="square"/>
+                    <a:lstStyle/>
+                    <a:p>
+                      <a:pPr algn="l"/>
+                      <a:r>
+                        <a:rPr sz="1000" b="0">
+                          <a:solidFill>
+                            <a:srgbClr val="1F3050"/>
+                          </a:solidFill>
+                        </a:rPr>
+                        <a:t>○ Gemini 3.1 Pro</a:t>
+                      </a:r>
+                    </a:p>
+                  </a:txBody>
+                  <a:tcPr marL="54864" marR="54864" marT="18288" marB="18288">
+                    <a:solidFill>
+                      <a:srgbClr val="ECF1F8"/>
+                    </a:solidFill>
+                  </a:tcPr>
+                </a:tc>
+                <a:tc>
+                  <a:txBody>
+                    <a:bodyPr wrap="square"/>
+                    <a:lstStyle/>
+                    <a:p>
+                      <a:pPr algn="l"/>
+                      <a:r>
+                        <a:rPr sz="900" b="0">
+                          <a:solidFill>
+                            <a:srgbClr val="555555"/>
+                          </a:solidFill>
+                        </a:rPr>
+                        <a:t>Google</a:t>
+                      </a:r>
+                    </a:p>
+                  </a:txBody>
+                  <a:tcPr marL="54864" marR="54864" marT="18288" marB="18288">
+                    <a:solidFill>
+                      <a:srgbClr val="ECF1F8"/>
+                    </a:solidFill>
+                  </a:tcPr>
+                </a:tc>
+                <a:tc>
+                  <a:txBody>
+                    <a:bodyPr wrap="square"/>
+                    <a:lstStyle/>
+                    <a:p>
+                      <a:pPr algn="r"/>
+                      <a:r>
+                        <a:rPr sz="1000" b="0">
+                          <a:solidFill>
+                            <a:srgbClr val="1F3050"/>
+                          </a:solidFill>
+                        </a:rPr>
+                        <a:t>$52</a:t>
+                      </a:r>
+                    </a:p>
+                  </a:txBody>
+                  <a:tcPr marL="54864" marR="54864" marT="18288" marB="18288">
+                    <a:solidFill>
+                      <a:srgbClr val="ECF1F8"/>
+                    </a:solidFill>
+                  </a:tcPr>
+                </a:tc>
+                <a:tc>
+                  <a:txBody>
+                    <a:bodyPr wrap="square"/>
+                    <a:lstStyle/>
+                    <a:p>
+                      <a:pPr algn="r"/>
+                      <a:r>
+                        <a:rPr sz="1000" b="1">
+                          <a:solidFill>
+                            <a:srgbClr val="A03030"/>
+                          </a:solidFill>
+                        </a:rPr>
+                        <a:t>$481</a:t>
+                      </a:r>
+                    </a:p>
+                  </a:txBody>
+                  <a:tcPr marL="54864" marR="54864" marT="18288" marB="18288">
+                    <a:solidFill>
+                      <a:srgbClr val="ECF1F8"/>
+                    </a:solidFill>
+                  </a:tcPr>
+                </a:tc>
+              </a:tr>
+              <a:tr h="300990">
+                <a:tc>
+                  <a:txBody>
+                    <a:bodyPr wrap="square"/>
+                    <a:lstStyle/>
+                    <a:p>
+                      <a:pPr algn="l"/>
+                      <a:r>
+                        <a:rPr sz="850" b="1">
+                          <a:solidFill>
+                            <a:srgbClr val="335588"/>
+                          </a:solidFill>
+                        </a:rPr>
+                        <a:t/>
+                      </a:r>
+                    </a:p>
+                  </a:txBody>
+                  <a:tcPr marL="54864" marR="54864" marT="18288" marB="18288">
+                    <a:solidFill>
+                      <a:srgbClr val="ECF1F8"/>
+                    </a:solidFill>
+                  </a:tcPr>
+                </a:tc>
+                <a:tc>
+                  <a:txBody>
+                    <a:bodyPr wrap="square"/>
+                    <a:lstStyle/>
+                    <a:p>
+                      <a:pPr algn="l"/>
+                      <a:r>
+                        <a:rPr sz="1000" b="0">
+                          <a:solidFill>
+                            <a:srgbClr val="1F3050"/>
+                          </a:solidFill>
+                        </a:rPr>
+                        <a:t>○ Qwen3.7-Max</a:t>
+                      </a:r>
+                    </a:p>
+                  </a:txBody>
+                  <a:tcPr marL="54864" marR="54864" marT="18288" marB="18288">
+                    <a:solidFill>
+                      <a:srgbClr val="ECF1F8"/>
+                    </a:solidFill>
+                  </a:tcPr>
+                </a:tc>
+                <a:tc>
+                  <a:txBody>
+                    <a:bodyPr wrap="square"/>
+                    <a:lstStyle/>
+                    <a:p>
+                      <a:pPr algn="l"/>
+                      <a:r>
+                        <a:rPr sz="900" b="0">
+                          <a:solidFill>
+                            <a:srgbClr val="555555"/>
+                          </a:solidFill>
+                        </a:rPr>
+                        <a:t>Alibaba</a:t>
+                      </a:r>
+                    </a:p>
+                  </a:txBody>
+                  <a:tcPr marL="54864" marR="54864" marT="18288" marB="18288">
+                    <a:solidFill>
+                      <a:srgbClr val="ECF1F8"/>
+                    </a:solidFill>
+                  </a:tcPr>
+                </a:tc>
+                <a:tc>
+                  <a:txBody>
+                    <a:bodyPr wrap="square"/>
+                    <a:lstStyle/>
+                    <a:p>
+                      <a:pPr algn="r"/>
+                      <a:r>
+                        <a:rPr sz="1000" b="0">
+                          <a:solidFill>
+                            <a:srgbClr val="1F3050"/>
+                          </a:solidFill>
+                        </a:rPr>
+                        <a:t>$66</a:t>
+                      </a:r>
+                    </a:p>
+                  </a:txBody>
+                  <a:tcPr marL="54864" marR="54864" marT="18288" marB="18288">
+                    <a:solidFill>
+                      <a:srgbClr val="ECF1F8"/>
+                    </a:solidFill>
+                  </a:tcPr>
+                </a:tc>
+                <a:tc>
+                  <a:txBody>
+                    <a:bodyPr wrap="square"/>
+                    <a:lstStyle/>
+                    <a:p>
+                      <a:pPr algn="r"/>
+                      <a:r>
+                        <a:rPr sz="1000" b="1">
+                          <a:solidFill>
+                            <a:srgbClr val="A03030"/>
+                          </a:solidFill>
+                        </a:rPr>
+                        <a:t>$478</a:t>
+                      </a:r>
+                    </a:p>
+                  </a:txBody>
+                  <a:tcPr marL="54864" marR="54864" marT="18288" marB="18288">
+                    <a:solidFill>
+                      <a:srgbClr val="ECF1F8"/>
+                    </a:solidFill>
+                  </a:tcPr>
+                </a:tc>
+              </a:tr>
+              <a:tr h="300990">
+                <a:tc>
+                  <a:txBody>
+                    <a:bodyPr wrap="square"/>
+                    <a:lstStyle/>
+                    <a:p>
+                      <a:pPr algn="l"/>
+                      <a:r>
+                        <a:rPr sz="850" b="1">
+                          <a:solidFill>
+                            <a:srgbClr val="335588"/>
+                          </a:solidFill>
+                        </a:rPr>
+                        <a:t>MID</a:t>
+                      </a:r>
+                    </a:p>
+                  </a:txBody>
+                  <a:tcPr marL="54864" marR="54864" marT="18288" marB="18288">
+                    <a:solidFill>
+                      <a:srgbClr val="E2F0D9"/>
+                    </a:solidFill>
+                  </a:tcPr>
+                </a:tc>
+                <a:tc>
+                  <a:txBody>
+                    <a:bodyPr wrap="square"/>
+                    <a:lstStyle/>
+                    <a:p>
+                      <a:pPr algn="l"/>
+                      <a:r>
+                        <a:rPr sz="1000" b="1">
+                          <a:solidFill>
+                            <a:srgbClr val="1F3050"/>
+                          </a:solidFill>
+                        </a:rPr>
+                        <a:t>● Haiku 4.5</a:t>
+                      </a:r>
+                    </a:p>
+                  </a:txBody>
+                  <a:tcPr marL="54864" marR="54864" marT="18288" marB="18288">
+                    <a:solidFill>
+                      <a:srgbClr val="E2F0D9"/>
+                    </a:solidFill>
+                  </a:tcPr>
+                </a:tc>
+                <a:tc>
+                  <a:txBody>
+                    <a:bodyPr wrap="square"/>
+                    <a:lstStyle/>
+                    <a:p>
+                      <a:pPr algn="l"/>
+                      <a:r>
+                        <a:rPr sz="900" b="0">
+                          <a:solidFill>
+                            <a:srgbClr val="555555"/>
+                          </a:solidFill>
+                        </a:rPr>
+                        <a:t>Anthropic</a:t>
+                      </a:r>
+                    </a:p>
+                  </a:txBody>
+                  <a:tcPr marL="54864" marR="54864" marT="18288" marB="18288">
+                    <a:solidFill>
+                      <a:srgbClr val="E2F0D9"/>
+                    </a:solidFill>
+                  </a:tcPr>
+                </a:tc>
+                <a:tc>
+                  <a:txBody>
+                    <a:bodyPr wrap="square"/>
+                    <a:lstStyle/>
+                    <a:p>
+                      <a:pPr algn="r"/>
+                      <a:r>
+                        <a:rPr sz="1000" b="0">
+                          <a:solidFill>
+                            <a:srgbClr val="1F3050"/>
+                          </a:solidFill>
+                        </a:rPr>
+                        <a:t>$22</a:t>
+                      </a:r>
+                    </a:p>
+                  </a:txBody>
+                  <a:tcPr marL="54864" marR="54864" marT="18288" marB="18288">
+                    <a:solidFill>
+                      <a:srgbClr val="E2F0D9"/>
+                    </a:solidFill>
+                  </a:tcPr>
+                </a:tc>
+                <a:tc>
+                  <a:txBody>
+                    <a:bodyPr wrap="square"/>
+                    <a:lstStyle/>
+                    <a:p>
+                      <a:pPr algn="r"/>
+                      <a:r>
+                        <a:rPr sz="1000" b="1">
+                          <a:solidFill>
+                            <a:srgbClr val="1F3050"/>
+                          </a:solidFill>
+                        </a:rPr>
+                        <a:t>$224</a:t>
+                      </a:r>
+                    </a:p>
+                  </a:txBody>
+                  <a:tcPr marL="54864" marR="54864" marT="18288" marB="18288">
+                    <a:solidFill>
+                      <a:srgbClr val="E2F0D9"/>
+                    </a:solidFill>
+                  </a:tcPr>
+                </a:tc>
+              </a:tr>
+              <a:tr h="300990">
+                <a:tc>
+                  <a:txBody>
+                    <a:bodyPr wrap="square"/>
+                    <a:lstStyle/>
+                    <a:p>
+                      <a:pPr algn="l"/>
+                      <a:r>
+                        <a:rPr sz="850" b="1">
+                          <a:solidFill>
+                            <a:srgbClr val="335588"/>
+                          </a:solidFill>
+                        </a:rPr>
+                        <a:t/>
+                      </a:r>
+                    </a:p>
+                  </a:txBody>
+                  <a:tcPr marL="54864" marR="54864" marT="18288" marB="18288">
+                    <a:solidFill>
+                      <a:srgbClr val="F6F2EC"/>
+                    </a:solidFill>
+                  </a:tcPr>
+                </a:tc>
+                <a:tc>
+                  <a:txBody>
+                    <a:bodyPr wrap="square"/>
+                    <a:lstStyle/>
+                    <a:p>
+                      <a:pPr algn="l"/>
+                      <a:r>
+                        <a:rPr sz="1000" b="0">
+                          <a:solidFill>
+                            <a:srgbClr val="1F3050"/>
+                          </a:solidFill>
+                        </a:rPr>
+                        <a:t>○ GPT-5.4 Mini</a:t>
+                      </a:r>
+                    </a:p>
+                  </a:txBody>
+                  <a:tcPr marL="54864" marR="54864" marT="18288" marB="18288">
+                    <a:solidFill>
+                      <a:srgbClr val="F6F2EC"/>
+                    </a:solidFill>
+                  </a:tcPr>
+                </a:tc>
+                <a:tc>
+                  <a:txBody>
+                    <a:bodyPr wrap="square"/>
+                    <a:lstStyle/>
+                    <a:p>
+                      <a:pPr algn="l"/>
+                      <a:r>
+                        <a:rPr sz="900" b="0">
+                          <a:solidFill>
+                            <a:srgbClr val="555555"/>
+                          </a:solidFill>
+                        </a:rPr>
+                        <a:t>OpenAI</a:t>
+                      </a:r>
+                    </a:p>
+                  </a:txBody>
+                  <a:tcPr marL="54864" marR="54864" marT="18288" marB="18288">
+                    <a:solidFill>
+                      <a:srgbClr val="F6F2EC"/>
+                    </a:solidFill>
+                  </a:tcPr>
+                </a:tc>
+                <a:tc>
+                  <a:txBody>
+                    <a:bodyPr wrap="square"/>
+                    <a:lstStyle/>
+                    <a:p>
+                      <a:pPr algn="r"/>
+                      <a:r>
+                        <a:rPr sz="1000" b="0">
+                          <a:solidFill>
+                            <a:srgbClr val="1F3050"/>
+                          </a:solidFill>
+                        </a:rPr>
+                        <a:t>$19</a:t>
+                      </a:r>
+                    </a:p>
+                  </a:txBody>
+                  <a:tcPr marL="54864" marR="54864" marT="18288" marB="18288">
+                    <a:solidFill>
+                      <a:srgbClr val="F6F2EC"/>
+                    </a:solidFill>
+                  </a:tcPr>
+                </a:tc>
+                <a:tc>
+                  <a:txBody>
+                    <a:bodyPr wrap="square"/>
+                    <a:lstStyle/>
+                    <a:p>
+                      <a:pPr algn="r"/>
+                      <a:r>
+                        <a:rPr sz="1000" b="1">
+                          <a:solidFill>
+                            <a:srgbClr val="1F3050"/>
+                          </a:solidFill>
+                        </a:rPr>
+                        <a:t>$181</a:t>
+                      </a:r>
+                    </a:p>
+                  </a:txBody>
+                  <a:tcPr marL="54864" marR="54864" marT="18288" marB="18288">
+                    <a:solidFill>
+                      <a:srgbClr val="F6F2EC"/>
+                    </a:solidFill>
+                  </a:tcPr>
+                </a:tc>
+              </a:tr>
+              <a:tr h="300990">
+                <a:tc>
+                  <a:txBody>
+                    <a:bodyPr wrap="square"/>
+                    <a:lstStyle/>
+                    <a:p>
+                      <a:pPr algn="l"/>
+                      <a:r>
+                        <a:rPr sz="850" b="1">
+                          <a:solidFill>
+                            <a:srgbClr val="335588"/>
+                          </a:solidFill>
+                        </a:rPr>
+                        <a:t/>
+                      </a:r>
+                    </a:p>
+                  </a:txBody>
+                  <a:tcPr marL="54864" marR="54864" marT="18288" marB="18288">
+                    <a:solidFill>
+                      <a:srgbClr val="F6F2EC"/>
+                    </a:solidFill>
+                  </a:tcPr>
+                </a:tc>
+                <a:tc>
+                  <a:txBody>
+                    <a:bodyPr wrap="square"/>
+                    <a:lstStyle/>
+                    <a:p>
+                      <a:pPr algn="l"/>
+                      <a:r>
+                        <a:rPr sz="1000" b="0">
+                          <a:solidFill>
+                            <a:srgbClr val="1F3050"/>
+                          </a:solidFill>
+                        </a:rPr>
+                        <a:t>○ Gemini 2.5 Flash</a:t>
+                      </a:r>
+                    </a:p>
+                  </a:txBody>
+                  <a:tcPr marL="54864" marR="54864" marT="18288" marB="18288">
+                    <a:solidFill>
+                      <a:srgbClr val="F6F2EC"/>
+                    </a:solidFill>
+                  </a:tcPr>
+                </a:tc>
+                <a:tc>
+                  <a:txBody>
+                    <a:bodyPr wrap="square"/>
+                    <a:lstStyle/>
+                    <a:p>
+                      <a:pPr algn="l"/>
+                      <a:r>
+                        <a:rPr sz="900" b="0">
+                          <a:solidFill>
+                            <a:srgbClr val="555555"/>
+                          </a:solidFill>
+                        </a:rPr>
+                        <a:t>Google</a:t>
+                      </a:r>
+                    </a:p>
+                  </a:txBody>
+                  <a:tcPr marL="54864" marR="54864" marT="18288" marB="18288">
+                    <a:solidFill>
+                      <a:srgbClr val="F6F2EC"/>
+                    </a:solidFill>
+                  </a:tcPr>
+                </a:tc>
+                <a:tc>
+                  <a:txBody>
+                    <a:bodyPr wrap="square"/>
+                    <a:lstStyle/>
+                    <a:p>
+                      <a:pPr algn="r"/>
+                      <a:r>
+                        <a:rPr sz="1000" b="0">
+                          <a:solidFill>
+                            <a:srgbClr val="1F3050"/>
+                          </a:solidFill>
+                        </a:rPr>
+                        <a:t>$10</a:t>
+                      </a:r>
+                    </a:p>
+                  </a:txBody>
+                  <a:tcPr marL="54864" marR="54864" marT="18288" marB="18288">
+                    <a:solidFill>
+                      <a:srgbClr val="F6F2EC"/>
+                    </a:solidFill>
+                  </a:tcPr>
+                </a:tc>
+                <a:tc>
+                  <a:txBody>
+                    <a:bodyPr wrap="square"/>
+                    <a:lstStyle/>
+                    <a:p>
+                      <a:pPr algn="r"/>
+                      <a:r>
+                        <a:rPr sz="1000" b="1">
+                          <a:solidFill>
+                            <a:srgbClr val="1F3050"/>
+                          </a:solidFill>
+                        </a:rPr>
+                        <a:t>$84</a:t>
+                      </a:r>
+                    </a:p>
+                  </a:txBody>
+                  <a:tcPr marL="54864" marR="54864" marT="18288" marB="18288">
+                    <a:solidFill>
+                      <a:srgbClr val="F6F2EC"/>
+                    </a:solidFill>
+                  </a:tcPr>
+                </a:tc>
+              </a:tr>
+              <a:tr h="300990">
+                <a:tc>
+                  <a:txBody>
+                    <a:bodyPr wrap="square"/>
+                    <a:lstStyle/>
+                    <a:p>
+                      <a:pPr algn="l"/>
+                      <a:r>
+                        <a:rPr sz="850" b="1">
+                          <a:solidFill>
+                            <a:srgbClr val="335588"/>
+                          </a:solidFill>
+                        </a:rPr>
+                        <a:t/>
+                      </a:r>
+                    </a:p>
+                  </a:txBody>
+                  <a:tcPr marL="54864" marR="54864" marT="18288" marB="18288">
+                    <a:solidFill>
+                      <a:srgbClr val="F6F2EC"/>
+                    </a:solidFill>
+                  </a:tcPr>
+                </a:tc>
+                <a:tc>
+                  <a:txBody>
+                    <a:bodyPr wrap="square"/>
+                    <a:lstStyle/>
+                    <a:p>
+                      <a:pPr algn="l"/>
+                      <a:r>
+                        <a:rPr sz="1000" b="0">
+                          <a:solidFill>
+                            <a:srgbClr val="1F3050"/>
+                          </a:solidFill>
+                        </a:rPr>
+                        <a:t>○ Qwen-Plus</a:t>
+                      </a:r>
+                    </a:p>
+                  </a:txBody>
+                  <a:tcPr marL="54864" marR="54864" marT="18288" marB="18288">
+                    <a:solidFill>
+                      <a:srgbClr val="F6F2EC"/>
+                    </a:solidFill>
+                  </a:tcPr>
+                </a:tc>
+                <a:tc>
+                  <a:txBody>
+                    <a:bodyPr wrap="square"/>
+                    <a:lstStyle/>
+                    <a:p>
+                      <a:pPr algn="l"/>
+                      <a:r>
+                        <a:rPr sz="900" b="0">
+                          <a:solidFill>
+                            <a:srgbClr val="555555"/>
+                          </a:solidFill>
+                        </a:rPr>
+                        <a:t>Alibaba</a:t>
+                      </a:r>
+                    </a:p>
+                  </a:txBody>
+                  <a:tcPr marL="54864" marR="54864" marT="18288" marB="18288">
+                    <a:solidFill>
+                      <a:srgbClr val="F6F2EC"/>
+                    </a:solidFill>
+                  </a:tcPr>
+                </a:tc>
+                <a:tc>
+                  <a:txBody>
+                    <a:bodyPr wrap="square"/>
+                    <a:lstStyle/>
+                    <a:p>
+                      <a:pPr algn="r"/>
+                      <a:r>
+                        <a:rPr sz="1000" b="0">
+                          <a:solidFill>
+                            <a:srgbClr val="1F3050"/>
+                          </a:solidFill>
+                        </a:rPr>
+                        <a:t>$11</a:t>
+                      </a:r>
+                    </a:p>
+                  </a:txBody>
+                  <a:tcPr marL="54864" marR="54864" marT="18288" marB="18288">
+                    <a:solidFill>
+                      <a:srgbClr val="F6F2EC"/>
+                    </a:solidFill>
+                  </a:tcPr>
+                </a:tc>
+                <a:tc>
+                  <a:txBody>
+                    <a:bodyPr wrap="square"/>
+                    <a:lstStyle/>
+                    <a:p>
+                      <a:pPr algn="r"/>
+                      <a:r>
+                        <a:rPr sz="1000" b="1">
+                          <a:solidFill>
+                            <a:srgbClr val="1F3050"/>
+                          </a:solidFill>
+                        </a:rPr>
+                        <a:t>$76</a:t>
+                      </a:r>
+                    </a:p>
+                  </a:txBody>
+                  <a:tcPr marL="54864" marR="54864" marT="18288" marB="18288">
+                    <a:solidFill>
+                      <a:srgbClr val="F6F2EC"/>
+                    </a:solidFill>
+                  </a:tcPr>
+                </a:tc>
+              </a:tr>
+              <a:tr h="300990">
+                <a:tc>
+                  <a:txBody>
+                    <a:bodyPr wrap="square"/>
+                    <a:lstStyle/>
+                    <a:p>
+                      <a:pPr algn="l"/>
+                      <a:r>
+                        <a:rPr sz="850" b="1">
+                          <a:solidFill>
+                            <a:srgbClr val="335588"/>
+                          </a:solidFill>
+                        </a:rPr>
+                        <a:t>BUDGET</a:t>
+                      </a:r>
+                    </a:p>
+                  </a:txBody>
+                  <a:tcPr marL="54864" marR="54864" marT="18288" marB="18288">
+                    <a:solidFill>
+                      <a:srgbClr val="F1F7F1"/>
+                    </a:solidFill>
+                  </a:tcPr>
+                </a:tc>
+                <a:tc>
+                  <a:txBody>
+                    <a:bodyPr wrap="square"/>
+                    <a:lstStyle/>
+                    <a:p>
+                      <a:pPr algn="l"/>
+                      <a:r>
+                        <a:rPr sz="1000" b="0">
+                          <a:solidFill>
+                            <a:srgbClr val="1F3050"/>
+                          </a:solidFill>
+                        </a:rPr>
+                        <a:t>○ GPT-5.4 Nano</a:t>
+                      </a:r>
+                    </a:p>
+                  </a:txBody>
+                  <a:tcPr marL="54864" marR="54864" marT="18288" marB="18288">
+                    <a:solidFill>
+                      <a:srgbClr val="F1F7F1"/>
+                    </a:solidFill>
+                  </a:tcPr>
+                </a:tc>
+                <a:tc>
+                  <a:txBody>
+                    <a:bodyPr wrap="square"/>
+                    <a:lstStyle/>
+                    <a:p>
+                      <a:pPr algn="l"/>
+                      <a:r>
+                        <a:rPr sz="900" b="0">
+                          <a:solidFill>
+                            <a:srgbClr val="555555"/>
+                          </a:solidFill>
+                        </a:rPr>
+                        <a:t>OpenAI</a:t>
+                      </a:r>
+                    </a:p>
+                  </a:txBody>
+                  <a:tcPr marL="54864" marR="54864" marT="18288" marB="18288">
+                    <a:solidFill>
+                      <a:srgbClr val="F1F7F1"/>
+                    </a:solidFill>
+                  </a:tcPr>
+                </a:tc>
+                <a:tc>
+                  <a:txBody>
+                    <a:bodyPr wrap="square"/>
+                    <a:lstStyle/>
+                    <a:p>
+                      <a:pPr algn="r"/>
+                      <a:r>
+                        <a:rPr sz="1000" b="0">
+                          <a:solidFill>
+                            <a:srgbClr val="1F3050"/>
+                          </a:solidFill>
+                        </a:rPr>
+                        <a:t>$5</a:t>
+                      </a:r>
+                    </a:p>
+                  </a:txBody>
+                  <a:tcPr marL="54864" marR="54864" marT="18288" marB="18288">
+                    <a:solidFill>
+                      <a:srgbClr val="F1F7F1"/>
+                    </a:solidFill>
+                  </a:tcPr>
+                </a:tc>
+                <a:tc>
+                  <a:txBody>
+                    <a:bodyPr wrap="square"/>
+                    <a:lstStyle/>
+                    <a:p>
+                      <a:pPr algn="r"/>
+                      <a:r>
+                        <a:rPr sz="1000" b="1">
+                          <a:solidFill>
+                            <a:srgbClr val="1F3050"/>
+                          </a:solidFill>
+                        </a:rPr>
+                        <a:t>$49</a:t>
+                      </a:r>
+                    </a:p>
+                  </a:txBody>
+                  <a:tcPr marL="54864" marR="54864" marT="18288" marB="18288">
+                    <a:solidFill>
+                      <a:srgbClr val="F1F7F1"/>
+                    </a:solidFill>
+                  </a:tcPr>
+                </a:tc>
+              </a:tr>
+              <a:tr h="300990">
+                <a:tc>
+                  <a:txBody>
+                    <a:bodyPr wrap="square"/>
+                    <a:lstStyle/>
+                    <a:p>
+                      <a:pPr algn="l"/>
+                      <a:r>
+                        <a:rPr sz="850" b="1">
+                          <a:solidFill>
+                            <a:srgbClr val="335588"/>
+                          </a:solidFill>
+                        </a:rPr>
+                        <a:t/>
+                      </a:r>
+                    </a:p>
+                  </a:txBody>
+                  <a:tcPr marL="54864" marR="54864" marT="18288" marB="18288">
+                    <a:solidFill>
+                      <a:srgbClr val="F1F7F1"/>
+                    </a:solidFill>
+                  </a:tcPr>
+                </a:tc>
+                <a:tc>
+                  <a:txBody>
+                    <a:bodyPr wrap="square"/>
+                    <a:lstStyle/>
+                    <a:p>
+                      <a:pPr algn="l"/>
+                      <a:r>
+                        <a:rPr sz="1000" b="0">
+                          <a:solidFill>
+                            <a:srgbClr val="1F3050"/>
+                          </a:solidFill>
+                        </a:rPr>
+                        <a:t>○ Gemini 2.5 Flash-Lite</a:t>
+                      </a:r>
+                    </a:p>
+                  </a:txBody>
+                  <a:tcPr marL="54864" marR="54864" marT="18288" marB="18288">
+                    <a:solidFill>
+                      <a:srgbClr val="F1F7F1"/>
+                    </a:solidFill>
+                  </a:tcPr>
+                </a:tc>
+                <a:tc>
+                  <a:txBody>
+                    <a:bodyPr wrap="square"/>
+                    <a:lstStyle/>
+                    <a:p>
+                      <a:pPr algn="l"/>
+                      <a:r>
+                        <a:rPr sz="900" b="0">
+                          <a:solidFill>
+                            <a:srgbClr val="555555"/>
+                          </a:solidFill>
+                        </a:rPr>
+                        <a:t>Google</a:t>
+                      </a:r>
+                    </a:p>
+                  </a:txBody>
+                  <a:tcPr marL="54864" marR="54864" marT="18288" marB="18288">
+                    <a:solidFill>
+                      <a:srgbClr val="F1F7F1"/>
+                    </a:solidFill>
+                  </a:tcPr>
+                </a:tc>
+                <a:tc>
+                  <a:txBody>
+                    <a:bodyPr wrap="square"/>
+                    <a:lstStyle/>
+                    <a:p>
+                      <a:pPr algn="r"/>
+                      <a:r>
+                        <a:rPr sz="1000" b="0">
+                          <a:solidFill>
+                            <a:srgbClr val="1F3050"/>
+                          </a:solidFill>
+                        </a:rPr>
+                        <a:t>$2</a:t>
+                      </a:r>
+                    </a:p>
+                  </a:txBody>
+                  <a:tcPr marL="54864" marR="54864" marT="18288" marB="18288">
+                    <a:solidFill>
+                      <a:srgbClr val="F1F7F1"/>
+                    </a:solidFill>
+                  </a:tcPr>
+                </a:tc>
+                <a:tc>
+                  <a:txBody>
+                    <a:bodyPr wrap="square"/>
+                    <a:lstStyle/>
+                    <a:p>
+                      <a:pPr algn="r"/>
+                      <a:r>
+                        <a:rPr sz="1000" b="1">
+                          <a:solidFill>
+                            <a:srgbClr val="1F3050"/>
+                          </a:solidFill>
+                        </a:rPr>
+                        <a:t>$21</a:t>
+                      </a:r>
+                    </a:p>
+                  </a:txBody>
+                  <a:tcPr marL="54864" marR="54864" marT="18288" marB="18288">
+                    <a:solidFill>
+                      <a:srgbClr val="F1F7F1"/>
+                    </a:solidFill>
+                  </a:tcPr>
+                </a:tc>
+              </a:tr>
+              <a:tr h="300990">
+                <a:tc>
+                  <a:txBody>
+                    <a:bodyPr wrap="square"/>
+                    <a:lstStyle/>
+                    <a:p>
+                      <a:pPr algn="l"/>
+                      <a:r>
+                        <a:rPr sz="850" b="1">
+                          <a:solidFill>
+                            <a:srgbClr val="335588"/>
+                          </a:solidFill>
+                        </a:rPr>
+                        <a:t/>
+                      </a:r>
+                    </a:p>
+                  </a:txBody>
+                  <a:tcPr marL="54864" marR="54864" marT="18288" marB="18288">
+                    <a:solidFill>
+                      <a:srgbClr val="F1F7F1"/>
+                    </a:solidFill>
+                  </a:tcPr>
+                </a:tc>
+                <a:tc>
+                  <a:txBody>
+                    <a:bodyPr wrap="square"/>
+                    <a:lstStyle/>
+                    <a:p>
+                      <a:pPr algn="l"/>
+                      <a:r>
+                        <a:rPr sz="1000" b="0">
+                          <a:solidFill>
+                            <a:srgbClr val="1F3050"/>
+                          </a:solidFill>
+                        </a:rPr>
+                        <a:t>○ Qwen-Flash</a:t>
+                      </a:r>
+                    </a:p>
+                  </a:txBody>
+                  <a:tcPr marL="54864" marR="54864" marT="18288" marB="18288">
+                    <a:solidFill>
+                      <a:srgbClr val="F1F7F1"/>
+                    </a:solidFill>
+                  </a:tcPr>
+                </a:tc>
+                <a:tc>
+                  <a:txBody>
+                    <a:bodyPr wrap="square"/>
+                    <a:lstStyle/>
+                    <a:p>
+                      <a:pPr algn="l"/>
+                      <a:r>
+                        <a:rPr sz="900" b="0">
+                          <a:solidFill>
+                            <a:srgbClr val="555555"/>
+                          </a:solidFill>
+                        </a:rPr>
+                        <a:t>Alibaba</a:t>
+                      </a:r>
+                    </a:p>
+                  </a:txBody>
+                  <a:tcPr marL="54864" marR="54864" marT="18288" marB="18288">
+                    <a:solidFill>
+                      <a:srgbClr val="F1F7F1"/>
+                    </a:solidFill>
+                  </a:tcPr>
+                </a:tc>
+                <a:tc>
+                  <a:txBody>
+                    <a:bodyPr wrap="square"/>
+                    <a:lstStyle/>
+                    <a:p>
+                      <a:pPr algn="r"/>
+                      <a:r>
+                        <a:rPr sz="1000" b="0">
+                          <a:solidFill>
+                            <a:srgbClr val="1F3050"/>
+                          </a:solidFill>
+                        </a:rPr>
+                        <a:t>$3</a:t>
+                      </a:r>
+                    </a:p>
+                  </a:txBody>
+                  <a:tcPr marL="54864" marR="54864" marT="18288" marB="18288">
+                    <a:solidFill>
+                      <a:srgbClr val="F1F7F1"/>
+                    </a:solidFill>
+                  </a:tcPr>
+                </a:tc>
+                <a:tc>
+                  <a:txBody>
+                    <a:bodyPr wrap="square"/>
+                    <a:lstStyle/>
+                    <a:p>
+                      <a:pPr algn="r"/>
+                      <a:r>
+                        <a:rPr sz="1000" b="1">
+                          <a:solidFill>
+                            <a:srgbClr val="1F3050"/>
+                          </a:solidFill>
+                        </a:rPr>
+                        <a:t>$14</a:t>
+                      </a:r>
+                    </a:p>
+                  </a:txBody>
+                  <a:tcPr marL="54864" marR="54864" marT="18288" marB="18288">
+                    <a:solidFill>
+                      <a:srgbClr val="F1F7F1"/>
+                    </a:solidFill>
+                  </a:tcPr>
+                </a:tc>
+              </a:tr>
+            </a:tbl>
+          </a:graphicData>
+        </a:graphic>
+      </p:graphicFrame>
       <p:sp>
         <p:nvSpPr>
-          <p:cNvPr id="6" name="Rounded Rectangle 5"/>
-          <p:cNvSpPr/>
-          <p:nvPr/>
-        </p:nvSpPr>
-        <p:spPr>
-          <a:xfrm>
-            <a:off x="6217920" y="1325880"/>
-            <a:ext cx="5696712" cy="3703320"/>
-          </a:xfrm>
-          <a:prstGeom prst="roundRect">
-            <a:avLst/>
-          </a:prstGeom>
-          <a:solidFill>
-            <a:srgbClr val="FBF1DE"/>
-          </a:solidFill>
-          <a:ln w="19050">
-            <a:solidFill>
-              <a:srgbClr val="AE701C"/>
-            </a:solidFill>
-          </a:ln>
-          <a:effectLst/>
-        </p:spPr>
-        <p:style>
-          <a:lnRef idx="1">
-            <a:schemeClr val="accent1"/>
-          </a:lnRef>
-          <a:fillRef idx="3">
-            <a:schemeClr val="accent1"/>
-          </a:fillRef>
-          <a:effectRef idx="2">
-            <a:schemeClr val="accent1"/>
-          </a:effectRef>
-          <a:fontRef idx="minor">
-            <a:schemeClr val="lt1"/>
-          </a:fontRef>
-        </p:style>
-        <p:txBody>
-          <a:bodyPr rtlCol="0" anchor="ctr"/>
-          <a:lstStyle/>
-          <a:p>
-            <a:pPr algn="ctr"/>
-          </a:p>
-        </p:txBody>
-      </p:sp>
-      <p:sp>
-        <p:nvSpPr>
-          <p:cNvPr id="7" name="TextBox 6"/>
+          <p:cNvPr id="5" name="TextBox 4"/>
           <p:cNvSpPr txBox="1"/>
           <p:nvPr/>
         </p:nvSpPr>
         <p:spPr>
           <a:xfrm>
-            <a:off x="6473952" y="1527048"/>
-            <a:ext cx="5184648" cy="3300984"/>
+            <a:off x="274320" y="4983480"/>
+            <a:ext cx="11612880" cy="1371600"/>
           </a:xfrm>
           <a:prstGeom prst="rect">
             <a:avLst/>
@@ -6967,196 +8457,65 @@
           <a:lstStyle/>
           <a:p>
             <a:r>
-              <a:rPr sz="1500" b="1">
+              <a:rPr sz="1300" b="1">
                 <a:solidFill>
-                  <a:srgbClr val="AE701C"/>
+                  <a:srgbClr val="335588"/>
                 </a:solidFill>
               </a:rPr>
-              <a:t>✂  SAFE TO CUT — just repeats</a:t>
+              <a:t>What this means</a:t>
             </a:r>
           </a:p>
           <a:p>
             <a:pPr>
               <a:spcBef>
-                <a:spcPts val="900"/>
+                <a:spcPts val="700"/>
               </a:spcBef>
             </a:pPr>
             <a:r>
-              <a:rPr sz="1150" b="1">
+              <a:rPr sz="1050" b="1">
                 <a:solidFill>
                   <a:srgbClr val="1F3050"/>
                 </a:solidFill>
               </a:rPr>
-              <a:t>• Wordings 6 → 2.  </a:t>
-            </a:r>
-            <a:r>
-              <a:rPr sz="1150">
+              <a:t>▪ API PlanBench with-tools is the budget-buster.  </a:t>
+            </a:r>
+            <a:r>
+              <a:rPr sz="1050">
                 <a:solidFill>
                   <a:srgbClr val="555555"/>
                 </a:solidFill>
               </a:rPr>
-              <a:t>keep 2 phrasings; still shows wording doesn't change the result.   ‒52%</a:t>
+              <a:t>$14 (Qwen-Flash) → $673 (Sonnet) → $1,204 (GPT-5.5) per corpus-equiv — 7,000 instances × the tool-loop input blowup. It already runs FREE on SLURM (open-weights vLLM), so sample a few hundred API instances at most, never the full 7,000.</a:t>
             </a:r>
           </a:p>
           <a:p>
             <a:pPr>
               <a:spcBef>
-                <a:spcPts val="900"/>
+                <a:spcPts val="700"/>
               </a:spcBef>
             </a:pPr>
             <a:r>
-              <a:rPr sz="1150" b="1">
+              <a:rPr sz="1050" b="1">
                 <a:solidFill>
                   <a:srgbClr val="1F3050"/>
                 </a:solidFill>
               </a:rPr>
-              <a:t>• Plan-checks 10 → 4.  </a:t>
-            </a:r>
-            <a:r>
-              <a:rPr sz="1150">
+              <a:t>▪ Levers (model-independent):  </a:t>
+            </a:r>
+            <a:r>
+              <a:rPr sz="1050">
                 <a:solidFill>
                   <a:srgbClr val="555555"/>
                 </a:solidFill>
               </a:rPr>
-              <a:t>2 broken + 2 good; still tests both skills.   −40%</a:t>
-            </a:r>
-          </a:p>
-          <a:p>
-            <a:pPr>
-              <a:spcBef>
-                <a:spcPts val="900"/>
-              </a:spcBef>
-            </a:pPr>
-            <a:r>
-              <a:rPr sz="1150" b="1">
-                <a:solidFill>
-                  <a:srgbClr val="1F3050"/>
-                </a:solidFill>
-              </a:rPr>
-              <a:t>• Worlds 20 → 10.  </a:t>
-            </a:r>
-            <a:r>
-              <a:rPr sz="1150">
-                <a:solidFill>
-                  <a:srgbClr val="555555"/>
-                </a:solidFill>
-              </a:rPr>
-              <a:t>keep 5 classical + 5 numeric (balanced).   −50%</a:t>
-            </a:r>
-          </a:p>
-          <a:p>
-            <a:pPr>
-              <a:spcBef>
-                <a:spcPts val="900"/>
-              </a:spcBef>
-            </a:pPr>
-            <a:r>
-              <a:rPr sz="1150" b="1">
-                <a:solidFill>
-                  <a:srgbClr val="1F3050"/>
-                </a:solidFill>
-              </a:rPr>
-              <a:t>• Drop think-on.  </a:t>
-            </a:r>
-            <a:r>
-              <a:rPr sz="1150">
-                <a:solidFill>
-                  <a:srgbClr val="555555"/>
-                </a:solidFill>
-              </a:rPr>
-              <a:t>the single biggest lever.   −64%</a:t>
+              <a:t>drop think-on (biggest, but frontier think-on is UNMEASURED) · with-tools wordings 6→2 (−52%) · halve domains (−50%) · validate_plan 10→4 (−40%). Cut the repeats, keep the spread.</a:t>
             </a:r>
           </a:p>
         </p:txBody>
       </p:sp>
       <p:sp>
         <p:nvSpPr>
-          <p:cNvPr id="8" name="Rounded Rectangle 7"/>
-          <p:cNvSpPr/>
-          <p:nvPr/>
-        </p:nvSpPr>
-        <p:spPr>
-          <a:xfrm>
-            <a:off x="274320" y="5285232"/>
-            <a:ext cx="11640312" cy="841248"/>
-          </a:xfrm>
-          <a:prstGeom prst="roundRect">
-            <a:avLst/>
-          </a:prstGeom>
-          <a:solidFill>
-            <a:srgbClr val="335588"/>
-          </a:solidFill>
-          <a:ln>
-            <a:noFill/>
-          </a:ln>
-          <a:effectLst/>
-        </p:spPr>
-        <p:style>
-          <a:lnRef idx="1">
-            <a:schemeClr val="accent1"/>
-          </a:lnRef>
-          <a:fillRef idx="3">
-            <a:schemeClr val="accent1"/>
-          </a:fillRef>
-          <a:effectRef idx="2">
-            <a:schemeClr val="accent1"/>
-          </a:effectRef>
-          <a:fontRef idx="minor">
-            <a:schemeClr val="lt1"/>
-          </a:fontRef>
-        </p:style>
-        <p:txBody>
-          <a:bodyPr rtlCol="0" anchor="ctr"/>
-          <a:lstStyle/>
-          <a:p>
-            <a:pPr algn="ctr"/>
-          </a:p>
-        </p:txBody>
-      </p:sp>
-      <p:sp>
-        <p:nvSpPr>
-          <p:cNvPr id="9" name="TextBox 8"/>
-          <p:cNvSpPr txBox="1"/>
-          <p:nvPr/>
-        </p:nvSpPr>
-        <p:spPr>
-          <a:xfrm>
-            <a:off x="502920" y="5394960"/>
-            <a:ext cx="11247120" cy="640080"/>
-          </a:xfrm>
-          <a:prstGeom prst="rect">
-            <a:avLst/>
-          </a:prstGeom>
-          <a:noFill/>
-        </p:spPr>
-        <p:txBody>
-          <a:bodyPr wrap="square">
-            <a:spAutoFit/>
-          </a:bodyPr>
-          <a:lstStyle/>
-          <a:p>
-            <a:r>
-              <a:rPr sz="1250" b="1">
-                <a:solidFill>
-                  <a:srgbClr val="FFFFFF"/>
-                </a:solidFill>
-              </a:rPr>
-              <a:t>Lean-but-solid recipe:  </a:t>
-            </a:r>
-            <a:r>
-              <a:rPr sz="1250">
-                <a:solidFill>
-                  <a:srgbClr val="DDE6F2"/>
-                </a:solidFill>
-              </a:rPr>
-              <a:t>both models · tools + no-tools · both think · 10 balanced worlds · 2 wordings · 4 plan-checks   →   ~10% of full  (~$54 sweep5, Haiku+Gemini), still with real confidence bars.</a:t>
-            </a:r>
-          </a:p>
-        </p:txBody>
-      </p:sp>
-      <p:sp>
-        <p:nvSpPr>
-          <p:cNvPr id="10" name="TextBox 9"/>
+          <p:cNvPr id="6" name="TextBox 5"/>
           <p:cNvSpPr txBox="1"/>
           <p:nvPr/>
         </p:nvSpPr>
@@ -7182,7 +8541,7 @@
                   <a:srgbClr val="555555"/>
                 </a:solidFill>
               </a:rPr>
-              <a:t>Cuts are labeled variants — flag any domain/fixture sampling in the writeup. % reductions are model-independent; $ shown for the recommended cheap pair.</a:t>
+              <a:t>Calibration transferred from the sweep5 think-off anchors — direction solid (same token structure), magnitudes ±30%. PlanBench tokens were NOT measured on the API; ○ rows also carry the ±-wide with-tools token uncertainty. Flag any instance sampling in the writeup.</a:t>
             </a:r>
           </a:p>
         </p:txBody>
